--- a/decks/Molecular_03_Molecular-Testing-in-Hematologic-Malignancy.pptx
+++ b/decks/Molecular_03_Molecular-Testing-in-Hematologic-Malignancy.pptx
@@ -26,9 +26,14 @@
     <p:sldId id="274" r:id="rId20"/>
     <p:sldId id="275" r:id="rId21"/>
     <p:sldId id="276" r:id="rId22"/>
+    <p:sldId id="277" r:id="rId23"/>
+    <p:sldId id="278" r:id="rId24"/>
+    <p:sldId id="279" r:id="rId25"/>
+    <p:sldId id="280" r:id="rId26"/>
+    <p:sldId id="281" r:id="rId27"/>
   </p:sldIdLst>
   <p:notesMasterIdLst>
-    <p:notesMasterId r:id="rId23"/>
+    <p:notesMasterId r:id="rId28"/>
   </p:notesMasterIdLst>
   <p:sldSz cx="12191695" cy="6858000"/>
   <p:notesSz cx="6858000" cy="12191695"/>
@@ -1690,6 +1695,446 @@
             <a:fld id="{F7021451-1387-4CA6-816F-3879F97B5CBC}" type="slidenum">
               <a:rPr lang="en-US"/>
               <a:t>21</a:t>
+            </a:fld>
+            <a:endParaRPr lang="en-US"/>
+          </a:p>
+        </p:txBody>
+      </p:sp>
+    </p:spTree>
+    <p:extLst>
+      <p:ext uri="{BB962C8B-B14F-4D97-AF65-F5344CB8AC3E}">
+        <p14:creationId xmlns:p14="http://schemas.microsoft.com/office/powerpoint/2010/main" val="1024086991"/>
+      </p:ext>
+    </p:extLst>
+  </p:cSld>
+  <p:clrMapOvr>
+    <a:masterClrMapping/>
+  </p:clrMapOvr>
+</p:notes>
+</file>
+
+<file path=ppt/notesSlides/notesSlide22.xml><?xml version="1.0" encoding="utf-8"?>
+<p:notes xmlns:a="http://schemas.openxmlformats.org/drawingml/2006/main" xmlns:r="http://schemas.openxmlformats.org/officeDocument/2006/relationships" xmlns:p="http://schemas.openxmlformats.org/presentationml/2006/main">
+  <p:cSld>
+    <p:spTree>
+      <p:nvGrpSpPr>
+        <p:cNvPr id="1" name=""/>
+        <p:cNvGrpSpPr/>
+        <p:nvPr/>
+      </p:nvGrpSpPr>
+      <p:grpSpPr>
+        <a:xfrm>
+          <a:off x="0" y="0"/>
+          <a:ext cx="0" cy="0"/>
+          <a:chOff x="0" y="0"/>
+          <a:chExt cx="0" cy="0"/>
+        </a:xfrm>
+      </p:grpSpPr>
+      <p:sp>
+        <p:nvSpPr>
+          <p:cNvPr id="2" name="Slide Image Placeholder 1"/>
+          <p:cNvSpPr>
+            <a:spLocks noGrp="1" noRot="1" noChangeAspect="1"/>
+          </p:cNvSpPr>
+          <p:nvPr>
+            <p:ph type="sldImg"/>
+          </p:nvPr>
+        </p:nvSpPr>
+        <p:spPr/>
+      </p:sp>
+      <p:sp>
+        <p:nvSpPr>
+          <p:cNvPr id="3" name="Notes Placeholder 2"/>
+          <p:cNvSpPr>
+            <a:spLocks noGrp="1"/>
+          </p:cNvSpPr>
+          <p:nvPr>
+            <p:ph type="body" idx="1"/>
+          </p:nvPr>
+        </p:nvSpPr>
+        <p:spPr/>
+        <p:txBody>
+          <a:bodyPr/>
+          <a:lstStyle/>
+          <a:p>
+            <a:r>
+              <a:rPr lang="en-US" dirty="0"/>
+              <a:t/>
+            </a:r>
+            <a:endParaRPr lang="en-US" dirty="0"/>
+          </a:p>
+        </p:txBody>
+      </p:sp>
+      <p:sp>
+        <p:nvSpPr>
+          <p:cNvPr id="4" name="Slide Number Placeholder 3"/>
+          <p:cNvSpPr>
+            <a:spLocks noGrp="1"/>
+          </p:cNvSpPr>
+          <p:nvPr>
+            <p:ph type="sldNum" sz="quarter" idx="10"/>
+          </p:nvPr>
+        </p:nvSpPr>
+        <p:spPr/>
+        <p:txBody>
+          <a:bodyPr/>
+          <a:lstStyle/>
+          <a:p>
+            <a:fld id="{F7021451-1387-4CA6-816F-3879F97B5CBC}" type="slidenum">
+              <a:rPr lang="en-US"/>
+              <a:t>22</a:t>
+            </a:fld>
+            <a:endParaRPr lang="en-US"/>
+          </a:p>
+        </p:txBody>
+      </p:sp>
+    </p:spTree>
+    <p:extLst>
+      <p:ext uri="{BB962C8B-B14F-4D97-AF65-F5344CB8AC3E}">
+        <p14:creationId xmlns:p14="http://schemas.microsoft.com/office/powerpoint/2010/main" val="1024086991"/>
+      </p:ext>
+    </p:extLst>
+  </p:cSld>
+  <p:clrMapOvr>
+    <a:masterClrMapping/>
+  </p:clrMapOvr>
+</p:notes>
+</file>
+
+<file path=ppt/notesSlides/notesSlide23.xml><?xml version="1.0" encoding="utf-8"?>
+<p:notes xmlns:a="http://schemas.openxmlformats.org/drawingml/2006/main" xmlns:r="http://schemas.openxmlformats.org/officeDocument/2006/relationships" xmlns:p="http://schemas.openxmlformats.org/presentationml/2006/main">
+  <p:cSld>
+    <p:spTree>
+      <p:nvGrpSpPr>
+        <p:cNvPr id="1" name=""/>
+        <p:cNvGrpSpPr/>
+        <p:nvPr/>
+      </p:nvGrpSpPr>
+      <p:grpSpPr>
+        <a:xfrm>
+          <a:off x="0" y="0"/>
+          <a:ext cx="0" cy="0"/>
+          <a:chOff x="0" y="0"/>
+          <a:chExt cx="0" cy="0"/>
+        </a:xfrm>
+      </p:grpSpPr>
+      <p:sp>
+        <p:nvSpPr>
+          <p:cNvPr id="2" name="Slide Image Placeholder 1"/>
+          <p:cNvSpPr>
+            <a:spLocks noGrp="1" noRot="1" noChangeAspect="1"/>
+          </p:cNvSpPr>
+          <p:nvPr>
+            <p:ph type="sldImg"/>
+          </p:nvPr>
+        </p:nvSpPr>
+        <p:spPr/>
+      </p:sp>
+      <p:sp>
+        <p:nvSpPr>
+          <p:cNvPr id="3" name="Notes Placeholder 2"/>
+          <p:cNvSpPr>
+            <a:spLocks noGrp="1"/>
+          </p:cNvSpPr>
+          <p:nvPr>
+            <p:ph type="body" idx="1"/>
+          </p:nvPr>
+        </p:nvSpPr>
+        <p:spPr/>
+        <p:txBody>
+          <a:bodyPr/>
+          <a:lstStyle/>
+          <a:p>
+            <a:r>
+              <a:rPr lang="en-US" dirty="0"/>
+              <a:t/>
+            </a:r>
+            <a:endParaRPr lang="en-US" dirty="0"/>
+          </a:p>
+        </p:txBody>
+      </p:sp>
+      <p:sp>
+        <p:nvSpPr>
+          <p:cNvPr id="4" name="Slide Number Placeholder 3"/>
+          <p:cNvSpPr>
+            <a:spLocks noGrp="1"/>
+          </p:cNvSpPr>
+          <p:nvPr>
+            <p:ph type="sldNum" sz="quarter" idx="10"/>
+          </p:nvPr>
+        </p:nvSpPr>
+        <p:spPr/>
+        <p:txBody>
+          <a:bodyPr/>
+          <a:lstStyle/>
+          <a:p>
+            <a:fld id="{F7021451-1387-4CA6-816F-3879F97B5CBC}" type="slidenum">
+              <a:rPr lang="en-US"/>
+              <a:t>23</a:t>
+            </a:fld>
+            <a:endParaRPr lang="en-US"/>
+          </a:p>
+        </p:txBody>
+      </p:sp>
+    </p:spTree>
+    <p:extLst>
+      <p:ext uri="{BB962C8B-B14F-4D97-AF65-F5344CB8AC3E}">
+        <p14:creationId xmlns:p14="http://schemas.microsoft.com/office/powerpoint/2010/main" val="1024086991"/>
+      </p:ext>
+    </p:extLst>
+  </p:cSld>
+  <p:clrMapOvr>
+    <a:masterClrMapping/>
+  </p:clrMapOvr>
+</p:notes>
+</file>
+
+<file path=ppt/notesSlides/notesSlide24.xml><?xml version="1.0" encoding="utf-8"?>
+<p:notes xmlns:a="http://schemas.openxmlformats.org/drawingml/2006/main" xmlns:r="http://schemas.openxmlformats.org/officeDocument/2006/relationships" xmlns:p="http://schemas.openxmlformats.org/presentationml/2006/main">
+  <p:cSld>
+    <p:spTree>
+      <p:nvGrpSpPr>
+        <p:cNvPr id="1" name=""/>
+        <p:cNvGrpSpPr/>
+        <p:nvPr/>
+      </p:nvGrpSpPr>
+      <p:grpSpPr>
+        <a:xfrm>
+          <a:off x="0" y="0"/>
+          <a:ext cx="0" cy="0"/>
+          <a:chOff x="0" y="0"/>
+          <a:chExt cx="0" cy="0"/>
+        </a:xfrm>
+      </p:grpSpPr>
+      <p:sp>
+        <p:nvSpPr>
+          <p:cNvPr id="2" name="Slide Image Placeholder 1"/>
+          <p:cNvSpPr>
+            <a:spLocks noGrp="1" noRot="1" noChangeAspect="1"/>
+          </p:cNvSpPr>
+          <p:nvPr>
+            <p:ph type="sldImg"/>
+          </p:nvPr>
+        </p:nvSpPr>
+        <p:spPr/>
+      </p:sp>
+      <p:sp>
+        <p:nvSpPr>
+          <p:cNvPr id="3" name="Notes Placeholder 2"/>
+          <p:cNvSpPr>
+            <a:spLocks noGrp="1"/>
+          </p:cNvSpPr>
+          <p:nvPr>
+            <p:ph type="body" idx="1"/>
+          </p:nvPr>
+        </p:nvSpPr>
+        <p:spPr/>
+        <p:txBody>
+          <a:bodyPr/>
+          <a:lstStyle/>
+          <a:p>
+            <a:r>
+              <a:rPr lang="en-US" dirty="0"/>
+              <a:t/>
+            </a:r>
+            <a:endParaRPr lang="en-US" dirty="0"/>
+          </a:p>
+        </p:txBody>
+      </p:sp>
+      <p:sp>
+        <p:nvSpPr>
+          <p:cNvPr id="4" name="Slide Number Placeholder 3"/>
+          <p:cNvSpPr>
+            <a:spLocks noGrp="1"/>
+          </p:cNvSpPr>
+          <p:nvPr>
+            <p:ph type="sldNum" sz="quarter" idx="10"/>
+          </p:nvPr>
+        </p:nvSpPr>
+        <p:spPr/>
+        <p:txBody>
+          <a:bodyPr/>
+          <a:lstStyle/>
+          <a:p>
+            <a:fld id="{F7021451-1387-4CA6-816F-3879F97B5CBC}" type="slidenum">
+              <a:rPr lang="en-US"/>
+              <a:t>24</a:t>
+            </a:fld>
+            <a:endParaRPr lang="en-US"/>
+          </a:p>
+        </p:txBody>
+      </p:sp>
+    </p:spTree>
+    <p:extLst>
+      <p:ext uri="{BB962C8B-B14F-4D97-AF65-F5344CB8AC3E}">
+        <p14:creationId xmlns:p14="http://schemas.microsoft.com/office/powerpoint/2010/main" val="1024086991"/>
+      </p:ext>
+    </p:extLst>
+  </p:cSld>
+  <p:clrMapOvr>
+    <a:masterClrMapping/>
+  </p:clrMapOvr>
+</p:notes>
+</file>
+
+<file path=ppt/notesSlides/notesSlide25.xml><?xml version="1.0" encoding="utf-8"?>
+<p:notes xmlns:a="http://schemas.openxmlformats.org/drawingml/2006/main" xmlns:r="http://schemas.openxmlformats.org/officeDocument/2006/relationships" xmlns:p="http://schemas.openxmlformats.org/presentationml/2006/main">
+  <p:cSld>
+    <p:spTree>
+      <p:nvGrpSpPr>
+        <p:cNvPr id="1" name=""/>
+        <p:cNvGrpSpPr/>
+        <p:nvPr/>
+      </p:nvGrpSpPr>
+      <p:grpSpPr>
+        <a:xfrm>
+          <a:off x="0" y="0"/>
+          <a:ext cx="0" cy="0"/>
+          <a:chOff x="0" y="0"/>
+          <a:chExt cx="0" cy="0"/>
+        </a:xfrm>
+      </p:grpSpPr>
+      <p:sp>
+        <p:nvSpPr>
+          <p:cNvPr id="2" name="Slide Image Placeholder 1"/>
+          <p:cNvSpPr>
+            <a:spLocks noGrp="1" noRot="1" noChangeAspect="1"/>
+          </p:cNvSpPr>
+          <p:nvPr>
+            <p:ph type="sldImg"/>
+          </p:nvPr>
+        </p:nvSpPr>
+        <p:spPr/>
+      </p:sp>
+      <p:sp>
+        <p:nvSpPr>
+          <p:cNvPr id="3" name="Notes Placeholder 2"/>
+          <p:cNvSpPr>
+            <a:spLocks noGrp="1"/>
+          </p:cNvSpPr>
+          <p:nvPr>
+            <p:ph type="body" idx="1"/>
+          </p:nvPr>
+        </p:nvSpPr>
+        <p:spPr/>
+        <p:txBody>
+          <a:bodyPr/>
+          <a:lstStyle/>
+          <a:p>
+            <a:r>
+              <a:rPr lang="en-US" dirty="0"/>
+              <a:t/>
+            </a:r>
+            <a:endParaRPr lang="en-US" dirty="0"/>
+          </a:p>
+        </p:txBody>
+      </p:sp>
+      <p:sp>
+        <p:nvSpPr>
+          <p:cNvPr id="4" name="Slide Number Placeholder 3"/>
+          <p:cNvSpPr>
+            <a:spLocks noGrp="1"/>
+          </p:cNvSpPr>
+          <p:nvPr>
+            <p:ph type="sldNum" sz="quarter" idx="10"/>
+          </p:nvPr>
+        </p:nvSpPr>
+        <p:spPr/>
+        <p:txBody>
+          <a:bodyPr/>
+          <a:lstStyle/>
+          <a:p>
+            <a:fld id="{F7021451-1387-4CA6-816F-3879F97B5CBC}" type="slidenum">
+              <a:rPr lang="en-US"/>
+              <a:t>25</a:t>
+            </a:fld>
+            <a:endParaRPr lang="en-US"/>
+          </a:p>
+        </p:txBody>
+      </p:sp>
+    </p:spTree>
+    <p:extLst>
+      <p:ext uri="{BB962C8B-B14F-4D97-AF65-F5344CB8AC3E}">
+        <p14:creationId xmlns:p14="http://schemas.microsoft.com/office/powerpoint/2010/main" val="1024086991"/>
+      </p:ext>
+    </p:extLst>
+  </p:cSld>
+  <p:clrMapOvr>
+    <a:masterClrMapping/>
+  </p:clrMapOvr>
+</p:notes>
+</file>
+
+<file path=ppt/notesSlides/notesSlide26.xml><?xml version="1.0" encoding="utf-8"?>
+<p:notes xmlns:a="http://schemas.openxmlformats.org/drawingml/2006/main" xmlns:r="http://schemas.openxmlformats.org/officeDocument/2006/relationships" xmlns:p="http://schemas.openxmlformats.org/presentationml/2006/main">
+  <p:cSld>
+    <p:spTree>
+      <p:nvGrpSpPr>
+        <p:cNvPr id="1" name=""/>
+        <p:cNvGrpSpPr/>
+        <p:nvPr/>
+      </p:nvGrpSpPr>
+      <p:grpSpPr>
+        <a:xfrm>
+          <a:off x="0" y="0"/>
+          <a:ext cx="0" cy="0"/>
+          <a:chOff x="0" y="0"/>
+          <a:chExt cx="0" cy="0"/>
+        </a:xfrm>
+      </p:grpSpPr>
+      <p:sp>
+        <p:nvSpPr>
+          <p:cNvPr id="2" name="Slide Image Placeholder 1"/>
+          <p:cNvSpPr>
+            <a:spLocks noGrp="1" noRot="1" noChangeAspect="1"/>
+          </p:cNvSpPr>
+          <p:nvPr>
+            <p:ph type="sldImg"/>
+          </p:nvPr>
+        </p:nvSpPr>
+        <p:spPr/>
+      </p:sp>
+      <p:sp>
+        <p:nvSpPr>
+          <p:cNvPr id="3" name="Notes Placeholder 2"/>
+          <p:cNvSpPr>
+            <a:spLocks noGrp="1"/>
+          </p:cNvSpPr>
+          <p:nvPr>
+            <p:ph type="body" idx="1"/>
+          </p:nvPr>
+        </p:nvSpPr>
+        <p:spPr/>
+        <p:txBody>
+          <a:bodyPr/>
+          <a:lstStyle/>
+          <a:p>
+            <a:r>
+              <a:rPr lang="en-US" dirty="0"/>
+              <a:t/>
+            </a:r>
+            <a:endParaRPr lang="en-US" dirty="0"/>
+          </a:p>
+        </p:txBody>
+      </p:sp>
+      <p:sp>
+        <p:nvSpPr>
+          <p:cNvPr id="4" name="Slide Number Placeholder 3"/>
+          <p:cNvSpPr>
+            <a:spLocks noGrp="1"/>
+          </p:cNvSpPr>
+          <p:nvPr>
+            <p:ph type="sldNum" sz="quarter" idx="10"/>
+          </p:nvPr>
+        </p:nvSpPr>
+        <p:spPr/>
+        <p:txBody>
+          <a:bodyPr/>
+          <a:lstStyle/>
+          <a:p>
+            <a:fld id="{F7021451-1387-4CA6-816F-3879F97B5CBC}" type="slidenum">
+              <a:rPr lang="en-US"/>
+              <a:t>26</a:t>
             </a:fld>
             <a:endParaRPr lang="en-US"/>
           </a:p>
@@ -2893,7 +3338,7 @@
                 <a:ea typeface="Calibri" pitchFamily="34" charset="-122"/>
                 <a:cs typeface="Calibri" pitchFamily="34" charset="-120"/>
               </a:rPr>
-              <a:t>Fusions, Clonality, MRD, and Integrated Diagnosis</a:t>
+              <a:t>Fusions, Mutations, Cytogenetics, and Minimal Residual Disease</a:t>
             </a:r>
             <a:endParaRPr lang="en-US" sz="1900" dirty="0"/>
           </a:p>
@@ -3034,7 +3479,7 @@
     <p:bg>
       <p:bgPr>
         <a:solidFill>
-          <a:srgbClr val="FFFFFF"/>
+          <a:srgbClr val="005A63"/>
         </a:solidFill>
       </p:bgPr>
     </p:bg>
@@ -3054,14 +3499,58 @@
       </p:grpSpPr>
       <p:sp>
         <p:nvSpPr>
-          <p:cNvPr id="2" name="Text 0"/>
-          <p:cNvSpPr/>
-          <p:nvPr/>
-        </p:nvSpPr>
-        <p:spPr>
-          <a:xfrm>
-            <a:off x="566928" y="329184"/>
-            <a:ext cx="10515600" cy="310896"/>
+          <p:cNvPr id="2" name="Shape 0"/>
+          <p:cNvSpPr/>
+          <p:nvPr/>
+        </p:nvSpPr>
+        <p:spPr>
+          <a:xfrm>
+            <a:off x="9509760" y="-1280160"/>
+            <a:ext cx="4754880" cy="4754880"/>
+          </a:xfrm>
+          <a:prstGeom prst="ellipse">
+            <a:avLst/>
+          </a:prstGeom>
+          <a:solidFill>
+            <a:srgbClr val="FFFFFF">
+              <a:alpha val="8000"/>
+            </a:srgbClr>
+          </a:solidFill>
+          <a:ln/>
+        </p:spPr>
+      </p:sp>
+      <p:sp>
+        <p:nvSpPr>
+          <p:cNvPr id="3" name="Shape 1"/>
+          <p:cNvSpPr/>
+          <p:nvPr/>
+        </p:nvSpPr>
+        <p:spPr>
+          <a:xfrm>
+            <a:off x="10607040" y="3931920"/>
+            <a:ext cx="3108960" cy="3108960"/>
+          </a:xfrm>
+          <a:prstGeom prst="ellipse">
+            <a:avLst/>
+          </a:prstGeom>
+          <a:solidFill>
+            <a:srgbClr val="FFFFFF">
+              <a:alpha val="6000"/>
+            </a:srgbClr>
+          </a:solidFill>
+          <a:ln/>
+        </p:spPr>
+      </p:sp>
+      <p:sp>
+        <p:nvSpPr>
+          <p:cNvPr id="4" name="Text 2"/>
+          <p:cNvSpPr/>
+          <p:nvPr/>
+        </p:nvSpPr>
+        <p:spPr>
+          <a:xfrm>
+            <a:off x="566928" y="1783080"/>
+            <a:ext cx="2743200" cy="1463040"/>
           </a:xfrm>
           <a:prstGeom prst="rect">
             <a:avLst/>
@@ -3077,30 +3566,30 @@
               <a:buNone/>
             </a:pPr>
             <a:r>
-              <a:rPr lang="en-US" sz="1100" b="1" spc="150" kern="0" dirty="0">
-                <a:solidFill>
-                  <a:srgbClr val="00838F"/>
-                </a:solidFill>
-                <a:latin typeface="Calibri" pitchFamily="34" charset="0"/>
-                <a:ea typeface="Calibri" pitchFamily="34" charset="-122"/>
-                <a:cs typeface="Calibri" pitchFamily="34" charset="-120"/>
-              </a:rPr>
-              <a:t>MOLECULAR &amp; CYTOGENETICS   ·   MRD</a:t>
-            </a:r>
-            <a:endParaRPr lang="en-US" sz="1100" dirty="0"/>
-          </a:p>
-        </p:txBody>
-      </p:sp>
-      <p:sp>
-        <p:nvSpPr>
-          <p:cNvPr id="3" name="Text 1"/>
-          <p:cNvSpPr/>
-          <p:nvPr/>
-        </p:nvSpPr>
-        <p:spPr>
-          <a:xfrm>
-            <a:off x="566928" y="713232"/>
-            <a:ext cx="11064240" cy="749808"/>
+              <a:rPr lang="en-US" sz="6400" b="1" dirty="0">
+                <a:solidFill>
+                  <a:srgbClr val="E0F2F4"/>
+                </a:solidFill>
+                <a:latin typeface="Calibri" pitchFamily="34" charset="0"/>
+                <a:ea typeface="Calibri" pitchFamily="34" charset="-122"/>
+                <a:cs typeface="Calibri" pitchFamily="34" charset="-120"/>
+              </a:rPr>
+              <a:t>02</a:t>
+            </a:r>
+            <a:endParaRPr lang="en-US" sz="6400" dirty="0"/>
+          </a:p>
+        </p:txBody>
+      </p:sp>
+      <p:sp>
+        <p:nvSpPr>
+          <p:cNvPr id="5" name="Text 3"/>
+          <p:cNvSpPr/>
+          <p:nvPr/>
+        </p:nvSpPr>
+        <p:spPr>
+          <a:xfrm>
+            <a:off x="566928" y="3246120"/>
+            <a:ext cx="10058400" cy="365760"/>
           </a:xfrm>
           <a:prstGeom prst="rect">
             <a:avLst/>
@@ -3116,85 +3605,17 @@
               <a:buNone/>
             </a:pPr>
             <a:r>
-              <a:rPr lang="en-US" sz="3000" b="1" dirty="0">
-                <a:solidFill>
-                  <a:srgbClr val="0E3A5F"/>
-                </a:solidFill>
-                <a:latin typeface="Calibri" pitchFamily="34" charset="0"/>
-                <a:ea typeface="Calibri" pitchFamily="34" charset="-122"/>
-                <a:cs typeface="Calibri" pitchFamily="34" charset="-120"/>
-              </a:rPr>
-              <a:t>Measurable Residual Disease</a:t>
-            </a:r>
-            <a:endParaRPr lang="en-US" sz="3000" dirty="0"/>
-          </a:p>
-        </p:txBody>
-      </p:sp>
-      <p:sp>
-        <p:nvSpPr>
-          <p:cNvPr id="4" name="Shape 2"/>
-          <p:cNvSpPr/>
-          <p:nvPr/>
-        </p:nvSpPr>
-        <p:spPr>
-          <a:xfrm>
-            <a:off x="566928" y="1517904"/>
-            <a:ext cx="5346040" cy="4114800"/>
-          </a:xfrm>
-          <a:prstGeom prst="roundRect">
-            <a:avLst>
-              <a:gd name="adj" fmla="val 2000"/>
-            </a:avLst>
-          </a:prstGeom>
-          <a:solidFill>
-            <a:srgbClr val="E0F2F4"/>
-          </a:solidFill>
-          <a:ln/>
-          <a:effectLst>
-            <a:outerShdw sx="100000" sy="100000" kx="0" ky="0" algn="bl" rotWithShape="0" blurRad="88900" dist="25400" dir="5400000">
-              <a:srgbClr val="22303C">
-                <a:alpha val="12000"/>
-              </a:srgbClr>
-            </a:outerShdw>
-          </a:effectLst>
-        </p:spPr>
-      </p:sp>
-      <p:sp>
-        <p:nvSpPr>
-          <p:cNvPr id="5" name="Text 3"/>
-          <p:cNvSpPr/>
-          <p:nvPr/>
-        </p:nvSpPr>
-        <p:spPr>
-          <a:xfrm>
-            <a:off x="804672" y="1682496"/>
-            <a:ext cx="4888840" cy="274320"/>
-          </a:xfrm>
-          <a:prstGeom prst="rect">
-            <a:avLst/>
-          </a:prstGeom>
-          <a:noFill/>
-          <a:ln/>
-        </p:spPr>
-        <p:txBody>
-          <a:bodyPr wrap="square" lIns="0" tIns="0" rIns="0" bIns="0" rtlCol="0" anchor="ctr"/>
-          <a:lstStyle/>
-          <a:p>
-            <a:pPr indent="0" marL="0">
-              <a:buNone/>
-            </a:pPr>
-            <a:r>
-              <a:rPr lang="en-US" sz="1200" b="1" spc="100" kern="0" dirty="0">
-                <a:solidFill>
-                  <a:srgbClr val="005A63"/>
-                </a:solidFill>
-                <a:latin typeface="Calibri" pitchFamily="34" charset="0"/>
-                <a:ea typeface="Calibri" pitchFamily="34" charset="-122"/>
-                <a:cs typeface="Calibri" pitchFamily="34" charset="-120"/>
-              </a:rPr>
-              <a:t>CONCEPT AND METHODS</a:t>
-            </a:r>
-            <a:endParaRPr lang="en-US" sz="1200" dirty="0"/>
+              <a:rPr lang="en-US" sz="1300" b="1" spc="250" kern="0" dirty="0">
+                <a:solidFill>
+                  <a:srgbClr val="F2C9D9"/>
+                </a:solidFill>
+                <a:latin typeface="Calibri" pitchFamily="34" charset="0"/>
+                <a:ea typeface="Calibri" pitchFamily="34" charset="-122"/>
+                <a:cs typeface="Calibri" pitchFamily="34" charset="-120"/>
+              </a:rPr>
+              <a:t>PART TWO</a:t>
+            </a:r>
+            <a:endParaRPr lang="en-US" sz="1300" dirty="0"/>
           </a:p>
         </p:txBody>
       </p:sp>
@@ -3206,8 +3627,8 @@
         </p:nvSpPr>
         <p:spPr>
           <a:xfrm>
-            <a:off x="804672" y="2029968"/>
-            <a:ext cx="4870552" cy="3474720"/>
+            <a:off x="566928" y="3611880"/>
+            <a:ext cx="10607040" cy="1463040"/>
           </a:xfrm>
           <a:prstGeom prst="rect">
             <a:avLst/>
@@ -3219,368 +3640,21 @@
           <a:bodyPr wrap="square" lIns="0" tIns="0" rIns="0" bIns="0" rtlCol="0" anchor="t"/>
           <a:lstStyle/>
           <a:p>
-            <a:pPr algn="l" marL="177800" indent="-177800">
-              <a:spcAft>
-                <a:spcPts val="900"/>
-              </a:spcAft>
-              <a:buSzPct val="100000"/>
-              <a:buChar char="•"/>
-            </a:pPr>
-            <a:r>
-              <a:rPr lang="en-US" sz="1250" b="1" dirty="0">
-                <a:solidFill>
-                  <a:srgbClr val="1B2A38"/>
-                </a:solidFill>
-                <a:latin typeface="Calibri" pitchFamily="34" charset="0"/>
-                <a:ea typeface="Calibri" pitchFamily="34" charset="-122"/>
-                <a:cs typeface="Calibri" pitchFamily="34" charset="-120"/>
-              </a:rPr>
-              <a:t>MRD = small numbers of residual neoplastic cells below morphologic detection.</a:t>
-            </a:r>
-            <a:endParaRPr lang="en-US" sz="1250" dirty="0"/>
-          </a:p>
-          <a:p>
-            <a:pPr algn="l" marL="177800" indent="-177800">
-              <a:spcAft>
-                <a:spcPts val="900"/>
-              </a:spcAft>
-              <a:buSzPct val="100000"/>
-              <a:buChar char="•"/>
-            </a:pPr>
-            <a:r>
-              <a:rPr lang="en-US" sz="1250" dirty="0">
-                <a:solidFill>
-                  <a:srgbClr val="33444F"/>
-                </a:solidFill>
-                <a:latin typeface="Calibri" pitchFamily="34" charset="0"/>
-                <a:ea typeface="Calibri" pitchFamily="34" charset="-122"/>
-                <a:cs typeface="Calibri" pitchFamily="34" charset="-120"/>
-              </a:rPr>
-              <a:t>Methods: quantitative RT-PCR (e.g., BCR-ABL1), multiparameter flow cytometry, and NGS.</a:t>
-            </a:r>
-            <a:endParaRPr lang="en-US" sz="1250" dirty="0"/>
-          </a:p>
-          <a:p>
-            <a:pPr algn="l" marL="177800" indent="-177800">
-              <a:spcAft>
-                <a:spcPts val="900"/>
-              </a:spcAft>
-              <a:buSzPct val="100000"/>
-              <a:buChar char="•"/>
-            </a:pPr>
-            <a:r>
-              <a:rPr lang="en-US" sz="1250" dirty="0">
-                <a:solidFill>
-                  <a:srgbClr val="33444F"/>
-                </a:solidFill>
-                <a:latin typeface="Calibri" pitchFamily="34" charset="0"/>
-                <a:ea typeface="Calibri" pitchFamily="34" charset="-122"/>
-                <a:cs typeface="Calibri" pitchFamily="34" charset="-120"/>
-              </a:rPr>
-              <a:t>Sensitivity often 10⁻⁴ to 10⁻⁶ depending on method.</a:t>
-            </a:r>
-            <a:endParaRPr lang="en-US" sz="1250" dirty="0"/>
-          </a:p>
-          <a:p>
-            <a:pPr algn="l" marL="177800" indent="-177800">
-              <a:spcAft>
-                <a:spcPts val="900"/>
-              </a:spcAft>
-              <a:buSzPct val="100000"/>
-              <a:buChar char="•"/>
-            </a:pPr>
-            <a:r>
-              <a:rPr lang="en-US" sz="1250" dirty="0">
-                <a:solidFill>
-                  <a:srgbClr val="33444F"/>
-                </a:solidFill>
-                <a:latin typeface="Calibri" pitchFamily="34" charset="0"/>
-                <a:ea typeface="Calibri" pitchFamily="34" charset="-122"/>
-                <a:cs typeface="Calibri" pitchFamily="34" charset="-120"/>
-              </a:rPr>
-              <a:t>Standardized reporting (e.g., International Scale for BCR-ABL1).</a:t>
-            </a:r>
-            <a:endParaRPr lang="en-US" sz="1250" dirty="0"/>
-          </a:p>
-        </p:txBody>
-      </p:sp>
-      <p:sp>
-        <p:nvSpPr>
-          <p:cNvPr id="7" name="Shape 5"/>
-          <p:cNvSpPr/>
-          <p:nvPr/>
-        </p:nvSpPr>
-        <p:spPr>
-          <a:xfrm>
-            <a:off x="6278728" y="1517904"/>
-            <a:ext cx="5346040" cy="4114800"/>
-          </a:xfrm>
-          <a:prstGeom prst="roundRect">
-            <a:avLst>
-              <a:gd name="adj" fmla="val 2000"/>
-            </a:avLst>
-          </a:prstGeom>
-          <a:solidFill>
-            <a:srgbClr val="E0F2F4"/>
-          </a:solidFill>
-          <a:ln/>
-          <a:effectLst>
-            <a:outerShdw sx="100000" sy="100000" kx="0" ky="0" algn="bl" rotWithShape="0" blurRad="88900" dist="25400" dir="5400000">
-              <a:srgbClr val="22303C">
-                <a:alpha val="12000"/>
-              </a:srgbClr>
-            </a:outerShdw>
-          </a:effectLst>
-        </p:spPr>
-      </p:sp>
-      <p:sp>
-        <p:nvSpPr>
-          <p:cNvPr id="8" name="Text 6"/>
-          <p:cNvSpPr/>
-          <p:nvPr/>
-        </p:nvSpPr>
-        <p:spPr>
-          <a:xfrm>
-            <a:off x="6516472" y="1682496"/>
-            <a:ext cx="4888840" cy="274320"/>
-          </a:xfrm>
-          <a:prstGeom prst="rect">
-            <a:avLst/>
-          </a:prstGeom>
-          <a:noFill/>
-          <a:ln/>
-        </p:spPr>
-        <p:txBody>
-          <a:bodyPr wrap="square" lIns="0" tIns="0" rIns="0" bIns="0" rtlCol="0" anchor="ctr"/>
-          <a:lstStyle/>
-          <a:p>
-            <a:pPr indent="0" marL="0">
-              <a:buNone/>
-            </a:pPr>
-            <a:r>
-              <a:rPr lang="en-US" sz="1200" b="1" spc="100" kern="0" dirty="0">
-                <a:solidFill>
-                  <a:srgbClr val="005A63"/>
-                </a:solidFill>
-                <a:latin typeface="Calibri" pitchFamily="34" charset="0"/>
-                <a:ea typeface="Calibri" pitchFamily="34" charset="-122"/>
-                <a:cs typeface="Calibri" pitchFamily="34" charset="-120"/>
-              </a:rPr>
-              <a:t>WHY IT MATTERS</a:t>
-            </a:r>
-            <a:endParaRPr lang="en-US" sz="1200" dirty="0"/>
-          </a:p>
-        </p:txBody>
-      </p:sp>
-      <p:sp>
-        <p:nvSpPr>
-          <p:cNvPr id="9" name="Text 7"/>
-          <p:cNvSpPr/>
-          <p:nvPr/>
-        </p:nvSpPr>
-        <p:spPr>
-          <a:xfrm>
-            <a:off x="6516472" y="2029968"/>
-            <a:ext cx="4870552" cy="3474720"/>
-          </a:xfrm>
-          <a:prstGeom prst="rect">
-            <a:avLst/>
-          </a:prstGeom>
-          <a:noFill/>
-          <a:ln/>
-        </p:spPr>
-        <p:txBody>
-          <a:bodyPr wrap="square" lIns="0" tIns="0" rIns="0" bIns="0" rtlCol="0" anchor="t"/>
-          <a:lstStyle/>
-          <a:p>
-            <a:pPr algn="l" marL="177800" indent="-177800">
-              <a:spcAft>
-                <a:spcPts val="900"/>
-              </a:spcAft>
-              <a:buSzPct val="100000"/>
-              <a:buChar char="•"/>
-            </a:pPr>
-            <a:r>
-              <a:rPr lang="en-US" sz="1250" b="1" dirty="0">
-                <a:solidFill>
-                  <a:srgbClr val="1B2A38"/>
-                </a:solidFill>
-                <a:latin typeface="Calibri" pitchFamily="34" charset="0"/>
-                <a:ea typeface="Calibri" pitchFamily="34" charset="-122"/>
-                <a:cs typeface="Calibri" pitchFamily="34" charset="-120"/>
-              </a:rPr>
-              <a:t>MRD status is prognostic and increasingly guides therapy (e.g., escalation, transplant decisions).</a:t>
-            </a:r>
-            <a:endParaRPr lang="en-US" sz="1250" dirty="0"/>
-          </a:p>
-          <a:p>
-            <a:pPr algn="l" marL="177800" indent="-177800">
-              <a:spcAft>
-                <a:spcPts val="900"/>
-              </a:spcAft>
-              <a:buSzPct val="100000"/>
-              <a:buChar char="•"/>
-            </a:pPr>
-            <a:r>
-              <a:rPr lang="en-US" sz="1250" dirty="0">
-                <a:solidFill>
-                  <a:srgbClr val="33444F"/>
-                </a:solidFill>
-                <a:latin typeface="Calibri" pitchFamily="34" charset="0"/>
-                <a:ea typeface="Calibri" pitchFamily="34" charset="-122"/>
-                <a:cs typeface="Calibri" pitchFamily="34" charset="-120"/>
-              </a:rPr>
-              <a:t>Track response over time, not a single value.</a:t>
-            </a:r>
-            <a:endParaRPr lang="en-US" sz="1250" dirty="0"/>
-          </a:p>
-          <a:p>
-            <a:pPr algn="l" marL="177800" indent="-177800">
-              <a:spcAft>
-                <a:spcPts val="900"/>
-              </a:spcAft>
-              <a:buSzPct val="100000"/>
-              <a:buChar char="•"/>
-            </a:pPr>
-            <a:r>
-              <a:rPr lang="en-US" sz="1250" dirty="0">
-                <a:solidFill>
-                  <a:srgbClr val="33444F"/>
-                </a:solidFill>
-                <a:latin typeface="Calibri" pitchFamily="34" charset="0"/>
-                <a:ea typeface="Calibri" pitchFamily="34" charset="-122"/>
-                <a:cs typeface="Calibri" pitchFamily="34" charset="-120"/>
-              </a:rPr>
-              <a:t>Method and sample type must be consistent for trending.</a:t>
-            </a:r>
-            <a:endParaRPr lang="en-US" sz="1250" dirty="0"/>
-          </a:p>
-          <a:p>
-            <a:pPr algn="l" marL="177800" indent="-177800">
-              <a:spcAft>
-                <a:spcPts val="900"/>
-              </a:spcAft>
-              <a:buSzPct val="100000"/>
-              <a:buChar char="•"/>
-            </a:pPr>
-            <a:r>
-              <a:rPr lang="en-US" sz="1250" dirty="0">
-                <a:solidFill>
-                  <a:srgbClr val="33444F"/>
-                </a:solidFill>
-                <a:latin typeface="Calibri" pitchFamily="34" charset="0"/>
-                <a:ea typeface="Calibri" pitchFamily="34" charset="-122"/>
-                <a:cs typeface="Calibri" pitchFamily="34" charset="-120"/>
-              </a:rPr>
-              <a:t>Rising MRD can predict relapse.</a:t>
-            </a:r>
-            <a:endParaRPr lang="en-US" sz="1250" dirty="0"/>
-          </a:p>
-        </p:txBody>
-      </p:sp>
-      <p:sp>
-        <p:nvSpPr>
-          <p:cNvPr id="10" name="Text 8"/>
-          <p:cNvSpPr/>
-          <p:nvPr/>
-        </p:nvSpPr>
-        <p:spPr>
-          <a:xfrm>
-            <a:off x="566928" y="6473952"/>
-            <a:ext cx="7772400" cy="274320"/>
-          </a:xfrm>
-          <a:prstGeom prst="rect">
-            <a:avLst/>
-          </a:prstGeom>
-          <a:noFill/>
-          <a:ln/>
-        </p:spPr>
-        <p:txBody>
-          <a:bodyPr wrap="square" lIns="0" tIns="0" rIns="0" bIns="0" rtlCol="0" anchor="ctr"/>
-          <a:lstStyle/>
-          <a:p>
             <a:pPr algn="l" indent="0" marL="0">
               <a:buNone/>
             </a:pPr>
             <a:r>
-              <a:rPr lang="en-US" sz="850" dirty="0">
-                <a:solidFill>
-                  <a:srgbClr val="9AA8B4"/>
-                </a:solidFill>
-                <a:latin typeface="Calibri" pitchFamily="34" charset="0"/>
-                <a:ea typeface="Calibri" pitchFamily="34" charset="-122"/>
-                <a:cs typeface="Calibri" pitchFamily="34" charset="-120"/>
-              </a:rPr>
-              <a:t>Makassed General Hospital  ·  Department of Laboratory Medicine</a:t>
-            </a:r>
-            <a:endParaRPr lang="en-US" sz="850" dirty="0"/>
-          </a:p>
-        </p:txBody>
-      </p:sp>
-      <p:sp>
-        <p:nvSpPr>
-          <p:cNvPr id="11" name="Text 9"/>
-          <p:cNvSpPr/>
-          <p:nvPr/>
-        </p:nvSpPr>
-        <p:spPr>
-          <a:xfrm>
-            <a:off x="9814255" y="6473952"/>
-            <a:ext cx="1828800" cy="274320"/>
-          </a:xfrm>
-          <a:prstGeom prst="rect">
-            <a:avLst/>
-          </a:prstGeom>
-          <a:noFill/>
-          <a:ln/>
-        </p:spPr>
-        <p:txBody>
-          <a:bodyPr wrap="square" lIns="0" tIns="0" rIns="0" bIns="0" rtlCol="0" anchor="ctr"/>
-          <a:lstStyle/>
-          <a:p>
-            <a:pPr algn="r" indent="0" marL="0">
-              <a:buNone/>
-            </a:pPr>
-            <a:r>
-              <a:rPr lang="en-US" sz="850" dirty="0">
-                <a:solidFill>
-                  <a:srgbClr val="9AA8B4"/>
-                </a:solidFill>
-                <a:latin typeface="Calibri" pitchFamily="34" charset="0"/>
-                <a:ea typeface="Calibri" pitchFamily="34" charset="-122"/>
-                <a:cs typeface="Calibri" pitchFamily="34" charset="-120"/>
-              </a:rPr>
-              <a:t>CP Lecture Series</a:t>
-            </a:r>
-            <a:pPr algn="r" indent="0" marL="0">
-              <a:buNone/>
-            </a:pPr>
-            <a:r>
-              <a:rPr lang="en-US" sz="850" dirty="0">
-                <a:solidFill>
-                  <a:srgbClr val="DCE4EC"/>
-                </a:solidFill>
-                <a:latin typeface="Calibri" pitchFamily="34" charset="0"/>
-                <a:ea typeface="Calibri" pitchFamily="34" charset="-122"/>
-                <a:cs typeface="Calibri" pitchFamily="34" charset="-120"/>
-              </a:rPr>
-              <a:t>   ·   </a:t>
-            </a:r>
-            <a:pPr algn="r" indent="0" marL="0">
-              <a:buNone/>
-            </a:pPr>
-            <a:r>
-              <a:rPr lang="en-US" sz="850" b="1" dirty="0">
-                <a:solidFill>
-                  <a:srgbClr val="00838F"/>
-                </a:solidFill>
-                <a:latin typeface="Calibri" pitchFamily="34" charset="0"/>
-                <a:ea typeface="Calibri" pitchFamily="34" charset="-122"/>
-                <a:cs typeface="Calibri" pitchFamily="34" charset="-120"/>
-              </a:rPr>
-              <a:t>8</a:t>
-            </a:r>
-            <a:endParaRPr lang="en-US" sz="850" dirty="0"/>
+              <a:rPr lang="en-US" sz="3800" b="1" dirty="0">
+                <a:solidFill>
+                  <a:srgbClr val="FFFFFF"/>
+                </a:solidFill>
+                <a:latin typeface="Calibri" pitchFamily="34" charset="0"/>
+                <a:ea typeface="Calibri" pitchFamily="34" charset="-122"/>
+                <a:cs typeface="Calibri" pitchFamily="34" charset="-120"/>
+              </a:rPr>
+              <a:t>Mutations, MRD &amp; Integration</a:t>
+            </a:r>
+            <a:endParaRPr lang="en-US" sz="3800" dirty="0"/>
           </a:p>
         </p:txBody>
       </p:sp>
@@ -3649,7 +3723,7 @@
                 <a:ea typeface="Calibri" pitchFamily="34" charset="-122"/>
                 <a:cs typeface="Calibri" pitchFamily="34" charset="-120"/>
               </a:rPr>
-              <a:t>MOLECULAR &amp; CYTOGENETICS   ·   INTEGRATION</a:t>
+              <a:t>MOLECULAR &amp; CYTOGENETICS   ·   MUTATIONS</a:t>
             </a:r>
             <a:endParaRPr lang="en-US" sz="1100" dirty="0"/>
           </a:p>
@@ -3688,7 +3762,7 @@
                 <a:ea typeface="Calibri" pitchFamily="34" charset="-122"/>
                 <a:cs typeface="Calibri" pitchFamily="34" charset="-120"/>
               </a:rPr>
-              <a:t>The Integrated Diagnosis</a:t>
+              <a:t>High-Yield Mutations</a:t>
             </a:r>
             <a:endParaRPr lang="en-US" sz="3000" dirty="0"/>
           </a:p>
@@ -3756,7 +3830,7 @@
                 <a:ea typeface="Calibri" pitchFamily="34" charset="-122"/>
                 <a:cs typeface="Calibri" pitchFamily="34" charset="-120"/>
               </a:rPr>
-              <a:t>BRING THE DATA TOGETHER</a:t>
+              <a:t>MYELOID</a:t>
             </a:r>
             <a:endParaRPr lang="en-US" sz="1200" dirty="0"/>
           </a:p>
@@ -3799,7 +3873,7 @@
                 <a:ea typeface="Calibri" pitchFamily="34" charset="-122"/>
                 <a:cs typeface="Calibri" pitchFamily="34" charset="-120"/>
               </a:rPr>
-              <a:t>Morphology + immunophenotype (flow) + cytogenetics + molecular define the WHO/ICC entity.</a:t>
+              <a:t>FLT3, NPM1, IDH1/2, CEBPA inform AML prognosis and therapy.</a:t>
             </a:r>
             <a:endParaRPr lang="en-US" sz="1250" dirty="0"/>
           </a:p>
@@ -3820,7 +3894,7 @@
                 <a:ea typeface="Calibri" pitchFamily="34" charset="-122"/>
                 <a:cs typeface="Calibri" pitchFamily="34" charset="-120"/>
               </a:rPr>
-              <a:t>Molecular results refine classification and risk — they do not stand alone.</a:t>
+              <a:t>JAK2 V617F in myeloproliferative neoplasms.</a:t>
             </a:r>
             <a:endParaRPr lang="en-US" sz="1250" dirty="0"/>
           </a:p>
@@ -3841,7 +3915,7 @@
                 <a:ea typeface="Calibri" pitchFamily="34" charset="-122"/>
                 <a:cs typeface="Calibri" pitchFamily="34" charset="-120"/>
               </a:rPr>
-              <a:t>Discordances prompt review, not isolated reporting.</a:t>
+              <a:t>Mutation panels increasingly standard at diagnosis.</a:t>
             </a:r>
             <a:endParaRPr lang="en-US" sz="1250" dirty="0"/>
           </a:p>
@@ -3862,7 +3936,7 @@
                 <a:ea typeface="Calibri" pitchFamily="34" charset="-122"/>
                 <a:cs typeface="Calibri" pitchFamily="34" charset="-120"/>
               </a:rPr>
-              <a:t>Communicate an integrated, coherent diagnosis.</a:t>
+              <a:t>Some are direct drug targets.</a:t>
             </a:r>
             <a:endParaRPr lang="en-US" sz="1250" dirty="0"/>
           </a:p>
@@ -3885,7 +3959,7 @@
             </a:avLst>
           </a:prstGeom>
           <a:solidFill>
-            <a:srgbClr val="E0F2F4"/>
+            <a:srgbClr val="DDF0EF"/>
           </a:solidFill>
           <a:ln/>
           <a:effectLst>
@@ -3930,7 +4004,7 @@
                 <a:ea typeface="Calibri" pitchFamily="34" charset="-122"/>
                 <a:cs typeface="Calibri" pitchFamily="34" charset="-120"/>
               </a:rPr>
-              <a:t>SAMPLE ADEQUACY</a:t>
+              <a:t>LYMPHOID &amp; MONITORING</a:t>
             </a:r>
             <a:endParaRPr lang="en-US" sz="1200" dirty="0"/>
           </a:p>
@@ -3973,7 +4047,7 @@
                 <a:ea typeface="Calibri" pitchFamily="34" charset="-122"/>
                 <a:cs typeface="Calibri" pitchFamily="34" charset="-120"/>
               </a:rPr>
-              <a:t>Ensure adequate, viable, properly anticoagulated material (often EDTA/heparin per assay).</a:t>
+              <a:t>Clonality (IGH/TCR rearrangement) supports lymphoproliferative diagnosis.</a:t>
             </a:r>
             <a:endParaRPr lang="en-US" sz="1250" dirty="0"/>
           </a:p>
@@ -3994,7 +4068,7 @@
                 <a:ea typeface="Calibri" pitchFamily="34" charset="-122"/>
                 <a:cs typeface="Calibri" pitchFamily="34" charset="-120"/>
               </a:rPr>
-              <a:t>Tumor cellularity affects sensitivity — report the limitation.</a:t>
+              <a:t>MRD by quantitative PCR, flow, or NGS detects low-level disease.</a:t>
             </a:r>
             <a:endParaRPr lang="en-US" sz="1250" dirty="0"/>
           </a:p>
@@ -4015,7 +4089,7 @@
                 <a:ea typeface="Calibri" pitchFamily="34" charset="-122"/>
                 <a:cs typeface="Calibri" pitchFamily="34" charset="-120"/>
               </a:rPr>
-              <a:t>Send the right tube for the right test (RNA for fusions).</a:t>
+              <a:t>Rising markers can precede morphologic relapse.</a:t>
             </a:r>
             <a:endParaRPr lang="en-US" sz="1250" dirty="0"/>
           </a:p>
@@ -4036,7 +4110,7 @@
                 <a:ea typeface="Calibri" pitchFamily="34" charset="-122"/>
                 <a:cs typeface="Calibri" pitchFamily="34" charset="-120"/>
               </a:rPr>
-              <a:t>Coordinate so limited specimen serves all needed studies.</a:t>
+              <a:t>Serial monitoring guides therapy.</a:t>
             </a:r>
             <a:endParaRPr lang="en-US" sz="1250" dirty="0"/>
           </a:p>
@@ -4162,7 +4236,7 @@
     <p:bg>
       <p:bgPr>
         <a:solidFill>
-          <a:srgbClr val="005A63"/>
+          <a:srgbClr val="FFFFFF"/>
         </a:solidFill>
       </p:bgPr>
     </p:bg>
@@ -4182,58 +4256,295 @@
       </p:grpSpPr>
       <p:sp>
         <p:nvSpPr>
-          <p:cNvPr id="2" name="Shape 0"/>
-          <p:cNvSpPr/>
-          <p:nvPr/>
-        </p:nvSpPr>
-        <p:spPr>
-          <a:xfrm>
-            <a:off x="9509760" y="-1280160"/>
-            <a:ext cx="4754880" cy="4754880"/>
-          </a:xfrm>
-          <a:prstGeom prst="ellipse">
-            <a:avLst/>
+          <p:cNvPr id="2" name="Text 0"/>
+          <p:cNvSpPr/>
+          <p:nvPr/>
+        </p:nvSpPr>
+        <p:spPr>
+          <a:xfrm>
+            <a:off x="566928" y="329184"/>
+            <a:ext cx="10515600" cy="310896"/>
+          </a:xfrm>
+          <a:prstGeom prst="rect">
+            <a:avLst/>
+          </a:prstGeom>
+          <a:noFill/>
+          <a:ln/>
+        </p:spPr>
+        <p:txBody>
+          <a:bodyPr wrap="square" lIns="0" tIns="0" rIns="0" bIns="0" rtlCol="0" anchor="ctr"/>
+          <a:lstStyle/>
+          <a:p>
+            <a:pPr algn="l" indent="0" marL="0">
+              <a:buNone/>
+            </a:pPr>
+            <a:r>
+              <a:rPr lang="en-US" sz="1100" b="1" spc="150" kern="0" dirty="0">
+                <a:solidFill>
+                  <a:srgbClr val="00838F"/>
+                </a:solidFill>
+                <a:latin typeface="Calibri" pitchFamily="34" charset="0"/>
+                <a:ea typeface="Calibri" pitchFamily="34" charset="-122"/>
+                <a:cs typeface="Calibri" pitchFamily="34" charset="-120"/>
+              </a:rPr>
+              <a:t>MOLECULAR &amp; CYTOGENETICS   ·   MONITORING</a:t>
+            </a:r>
+            <a:endParaRPr lang="en-US" sz="1100" dirty="0"/>
+          </a:p>
+        </p:txBody>
+      </p:sp>
+      <p:sp>
+        <p:nvSpPr>
+          <p:cNvPr id="3" name="Text 1"/>
+          <p:cNvSpPr/>
+          <p:nvPr/>
+        </p:nvSpPr>
+        <p:spPr>
+          <a:xfrm>
+            <a:off x="566928" y="713232"/>
+            <a:ext cx="11064240" cy="749808"/>
+          </a:xfrm>
+          <a:prstGeom prst="rect">
+            <a:avLst/>
+          </a:prstGeom>
+          <a:noFill/>
+          <a:ln/>
+        </p:spPr>
+        <p:txBody>
+          <a:bodyPr wrap="square" lIns="0" tIns="0" rIns="0" bIns="0" rtlCol="0" anchor="ctr"/>
+          <a:lstStyle/>
+          <a:p>
+            <a:pPr algn="l" indent="0" marL="0">
+              <a:buNone/>
+            </a:pPr>
+            <a:r>
+              <a:rPr lang="en-US" sz="3000" b="1" dirty="0">
+                <a:solidFill>
+                  <a:srgbClr val="0E3A5F"/>
+                </a:solidFill>
+                <a:latin typeface="Calibri" pitchFamily="34" charset="0"/>
+                <a:ea typeface="Calibri" pitchFamily="34" charset="-122"/>
+                <a:cs typeface="Calibri" pitchFamily="34" charset="-120"/>
+              </a:rPr>
+              <a:t>Quantitative Monitoring &amp; MRD</a:t>
+            </a:r>
+            <a:endParaRPr lang="en-US" sz="3000" dirty="0"/>
+          </a:p>
+        </p:txBody>
+      </p:sp>
+      <p:sp>
+        <p:nvSpPr>
+          <p:cNvPr id="4" name="Shape 2"/>
+          <p:cNvSpPr/>
+          <p:nvPr/>
+        </p:nvSpPr>
+        <p:spPr>
+          <a:xfrm>
+            <a:off x="566928" y="1517904"/>
+            <a:ext cx="5346040" cy="4114800"/>
+          </a:xfrm>
+          <a:prstGeom prst="roundRect">
+            <a:avLst>
+              <a:gd name="adj" fmla="val 2000"/>
+            </a:avLst>
           </a:prstGeom>
           <a:solidFill>
-            <a:srgbClr val="FFFFFF">
-              <a:alpha val="8000"/>
-            </a:srgbClr>
+            <a:srgbClr val="E0F2F4"/>
           </a:solidFill>
           <a:ln/>
-        </p:spPr>
-      </p:sp>
-      <p:sp>
-        <p:nvSpPr>
-          <p:cNvPr id="3" name="Shape 1"/>
-          <p:cNvSpPr/>
-          <p:nvPr/>
-        </p:nvSpPr>
-        <p:spPr>
-          <a:xfrm>
-            <a:off x="10607040" y="3931920"/>
-            <a:ext cx="3108960" cy="3108960"/>
-          </a:xfrm>
-          <a:prstGeom prst="ellipse">
-            <a:avLst/>
+          <a:effectLst>
+            <a:outerShdw sx="100000" sy="100000" kx="0" ky="0" algn="bl" rotWithShape="0" blurRad="88900" dist="25400" dir="5400000">
+              <a:srgbClr val="22303C">
+                <a:alpha val="12000"/>
+              </a:srgbClr>
+            </a:outerShdw>
+          </a:effectLst>
+        </p:spPr>
+      </p:sp>
+      <p:sp>
+        <p:nvSpPr>
+          <p:cNvPr id="5" name="Text 3"/>
+          <p:cNvSpPr/>
+          <p:nvPr/>
+        </p:nvSpPr>
+        <p:spPr>
+          <a:xfrm>
+            <a:off x="804672" y="1682496"/>
+            <a:ext cx="4888840" cy="274320"/>
+          </a:xfrm>
+          <a:prstGeom prst="rect">
+            <a:avLst/>
+          </a:prstGeom>
+          <a:noFill/>
+          <a:ln/>
+        </p:spPr>
+        <p:txBody>
+          <a:bodyPr wrap="square" lIns="0" tIns="0" rIns="0" bIns="0" rtlCol="0" anchor="ctr"/>
+          <a:lstStyle/>
+          <a:p>
+            <a:pPr indent="0" marL="0">
+              <a:buNone/>
+            </a:pPr>
+            <a:r>
+              <a:rPr lang="en-US" sz="1200" b="1" spc="100" kern="0" dirty="0">
+                <a:solidFill>
+                  <a:srgbClr val="005A63"/>
+                </a:solidFill>
+                <a:latin typeface="Calibri" pitchFamily="34" charset="0"/>
+                <a:ea typeface="Calibri" pitchFamily="34" charset="-122"/>
+                <a:cs typeface="Calibri" pitchFamily="34" charset="-120"/>
+              </a:rPr>
+              <a:t>BCR-ABL1 MONITORING</a:t>
+            </a:r>
+            <a:endParaRPr lang="en-US" sz="1200" dirty="0"/>
+          </a:p>
+        </p:txBody>
+      </p:sp>
+      <p:sp>
+        <p:nvSpPr>
+          <p:cNvPr id="6" name="Text 4"/>
+          <p:cNvSpPr/>
+          <p:nvPr/>
+        </p:nvSpPr>
+        <p:spPr>
+          <a:xfrm>
+            <a:off x="804672" y="2029968"/>
+            <a:ext cx="4870552" cy="3474720"/>
+          </a:xfrm>
+          <a:prstGeom prst="rect">
+            <a:avLst/>
+          </a:prstGeom>
+          <a:noFill/>
+          <a:ln/>
+        </p:spPr>
+        <p:txBody>
+          <a:bodyPr wrap="square" lIns="0" tIns="0" rIns="0" bIns="0" rtlCol="0" anchor="t"/>
+          <a:lstStyle/>
+          <a:p>
+            <a:pPr algn="l" marL="177800" indent="-177800">
+              <a:spcAft>
+                <a:spcPts val="900"/>
+              </a:spcAft>
+              <a:buSzPct val="100000"/>
+              <a:buChar char="•"/>
+            </a:pPr>
+            <a:r>
+              <a:rPr lang="en-US" sz="1250" b="1" dirty="0">
+                <a:solidFill>
+                  <a:srgbClr val="1B2A38"/>
+                </a:solidFill>
+                <a:latin typeface="Calibri" pitchFamily="34" charset="0"/>
+                <a:ea typeface="Calibri" pitchFamily="34" charset="-122"/>
+                <a:cs typeface="Calibri" pitchFamily="34" charset="-120"/>
+              </a:rPr>
+              <a:t>Quantitative RT-PCR on the International Scale tracks CML response to therapy.</a:t>
+            </a:r>
+            <a:endParaRPr lang="en-US" sz="1250" dirty="0"/>
+          </a:p>
+          <a:p>
+            <a:pPr algn="l" marL="177800" indent="-177800">
+              <a:spcAft>
+                <a:spcPts val="900"/>
+              </a:spcAft>
+              <a:buSzPct val="100000"/>
+              <a:buChar char="•"/>
+            </a:pPr>
+            <a:r>
+              <a:rPr lang="en-US" sz="1250" dirty="0">
+                <a:solidFill>
+                  <a:srgbClr val="33444F"/>
+                </a:solidFill>
+                <a:latin typeface="Calibri" pitchFamily="34" charset="0"/>
+                <a:ea typeface="Calibri" pitchFamily="34" charset="-122"/>
+                <a:cs typeface="Calibri" pitchFamily="34" charset="-120"/>
+              </a:rPr>
+              <a:t>Defined molecular-response milestones guide management.</a:t>
+            </a:r>
+            <a:endParaRPr lang="en-US" sz="1250" dirty="0"/>
+          </a:p>
+          <a:p>
+            <a:pPr algn="l" marL="177800" indent="-177800">
+              <a:spcAft>
+                <a:spcPts val="900"/>
+              </a:spcAft>
+              <a:buSzPct val="100000"/>
+              <a:buChar char="•"/>
+            </a:pPr>
+            <a:r>
+              <a:rPr lang="en-US" sz="1250" dirty="0">
+                <a:solidFill>
+                  <a:srgbClr val="33444F"/>
+                </a:solidFill>
+                <a:latin typeface="Calibri" pitchFamily="34" charset="0"/>
+                <a:ea typeface="Calibri" pitchFamily="34" charset="-122"/>
+                <a:cs typeface="Calibri" pitchFamily="34" charset="-120"/>
+              </a:rPr>
+              <a:t>Rising transcripts prompt resistance evaluation.</a:t>
+            </a:r>
+            <a:endParaRPr lang="en-US" sz="1250" dirty="0"/>
+          </a:p>
+          <a:p>
+            <a:pPr algn="l" marL="177800" indent="-177800">
+              <a:spcAft>
+                <a:spcPts val="900"/>
+              </a:spcAft>
+              <a:buSzPct val="100000"/>
+              <a:buChar char="•"/>
+            </a:pPr>
+            <a:r>
+              <a:rPr lang="en-US" sz="1250" dirty="0">
+                <a:solidFill>
+                  <a:srgbClr val="33444F"/>
+                </a:solidFill>
+                <a:latin typeface="Calibri" pitchFamily="34" charset="0"/>
+                <a:ea typeface="Calibri" pitchFamily="34" charset="-122"/>
+                <a:cs typeface="Calibri" pitchFamily="34" charset="-120"/>
+              </a:rPr>
+              <a:t>Standardization enables comparison across labs.</a:t>
+            </a:r>
+            <a:endParaRPr lang="en-US" sz="1250" dirty="0"/>
+          </a:p>
+        </p:txBody>
+      </p:sp>
+      <p:sp>
+        <p:nvSpPr>
+          <p:cNvPr id="7" name="Shape 5"/>
+          <p:cNvSpPr/>
+          <p:nvPr/>
+        </p:nvSpPr>
+        <p:spPr>
+          <a:xfrm>
+            <a:off x="6278728" y="1517904"/>
+            <a:ext cx="5346040" cy="4114800"/>
+          </a:xfrm>
+          <a:prstGeom prst="roundRect">
+            <a:avLst>
+              <a:gd name="adj" fmla="val 2000"/>
+            </a:avLst>
           </a:prstGeom>
           <a:solidFill>
-            <a:srgbClr val="FFFFFF">
-              <a:alpha val="6000"/>
-            </a:srgbClr>
+            <a:srgbClr val="DDF0EF"/>
           </a:solidFill>
           <a:ln/>
-        </p:spPr>
-      </p:sp>
-      <p:sp>
-        <p:nvSpPr>
-          <p:cNvPr id="4" name="Text 2"/>
-          <p:cNvSpPr/>
-          <p:nvPr/>
-        </p:nvSpPr>
-        <p:spPr>
-          <a:xfrm>
-            <a:off x="566928" y="1783080"/>
-            <a:ext cx="2743200" cy="1463040"/>
+          <a:effectLst>
+            <a:outerShdw sx="100000" sy="100000" kx="0" ky="0" algn="bl" rotWithShape="0" blurRad="88900" dist="25400" dir="5400000">
+              <a:srgbClr val="22303C">
+                <a:alpha val="12000"/>
+              </a:srgbClr>
+            </a:outerShdw>
+          </a:effectLst>
+        </p:spPr>
+      </p:sp>
+      <p:sp>
+        <p:nvSpPr>
+          <p:cNvPr id="8" name="Text 6"/>
+          <p:cNvSpPr/>
+          <p:nvPr/>
+        </p:nvSpPr>
+        <p:spPr>
+          <a:xfrm>
+            <a:off x="6516472" y="1682496"/>
+            <a:ext cx="4888840" cy="274320"/>
           </a:xfrm>
           <a:prstGeom prst="rect">
             <a:avLst/>
@@ -4245,34 +4556,179 @@
           <a:bodyPr wrap="square" lIns="0" tIns="0" rIns="0" bIns="0" rtlCol="0" anchor="ctr"/>
           <a:lstStyle/>
           <a:p>
+            <a:pPr indent="0" marL="0">
+              <a:buNone/>
+            </a:pPr>
+            <a:r>
+              <a:rPr lang="en-US" sz="1200" b="1" spc="100" kern="0" dirty="0">
+                <a:solidFill>
+                  <a:srgbClr val="005A63"/>
+                </a:solidFill>
+                <a:latin typeface="Calibri" pitchFamily="34" charset="0"/>
+                <a:ea typeface="Calibri" pitchFamily="34" charset="-122"/>
+                <a:cs typeface="Calibri" pitchFamily="34" charset="-120"/>
+              </a:rPr>
+              <a:t>MRD PRINCIPLES</a:t>
+            </a:r>
+            <a:endParaRPr lang="en-US" sz="1200" dirty="0"/>
+          </a:p>
+        </p:txBody>
+      </p:sp>
+      <p:sp>
+        <p:nvSpPr>
+          <p:cNvPr id="9" name="Text 7"/>
+          <p:cNvSpPr/>
+          <p:nvPr/>
+        </p:nvSpPr>
+        <p:spPr>
+          <a:xfrm>
+            <a:off x="6516472" y="2029968"/>
+            <a:ext cx="4870552" cy="3474720"/>
+          </a:xfrm>
+          <a:prstGeom prst="rect">
+            <a:avLst/>
+          </a:prstGeom>
+          <a:noFill/>
+          <a:ln/>
+        </p:spPr>
+        <p:txBody>
+          <a:bodyPr wrap="square" lIns="0" tIns="0" rIns="0" bIns="0" rtlCol="0" anchor="t"/>
+          <a:lstStyle/>
+          <a:p>
+            <a:pPr algn="l" marL="177800" indent="-177800">
+              <a:spcAft>
+                <a:spcPts val="900"/>
+              </a:spcAft>
+              <a:buSzPct val="100000"/>
+              <a:buChar char="•"/>
+            </a:pPr>
+            <a:r>
+              <a:rPr lang="en-US" sz="1250" b="1" dirty="0">
+                <a:solidFill>
+                  <a:srgbClr val="1B2A38"/>
+                </a:solidFill>
+                <a:latin typeface="Calibri" pitchFamily="34" charset="0"/>
+                <a:ea typeface="Calibri" pitchFamily="34" charset="-122"/>
+                <a:cs typeface="Calibri" pitchFamily="34" charset="-120"/>
+              </a:rPr>
+              <a:t>MRD detects residual disease below morphologic resolution.</a:t>
+            </a:r>
+            <a:endParaRPr lang="en-US" sz="1250" dirty="0"/>
+          </a:p>
+          <a:p>
+            <a:pPr algn="l" marL="177800" indent="-177800">
+              <a:spcAft>
+                <a:spcPts val="900"/>
+              </a:spcAft>
+              <a:buSzPct val="100000"/>
+              <a:buChar char="•"/>
+            </a:pPr>
+            <a:r>
+              <a:rPr lang="en-US" sz="1250" dirty="0">
+                <a:solidFill>
+                  <a:srgbClr val="33444F"/>
+                </a:solidFill>
+                <a:latin typeface="Calibri" pitchFamily="34" charset="0"/>
+                <a:ea typeface="Calibri" pitchFamily="34" charset="-122"/>
+                <a:cs typeface="Calibri" pitchFamily="34" charset="-120"/>
+              </a:rPr>
+              <a:t>Sensitivity depends on the method and marker.</a:t>
+            </a:r>
+            <a:endParaRPr lang="en-US" sz="1250" dirty="0"/>
+          </a:p>
+          <a:p>
+            <a:pPr algn="l" marL="177800" indent="-177800">
+              <a:spcAft>
+                <a:spcPts val="900"/>
+              </a:spcAft>
+              <a:buSzPct val="100000"/>
+              <a:buChar char="•"/>
+            </a:pPr>
+            <a:r>
+              <a:rPr lang="en-US" sz="1250" dirty="0">
+                <a:solidFill>
+                  <a:srgbClr val="33444F"/>
+                </a:solidFill>
+                <a:latin typeface="Calibri" pitchFamily="34" charset="0"/>
+                <a:ea typeface="Calibri" pitchFamily="34" charset="-122"/>
+                <a:cs typeface="Calibri" pitchFamily="34" charset="-120"/>
+              </a:rPr>
+              <a:t>Results must be reported with the limit of detection.</a:t>
+            </a:r>
+            <a:endParaRPr lang="en-US" sz="1250" dirty="0"/>
+          </a:p>
+          <a:p>
+            <a:pPr algn="l" marL="177800" indent="-177800">
+              <a:spcAft>
+                <a:spcPts val="900"/>
+              </a:spcAft>
+              <a:buSzPct val="100000"/>
+              <a:buChar char="•"/>
+            </a:pPr>
+            <a:r>
+              <a:rPr lang="en-US" sz="1250" dirty="0">
+                <a:solidFill>
+                  <a:srgbClr val="33444F"/>
+                </a:solidFill>
+                <a:latin typeface="Calibri" pitchFamily="34" charset="0"/>
+                <a:ea typeface="Calibri" pitchFamily="34" charset="-122"/>
+                <a:cs typeface="Calibri" pitchFamily="34" charset="-120"/>
+              </a:rPr>
+              <a:t>Integrate with clinical and other lab data.</a:t>
+            </a:r>
+            <a:endParaRPr lang="en-US" sz="1250" dirty="0"/>
+          </a:p>
+        </p:txBody>
+      </p:sp>
+      <p:sp>
+        <p:nvSpPr>
+          <p:cNvPr id="10" name="Text 8"/>
+          <p:cNvSpPr/>
+          <p:nvPr/>
+        </p:nvSpPr>
+        <p:spPr>
+          <a:xfrm>
+            <a:off x="566928" y="6473952"/>
+            <a:ext cx="7772400" cy="274320"/>
+          </a:xfrm>
+          <a:prstGeom prst="rect">
+            <a:avLst/>
+          </a:prstGeom>
+          <a:noFill/>
+          <a:ln/>
+        </p:spPr>
+        <p:txBody>
+          <a:bodyPr wrap="square" lIns="0" tIns="0" rIns="0" bIns="0" rtlCol="0" anchor="ctr"/>
+          <a:lstStyle/>
+          <a:p>
             <a:pPr algn="l" indent="0" marL="0">
               <a:buNone/>
             </a:pPr>
             <a:r>
-              <a:rPr lang="en-US" sz="6400" b="1" dirty="0">
-                <a:solidFill>
-                  <a:srgbClr val="E0F2F4"/>
-                </a:solidFill>
-                <a:latin typeface="Calibri" pitchFamily="34" charset="0"/>
-                <a:ea typeface="Calibri" pitchFamily="34" charset="-122"/>
-                <a:cs typeface="Calibri" pitchFamily="34" charset="-120"/>
-              </a:rPr>
-              <a:t>03</a:t>
-            </a:r>
-            <a:endParaRPr lang="en-US" sz="6400" dirty="0"/>
-          </a:p>
-        </p:txBody>
-      </p:sp>
-      <p:sp>
-        <p:nvSpPr>
-          <p:cNvPr id="5" name="Text 3"/>
-          <p:cNvSpPr/>
-          <p:nvPr/>
-        </p:nvSpPr>
-        <p:spPr>
-          <a:xfrm>
-            <a:off x="566928" y="3246120"/>
-            <a:ext cx="10058400" cy="365760"/>
+              <a:rPr lang="en-US" sz="850" dirty="0">
+                <a:solidFill>
+                  <a:srgbClr val="9AA8B4"/>
+                </a:solidFill>
+                <a:latin typeface="Calibri" pitchFamily="34" charset="0"/>
+                <a:ea typeface="Calibri" pitchFamily="34" charset="-122"/>
+                <a:cs typeface="Calibri" pitchFamily="34" charset="-120"/>
+              </a:rPr>
+              <a:t>Makassed General Hospital  ·  Department of Laboratory Medicine</a:t>
+            </a:r>
+            <a:endParaRPr lang="en-US" sz="850" dirty="0"/>
+          </a:p>
+        </p:txBody>
+      </p:sp>
+      <p:sp>
+        <p:nvSpPr>
+          <p:cNvPr id="11" name="Text 9"/>
+          <p:cNvSpPr/>
+          <p:nvPr/>
+        </p:nvSpPr>
+        <p:spPr>
+          <a:xfrm>
+            <a:off x="9814255" y="6473952"/>
+            <a:ext cx="1828800" cy="274320"/>
           </a:xfrm>
           <a:prstGeom prst="rect">
             <a:avLst/>
@@ -4284,60 +4740,49 @@
           <a:bodyPr wrap="square" lIns="0" tIns="0" rIns="0" bIns="0" rtlCol="0" anchor="ctr"/>
           <a:lstStyle/>
           <a:p>
-            <a:pPr algn="l" indent="0" marL="0">
-              <a:buNone/>
-            </a:pPr>
-            <a:r>
-              <a:rPr lang="en-US" sz="1300" b="1" spc="250" kern="0" dirty="0">
-                <a:solidFill>
-                  <a:srgbClr val="F2C9D9"/>
-                </a:solidFill>
-                <a:latin typeface="Calibri" pitchFamily="34" charset="0"/>
-                <a:ea typeface="Calibri" pitchFamily="34" charset="-122"/>
-                <a:cs typeface="Calibri" pitchFamily="34" charset="-120"/>
-              </a:rPr>
-              <a:t>PART THREE</a:t>
-            </a:r>
-            <a:endParaRPr lang="en-US" sz="1300" dirty="0"/>
-          </a:p>
-        </p:txBody>
-      </p:sp>
-      <p:sp>
-        <p:nvSpPr>
-          <p:cNvPr id="6" name="Text 4"/>
-          <p:cNvSpPr/>
-          <p:nvPr/>
-        </p:nvSpPr>
-        <p:spPr>
-          <a:xfrm>
-            <a:off x="566928" y="3611880"/>
-            <a:ext cx="10607040" cy="1463040"/>
-          </a:xfrm>
-          <a:prstGeom prst="rect">
-            <a:avLst/>
-          </a:prstGeom>
-          <a:noFill/>
-          <a:ln/>
-        </p:spPr>
-        <p:txBody>
-          <a:bodyPr wrap="square" lIns="0" tIns="0" rIns="0" bIns="0" rtlCol="0" anchor="t"/>
-          <a:lstStyle/>
-          <a:p>
-            <a:pPr algn="l" indent="0" marL="0">
-              <a:buNone/>
-            </a:pPr>
-            <a:r>
-              <a:rPr lang="en-US" sz="3800" b="1" dirty="0">
-                <a:solidFill>
-                  <a:srgbClr val="FFFFFF"/>
-                </a:solidFill>
-                <a:latin typeface="Calibri" pitchFamily="34" charset="0"/>
-                <a:ea typeface="Calibri" pitchFamily="34" charset="-122"/>
-                <a:cs typeface="Calibri" pitchFamily="34" charset="-120"/>
-              </a:rPr>
-              <a:t>Cases &amp; Board Review</a:t>
-            </a:r>
-            <a:endParaRPr lang="en-US" sz="3800" dirty="0"/>
+            <a:pPr algn="r" indent="0" marL="0">
+              <a:buNone/>
+            </a:pPr>
+            <a:r>
+              <a:rPr lang="en-US" sz="850" dirty="0">
+                <a:solidFill>
+                  <a:srgbClr val="9AA8B4"/>
+                </a:solidFill>
+                <a:latin typeface="Calibri" pitchFamily="34" charset="0"/>
+                <a:ea typeface="Calibri" pitchFamily="34" charset="-122"/>
+                <a:cs typeface="Calibri" pitchFamily="34" charset="-120"/>
+              </a:rPr>
+              <a:t>CP Lecture Series</a:t>
+            </a:r>
+            <a:pPr algn="r" indent="0" marL="0">
+              <a:buNone/>
+            </a:pPr>
+            <a:r>
+              <a:rPr lang="en-US" sz="850" dirty="0">
+                <a:solidFill>
+                  <a:srgbClr val="DCE4EC"/>
+                </a:solidFill>
+                <a:latin typeface="Calibri" pitchFamily="34" charset="0"/>
+                <a:ea typeface="Calibri" pitchFamily="34" charset="-122"/>
+                <a:cs typeface="Calibri" pitchFamily="34" charset="-120"/>
+              </a:rPr>
+              <a:t>   ·   </a:t>
+            </a:r>
+            <a:pPr algn="r" indent="0" marL="0">
+              <a:buNone/>
+            </a:pPr>
+            <a:r>
+              <a:rPr lang="en-US" sz="850" b="1" dirty="0">
+                <a:solidFill>
+                  <a:srgbClr val="00838F"/>
+                </a:solidFill>
+                <a:latin typeface="Calibri" pitchFamily="34" charset="0"/>
+                <a:ea typeface="Calibri" pitchFamily="34" charset="-122"/>
+                <a:cs typeface="Calibri" pitchFamily="34" charset="-120"/>
+              </a:rPr>
+              <a:t>10</a:t>
+            </a:r>
+            <a:endParaRPr lang="en-US" sz="850" dirty="0"/>
           </a:p>
         </p:txBody>
       </p:sp>
@@ -4406,7 +4851,7 @@
                 <a:ea typeface="Calibri" pitchFamily="34" charset="-122"/>
                 <a:cs typeface="Calibri" pitchFamily="34" charset="-120"/>
               </a:rPr>
-              <a:t>MOLECULAR &amp; CYTOGENETICS   ·   CASE 1</a:t>
+              <a:t>MOLECULAR &amp; CYTOGENETICS   ·   INTEGRATION</a:t>
             </a:r>
             <a:endParaRPr lang="en-US" sz="1100" dirty="0"/>
           </a:p>
@@ -4445,7 +4890,7 @@
                 <a:ea typeface="Calibri" pitchFamily="34" charset="-122"/>
                 <a:cs typeface="Calibri" pitchFamily="34" charset="-120"/>
               </a:rPr>
-              <a:t>Case 1</a:t>
+              <a:t>Putting It Together</a:t>
             </a:r>
             <a:endParaRPr lang="en-US" sz="3000" dirty="0"/>
           </a:p>
@@ -4460,11 +4905,11 @@
         <p:spPr>
           <a:xfrm>
             <a:off x="566928" y="1517904"/>
-            <a:ext cx="11057839" cy="2788920"/>
+            <a:ext cx="5346040" cy="4114800"/>
           </a:xfrm>
           <a:prstGeom prst="roundRect">
             <a:avLst>
-              <a:gd name="adj" fmla="val 2951"/>
+              <a:gd name="adj" fmla="val 2000"/>
             </a:avLst>
           </a:prstGeom>
           <a:solidFill>
@@ -4488,8 +4933,8 @@
         </p:nvSpPr>
         <p:spPr>
           <a:xfrm>
-            <a:off x="841248" y="1700784"/>
-            <a:ext cx="5486400" cy="292608"/>
+            <a:off x="804672" y="1682496"/>
+            <a:ext cx="4888840" cy="274320"/>
           </a:xfrm>
           <a:prstGeom prst="rect">
             <a:avLst/>
@@ -4505,17 +4950,17 @@
               <a:buNone/>
             </a:pPr>
             <a:r>
-              <a:rPr lang="en-US" sz="1100" b="1" spc="150" kern="0" dirty="0">
-                <a:solidFill>
-                  <a:srgbClr val="00838F"/>
-                </a:solidFill>
-                <a:latin typeface="Calibri" pitchFamily="34" charset="0"/>
-                <a:ea typeface="Calibri" pitchFamily="34" charset="-122"/>
-                <a:cs typeface="Calibri" pitchFamily="34" charset="-120"/>
-              </a:rPr>
-              <a:t>CLINICAL VIGNETTE</a:t>
-            </a:r>
-            <a:endParaRPr lang="en-US" sz="1100" dirty="0"/>
+              <a:rPr lang="en-US" sz="1200" b="1" spc="100" kern="0" dirty="0">
+                <a:solidFill>
+                  <a:srgbClr val="005A63"/>
+                </a:solidFill>
+                <a:latin typeface="Calibri" pitchFamily="34" charset="0"/>
+                <a:ea typeface="Calibri" pitchFamily="34" charset="-122"/>
+                <a:cs typeface="Calibri" pitchFamily="34" charset="-120"/>
+              </a:rPr>
+              <a:t>MULTIMODAL DIAGNOSIS</a:t>
+            </a:r>
+            <a:endParaRPr lang="en-US" sz="1200" dirty="0"/>
           </a:p>
         </p:txBody>
       </p:sp>
@@ -4527,8 +4972,8 @@
         </p:nvSpPr>
         <p:spPr>
           <a:xfrm>
-            <a:off x="841248" y="2029968"/>
-            <a:ext cx="10509199" cy="2148840"/>
+            <a:off x="804672" y="2029968"/>
+            <a:ext cx="4870552" cy="3474720"/>
           </a:xfrm>
           <a:prstGeom prst="rect">
             <a:avLst/>
@@ -4540,14 +4985,36 @@
           <a:bodyPr wrap="square" lIns="0" tIns="0" rIns="0" bIns="0" rtlCol="0" anchor="t"/>
           <a:lstStyle/>
           <a:p>
-            <a:pPr algn="l" indent="0" marL="0">
-              <a:lnSpc>
-                <a:spcPct val="108000"/>
-              </a:lnSpc>
-              <a:buNone/>
-            </a:pPr>
-            <a:r>
-              <a:rPr lang="en-US" sz="1450" dirty="0">
+            <a:pPr algn="l" marL="177800" indent="-177800">
+              <a:spcAft>
+                <a:spcPts val="900"/>
+              </a:spcAft>
+              <a:buSzPct val="100000"/>
+              <a:buChar char="•"/>
+            </a:pPr>
+            <a:r>
+              <a:rPr lang="en-US" sz="1250" b="1" dirty="0">
+                <a:solidFill>
+                  <a:srgbClr val="1B2A38"/>
+                </a:solidFill>
+                <a:latin typeface="Calibri" pitchFamily="34" charset="0"/>
+                <a:ea typeface="Calibri" pitchFamily="34" charset="-122"/>
+                <a:cs typeface="Calibri" pitchFamily="34" charset="-120"/>
+              </a:rPr>
+              <a:t>Morphology + flow cytometry + cytogenetics + molecular together define the diagnosis (WHO/ICC).</a:t>
+            </a:r>
+            <a:endParaRPr lang="en-US" sz="1250" dirty="0"/>
+          </a:p>
+          <a:p>
+            <a:pPr algn="l" marL="177800" indent="-177800">
+              <a:spcAft>
+                <a:spcPts val="900"/>
+              </a:spcAft>
+              <a:buSzPct val="100000"/>
+              <a:buChar char="•"/>
+            </a:pPr>
+            <a:r>
+              <a:rPr lang="en-US" sz="1250" dirty="0">
                 <a:solidFill>
                   <a:srgbClr val="33444F"/>
                 </a:solidFill>
@@ -4555,9 +5022,51 @@
                 <a:ea typeface="Calibri" pitchFamily="34" charset="-122"/>
                 <a:cs typeface="Calibri" pitchFamily="34" charset="-120"/>
               </a:rPr>
-              <a:t>A patient with new acute leukemia has promyelocytes with faggot cells and coagulopathy. The team needs rapid confirmation to start specific therapy.</a:t>
-            </a:r>
-            <a:endParaRPr lang="en-US" sz="1450" dirty="0"/>
+              <a:t>No single modality is sufficient.</a:t>
+            </a:r>
+            <a:endParaRPr lang="en-US" sz="1250" dirty="0"/>
+          </a:p>
+          <a:p>
+            <a:pPr algn="l" marL="177800" indent="-177800">
+              <a:spcAft>
+                <a:spcPts val="900"/>
+              </a:spcAft>
+              <a:buSzPct val="100000"/>
+              <a:buChar char="•"/>
+            </a:pPr>
+            <a:r>
+              <a:rPr lang="en-US" sz="1250" dirty="0">
+                <a:solidFill>
+                  <a:srgbClr val="33444F"/>
+                </a:solidFill>
+                <a:latin typeface="Calibri" pitchFamily="34" charset="0"/>
+                <a:ea typeface="Calibri" pitchFamily="34" charset="-122"/>
+                <a:cs typeface="Calibri" pitchFamily="34" charset="-120"/>
+              </a:rPr>
+              <a:t>Discordances prompt review.</a:t>
+            </a:r>
+            <a:endParaRPr lang="en-US" sz="1250" dirty="0"/>
+          </a:p>
+          <a:p>
+            <a:pPr algn="l" marL="177800" indent="-177800">
+              <a:spcAft>
+                <a:spcPts val="900"/>
+              </a:spcAft>
+              <a:buSzPct val="100000"/>
+              <a:buChar char="•"/>
+            </a:pPr>
+            <a:r>
+              <a:rPr lang="en-US" sz="1250" dirty="0">
+                <a:solidFill>
+                  <a:srgbClr val="33444F"/>
+                </a:solidFill>
+                <a:latin typeface="Calibri" pitchFamily="34" charset="0"/>
+                <a:ea typeface="Calibri" pitchFamily="34" charset="-122"/>
+                <a:cs typeface="Calibri" pitchFamily="34" charset="-120"/>
+              </a:rPr>
+              <a:t>Communicate an integrated interpretation.</a:t>
+            </a:r>
+            <a:endParaRPr lang="en-US" sz="1250" dirty="0"/>
           </a:p>
         </p:txBody>
       </p:sp>
@@ -4569,16 +5078,16 @@
         </p:nvSpPr>
         <p:spPr>
           <a:xfrm>
-            <a:off x="566928" y="4553712"/>
-            <a:ext cx="11057839" cy="1325880"/>
+            <a:off x="6278728" y="1517904"/>
+            <a:ext cx="5346040" cy="4114800"/>
           </a:xfrm>
           <a:prstGeom prst="roundRect">
             <a:avLst>
-              <a:gd name="adj" fmla="val 6207"/>
+              <a:gd name="adj" fmla="val 2000"/>
             </a:avLst>
           </a:prstGeom>
           <a:solidFill>
-            <a:srgbClr val="0E3A5F"/>
+            <a:srgbClr val="DDF0EF"/>
           </a:solidFill>
           <a:ln/>
           <a:effectLst>
@@ -4598,8 +5107,8 @@
         </p:nvSpPr>
         <p:spPr>
           <a:xfrm>
-            <a:off x="822960" y="4681728"/>
-            <a:ext cx="640080" cy="960120"/>
+            <a:off x="6516472" y="1682496"/>
+            <a:ext cx="4888840" cy="274320"/>
           </a:xfrm>
           <a:prstGeom prst="rect">
             <a:avLst/>
@@ -4611,21 +5120,21 @@
           <a:bodyPr wrap="square" lIns="0" tIns="0" rIns="0" bIns="0" rtlCol="0" anchor="ctr"/>
           <a:lstStyle/>
           <a:p>
-            <a:pPr algn="ctr" indent="0" marL="0">
-              <a:buNone/>
-            </a:pPr>
-            <a:r>
-              <a:rPr lang="en-US" sz="4000" b="1" dirty="0">
-                <a:solidFill>
-                  <a:srgbClr val="00838F"/>
-                </a:solidFill>
-                <a:latin typeface="Calibri" pitchFamily="34" charset="0"/>
-                <a:ea typeface="Calibri" pitchFamily="34" charset="-122"/>
-                <a:cs typeface="Calibri" pitchFamily="34" charset="-120"/>
-              </a:rPr>
-              <a:t>?</a:t>
-            </a:r>
-            <a:endParaRPr lang="en-US" sz="4000" dirty="0"/>
+            <a:pPr indent="0" marL="0">
+              <a:buNone/>
+            </a:pPr>
+            <a:r>
+              <a:rPr lang="en-US" sz="1200" b="1" spc="100" kern="0" dirty="0">
+                <a:solidFill>
+                  <a:srgbClr val="005A63"/>
+                </a:solidFill>
+                <a:latin typeface="Calibri" pitchFamily="34" charset="0"/>
+                <a:ea typeface="Calibri" pitchFamily="34" charset="-122"/>
+                <a:cs typeface="Calibri" pitchFamily="34" charset="-120"/>
+              </a:rPr>
+              <a:t>ACTIONABLE RESULTS</a:t>
+            </a:r>
+            <a:endParaRPr lang="en-US" sz="1200" dirty="0"/>
           </a:p>
         </p:txBody>
       </p:sp>
@@ -4637,34 +5146,101 @@
         </p:nvSpPr>
         <p:spPr>
           <a:xfrm>
-            <a:off x="1618488" y="4553712"/>
-            <a:ext cx="9686239" cy="1325880"/>
-          </a:xfrm>
-          <a:prstGeom prst="rect">
-            <a:avLst/>
-          </a:prstGeom>
-          <a:noFill/>
-          <a:ln/>
-        </p:spPr>
-        <p:txBody>
-          <a:bodyPr wrap="square" lIns="0" tIns="0" rIns="0" bIns="0" rtlCol="0" anchor="ctr"/>
-          <a:lstStyle/>
-          <a:p>
-            <a:pPr algn="l" indent="0" marL="0">
-              <a:buNone/>
-            </a:pPr>
-            <a:r>
-              <a:rPr lang="en-US" sz="1500" b="1" dirty="0">
-                <a:solidFill>
-                  <a:srgbClr val="FFFFFF"/>
-                </a:solidFill>
-                <a:latin typeface="Calibri" pitchFamily="34" charset="0"/>
-                <a:ea typeface="Calibri" pitchFamily="34" charset="-122"/>
-                <a:cs typeface="Calibri" pitchFamily="34" charset="-120"/>
-              </a:rPr>
-              <a:t>Which molecular/cytogenetic target is critical, and why urgently?</a:t>
-            </a:r>
-            <a:endParaRPr lang="en-US" sz="1500" dirty="0"/>
+            <a:off x="6516472" y="2029968"/>
+            <a:ext cx="4870552" cy="3474720"/>
+          </a:xfrm>
+          <a:prstGeom prst="rect">
+            <a:avLst/>
+          </a:prstGeom>
+          <a:noFill/>
+          <a:ln/>
+        </p:spPr>
+        <p:txBody>
+          <a:bodyPr wrap="square" lIns="0" tIns="0" rIns="0" bIns="0" rtlCol="0" anchor="t"/>
+          <a:lstStyle/>
+          <a:p>
+            <a:pPr algn="l" marL="177800" indent="-177800">
+              <a:spcAft>
+                <a:spcPts val="900"/>
+              </a:spcAft>
+              <a:buSzPct val="100000"/>
+              <a:buChar char="•"/>
+            </a:pPr>
+            <a:r>
+              <a:rPr lang="en-US" sz="1250" b="1" dirty="0">
+                <a:solidFill>
+                  <a:srgbClr val="1B2A38"/>
+                </a:solidFill>
+                <a:latin typeface="Calibri" pitchFamily="34" charset="0"/>
+                <a:ea typeface="Calibri" pitchFamily="34" charset="-122"/>
+                <a:cs typeface="Calibri" pitchFamily="34" charset="-120"/>
+              </a:rPr>
+              <a:t>Recognize emergencies (e.g., PML-RARA in APL) requiring immediate action.</a:t>
+            </a:r>
+            <a:endParaRPr lang="en-US" sz="1250" dirty="0"/>
+          </a:p>
+          <a:p>
+            <a:pPr algn="l" marL="177800" indent="-177800">
+              <a:spcAft>
+                <a:spcPts val="900"/>
+              </a:spcAft>
+              <a:buSzPct val="100000"/>
+              <a:buChar char="•"/>
+            </a:pPr>
+            <a:r>
+              <a:rPr lang="en-US" sz="1250" dirty="0">
+                <a:solidFill>
+                  <a:srgbClr val="33444F"/>
+                </a:solidFill>
+                <a:latin typeface="Calibri" pitchFamily="34" charset="0"/>
+                <a:ea typeface="Calibri" pitchFamily="34" charset="-122"/>
+                <a:cs typeface="Calibri" pitchFamily="34" charset="-120"/>
+              </a:rPr>
+              <a:t>Flag targetable lesions for therapy.</a:t>
+            </a:r>
+            <a:endParaRPr lang="en-US" sz="1250" dirty="0"/>
+          </a:p>
+          <a:p>
+            <a:pPr algn="l" marL="177800" indent="-177800">
+              <a:spcAft>
+                <a:spcPts val="900"/>
+              </a:spcAft>
+              <a:buSzPct val="100000"/>
+              <a:buChar char="•"/>
+            </a:pPr>
+            <a:r>
+              <a:rPr lang="en-US" sz="1250" dirty="0">
+                <a:solidFill>
+                  <a:srgbClr val="33444F"/>
+                </a:solidFill>
+                <a:latin typeface="Calibri" pitchFamily="34" charset="0"/>
+                <a:ea typeface="Calibri" pitchFamily="34" charset="-122"/>
+                <a:cs typeface="Calibri" pitchFamily="34" charset="-120"/>
+              </a:rPr>
+              <a:t>Provide risk classification for management.</a:t>
+            </a:r>
+            <a:endParaRPr lang="en-US" sz="1250" dirty="0"/>
+          </a:p>
+          <a:p>
+            <a:pPr algn="l" marL="177800" indent="-177800">
+              <a:spcAft>
+                <a:spcPts val="900"/>
+              </a:spcAft>
+              <a:buSzPct val="100000"/>
+              <a:buChar char="•"/>
+            </a:pPr>
+            <a:r>
+              <a:rPr lang="en-US" sz="1250" dirty="0">
+                <a:solidFill>
+                  <a:srgbClr val="33444F"/>
+                </a:solidFill>
+                <a:latin typeface="Calibri" pitchFamily="34" charset="0"/>
+                <a:ea typeface="Calibri" pitchFamily="34" charset="-122"/>
+                <a:cs typeface="Calibri" pitchFamily="34" charset="-120"/>
+              </a:rPr>
+              <a:t>Ensure timely critical communication.</a:t>
+            </a:r>
+            <a:endParaRPr lang="en-US" sz="1250" dirty="0"/>
           </a:p>
         </p:txBody>
       </p:sp>
@@ -4768,7 +5344,7 @@
                 <a:ea typeface="Calibri" pitchFamily="34" charset="-122"/>
                 <a:cs typeface="Calibri" pitchFamily="34" charset="-120"/>
               </a:rPr>
-              <a:t>10</a:t>
+              <a:t>11</a:t>
             </a:r>
             <a:endParaRPr lang="en-US" sz="850" dirty="0"/>
           </a:p>
@@ -4788,7 +5364,7 @@
     <p:bg>
       <p:bgPr>
         <a:solidFill>
-          <a:srgbClr val="FFFFFF"/>
+          <a:srgbClr val="005A63"/>
         </a:solidFill>
       </p:bgPr>
     </p:bg>
@@ -4808,14 +5384,58 @@
       </p:grpSpPr>
       <p:sp>
         <p:nvSpPr>
-          <p:cNvPr id="2" name="Text 0"/>
-          <p:cNvSpPr/>
-          <p:nvPr/>
-        </p:nvSpPr>
-        <p:spPr>
-          <a:xfrm>
-            <a:off x="566928" y="329184"/>
-            <a:ext cx="10515600" cy="310896"/>
+          <p:cNvPr id="2" name="Shape 0"/>
+          <p:cNvSpPr/>
+          <p:nvPr/>
+        </p:nvSpPr>
+        <p:spPr>
+          <a:xfrm>
+            <a:off x="9509760" y="-1280160"/>
+            <a:ext cx="4754880" cy="4754880"/>
+          </a:xfrm>
+          <a:prstGeom prst="ellipse">
+            <a:avLst/>
+          </a:prstGeom>
+          <a:solidFill>
+            <a:srgbClr val="FFFFFF">
+              <a:alpha val="8000"/>
+            </a:srgbClr>
+          </a:solidFill>
+          <a:ln/>
+        </p:spPr>
+      </p:sp>
+      <p:sp>
+        <p:nvSpPr>
+          <p:cNvPr id="3" name="Shape 1"/>
+          <p:cNvSpPr/>
+          <p:nvPr/>
+        </p:nvSpPr>
+        <p:spPr>
+          <a:xfrm>
+            <a:off x="10607040" y="3931920"/>
+            <a:ext cx="3108960" cy="3108960"/>
+          </a:xfrm>
+          <a:prstGeom prst="ellipse">
+            <a:avLst/>
+          </a:prstGeom>
+          <a:solidFill>
+            <a:srgbClr val="FFFFFF">
+              <a:alpha val="6000"/>
+            </a:srgbClr>
+          </a:solidFill>
+          <a:ln/>
+        </p:spPr>
+      </p:sp>
+      <p:sp>
+        <p:nvSpPr>
+          <p:cNvPr id="4" name="Text 2"/>
+          <p:cNvSpPr/>
+          <p:nvPr/>
+        </p:nvSpPr>
+        <p:spPr>
+          <a:xfrm>
+            <a:off x="566928" y="1783080"/>
+            <a:ext cx="2743200" cy="1463040"/>
           </a:xfrm>
           <a:prstGeom prst="rect">
             <a:avLst/>
@@ -4831,30 +5451,30 @@
               <a:buNone/>
             </a:pPr>
             <a:r>
-              <a:rPr lang="en-US" sz="1100" b="1" spc="150" kern="0" dirty="0">
-                <a:solidFill>
-                  <a:srgbClr val="00838F"/>
-                </a:solidFill>
-                <a:latin typeface="Calibri" pitchFamily="34" charset="0"/>
-                <a:ea typeface="Calibri" pitchFamily="34" charset="-122"/>
-                <a:cs typeface="Calibri" pitchFamily="34" charset="-120"/>
-              </a:rPr>
-              <a:t>MOLECULAR &amp; CYTOGENETICS   ·   CASE 1  ·  RESOLUTION</a:t>
-            </a:r>
-            <a:endParaRPr lang="en-US" sz="1100" dirty="0"/>
-          </a:p>
-        </p:txBody>
-      </p:sp>
-      <p:sp>
-        <p:nvSpPr>
-          <p:cNvPr id="3" name="Text 1"/>
-          <p:cNvSpPr/>
-          <p:nvPr/>
-        </p:nvSpPr>
-        <p:spPr>
-          <a:xfrm>
-            <a:off x="566928" y="713232"/>
-            <a:ext cx="11064240" cy="749808"/>
+              <a:rPr lang="en-US" sz="6400" b="1" dirty="0">
+                <a:solidFill>
+                  <a:srgbClr val="E0F2F4"/>
+                </a:solidFill>
+                <a:latin typeface="Calibri" pitchFamily="34" charset="0"/>
+                <a:ea typeface="Calibri" pitchFamily="34" charset="-122"/>
+                <a:cs typeface="Calibri" pitchFamily="34" charset="-120"/>
+              </a:rPr>
+              <a:t>03</a:t>
+            </a:r>
+            <a:endParaRPr lang="en-US" sz="6400" dirty="0"/>
+          </a:p>
+        </p:txBody>
+      </p:sp>
+      <p:sp>
+        <p:nvSpPr>
+          <p:cNvPr id="5" name="Text 3"/>
+          <p:cNvSpPr/>
+          <p:nvPr/>
+        </p:nvSpPr>
+        <p:spPr>
+          <a:xfrm>
+            <a:off x="566928" y="3246120"/>
+            <a:ext cx="10058400" cy="365760"/>
           </a:xfrm>
           <a:prstGeom prst="rect">
             <a:avLst/>
@@ -4870,30 +5490,30 @@
               <a:buNone/>
             </a:pPr>
             <a:r>
-              <a:rPr lang="en-US" sz="3000" b="1" dirty="0">
-                <a:solidFill>
-                  <a:srgbClr val="0E3A5F"/>
-                </a:solidFill>
-                <a:latin typeface="Calibri" pitchFamily="34" charset="0"/>
-                <a:ea typeface="Calibri" pitchFamily="34" charset="-122"/>
-                <a:cs typeface="Calibri" pitchFamily="34" charset="-120"/>
-              </a:rPr>
-              <a:t>Case 1: PML-RARA in APL</a:t>
-            </a:r>
-            <a:endParaRPr lang="en-US" sz="3000" dirty="0"/>
-          </a:p>
-        </p:txBody>
-      </p:sp>
-      <p:sp>
-        <p:nvSpPr>
-          <p:cNvPr id="4" name="Text 2"/>
-          <p:cNvSpPr/>
-          <p:nvPr/>
-        </p:nvSpPr>
-        <p:spPr>
-          <a:xfrm>
-            <a:off x="566928" y="1554480"/>
-            <a:ext cx="6413547" cy="4023360"/>
+              <a:rPr lang="en-US" sz="1300" b="1" spc="250" kern="0" dirty="0">
+                <a:solidFill>
+                  <a:srgbClr val="F2C9D9"/>
+                </a:solidFill>
+                <a:latin typeface="Calibri" pitchFamily="34" charset="0"/>
+                <a:ea typeface="Calibri" pitchFamily="34" charset="-122"/>
+                <a:cs typeface="Calibri" pitchFamily="34" charset="-120"/>
+              </a:rPr>
+              <a:t>PART THREE</a:t>
+            </a:r>
+            <a:endParaRPr lang="en-US" sz="1300" dirty="0"/>
+          </a:p>
+        </p:txBody>
+      </p:sp>
+      <p:sp>
+        <p:nvSpPr>
+          <p:cNvPr id="6" name="Text 4"/>
+          <p:cNvSpPr/>
+          <p:nvPr/>
+        </p:nvSpPr>
+        <p:spPr>
+          <a:xfrm>
+            <a:off x="566928" y="3611880"/>
+            <a:ext cx="10607040" cy="1463040"/>
           </a:xfrm>
           <a:prstGeom prst="rect">
             <a:avLst/>
@@ -4905,304 +5525,21 @@
           <a:bodyPr wrap="square" lIns="0" tIns="0" rIns="0" bIns="0" rtlCol="0" anchor="t"/>
           <a:lstStyle/>
           <a:p>
-            <a:pPr algn="l" marL="177800" indent="-177800">
-              <a:spcAft>
-                <a:spcPts val="900"/>
-              </a:spcAft>
-              <a:buSzPct val="100000"/>
-              <a:buChar char="•"/>
-            </a:pPr>
-            <a:r>
-              <a:rPr lang="en-US" sz="1400" b="1" dirty="0">
-                <a:solidFill>
-                  <a:srgbClr val="1B2A38"/>
-                </a:solidFill>
-                <a:latin typeface="Calibri" pitchFamily="34" charset="0"/>
-                <a:ea typeface="Calibri" pitchFamily="34" charset="-122"/>
-                <a:cs typeface="Calibri" pitchFamily="34" charset="-120"/>
-              </a:rPr>
-              <a:t>Confirm PML-RARA / t(15;17) urgently — acute promyelocytic leukemia is an emergency.</a:t>
-            </a:r>
-            <a:endParaRPr lang="en-US" sz="1400" dirty="0"/>
-          </a:p>
-          <a:p>
-            <a:pPr algn="l" marL="177800" indent="-177800">
-              <a:spcAft>
-                <a:spcPts val="900"/>
-              </a:spcAft>
-              <a:buSzPct val="100000"/>
-              <a:buChar char="•"/>
-            </a:pPr>
-            <a:r>
-              <a:rPr lang="en-US" sz="1400" dirty="0">
-                <a:solidFill>
-                  <a:srgbClr val="33444F"/>
-                </a:solidFill>
-                <a:latin typeface="Calibri" pitchFamily="34" charset="0"/>
-                <a:ea typeface="Calibri" pitchFamily="34" charset="-122"/>
-                <a:cs typeface="Calibri" pitchFamily="34" charset="-120"/>
-              </a:rPr>
-              <a:t>Early death is from hemorrhage (DIC); rapid confirmation supports time-critical therapy.</a:t>
-            </a:r>
-            <a:endParaRPr lang="en-US" sz="1400" dirty="0"/>
-          </a:p>
-          <a:p>
-            <a:pPr algn="l" marL="177800" indent="-177800">
-              <a:spcAft>
-                <a:spcPts val="900"/>
-              </a:spcAft>
-              <a:buSzPct val="100000"/>
-              <a:buChar char="•"/>
-            </a:pPr>
-            <a:r>
-              <a:rPr lang="en-US" sz="1400" dirty="0">
-                <a:solidFill>
-                  <a:srgbClr val="33444F"/>
-                </a:solidFill>
-                <a:latin typeface="Calibri" pitchFamily="34" charset="0"/>
-                <a:ea typeface="Calibri" pitchFamily="34" charset="-122"/>
-                <a:cs typeface="Calibri" pitchFamily="34" charset="-120"/>
-              </a:rPr>
-              <a:t>Use FISH/RT-PCR for speed; karyotype confirms t(15;17).</a:t>
-            </a:r>
-            <a:endParaRPr lang="en-US" sz="1400" dirty="0"/>
-          </a:p>
-          <a:p>
-            <a:pPr algn="l" marL="177800" indent="-177800">
-              <a:spcAft>
-                <a:spcPts val="900"/>
-              </a:spcAft>
-              <a:buSzPct val="100000"/>
-              <a:buChar char="•"/>
-            </a:pPr>
-            <a:r>
-              <a:rPr lang="en-US" sz="1400" dirty="0">
-                <a:solidFill>
-                  <a:srgbClr val="33444F"/>
-                </a:solidFill>
-                <a:latin typeface="Calibri" pitchFamily="34" charset="0"/>
-                <a:ea typeface="Calibri" pitchFamily="34" charset="-122"/>
-                <a:cs typeface="Calibri" pitchFamily="34" charset="-120"/>
-              </a:rPr>
-              <a:t>Integrate with morphology and coagulation findings.</a:t>
-            </a:r>
-            <a:endParaRPr lang="en-US" sz="1400" dirty="0"/>
-          </a:p>
-        </p:txBody>
-      </p:sp>
-      <p:sp>
-        <p:nvSpPr>
-          <p:cNvPr id="5" name="Shape 3"/>
-          <p:cNvSpPr/>
-          <p:nvPr/>
-        </p:nvSpPr>
-        <p:spPr>
-          <a:xfrm>
-            <a:off x="7422788" y="1554480"/>
-            <a:ext cx="4201979" cy="3977640"/>
-          </a:xfrm>
-          <a:prstGeom prst="roundRect">
-            <a:avLst>
-              <a:gd name="adj" fmla="val 2069"/>
-            </a:avLst>
-          </a:prstGeom>
-          <a:solidFill>
-            <a:srgbClr val="E0F2F4"/>
-          </a:solidFill>
-          <a:ln/>
-          <a:effectLst>
-            <a:outerShdw sx="100000" sy="100000" kx="0" ky="0" algn="bl" rotWithShape="0" blurRad="88900" dist="25400" dir="5400000">
-              <a:srgbClr val="22303C">
-                <a:alpha val="12000"/>
-              </a:srgbClr>
-            </a:outerShdw>
-          </a:effectLst>
-        </p:spPr>
-      </p:sp>
-      <p:sp>
-        <p:nvSpPr>
-          <p:cNvPr id="6" name="Text 4"/>
-          <p:cNvSpPr/>
-          <p:nvPr/>
-        </p:nvSpPr>
-        <p:spPr>
-          <a:xfrm>
-            <a:off x="7660532" y="1755648"/>
-            <a:ext cx="3744779" cy="310896"/>
-          </a:xfrm>
-          <a:prstGeom prst="rect">
-            <a:avLst/>
-          </a:prstGeom>
-          <a:noFill/>
-          <a:ln/>
-        </p:spPr>
-        <p:txBody>
-          <a:bodyPr wrap="square" lIns="0" tIns="0" rIns="0" bIns="0" rtlCol="0" anchor="ctr"/>
-          <a:lstStyle/>
-          <a:p>
-            <a:pPr indent="0" marL="0">
-              <a:buNone/>
-            </a:pPr>
-            <a:r>
-              <a:rPr lang="en-US" sz="1100" b="1" spc="140" kern="0" dirty="0">
-                <a:solidFill>
-                  <a:srgbClr val="00838F"/>
-                </a:solidFill>
-                <a:latin typeface="Calibri" pitchFamily="34" charset="0"/>
-                <a:ea typeface="Calibri" pitchFamily="34" charset="-122"/>
-                <a:cs typeface="Calibri" pitchFamily="34" charset="-120"/>
-              </a:rPr>
-              <a:t>TEACHING POINT</a:t>
-            </a:r>
-            <a:endParaRPr lang="en-US" sz="1100" dirty="0"/>
-          </a:p>
-        </p:txBody>
-      </p:sp>
-      <p:sp>
-        <p:nvSpPr>
-          <p:cNvPr id="7" name="Text 5"/>
-          <p:cNvSpPr/>
-          <p:nvPr/>
-        </p:nvSpPr>
-        <p:spPr>
-          <a:xfrm>
-            <a:off x="7660532" y="2121408"/>
-            <a:ext cx="3726491" cy="3291840"/>
-          </a:xfrm>
-          <a:prstGeom prst="rect">
-            <a:avLst/>
-          </a:prstGeom>
-          <a:noFill/>
-          <a:ln/>
-        </p:spPr>
-        <p:txBody>
-          <a:bodyPr wrap="square" lIns="0" tIns="0" rIns="0" bIns="0" rtlCol="0" anchor="t"/>
-          <a:lstStyle/>
-          <a:p>
             <a:pPr algn="l" indent="0" marL="0">
-              <a:lnSpc>
-                <a:spcPct val="110000"/>
-              </a:lnSpc>
-              <a:buNone/>
-            </a:pPr>
-            <a:r>
-              <a:rPr lang="en-US" sz="1350" dirty="0">
-                <a:solidFill>
-                  <a:srgbClr val="33444F"/>
-                </a:solidFill>
-                <a:latin typeface="Calibri" pitchFamily="34" charset="0"/>
-                <a:ea typeface="Calibri" pitchFamily="34" charset="-122"/>
-                <a:cs typeface="Calibri" pitchFamily="34" charset="-120"/>
-              </a:rPr>
-              <a:t>Suspected APL is a molecular emergency: expedite PML-RARA confirmation while supporting the coagulopathy.</a:t>
-            </a:r>
-            <a:endParaRPr lang="en-US" sz="1350" dirty="0"/>
-          </a:p>
-        </p:txBody>
-      </p:sp>
-      <p:sp>
-        <p:nvSpPr>
-          <p:cNvPr id="8" name="Text 6"/>
-          <p:cNvSpPr/>
-          <p:nvPr/>
-        </p:nvSpPr>
-        <p:spPr>
-          <a:xfrm>
-            <a:off x="566928" y="6473952"/>
-            <a:ext cx="7772400" cy="274320"/>
-          </a:xfrm>
-          <a:prstGeom prst="rect">
-            <a:avLst/>
-          </a:prstGeom>
-          <a:noFill/>
-          <a:ln/>
-        </p:spPr>
-        <p:txBody>
-          <a:bodyPr wrap="square" lIns="0" tIns="0" rIns="0" bIns="0" rtlCol="0" anchor="ctr"/>
-          <a:lstStyle/>
-          <a:p>
-            <a:pPr algn="l" indent="0" marL="0">
-              <a:buNone/>
-            </a:pPr>
-            <a:r>
-              <a:rPr lang="en-US" sz="850" dirty="0">
-                <a:solidFill>
-                  <a:srgbClr val="9AA8B4"/>
-                </a:solidFill>
-                <a:latin typeface="Calibri" pitchFamily="34" charset="0"/>
-                <a:ea typeface="Calibri" pitchFamily="34" charset="-122"/>
-                <a:cs typeface="Calibri" pitchFamily="34" charset="-120"/>
-              </a:rPr>
-              <a:t>Makassed General Hospital  ·  Department of Laboratory Medicine</a:t>
-            </a:r>
-            <a:endParaRPr lang="en-US" sz="850" dirty="0"/>
-          </a:p>
-        </p:txBody>
-      </p:sp>
-      <p:sp>
-        <p:nvSpPr>
-          <p:cNvPr id="9" name="Text 7"/>
-          <p:cNvSpPr/>
-          <p:nvPr/>
-        </p:nvSpPr>
-        <p:spPr>
-          <a:xfrm>
-            <a:off x="9814255" y="6473952"/>
-            <a:ext cx="1828800" cy="274320"/>
-          </a:xfrm>
-          <a:prstGeom prst="rect">
-            <a:avLst/>
-          </a:prstGeom>
-          <a:noFill/>
-          <a:ln/>
-        </p:spPr>
-        <p:txBody>
-          <a:bodyPr wrap="square" lIns="0" tIns="0" rIns="0" bIns="0" rtlCol="0" anchor="ctr"/>
-          <a:lstStyle/>
-          <a:p>
-            <a:pPr algn="r" indent="0" marL="0">
-              <a:buNone/>
-            </a:pPr>
-            <a:r>
-              <a:rPr lang="en-US" sz="850" dirty="0">
-                <a:solidFill>
-                  <a:srgbClr val="9AA8B4"/>
-                </a:solidFill>
-                <a:latin typeface="Calibri" pitchFamily="34" charset="0"/>
-                <a:ea typeface="Calibri" pitchFamily="34" charset="-122"/>
-                <a:cs typeface="Calibri" pitchFamily="34" charset="-120"/>
-              </a:rPr>
-              <a:t>CP Lecture Series</a:t>
-            </a:r>
-            <a:pPr algn="r" indent="0" marL="0">
-              <a:buNone/>
-            </a:pPr>
-            <a:r>
-              <a:rPr lang="en-US" sz="850" dirty="0">
-                <a:solidFill>
-                  <a:srgbClr val="DCE4EC"/>
-                </a:solidFill>
-                <a:latin typeface="Calibri" pitchFamily="34" charset="0"/>
-                <a:ea typeface="Calibri" pitchFamily="34" charset="-122"/>
-                <a:cs typeface="Calibri" pitchFamily="34" charset="-120"/>
-              </a:rPr>
-              <a:t>   ·   </a:t>
-            </a:r>
-            <a:pPr algn="r" indent="0" marL="0">
-              <a:buNone/>
-            </a:pPr>
-            <a:r>
-              <a:rPr lang="en-US" sz="850" b="1" dirty="0">
-                <a:solidFill>
-                  <a:srgbClr val="00838F"/>
-                </a:solidFill>
-                <a:latin typeface="Calibri" pitchFamily="34" charset="0"/>
-                <a:ea typeface="Calibri" pitchFamily="34" charset="-122"/>
-                <a:cs typeface="Calibri" pitchFamily="34" charset="-120"/>
-              </a:rPr>
-              <a:t>11</a:t>
-            </a:r>
-            <a:endParaRPr lang="en-US" sz="850" dirty="0"/>
+              <a:buNone/>
+            </a:pPr>
+            <a:r>
+              <a:rPr lang="en-US" sz="3800" b="1" dirty="0">
+                <a:solidFill>
+                  <a:srgbClr val="FFFFFF"/>
+                </a:solidFill>
+                <a:latin typeface="Calibri" pitchFamily="34" charset="0"/>
+                <a:ea typeface="Calibri" pitchFamily="34" charset="-122"/>
+                <a:cs typeface="Calibri" pitchFamily="34" charset="-120"/>
+              </a:rPr>
+              <a:t>Cases &amp; Board Review</a:t>
+            </a:r>
+            <a:endParaRPr lang="en-US" sz="3800" dirty="0"/>
           </a:p>
         </p:txBody>
       </p:sp>
@@ -5271,7 +5608,7 @@
                 <a:ea typeface="Calibri" pitchFamily="34" charset="-122"/>
                 <a:cs typeface="Calibri" pitchFamily="34" charset="-120"/>
               </a:rPr>
-              <a:t>MOLECULAR &amp; CYTOGENETICS   ·   CASE 2</a:t>
+              <a:t>MOLECULAR &amp; CYTOGENETICS   ·   CASE 1</a:t>
             </a:r>
             <a:endParaRPr lang="en-US" sz="1100" dirty="0"/>
           </a:p>
@@ -5310,7 +5647,7 @@
                 <a:ea typeface="Calibri" pitchFamily="34" charset="-122"/>
                 <a:cs typeface="Calibri" pitchFamily="34" charset="-120"/>
               </a:rPr>
-              <a:t>Case 2</a:t>
+              <a:t>Case 1</a:t>
             </a:r>
             <a:endParaRPr lang="en-US" sz="3000" dirty="0"/>
           </a:p>
@@ -5420,7 +5757,7 @@
                 <a:ea typeface="Calibri" pitchFamily="34" charset="-122"/>
                 <a:cs typeface="Calibri" pitchFamily="34" charset="-120"/>
               </a:rPr>
-              <a:t>A CML patient in apparent remission has rising quantitative BCR-ABL1 transcript levels on serial International-Scale monitoring.</a:t>
+              <a:t>A patient with leukocytosis and basophilia has a Philadelphia chromosome; RT-PCR confirms BCR-ABL1.</a:t>
             </a:r>
             <a:endParaRPr lang="en-US" sz="1450" dirty="0"/>
           </a:p>
@@ -5527,7 +5864,7 @@
                 <a:ea typeface="Calibri" pitchFamily="34" charset="-122"/>
                 <a:cs typeface="Calibri" pitchFamily="34" charset="-120"/>
               </a:rPr>
-              <a:t>What does this indicate and how should it be acted on?</a:t>
+              <a:t>What is the diagnosis and how is the lab used going forward?</a:t>
             </a:r>
             <a:endParaRPr lang="en-US" sz="1500" dirty="0"/>
           </a:p>
@@ -5704,7 +6041,7 @@
                 <a:ea typeface="Calibri" pitchFamily="34" charset="-122"/>
                 <a:cs typeface="Calibri" pitchFamily="34" charset="-120"/>
               </a:rPr>
-              <a:t>MOLECULAR &amp; CYTOGENETICS   ·   CASE 2  ·  RESOLUTION</a:t>
+              <a:t>MOLECULAR &amp; CYTOGENETICS   ·   CASE 1  ·  RESOLUTION</a:t>
             </a:r>
             <a:endParaRPr lang="en-US" sz="1100" dirty="0"/>
           </a:p>
@@ -5743,7 +6080,7 @@
                 <a:ea typeface="Calibri" pitchFamily="34" charset="-122"/>
                 <a:cs typeface="Calibri" pitchFamily="34" charset="-120"/>
               </a:rPr>
-              <a:t>Case 2: Rising MRD in CML</a:t>
+              <a:t>Case 1: CML and Monitoring</a:t>
             </a:r>
             <a:endParaRPr lang="en-US" sz="3000" dirty="0"/>
           </a:p>
@@ -5786,7 +6123,7 @@
                 <a:ea typeface="Calibri" pitchFamily="34" charset="-122"/>
                 <a:cs typeface="Calibri" pitchFamily="34" charset="-120"/>
               </a:rPr>
-              <a:t>A confirmed rise in BCR-ABL1 transcript signals loss of molecular response / possible resistance.</a:t>
+              <a:t>BCR-ABL1 with a compatible picture establishes CML.</a:t>
             </a:r>
             <a:endParaRPr lang="en-US" sz="1400" dirty="0"/>
           </a:p>
@@ -5807,7 +6144,7 @@
                 <a:ea typeface="Calibri" pitchFamily="34" charset="-122"/>
                 <a:cs typeface="Calibri" pitchFamily="34" charset="-120"/>
               </a:rPr>
-              <a:t>Prompts adherence assessment and kinase-domain mutation testing.</a:t>
+              <a:t>Quantitative BCR-ABL1 (International Scale) monitors response to tyrosine-kinase inhibitors.</a:t>
             </a:r>
             <a:endParaRPr lang="en-US" sz="1400" dirty="0"/>
           </a:p>
@@ -5828,7 +6165,7 @@
                 <a:ea typeface="Calibri" pitchFamily="34" charset="-122"/>
                 <a:cs typeface="Calibri" pitchFamily="34" charset="-120"/>
               </a:rPr>
-              <a:t>May lead to a change in tyrosine kinase inhibitor.</a:t>
+              <a:t>Failure to reach milestones or rising transcripts prompts resistance/mutation testing.</a:t>
             </a:r>
             <a:endParaRPr lang="en-US" sz="1400" dirty="0"/>
           </a:p>
@@ -5849,7 +6186,7 @@
                 <a:ea typeface="Calibri" pitchFamily="34" charset="-122"/>
                 <a:cs typeface="Calibri" pitchFamily="34" charset="-120"/>
               </a:rPr>
-              <a:t>Trend on a consistent assay and the International Scale.</a:t>
+              <a:t>The lab supports diagnosis, monitoring, and resistance evaluation.</a:t>
             </a:r>
             <a:endParaRPr lang="en-US" sz="1400" dirty="0"/>
           </a:p>
@@ -5959,7 +6296,7 @@
                 <a:ea typeface="Calibri" pitchFamily="34" charset="-122"/>
                 <a:cs typeface="Calibri" pitchFamily="34" charset="-120"/>
               </a:rPr>
-              <a:t>MRD is followed as a trend; a confirmed rise in BCR-ABL1 triggers resistance evaluation and possible therapy change.</a:t>
+              <a:t>In CML the laboratory both diagnoses (BCR-ABL1) and monitors response quantitatively on the International Scale.</a:t>
             </a:r>
             <a:endParaRPr lang="en-US" sz="1350" dirty="0"/>
           </a:p>
@@ -6136,7 +6473,7 @@
                 <a:ea typeface="Calibri" pitchFamily="34" charset="-122"/>
                 <a:cs typeface="Calibri" pitchFamily="34" charset="-120"/>
               </a:rPr>
-              <a:t>MOLECULAR &amp; CYTOGENETICS   ·   BOARD REVIEW  ·  Q1</a:t>
+              <a:t>MOLECULAR &amp; CYTOGENETICS   ·   CASE 2</a:t>
             </a:r>
             <a:endParaRPr lang="en-US" sz="1100" dirty="0"/>
           </a:p>
@@ -6167,7 +6504,7 @@
               <a:buNone/>
             </a:pPr>
             <a:r>
-              <a:rPr lang="en-US" sz="2600" b="1" dirty="0">
+              <a:rPr lang="en-US" sz="3000" b="1" dirty="0">
                 <a:solidFill>
                   <a:srgbClr val="0E3A5F"/>
                 </a:solidFill>
@@ -6175,190 +6512,26 @@
                 <a:ea typeface="Calibri" pitchFamily="34" charset="-122"/>
                 <a:cs typeface="Calibri" pitchFamily="34" charset="-120"/>
               </a:rPr>
-              <a:t>Board-Style Review</a:t>
-            </a:r>
-            <a:endParaRPr lang="en-US" sz="2600" dirty="0"/>
-          </a:p>
-        </p:txBody>
-      </p:sp>
-      <p:sp>
-        <p:nvSpPr>
-          <p:cNvPr id="4" name="Text 2"/>
-          <p:cNvSpPr/>
-          <p:nvPr/>
-        </p:nvSpPr>
-        <p:spPr>
-          <a:xfrm>
-            <a:off x="566928" y="1417320"/>
-            <a:ext cx="11057839" cy="914400"/>
-          </a:xfrm>
-          <a:prstGeom prst="rect">
-            <a:avLst/>
-          </a:prstGeom>
-          <a:noFill/>
-          <a:ln/>
-        </p:spPr>
-        <p:txBody>
-          <a:bodyPr wrap="square" lIns="0" tIns="0" rIns="0" bIns="0" rtlCol="0" anchor="t"/>
-          <a:lstStyle/>
-          <a:p>
-            <a:pPr algn="l" indent="0" marL="0">
-              <a:lnSpc>
-                <a:spcPct val="105000"/>
-              </a:lnSpc>
-              <a:buNone/>
-            </a:pPr>
-            <a:r>
-              <a:rPr lang="en-US" sz="1450" b="1" dirty="0">
-                <a:solidFill>
-                  <a:srgbClr val="1B2A38"/>
-                </a:solidFill>
-                <a:latin typeface="Calibri" pitchFamily="34" charset="0"/>
-                <a:ea typeface="Calibri" pitchFamily="34" charset="-122"/>
-                <a:cs typeface="Calibri" pitchFamily="34" charset="-120"/>
-              </a:rPr>
-              <a:t>A clonal IGH gene rearrangement on PCR indicates:</a:t>
-            </a:r>
-            <a:endParaRPr lang="en-US" sz="1450" dirty="0"/>
-          </a:p>
-        </p:txBody>
-      </p:sp>
-      <p:sp>
-        <p:nvSpPr>
-          <p:cNvPr id="5" name="Text 3"/>
-          <p:cNvSpPr/>
-          <p:nvPr/>
-        </p:nvSpPr>
-        <p:spPr>
-          <a:xfrm>
-            <a:off x="658368" y="2395728"/>
-            <a:ext cx="6192390" cy="3017520"/>
-          </a:xfrm>
-          <a:prstGeom prst="rect">
-            <a:avLst/>
-          </a:prstGeom>
-          <a:noFill/>
-          <a:ln/>
-        </p:spPr>
-        <p:txBody>
-          <a:bodyPr wrap="square" lIns="0" tIns="0" rIns="0" bIns="0" rtlCol="0" anchor="t"/>
-          <a:lstStyle/>
-          <a:p>
-            <a:pPr algn="l" indent="0" marL="0">
-              <a:spcAft>
-                <a:spcPts val="600"/>
-              </a:spcAft>
-              <a:buNone/>
-            </a:pPr>
-            <a:r>
-              <a:rPr lang="en-US" sz="1350" dirty="0">
-                <a:solidFill>
-                  <a:srgbClr val="33444F"/>
-                </a:solidFill>
-                <a:latin typeface="Calibri" pitchFamily="34" charset="0"/>
-                <a:ea typeface="Calibri" pitchFamily="34" charset="-122"/>
-                <a:cs typeface="Calibri" pitchFamily="34" charset="-120"/>
-              </a:rPr>
-              <a:t>A. Definite malignancy</a:t>
-            </a:r>
-            <a:endParaRPr lang="en-US" sz="1350" dirty="0"/>
-          </a:p>
-          <a:p>
-            <a:pPr algn="l" indent="0" marL="0">
-              <a:spcAft>
-                <a:spcPts val="600"/>
-              </a:spcAft>
-              <a:buNone/>
-            </a:pPr>
-            <a:r>
-              <a:rPr lang="en-US" sz="1350" b="1" dirty="0">
-                <a:solidFill>
-                  <a:srgbClr val="005A63"/>
-                </a:solidFill>
-                <a:latin typeface="Calibri" pitchFamily="34" charset="0"/>
-                <a:ea typeface="Calibri" pitchFamily="34" charset="-122"/>
-                <a:cs typeface="Calibri" pitchFamily="34" charset="-120"/>
-              </a:rPr>
-              <a:t>B. A clonal B-cell population supporting (with context) lymphoproliferative disease</a:t>
-            </a:r>
-            <a:endParaRPr lang="en-US" sz="1350" dirty="0"/>
-          </a:p>
-          <a:p>
-            <a:pPr algn="l" indent="0" marL="0">
-              <a:spcAft>
-                <a:spcPts val="600"/>
-              </a:spcAft>
-              <a:buNone/>
-            </a:pPr>
-            <a:r>
-              <a:rPr lang="en-US" sz="1350" dirty="0">
-                <a:solidFill>
-                  <a:srgbClr val="33444F"/>
-                </a:solidFill>
-                <a:latin typeface="Calibri" pitchFamily="34" charset="0"/>
-                <a:ea typeface="Calibri" pitchFamily="34" charset="-122"/>
-                <a:cs typeface="Calibri" pitchFamily="34" charset="-120"/>
-              </a:rPr>
-              <a:t>C. A reactive process</a:t>
-            </a:r>
-            <a:endParaRPr lang="en-US" sz="1350" dirty="0"/>
-          </a:p>
-          <a:p>
-            <a:pPr algn="l" indent="0" marL="0">
-              <a:spcAft>
-                <a:spcPts val="600"/>
-              </a:spcAft>
-              <a:buNone/>
-            </a:pPr>
-            <a:r>
-              <a:rPr lang="en-US" sz="1350" dirty="0">
-                <a:solidFill>
-                  <a:srgbClr val="33444F"/>
-                </a:solidFill>
-                <a:latin typeface="Calibri" pitchFamily="34" charset="0"/>
-                <a:ea typeface="Calibri" pitchFamily="34" charset="-122"/>
-                <a:cs typeface="Calibri" pitchFamily="34" charset="-120"/>
-              </a:rPr>
-              <a:t>D. T-cell lineage disease</a:t>
-            </a:r>
-            <a:endParaRPr lang="en-US" sz="1350" dirty="0"/>
-          </a:p>
-          <a:p>
-            <a:pPr algn="l" indent="0" marL="0">
-              <a:spcAft>
-                <a:spcPts val="600"/>
-              </a:spcAft>
-              <a:buNone/>
-            </a:pPr>
-            <a:r>
-              <a:rPr lang="en-US" sz="1350" dirty="0">
-                <a:solidFill>
-                  <a:srgbClr val="33444F"/>
-                </a:solidFill>
-                <a:latin typeface="Calibri" pitchFamily="34" charset="0"/>
-                <a:ea typeface="Calibri" pitchFamily="34" charset="-122"/>
-                <a:cs typeface="Calibri" pitchFamily="34" charset="-120"/>
-              </a:rPr>
-              <a:t>E. Germline mutation</a:t>
-            </a:r>
-            <a:endParaRPr lang="en-US" sz="1350" dirty="0"/>
-          </a:p>
-        </p:txBody>
-      </p:sp>
-      <p:sp>
-        <p:nvSpPr>
-          <p:cNvPr id="6" name="Shape 4"/>
-          <p:cNvSpPr/>
-          <p:nvPr/>
-        </p:nvSpPr>
-        <p:spPr>
-          <a:xfrm>
-            <a:off x="7201632" y="2395728"/>
-            <a:ext cx="4423136" cy="3246120"/>
+              <a:t>Case 2</a:t>
+            </a:r>
+            <a:endParaRPr lang="en-US" sz="3000" dirty="0"/>
+          </a:p>
+        </p:txBody>
+      </p:sp>
+      <p:sp>
+        <p:nvSpPr>
+          <p:cNvPr id="4" name="Shape 2"/>
+          <p:cNvSpPr/>
+          <p:nvPr/>
+        </p:nvSpPr>
+        <p:spPr>
+          <a:xfrm>
+            <a:off x="566928" y="1517904"/>
+            <a:ext cx="11057839" cy="2788920"/>
           </a:xfrm>
           <a:prstGeom prst="roundRect">
             <a:avLst>
-              <a:gd name="adj" fmla="val 2535"/>
+              <a:gd name="adj" fmla="val 2951"/>
             </a:avLst>
           </a:prstGeom>
           <a:solidFill>
@@ -6376,14 +6549,14 @@
       </p:sp>
       <p:sp>
         <p:nvSpPr>
-          <p:cNvPr id="7" name="Text 5"/>
-          <p:cNvSpPr/>
-          <p:nvPr/>
-        </p:nvSpPr>
-        <p:spPr>
-          <a:xfrm>
-            <a:off x="7439376" y="2578608"/>
-            <a:ext cx="3965936" cy="457200"/>
+          <p:cNvPr id="5" name="Text 3"/>
+          <p:cNvSpPr/>
+          <p:nvPr/>
+        </p:nvSpPr>
+        <p:spPr>
+          <a:xfrm>
+            <a:off x="841248" y="1700784"/>
+            <a:ext cx="5486400" cy="292608"/>
           </a:xfrm>
           <a:prstGeom prst="rect">
             <a:avLst/>
@@ -6399,7 +6572,7 @@
               <a:buNone/>
             </a:pPr>
             <a:r>
-              <a:rPr lang="en-US" sz="1500" b="1" dirty="0">
+              <a:rPr lang="en-US" sz="1100" b="1" spc="150" kern="0" dirty="0">
                 <a:solidFill>
                   <a:srgbClr val="00838F"/>
                 </a:solidFill>
@@ -6407,36 +6580,22 @@
                 <a:ea typeface="Calibri" pitchFamily="34" charset="-122"/>
                 <a:cs typeface="Calibri" pitchFamily="34" charset="-120"/>
               </a:rPr>
-              <a:t>ANSWER  </a:t>
-            </a:r>
-            <a:pPr indent="0" marL="0">
-              <a:buNone/>
-            </a:pPr>
-            <a:r>
-              <a:rPr lang="en-US" sz="1500" b="1" dirty="0">
-                <a:solidFill>
-                  <a:srgbClr val="1B2A38"/>
-                </a:solidFill>
-                <a:latin typeface="Calibri" pitchFamily="34" charset="0"/>
-                <a:ea typeface="Calibri" pitchFamily="34" charset="-122"/>
-                <a:cs typeface="Calibri" pitchFamily="34" charset="-120"/>
-              </a:rPr>
-              <a:t>B — Clonal B-cell population (with context)</a:t>
-            </a:r>
-            <a:endParaRPr lang="en-US" sz="1500" dirty="0"/>
-          </a:p>
-        </p:txBody>
-      </p:sp>
-      <p:sp>
-        <p:nvSpPr>
-          <p:cNvPr id="8" name="Text 6"/>
-          <p:cNvSpPr/>
-          <p:nvPr/>
-        </p:nvSpPr>
-        <p:spPr>
-          <a:xfrm>
-            <a:off x="7439376" y="3127248"/>
-            <a:ext cx="3947648" cy="2377440"/>
+              <a:t>CLINICAL VIGNETTE</a:t>
+            </a:r>
+            <a:endParaRPr lang="en-US" sz="1100" dirty="0"/>
+          </a:p>
+        </p:txBody>
+      </p:sp>
+      <p:sp>
+        <p:nvSpPr>
+          <p:cNvPr id="6" name="Text 4"/>
+          <p:cNvSpPr/>
+          <p:nvPr/>
+        </p:nvSpPr>
+        <p:spPr>
+          <a:xfrm>
+            <a:off x="841248" y="2029968"/>
+            <a:ext cx="10509199" cy="2148840"/>
           </a:xfrm>
           <a:prstGeom prst="rect">
             <a:avLst/>
@@ -6455,7 +6614,7 @@
               <a:buNone/>
             </a:pPr>
             <a:r>
-              <a:rPr lang="en-US" sz="1250" dirty="0">
+              <a:rPr lang="en-US" sz="1450" dirty="0">
                 <a:solidFill>
                   <a:srgbClr val="33444F"/>
                 </a:solidFill>
@@ -6463,15 +6622,122 @@
                 <a:ea typeface="Calibri" pitchFamily="34" charset="-122"/>
                 <a:cs typeface="Calibri" pitchFamily="34" charset="-120"/>
               </a:rPr>
-              <a:t>Clonality supports a neoplastic process but is not synonymous with malignancy; interpret with morphology, flow, and clinical context.</a:t>
-            </a:r>
-            <a:endParaRPr lang="en-US" sz="1250" dirty="0"/>
+              <a:t>A patient with promyelocytic morphology and coagulopathy has suspected APL.</a:t>
+            </a:r>
+            <a:endParaRPr lang="en-US" sz="1450" dirty="0"/>
+          </a:p>
+        </p:txBody>
+      </p:sp>
+      <p:sp>
+        <p:nvSpPr>
+          <p:cNvPr id="7" name="Shape 5"/>
+          <p:cNvSpPr/>
+          <p:nvPr/>
+        </p:nvSpPr>
+        <p:spPr>
+          <a:xfrm>
+            <a:off x="566928" y="4553712"/>
+            <a:ext cx="11057839" cy="1325880"/>
+          </a:xfrm>
+          <a:prstGeom prst="roundRect">
+            <a:avLst>
+              <a:gd name="adj" fmla="val 6207"/>
+            </a:avLst>
+          </a:prstGeom>
+          <a:solidFill>
+            <a:srgbClr val="0E3A5F"/>
+          </a:solidFill>
+          <a:ln/>
+          <a:effectLst>
+            <a:outerShdw sx="100000" sy="100000" kx="0" ky="0" algn="bl" rotWithShape="0" blurRad="88900" dist="25400" dir="5400000">
+              <a:srgbClr val="22303C">
+                <a:alpha val="12000"/>
+              </a:srgbClr>
+            </a:outerShdw>
+          </a:effectLst>
+        </p:spPr>
+      </p:sp>
+      <p:sp>
+        <p:nvSpPr>
+          <p:cNvPr id="8" name="Text 6"/>
+          <p:cNvSpPr/>
+          <p:nvPr/>
+        </p:nvSpPr>
+        <p:spPr>
+          <a:xfrm>
+            <a:off x="822960" y="4681728"/>
+            <a:ext cx="640080" cy="960120"/>
+          </a:xfrm>
+          <a:prstGeom prst="rect">
+            <a:avLst/>
+          </a:prstGeom>
+          <a:noFill/>
+          <a:ln/>
+        </p:spPr>
+        <p:txBody>
+          <a:bodyPr wrap="square" lIns="0" tIns="0" rIns="0" bIns="0" rtlCol="0" anchor="ctr"/>
+          <a:lstStyle/>
+          <a:p>
+            <a:pPr algn="ctr" indent="0" marL="0">
+              <a:buNone/>
+            </a:pPr>
+            <a:r>
+              <a:rPr lang="en-US" sz="4000" b="1" dirty="0">
+                <a:solidFill>
+                  <a:srgbClr val="00838F"/>
+                </a:solidFill>
+                <a:latin typeface="Calibri" pitchFamily="34" charset="0"/>
+                <a:ea typeface="Calibri" pitchFamily="34" charset="-122"/>
+                <a:cs typeface="Calibri" pitchFamily="34" charset="-120"/>
+              </a:rPr>
+              <a:t>?</a:t>
+            </a:r>
+            <a:endParaRPr lang="en-US" sz="4000" dirty="0"/>
           </a:p>
         </p:txBody>
       </p:sp>
       <p:sp>
         <p:nvSpPr>
           <p:cNvPr id="9" name="Text 7"/>
+          <p:cNvSpPr/>
+          <p:nvPr/>
+        </p:nvSpPr>
+        <p:spPr>
+          <a:xfrm>
+            <a:off x="1618488" y="4553712"/>
+            <a:ext cx="9686239" cy="1325880"/>
+          </a:xfrm>
+          <a:prstGeom prst="rect">
+            <a:avLst/>
+          </a:prstGeom>
+          <a:noFill/>
+          <a:ln/>
+        </p:spPr>
+        <p:txBody>
+          <a:bodyPr wrap="square" lIns="0" tIns="0" rIns="0" bIns="0" rtlCol="0" anchor="ctr"/>
+          <a:lstStyle/>
+          <a:p>
+            <a:pPr algn="l" indent="0" marL="0">
+              <a:buNone/>
+            </a:pPr>
+            <a:r>
+              <a:rPr lang="en-US" sz="1500" b="1" dirty="0">
+                <a:solidFill>
+                  <a:srgbClr val="FFFFFF"/>
+                </a:solidFill>
+                <a:latin typeface="Calibri" pitchFamily="34" charset="0"/>
+                <a:ea typeface="Calibri" pitchFamily="34" charset="-122"/>
+                <a:cs typeface="Calibri" pitchFamily="34" charset="-120"/>
+              </a:rPr>
+              <a:t>Why is rapid molecular/cytogenetic testing urgent here?</a:t>
+            </a:r>
+            <a:endParaRPr lang="en-US" sz="1500" dirty="0"/>
+          </a:p>
+        </p:txBody>
+      </p:sp>
+      <p:sp>
+        <p:nvSpPr>
+          <p:cNvPr id="10" name="Text 8"/>
           <p:cNvSpPr/>
           <p:nvPr/>
         </p:nvSpPr>
@@ -6510,7 +6776,7 @@
       </p:sp>
       <p:sp>
         <p:nvSpPr>
-          <p:cNvPr id="10" name="Text 8"/>
+          <p:cNvPr id="11" name="Text 9"/>
           <p:cNvSpPr/>
           <p:nvPr/>
         </p:nvSpPr>
@@ -6640,7 +6906,7 @@
                 <a:ea typeface="Calibri" pitchFamily="34" charset="-122"/>
                 <a:cs typeface="Calibri" pitchFamily="34" charset="-120"/>
               </a:rPr>
-              <a:t>MOLECULAR &amp; CYTOGENETICS   ·   BOARD REVIEW  ·  Q2</a:t>
+              <a:t>MOLECULAR &amp; CYTOGENETICS   ·   CASE 2  ·  RESOLUTION</a:t>
             </a:r>
             <a:endParaRPr lang="en-US" sz="1100" dirty="0"/>
           </a:p>
@@ -6671,7 +6937,7 @@
               <a:buNone/>
             </a:pPr>
             <a:r>
-              <a:rPr lang="en-US" sz="2600" b="1" dirty="0">
+              <a:rPr lang="en-US" sz="3000" b="1" dirty="0">
                 <a:solidFill>
                   <a:srgbClr val="0E3A5F"/>
                 </a:solidFill>
@@ -6679,9 +6945,9 @@
                 <a:ea typeface="Calibri" pitchFamily="34" charset="-122"/>
                 <a:cs typeface="Calibri" pitchFamily="34" charset="-120"/>
               </a:rPr>
-              <a:t>Board-Style Review</a:t>
-            </a:r>
-            <a:endParaRPr lang="en-US" sz="2600" dirty="0"/>
+              <a:t>Case 2: APL Emergency</a:t>
+            </a:r>
+            <a:endParaRPr lang="en-US" sz="3000" dirty="0"/>
           </a:p>
         </p:txBody>
       </p:sp>
@@ -6693,8 +6959,8 @@
         </p:nvSpPr>
         <p:spPr>
           <a:xfrm>
-            <a:off x="566928" y="1417320"/>
-            <a:ext cx="11057839" cy="914400"/>
+            <a:off x="566928" y="1554480"/>
+            <a:ext cx="6413547" cy="4023360"/>
           </a:xfrm>
           <a:prstGeom prst="rect">
             <a:avLst/>
@@ -6706,14 +6972,15 @@
           <a:bodyPr wrap="square" lIns="0" tIns="0" rIns="0" bIns="0" rtlCol="0" anchor="t"/>
           <a:lstStyle/>
           <a:p>
-            <a:pPr algn="l" indent="0" marL="0">
-              <a:lnSpc>
-                <a:spcPct val="105000"/>
-              </a:lnSpc>
-              <a:buNone/>
-            </a:pPr>
-            <a:r>
-              <a:rPr lang="en-US" sz="1450" b="1" dirty="0">
+            <a:pPr algn="l" marL="177800" indent="-177800">
+              <a:spcAft>
+                <a:spcPts val="900"/>
+              </a:spcAft>
+              <a:buSzPct val="100000"/>
+              <a:buChar char="•"/>
+            </a:pPr>
+            <a:r>
+              <a:rPr lang="en-US" sz="1400" b="1" dirty="0">
                 <a:solidFill>
                   <a:srgbClr val="1B2A38"/>
                 </a:solidFill>
@@ -6721,41 +6988,20 @@
                 <a:ea typeface="Calibri" pitchFamily="34" charset="-122"/>
                 <a:cs typeface="Calibri" pitchFamily="34" charset="-120"/>
               </a:rPr>
-              <a:t>Which method provides the most sensitive routine monitoring of MRD in CML?</a:t>
-            </a:r>
-            <a:endParaRPr lang="en-US" sz="1450" dirty="0"/>
-          </a:p>
-        </p:txBody>
-      </p:sp>
-      <p:sp>
-        <p:nvSpPr>
-          <p:cNvPr id="5" name="Text 3"/>
-          <p:cNvSpPr/>
-          <p:nvPr/>
-        </p:nvSpPr>
-        <p:spPr>
-          <a:xfrm>
-            <a:off x="658368" y="2395728"/>
-            <a:ext cx="6192390" cy="3017520"/>
-          </a:xfrm>
-          <a:prstGeom prst="rect">
-            <a:avLst/>
-          </a:prstGeom>
-          <a:noFill/>
-          <a:ln/>
-        </p:spPr>
-        <p:txBody>
-          <a:bodyPr wrap="square" lIns="0" tIns="0" rIns="0" bIns="0" rtlCol="0" anchor="t"/>
-          <a:lstStyle/>
-          <a:p>
-            <a:pPr algn="l" indent="0" marL="0">
+              <a:t>PML-RARA (t(15;17)) defines APL, a medical emergency due to life-threatening coagulopathy.</a:t>
+            </a:r>
+            <a:endParaRPr lang="en-US" sz="1400" dirty="0"/>
+          </a:p>
+          <a:p>
+            <a:pPr algn="l" marL="177800" indent="-177800">
               <a:spcAft>
-                <a:spcPts val="600"/>
+                <a:spcPts val="900"/>
               </a:spcAft>
-              <a:buNone/>
-            </a:pPr>
-            <a:r>
-              <a:rPr lang="en-US" sz="1350" dirty="0">
+              <a:buSzPct val="100000"/>
+              <a:buChar char="•"/>
+            </a:pPr>
+            <a:r>
+              <a:rPr lang="en-US" sz="1400" dirty="0">
                 <a:solidFill>
                   <a:srgbClr val="33444F"/>
                 </a:solidFill>
@@ -6763,19 +7009,20 @@
                 <a:ea typeface="Calibri" pitchFamily="34" charset="-122"/>
                 <a:cs typeface="Calibri" pitchFamily="34" charset="-120"/>
               </a:rPr>
-              <a:t>A. Karyotype</a:t>
-            </a:r>
-            <a:endParaRPr lang="en-US" sz="1350" dirty="0"/>
-          </a:p>
-          <a:p>
-            <a:pPr algn="l" indent="0" marL="0">
+              <a:t>Rapid FISH/RT-PCR confirmation supports urgent targeted therapy.</a:t>
+            </a:r>
+            <a:endParaRPr lang="en-US" sz="1400" dirty="0"/>
+          </a:p>
+          <a:p>
+            <a:pPr algn="l" marL="177800" indent="-177800">
               <a:spcAft>
-                <a:spcPts val="600"/>
+                <a:spcPts val="900"/>
               </a:spcAft>
-              <a:buNone/>
-            </a:pPr>
-            <a:r>
-              <a:rPr lang="en-US" sz="1350" dirty="0">
+              <a:buSzPct val="100000"/>
+              <a:buChar char="•"/>
+            </a:pPr>
+            <a:r>
+              <a:rPr lang="en-US" sz="1400" dirty="0">
                 <a:solidFill>
                   <a:srgbClr val="33444F"/>
                 </a:solidFill>
@@ -6783,39 +7030,20 @@
                 <a:ea typeface="Calibri" pitchFamily="34" charset="-122"/>
                 <a:cs typeface="Calibri" pitchFamily="34" charset="-120"/>
               </a:rPr>
-              <a:t>B. FISH</a:t>
-            </a:r>
-            <a:endParaRPr lang="en-US" sz="1350" dirty="0"/>
-          </a:p>
-          <a:p>
-            <a:pPr algn="l" indent="0" marL="0">
+              <a:t>Early treatment dramatically improves outcomes.</a:t>
+            </a:r>
+            <a:endParaRPr lang="en-US" sz="1400" dirty="0"/>
+          </a:p>
+          <a:p>
+            <a:pPr algn="l" marL="177800" indent="-177800">
               <a:spcAft>
-                <a:spcPts val="600"/>
+                <a:spcPts val="900"/>
               </a:spcAft>
-              <a:buNone/>
-            </a:pPr>
-            <a:r>
-              <a:rPr lang="en-US" sz="1350" b="1" dirty="0">
-                <a:solidFill>
-                  <a:srgbClr val="005A63"/>
-                </a:solidFill>
-                <a:latin typeface="Calibri" pitchFamily="34" charset="0"/>
-                <a:ea typeface="Calibri" pitchFamily="34" charset="-122"/>
-                <a:cs typeface="Calibri" pitchFamily="34" charset="-120"/>
-              </a:rPr>
-              <a:t>C. Quantitative RT-PCR for BCR-ABL1 (International Scale)</a:t>
-            </a:r>
-            <a:endParaRPr lang="en-US" sz="1350" dirty="0"/>
-          </a:p>
-          <a:p>
-            <a:pPr algn="l" indent="0" marL="0">
-              <a:spcAft>
-                <a:spcPts val="600"/>
-              </a:spcAft>
-              <a:buNone/>
-            </a:pPr>
-            <a:r>
-              <a:rPr lang="en-US" sz="1350" dirty="0">
+              <a:buSzPct val="100000"/>
+              <a:buChar char="•"/>
+            </a:pPr>
+            <a:r>
+              <a:rPr lang="en-US" sz="1400" dirty="0">
                 <a:solidFill>
                   <a:srgbClr val="33444F"/>
                 </a:solidFill>
@@ -6823,46 +7051,26 @@
                 <a:ea typeface="Calibri" pitchFamily="34" charset="-122"/>
                 <a:cs typeface="Calibri" pitchFamily="34" charset="-120"/>
               </a:rPr>
-              <a:t>D. Morphology</a:t>
-            </a:r>
-            <a:endParaRPr lang="en-US" sz="1350" dirty="0"/>
-          </a:p>
-          <a:p>
-            <a:pPr algn="l" indent="0" marL="0">
-              <a:spcAft>
-                <a:spcPts val="600"/>
-              </a:spcAft>
-              <a:buNone/>
-            </a:pPr>
-            <a:r>
-              <a:rPr lang="en-US" sz="1350" dirty="0">
-                <a:solidFill>
-                  <a:srgbClr val="33444F"/>
-                </a:solidFill>
-                <a:latin typeface="Calibri" pitchFamily="34" charset="0"/>
-                <a:ea typeface="Calibri" pitchFamily="34" charset="-122"/>
-                <a:cs typeface="Calibri" pitchFamily="34" charset="-120"/>
-              </a:rPr>
-              <a:t>E. Sanger sequencing</a:t>
-            </a:r>
-            <a:endParaRPr lang="en-US" sz="1350" dirty="0"/>
-          </a:p>
-        </p:txBody>
-      </p:sp>
-      <p:sp>
-        <p:nvSpPr>
-          <p:cNvPr id="6" name="Shape 4"/>
-          <p:cNvSpPr/>
-          <p:nvPr/>
-        </p:nvSpPr>
-        <p:spPr>
-          <a:xfrm>
-            <a:off x="7201632" y="2395728"/>
-            <a:ext cx="4423136" cy="3246120"/>
+              <a:t>Coordinate immediate communication with the clinical team.</a:t>
+            </a:r>
+            <a:endParaRPr lang="en-US" sz="1400" dirty="0"/>
+          </a:p>
+        </p:txBody>
+      </p:sp>
+      <p:sp>
+        <p:nvSpPr>
+          <p:cNvPr id="5" name="Shape 3"/>
+          <p:cNvSpPr/>
+          <p:nvPr/>
+        </p:nvSpPr>
+        <p:spPr>
+          <a:xfrm>
+            <a:off x="7422788" y="1554480"/>
+            <a:ext cx="4201979" cy="3977640"/>
           </a:xfrm>
           <a:prstGeom prst="roundRect">
             <a:avLst>
-              <a:gd name="adj" fmla="val 2535"/>
+              <a:gd name="adj" fmla="val 2069"/>
             </a:avLst>
           </a:prstGeom>
           <a:solidFill>
@@ -6880,67 +7088,53 @@
       </p:sp>
       <p:sp>
         <p:nvSpPr>
+          <p:cNvPr id="6" name="Text 4"/>
+          <p:cNvSpPr/>
+          <p:nvPr/>
+        </p:nvSpPr>
+        <p:spPr>
+          <a:xfrm>
+            <a:off x="7660532" y="1755648"/>
+            <a:ext cx="3744779" cy="310896"/>
+          </a:xfrm>
+          <a:prstGeom prst="rect">
+            <a:avLst/>
+          </a:prstGeom>
+          <a:noFill/>
+          <a:ln/>
+        </p:spPr>
+        <p:txBody>
+          <a:bodyPr wrap="square" lIns="0" tIns="0" rIns="0" bIns="0" rtlCol="0" anchor="ctr"/>
+          <a:lstStyle/>
+          <a:p>
+            <a:pPr indent="0" marL="0">
+              <a:buNone/>
+            </a:pPr>
+            <a:r>
+              <a:rPr lang="en-US" sz="1100" b="1" spc="140" kern="0" dirty="0">
+                <a:solidFill>
+                  <a:srgbClr val="00838F"/>
+                </a:solidFill>
+                <a:latin typeface="Calibri" pitchFamily="34" charset="0"/>
+                <a:ea typeface="Calibri" pitchFamily="34" charset="-122"/>
+                <a:cs typeface="Calibri" pitchFamily="34" charset="-120"/>
+              </a:rPr>
+              <a:t>TEACHING POINT</a:t>
+            </a:r>
+            <a:endParaRPr lang="en-US" sz="1100" dirty="0"/>
+          </a:p>
+        </p:txBody>
+      </p:sp>
+      <p:sp>
+        <p:nvSpPr>
           <p:cNvPr id="7" name="Text 5"/>
           <p:cNvSpPr/>
           <p:nvPr/>
         </p:nvSpPr>
         <p:spPr>
           <a:xfrm>
-            <a:off x="7439376" y="2578608"/>
-            <a:ext cx="3965936" cy="457200"/>
-          </a:xfrm>
-          <a:prstGeom prst="rect">
-            <a:avLst/>
-          </a:prstGeom>
-          <a:noFill/>
-          <a:ln/>
-        </p:spPr>
-        <p:txBody>
-          <a:bodyPr wrap="square" lIns="0" tIns="0" rIns="0" bIns="0" rtlCol="0" anchor="ctr"/>
-          <a:lstStyle/>
-          <a:p>
-            <a:pPr indent="0" marL="0">
-              <a:buNone/>
-            </a:pPr>
-            <a:r>
-              <a:rPr lang="en-US" sz="1500" b="1" dirty="0">
-                <a:solidFill>
-                  <a:srgbClr val="00838F"/>
-                </a:solidFill>
-                <a:latin typeface="Calibri" pitchFamily="34" charset="0"/>
-                <a:ea typeface="Calibri" pitchFamily="34" charset="-122"/>
-                <a:cs typeface="Calibri" pitchFamily="34" charset="-120"/>
-              </a:rPr>
-              <a:t>ANSWER  </a:t>
-            </a:r>
-            <a:pPr indent="0" marL="0">
-              <a:buNone/>
-            </a:pPr>
-            <a:r>
-              <a:rPr lang="en-US" sz="1500" b="1" dirty="0">
-                <a:solidFill>
-                  <a:srgbClr val="1B2A38"/>
-                </a:solidFill>
-                <a:latin typeface="Calibri" pitchFamily="34" charset="0"/>
-                <a:ea typeface="Calibri" pitchFamily="34" charset="-122"/>
-                <a:cs typeface="Calibri" pitchFamily="34" charset="-120"/>
-              </a:rPr>
-              <a:t>C — Quantitative RT-PCR (International Scale)</a:t>
-            </a:r>
-            <a:endParaRPr lang="en-US" sz="1500" dirty="0"/>
-          </a:p>
-        </p:txBody>
-      </p:sp>
-      <p:sp>
-        <p:nvSpPr>
-          <p:cNvPr id="8" name="Text 6"/>
-          <p:cNvSpPr/>
-          <p:nvPr/>
-        </p:nvSpPr>
-        <p:spPr>
-          <a:xfrm>
-            <a:off x="7439376" y="3127248"/>
-            <a:ext cx="3947648" cy="2377440"/>
+            <a:off x="7660532" y="2121408"/>
+            <a:ext cx="3726491" cy="3291840"/>
           </a:xfrm>
           <a:prstGeom prst="rect">
             <a:avLst/>
@@ -6954,12 +7148,12 @@
           <a:p>
             <a:pPr algn="l" indent="0" marL="0">
               <a:lnSpc>
-                <a:spcPct val="108000"/>
+                <a:spcPct val="110000"/>
               </a:lnSpc>
               <a:buNone/>
             </a:pPr>
             <a:r>
-              <a:rPr lang="en-US" sz="1250" dirty="0">
+              <a:rPr lang="en-US" sz="1350" dirty="0">
                 <a:solidFill>
                   <a:srgbClr val="33444F"/>
                 </a:solidFill>
@@ -6967,15 +7161,15 @@
                 <a:ea typeface="Calibri" pitchFamily="34" charset="-122"/>
                 <a:cs typeface="Calibri" pitchFamily="34" charset="-120"/>
               </a:rPr>
-              <a:t>Quantitative RT-PCR detects BCR-ABL1 transcript to ~10⁻⁴–10⁻⁵, far below morphologic or FISH sensitivity, and is reported on a standardized scale.</a:t>
-            </a:r>
-            <a:endParaRPr lang="en-US" sz="1250" dirty="0"/>
-          </a:p>
-        </p:txBody>
-      </p:sp>
-      <p:sp>
-        <p:nvSpPr>
-          <p:cNvPr id="9" name="Text 7"/>
+              <a:t>Suspected APL demands urgent confirmation of PML-RARA — the laboratory’s speed directly affects survival.</a:t>
+            </a:r>
+            <a:endParaRPr lang="en-US" sz="1350" dirty="0"/>
+          </a:p>
+        </p:txBody>
+      </p:sp>
+      <p:sp>
+        <p:nvSpPr>
+          <p:cNvPr id="8" name="Text 6"/>
           <p:cNvSpPr/>
           <p:nvPr/>
         </p:nvSpPr>
@@ -7014,7 +7208,7 @@
       </p:sp>
       <p:sp>
         <p:nvSpPr>
-          <p:cNvPr id="10" name="Text 8"/>
+          <p:cNvPr id="9" name="Text 7"/>
           <p:cNvSpPr/>
           <p:nvPr/>
         </p:nvSpPr>
@@ -7144,7 +7338,7 @@
                 <a:ea typeface="Calibri" pitchFamily="34" charset="-122"/>
                 <a:cs typeface="Calibri" pitchFamily="34" charset="-120"/>
               </a:rPr>
-              <a:t>MOLECULAR &amp; CYTOGENETICS   ·   BOARD REVIEW  ·  Q3</a:t>
+              <a:t>MOLECULAR &amp; CYTOGENETICS   ·   CASE 3</a:t>
             </a:r>
             <a:endParaRPr lang="en-US" sz="1100" dirty="0"/>
           </a:p>
@@ -7175,7 +7369,7 @@
               <a:buNone/>
             </a:pPr>
             <a:r>
-              <a:rPr lang="en-US" sz="2600" b="1" dirty="0">
+              <a:rPr lang="en-US" sz="3000" b="1" dirty="0">
                 <a:solidFill>
                   <a:srgbClr val="0E3A5F"/>
                 </a:solidFill>
@@ -7183,190 +7377,26 @@
                 <a:ea typeface="Calibri" pitchFamily="34" charset="-122"/>
                 <a:cs typeface="Calibri" pitchFamily="34" charset="-120"/>
               </a:rPr>
-              <a:t>Board-Style Review</a:t>
-            </a:r>
-            <a:endParaRPr lang="en-US" sz="2600" dirty="0"/>
-          </a:p>
-        </p:txBody>
-      </p:sp>
-      <p:sp>
-        <p:nvSpPr>
-          <p:cNvPr id="4" name="Text 2"/>
-          <p:cNvSpPr/>
-          <p:nvPr/>
-        </p:nvSpPr>
-        <p:spPr>
-          <a:xfrm>
-            <a:off x="566928" y="1417320"/>
-            <a:ext cx="11057839" cy="914400"/>
-          </a:xfrm>
-          <a:prstGeom prst="rect">
-            <a:avLst/>
-          </a:prstGeom>
-          <a:noFill/>
-          <a:ln/>
-        </p:spPr>
-        <p:txBody>
-          <a:bodyPr wrap="square" lIns="0" tIns="0" rIns="0" bIns="0" rtlCol="0" anchor="t"/>
-          <a:lstStyle/>
-          <a:p>
-            <a:pPr algn="l" indent="0" marL="0">
-              <a:lnSpc>
-                <a:spcPct val="105000"/>
-              </a:lnSpc>
-              <a:buNone/>
-            </a:pPr>
-            <a:r>
-              <a:rPr lang="en-US" sz="1450" b="1" dirty="0">
-                <a:solidFill>
-                  <a:srgbClr val="1B2A38"/>
-                </a:solidFill>
-                <a:latin typeface="Calibri" pitchFamily="34" charset="0"/>
-                <a:ea typeface="Calibri" pitchFamily="34" charset="-122"/>
-                <a:cs typeface="Calibri" pitchFamily="34" charset="-120"/>
-              </a:rPr>
-              <a:t>The modern diagnosis of a hematologic malignancy is best described as:</a:t>
-            </a:r>
-            <a:endParaRPr lang="en-US" sz="1450" dirty="0"/>
-          </a:p>
-        </p:txBody>
-      </p:sp>
-      <p:sp>
-        <p:nvSpPr>
-          <p:cNvPr id="5" name="Text 3"/>
-          <p:cNvSpPr/>
-          <p:nvPr/>
-        </p:nvSpPr>
-        <p:spPr>
-          <a:xfrm>
-            <a:off x="658368" y="2395728"/>
-            <a:ext cx="6192390" cy="3017520"/>
-          </a:xfrm>
-          <a:prstGeom prst="rect">
-            <a:avLst/>
-          </a:prstGeom>
-          <a:noFill/>
-          <a:ln/>
-        </p:spPr>
-        <p:txBody>
-          <a:bodyPr wrap="square" lIns="0" tIns="0" rIns="0" bIns="0" rtlCol="0" anchor="t"/>
-          <a:lstStyle/>
-          <a:p>
-            <a:pPr algn="l" indent="0" marL="0">
-              <a:spcAft>
-                <a:spcPts val="600"/>
-              </a:spcAft>
-              <a:buNone/>
-            </a:pPr>
-            <a:r>
-              <a:rPr lang="en-US" sz="1350" dirty="0">
-                <a:solidFill>
-                  <a:srgbClr val="33444F"/>
-                </a:solidFill>
-                <a:latin typeface="Calibri" pitchFamily="34" charset="0"/>
-                <a:ea typeface="Calibri" pitchFamily="34" charset="-122"/>
-                <a:cs typeface="Calibri" pitchFamily="34" charset="-120"/>
-              </a:rPr>
-              <a:t>A. Molecular result alone</a:t>
-            </a:r>
-            <a:endParaRPr lang="en-US" sz="1350" dirty="0"/>
-          </a:p>
-          <a:p>
-            <a:pPr algn="l" indent="0" marL="0">
-              <a:spcAft>
-                <a:spcPts val="600"/>
-              </a:spcAft>
-              <a:buNone/>
-            </a:pPr>
-            <a:r>
-              <a:rPr lang="en-US" sz="1350" dirty="0">
-                <a:solidFill>
-                  <a:srgbClr val="33444F"/>
-                </a:solidFill>
-                <a:latin typeface="Calibri" pitchFamily="34" charset="0"/>
-                <a:ea typeface="Calibri" pitchFamily="34" charset="-122"/>
-                <a:cs typeface="Calibri" pitchFamily="34" charset="-120"/>
-              </a:rPr>
-              <a:t>B. Morphology alone</a:t>
-            </a:r>
-            <a:endParaRPr lang="en-US" sz="1350" dirty="0"/>
-          </a:p>
-          <a:p>
-            <a:pPr algn="l" indent="0" marL="0">
-              <a:spcAft>
-                <a:spcPts val="600"/>
-              </a:spcAft>
-              <a:buNone/>
-            </a:pPr>
-            <a:r>
-              <a:rPr lang="en-US" sz="1350" b="1" dirty="0">
-                <a:solidFill>
-                  <a:srgbClr val="005A63"/>
-                </a:solidFill>
-                <a:latin typeface="Calibri" pitchFamily="34" charset="0"/>
-                <a:ea typeface="Calibri" pitchFamily="34" charset="-122"/>
-                <a:cs typeface="Calibri" pitchFamily="34" charset="-120"/>
-              </a:rPr>
-              <a:t>C. An integration of morphology, immunophenotype, cytogenetics, and molecular findings</a:t>
-            </a:r>
-            <a:endParaRPr lang="en-US" sz="1350" dirty="0"/>
-          </a:p>
-          <a:p>
-            <a:pPr algn="l" indent="0" marL="0">
-              <a:spcAft>
-                <a:spcPts val="600"/>
-              </a:spcAft>
-              <a:buNone/>
-            </a:pPr>
-            <a:r>
-              <a:rPr lang="en-US" sz="1350" dirty="0">
-                <a:solidFill>
-                  <a:srgbClr val="33444F"/>
-                </a:solidFill>
-                <a:latin typeface="Calibri" pitchFamily="34" charset="0"/>
-                <a:ea typeface="Calibri" pitchFamily="34" charset="-122"/>
-                <a:cs typeface="Calibri" pitchFamily="34" charset="-120"/>
-              </a:rPr>
-              <a:t>D. Flow cytometry alone</a:t>
-            </a:r>
-            <a:endParaRPr lang="en-US" sz="1350" dirty="0"/>
-          </a:p>
-          <a:p>
-            <a:pPr algn="l" indent="0" marL="0">
-              <a:spcAft>
-                <a:spcPts val="600"/>
-              </a:spcAft>
-              <a:buNone/>
-            </a:pPr>
-            <a:r>
-              <a:rPr lang="en-US" sz="1350" dirty="0">
-                <a:solidFill>
-                  <a:srgbClr val="33444F"/>
-                </a:solidFill>
-                <a:latin typeface="Calibri" pitchFamily="34" charset="0"/>
-                <a:ea typeface="Calibri" pitchFamily="34" charset="-122"/>
-                <a:cs typeface="Calibri" pitchFamily="34" charset="-120"/>
-              </a:rPr>
-              <a:t>E. Karyotype alone</a:t>
-            </a:r>
-            <a:endParaRPr lang="en-US" sz="1350" dirty="0"/>
-          </a:p>
-        </p:txBody>
-      </p:sp>
-      <p:sp>
-        <p:nvSpPr>
-          <p:cNvPr id="6" name="Shape 4"/>
-          <p:cNvSpPr/>
-          <p:nvPr/>
-        </p:nvSpPr>
-        <p:spPr>
-          <a:xfrm>
-            <a:off x="7201632" y="2395728"/>
-            <a:ext cx="4423136" cy="3246120"/>
+              <a:t>Case 3</a:t>
+            </a:r>
+            <a:endParaRPr lang="en-US" sz="3000" dirty="0"/>
+          </a:p>
+        </p:txBody>
+      </p:sp>
+      <p:sp>
+        <p:nvSpPr>
+          <p:cNvPr id="4" name="Shape 2"/>
+          <p:cNvSpPr/>
+          <p:nvPr/>
+        </p:nvSpPr>
+        <p:spPr>
+          <a:xfrm>
+            <a:off x="566928" y="1517904"/>
+            <a:ext cx="11057839" cy="2788920"/>
           </a:xfrm>
           <a:prstGeom prst="roundRect">
             <a:avLst>
-              <a:gd name="adj" fmla="val 2535"/>
+              <a:gd name="adj" fmla="val 2951"/>
             </a:avLst>
           </a:prstGeom>
           <a:solidFill>
@@ -7384,14 +7414,14 @@
       </p:sp>
       <p:sp>
         <p:nvSpPr>
-          <p:cNvPr id="7" name="Text 5"/>
-          <p:cNvSpPr/>
-          <p:nvPr/>
-        </p:nvSpPr>
-        <p:spPr>
-          <a:xfrm>
-            <a:off x="7439376" y="2578608"/>
-            <a:ext cx="3965936" cy="457200"/>
+          <p:cNvPr id="5" name="Text 3"/>
+          <p:cNvSpPr/>
+          <p:nvPr/>
+        </p:nvSpPr>
+        <p:spPr>
+          <a:xfrm>
+            <a:off x="841248" y="1700784"/>
+            <a:ext cx="5486400" cy="292608"/>
           </a:xfrm>
           <a:prstGeom prst="rect">
             <a:avLst/>
@@ -7407,7 +7437,7 @@
               <a:buNone/>
             </a:pPr>
             <a:r>
-              <a:rPr lang="en-US" sz="1500" b="1" dirty="0">
+              <a:rPr lang="en-US" sz="1100" b="1" spc="150" kern="0" dirty="0">
                 <a:solidFill>
                   <a:srgbClr val="00838F"/>
                 </a:solidFill>
@@ -7415,36 +7445,22 @@
                 <a:ea typeface="Calibri" pitchFamily="34" charset="-122"/>
                 <a:cs typeface="Calibri" pitchFamily="34" charset="-120"/>
               </a:rPr>
-              <a:t>ANSWER  </a:t>
-            </a:r>
-            <a:pPr indent="0" marL="0">
-              <a:buNone/>
-            </a:pPr>
-            <a:r>
-              <a:rPr lang="en-US" sz="1500" b="1" dirty="0">
-                <a:solidFill>
-                  <a:srgbClr val="1B2A38"/>
-                </a:solidFill>
-                <a:latin typeface="Calibri" pitchFamily="34" charset="0"/>
-                <a:ea typeface="Calibri" pitchFamily="34" charset="-122"/>
-                <a:cs typeface="Calibri" pitchFamily="34" charset="-120"/>
-              </a:rPr>
-              <a:t>C — Integration of all modalities</a:t>
-            </a:r>
-            <a:endParaRPr lang="en-US" sz="1500" dirty="0"/>
-          </a:p>
-        </p:txBody>
-      </p:sp>
-      <p:sp>
-        <p:nvSpPr>
-          <p:cNvPr id="8" name="Text 6"/>
-          <p:cNvSpPr/>
-          <p:nvPr/>
-        </p:nvSpPr>
-        <p:spPr>
-          <a:xfrm>
-            <a:off x="7439376" y="3127248"/>
-            <a:ext cx="3947648" cy="2377440"/>
+              <a:t>CLINICAL VIGNETTE</a:t>
+            </a:r>
+            <a:endParaRPr lang="en-US" sz="1100" dirty="0"/>
+          </a:p>
+        </p:txBody>
+      </p:sp>
+      <p:sp>
+        <p:nvSpPr>
+          <p:cNvPr id="6" name="Text 4"/>
+          <p:cNvSpPr/>
+          <p:nvPr/>
+        </p:nvSpPr>
+        <p:spPr>
+          <a:xfrm>
+            <a:off x="841248" y="2029968"/>
+            <a:ext cx="10509199" cy="2148840"/>
           </a:xfrm>
           <a:prstGeom prst="rect">
             <a:avLst/>
@@ -7463,7 +7479,7 @@
               <a:buNone/>
             </a:pPr>
             <a:r>
-              <a:rPr lang="en-US" sz="1250" dirty="0">
+              <a:rPr lang="en-US" sz="1450" dirty="0">
                 <a:solidFill>
                   <a:srgbClr val="33444F"/>
                 </a:solidFill>
@@ -7471,15 +7487,122 @@
                 <a:ea typeface="Calibri" pitchFamily="34" charset="-122"/>
                 <a:cs typeface="Calibri" pitchFamily="34" charset="-120"/>
               </a:rPr>
-              <a:t>WHO/ICC classification integrates morphology, immunophenotype, cytogenetics, and molecular data into a single coherent diagnosis.</a:t>
-            </a:r>
-            <a:endParaRPr lang="en-US" sz="1250" dirty="0"/>
+              <a:t>After AML therapy, an NPM1-based MRD assay shows rising transcript levels while morphology still looks in remission.</a:t>
+            </a:r>
+            <a:endParaRPr lang="en-US" sz="1450" dirty="0"/>
+          </a:p>
+        </p:txBody>
+      </p:sp>
+      <p:sp>
+        <p:nvSpPr>
+          <p:cNvPr id="7" name="Shape 5"/>
+          <p:cNvSpPr/>
+          <p:nvPr/>
+        </p:nvSpPr>
+        <p:spPr>
+          <a:xfrm>
+            <a:off x="566928" y="4553712"/>
+            <a:ext cx="11057839" cy="1325880"/>
+          </a:xfrm>
+          <a:prstGeom prst="roundRect">
+            <a:avLst>
+              <a:gd name="adj" fmla="val 6207"/>
+            </a:avLst>
+          </a:prstGeom>
+          <a:solidFill>
+            <a:srgbClr val="0E3A5F"/>
+          </a:solidFill>
+          <a:ln/>
+          <a:effectLst>
+            <a:outerShdw sx="100000" sy="100000" kx="0" ky="0" algn="bl" rotWithShape="0" blurRad="88900" dist="25400" dir="5400000">
+              <a:srgbClr val="22303C">
+                <a:alpha val="12000"/>
+              </a:srgbClr>
+            </a:outerShdw>
+          </a:effectLst>
+        </p:spPr>
+      </p:sp>
+      <p:sp>
+        <p:nvSpPr>
+          <p:cNvPr id="8" name="Text 6"/>
+          <p:cNvSpPr/>
+          <p:nvPr/>
+        </p:nvSpPr>
+        <p:spPr>
+          <a:xfrm>
+            <a:off x="822960" y="4681728"/>
+            <a:ext cx="640080" cy="960120"/>
+          </a:xfrm>
+          <a:prstGeom prst="rect">
+            <a:avLst/>
+          </a:prstGeom>
+          <a:noFill/>
+          <a:ln/>
+        </p:spPr>
+        <p:txBody>
+          <a:bodyPr wrap="square" lIns="0" tIns="0" rIns="0" bIns="0" rtlCol="0" anchor="ctr"/>
+          <a:lstStyle/>
+          <a:p>
+            <a:pPr algn="ctr" indent="0" marL="0">
+              <a:buNone/>
+            </a:pPr>
+            <a:r>
+              <a:rPr lang="en-US" sz="4000" b="1" dirty="0">
+                <a:solidFill>
+                  <a:srgbClr val="00838F"/>
+                </a:solidFill>
+                <a:latin typeface="Calibri" pitchFamily="34" charset="0"/>
+                <a:ea typeface="Calibri" pitchFamily="34" charset="-122"/>
+                <a:cs typeface="Calibri" pitchFamily="34" charset="-120"/>
+              </a:rPr>
+              <a:t>?</a:t>
+            </a:r>
+            <a:endParaRPr lang="en-US" sz="4000" dirty="0"/>
           </a:p>
         </p:txBody>
       </p:sp>
       <p:sp>
         <p:nvSpPr>
           <p:cNvPr id="9" name="Text 7"/>
+          <p:cNvSpPr/>
+          <p:nvPr/>
+        </p:nvSpPr>
+        <p:spPr>
+          <a:xfrm>
+            <a:off x="1618488" y="4553712"/>
+            <a:ext cx="9686239" cy="1325880"/>
+          </a:xfrm>
+          <a:prstGeom prst="rect">
+            <a:avLst/>
+          </a:prstGeom>
+          <a:noFill/>
+          <a:ln/>
+        </p:spPr>
+        <p:txBody>
+          <a:bodyPr wrap="square" lIns="0" tIns="0" rIns="0" bIns="0" rtlCol="0" anchor="ctr"/>
+          <a:lstStyle/>
+          <a:p>
+            <a:pPr algn="l" indent="0" marL="0">
+              <a:buNone/>
+            </a:pPr>
+            <a:r>
+              <a:rPr lang="en-US" sz="1500" b="1" dirty="0">
+                <a:solidFill>
+                  <a:srgbClr val="FFFFFF"/>
+                </a:solidFill>
+                <a:latin typeface="Calibri" pitchFamily="34" charset="0"/>
+                <a:ea typeface="Calibri" pitchFamily="34" charset="-122"/>
+                <a:cs typeface="Calibri" pitchFamily="34" charset="-120"/>
+              </a:rPr>
+              <a:t>What does the rising MRD indicate?</a:t>
+            </a:r>
+            <a:endParaRPr lang="en-US" sz="1500" dirty="0"/>
+          </a:p>
+        </p:txBody>
+      </p:sp>
+      <p:sp>
+        <p:nvSpPr>
+          <p:cNvPr id="10" name="Text 8"/>
           <p:cNvSpPr/>
           <p:nvPr/>
         </p:nvSpPr>
@@ -7518,7 +7641,7 @@
       </p:sp>
       <p:sp>
         <p:nvSpPr>
-          <p:cNvPr id="10" name="Text 8"/>
+          <p:cNvPr id="11" name="Text 9"/>
           <p:cNvSpPr/>
           <p:nvPr/>
         </p:nvSpPr>
@@ -7755,7 +7878,7 @@
                 <a:ea typeface="Calibri" pitchFamily="34" charset="-122"/>
                 <a:cs typeface="Calibri" pitchFamily="34" charset="-120"/>
               </a:rPr>
-              <a:t>Fusion</a:t>
+              <a:t>BCR-ABL1</a:t>
             </a:r>
             <a:endParaRPr lang="en-US" sz="3600" dirty="0"/>
           </a:p>
@@ -7794,7 +7917,7 @@
                 <a:ea typeface="Calibri" pitchFamily="34" charset="-122"/>
                 <a:cs typeface="Calibri" pitchFamily="34" charset="-120"/>
               </a:rPr>
-              <a:t>Recurrent fusions define entities and targeted therapy</a:t>
+              <a:t>Defines CML and is monitored quantitatively</a:t>
             </a:r>
             <a:endParaRPr lang="en-US" sz="1150" dirty="0"/>
           </a:p>
@@ -7862,7 +7985,7 @@
                 <a:ea typeface="Calibri" pitchFamily="34" charset="-122"/>
                 <a:cs typeface="Calibri" pitchFamily="34" charset="-120"/>
               </a:rPr>
-              <a:t>MRD</a:t>
+              <a:t>Karyotype</a:t>
             </a:r>
             <a:endParaRPr lang="en-US" sz="3600" dirty="0"/>
           </a:p>
@@ -7901,7 +8024,7 @@
                 <a:ea typeface="Calibri" pitchFamily="34" charset="-122"/>
                 <a:cs typeface="Calibri" pitchFamily="34" charset="-120"/>
               </a:rPr>
-              <a:t>Measurable residual disease guides prognosis and treatment</a:t>
+              <a:t>Cytogenetics still anchors risk stratification</a:t>
             </a:r>
             <a:endParaRPr lang="en-US" sz="1150" dirty="0"/>
           </a:p>
@@ -7969,7 +8092,7 @@
                 <a:ea typeface="Calibri" pitchFamily="34" charset="-122"/>
                 <a:cs typeface="Calibri" pitchFamily="34" charset="-120"/>
               </a:rPr>
-              <a:t>Integrate</a:t>
+              <a:t>MRD</a:t>
             </a:r>
             <a:endParaRPr lang="en-US" sz="3600" dirty="0"/>
           </a:p>
@@ -8008,7 +8131,7 @@
                 <a:ea typeface="Calibri" pitchFamily="34" charset="-122"/>
                 <a:cs typeface="Calibri" pitchFamily="34" charset="-120"/>
               </a:rPr>
-              <a:t>Molecular results join morphology and flow, not replace them</a:t>
+              <a:t>Deep monitoring detects relapse early</a:t>
             </a:r>
             <a:endParaRPr lang="en-US" sz="1150" dirty="0"/>
           </a:p>
@@ -8079,7 +8202,7 @@
                 <a:ea typeface="Calibri" pitchFamily="34" charset="-122"/>
                 <a:cs typeface="Calibri" pitchFamily="34" charset="-120"/>
               </a:rPr>
-              <a:t>Hematologic malignancy is where molecular diagnostics most directly drive classification, prognosis, therapy, and monitoring — always integrated with morphology, flow cytometry, and cytogenetics.</a:t>
+              <a:t>Hematologic malignancies are where molecular and cytogenetic testing most directly drive diagnosis, prognosis, therapy, and monitoring — from defining fusions to quantitative minimal residual disease.</a:t>
             </a:r>
             <a:endParaRPr lang="en-US" sz="1450" dirty="0"/>
           </a:p>
@@ -8122,7 +8245,7 @@
                 <a:ea typeface="Calibri" pitchFamily="34" charset="-122"/>
                 <a:cs typeface="Calibri" pitchFamily="34" charset="-120"/>
               </a:rPr>
-              <a:t>The modern diagnosis is integrated: morphology + immunophenotype + cytogenetics + molecular together define the entity.</a:t>
+              <a:t>In heme malignancy, the lab does it all: diagnosis (fusion/mutation), risk (cytogenetics), therapy target, and MRD monitoring.</a:t>
             </a:r>
             <a:endParaRPr lang="en-US" sz="1300" dirty="0"/>
           </a:p>
@@ -8248,7 +8371,7 @@
     <p:bg>
       <p:bgPr>
         <a:solidFill>
-          <a:srgbClr val="0A2A45"/>
+          <a:srgbClr val="FFFFFF"/>
         </a:solidFill>
       </p:bgPr>
     </p:bg>
@@ -8275,7 +8398,7 @@
         <p:spPr>
           <a:xfrm>
             <a:off x="566928" y="329184"/>
-            <a:ext cx="10058400" cy="310896"/>
+            <a:ext cx="10515600" cy="310896"/>
           </a:xfrm>
           <a:prstGeom prst="rect">
             <a:avLst/>
@@ -8287,7 +8410,7 @@
           <a:bodyPr wrap="square" lIns="0" tIns="0" rIns="0" bIns="0" rtlCol="0" anchor="ctr"/>
           <a:lstStyle/>
           <a:p>
-            <a:pPr indent="0" marL="0">
+            <a:pPr algn="l" indent="0" marL="0">
               <a:buNone/>
             </a:pPr>
             <a:r>
@@ -8299,7 +8422,7 @@
                 <a:ea typeface="Calibri" pitchFamily="34" charset="-122"/>
                 <a:cs typeface="Calibri" pitchFamily="34" charset="-120"/>
               </a:rPr>
-              <a:t>MOLECULAR &amp; CYTOGENETICS</a:t>
+              <a:t>MOLECULAR &amp; CYTOGENETICS   ·   CASE 3  ·  RESOLUTION</a:t>
             </a:r>
             <a:endParaRPr lang="en-US" sz="1100" dirty="0"/>
           </a:p>
@@ -8313,8 +8436,8 @@
         </p:nvSpPr>
         <p:spPr>
           <a:xfrm>
-            <a:off x="566928" y="676656"/>
-            <a:ext cx="10972800" cy="749808"/>
+            <a:off x="566928" y="713232"/>
+            <a:ext cx="11064240" cy="749808"/>
           </a:xfrm>
           <a:prstGeom prst="rect">
             <a:avLst/>
@@ -8326,19 +8449,19 @@
           <a:bodyPr wrap="square" lIns="0" tIns="0" rIns="0" bIns="0" rtlCol="0" anchor="ctr"/>
           <a:lstStyle/>
           <a:p>
-            <a:pPr indent="0" marL="0">
+            <a:pPr algn="l" indent="0" marL="0">
               <a:buNone/>
             </a:pPr>
             <a:r>
               <a:rPr lang="en-US" sz="3000" b="1" dirty="0">
                 <a:solidFill>
-                  <a:srgbClr val="FFFFFF"/>
-                </a:solidFill>
-                <a:latin typeface="Calibri" pitchFamily="34" charset="0"/>
-                <a:ea typeface="Calibri" pitchFamily="34" charset="-122"/>
-                <a:cs typeface="Calibri" pitchFamily="34" charset="-120"/>
-              </a:rPr>
-              <a:t>Key Take-Home Points</a:t>
+                  <a:srgbClr val="0E3A5F"/>
+                </a:solidFill>
+                <a:latin typeface="Calibri" pitchFamily="34" charset="0"/>
+                <a:ea typeface="Calibri" pitchFamily="34" charset="-122"/>
+                <a:cs typeface="Calibri" pitchFamily="34" charset="-120"/>
+              </a:rPr>
+              <a:t>Case 3: Molecular Relapse</a:t>
             </a:r>
             <a:endParaRPr lang="en-US" sz="3000" dirty="0"/>
           </a:p>
@@ -8346,42 +8469,128 @@
       </p:sp>
       <p:sp>
         <p:nvSpPr>
-          <p:cNvPr id="4" name="Shape 2"/>
-          <p:cNvSpPr/>
-          <p:nvPr/>
-        </p:nvSpPr>
-        <p:spPr>
-          <a:xfrm>
-            <a:off x="566928" y="1517904"/>
-            <a:ext cx="11057839" cy="841248"/>
+          <p:cNvPr id="4" name="Text 2"/>
+          <p:cNvSpPr/>
+          <p:nvPr/>
+        </p:nvSpPr>
+        <p:spPr>
+          <a:xfrm>
+            <a:off x="566928" y="1554480"/>
+            <a:ext cx="6413547" cy="4023360"/>
+          </a:xfrm>
+          <a:prstGeom prst="rect">
+            <a:avLst/>
+          </a:prstGeom>
+          <a:noFill/>
+          <a:ln/>
+        </p:spPr>
+        <p:txBody>
+          <a:bodyPr wrap="square" lIns="0" tIns="0" rIns="0" bIns="0" rtlCol="0" anchor="t"/>
+          <a:lstStyle/>
+          <a:p>
+            <a:pPr algn="l" marL="177800" indent="-177800">
+              <a:spcAft>
+                <a:spcPts val="900"/>
+              </a:spcAft>
+              <a:buSzPct val="100000"/>
+              <a:buChar char="•"/>
+            </a:pPr>
+            <a:r>
+              <a:rPr lang="en-US" sz="1400" b="1" dirty="0">
+                <a:solidFill>
+                  <a:srgbClr val="1B2A38"/>
+                </a:solidFill>
+                <a:latin typeface="Calibri" pitchFamily="34" charset="0"/>
+                <a:ea typeface="Calibri" pitchFamily="34" charset="-122"/>
+                <a:cs typeface="Calibri" pitchFamily="34" charset="-120"/>
+              </a:rPr>
+              <a:t>Rising MRD can precede morphologic relapse, signaling impending recurrence.</a:t>
+            </a:r>
+            <a:endParaRPr lang="en-US" sz="1400" dirty="0"/>
+          </a:p>
+          <a:p>
+            <a:pPr algn="l" marL="177800" indent="-177800">
+              <a:spcAft>
+                <a:spcPts val="900"/>
+              </a:spcAft>
+              <a:buSzPct val="100000"/>
+              <a:buChar char="•"/>
+            </a:pPr>
+            <a:r>
+              <a:rPr lang="en-US" sz="1400" dirty="0">
+                <a:solidFill>
+                  <a:srgbClr val="33444F"/>
+                </a:solidFill>
+                <a:latin typeface="Calibri" pitchFamily="34" charset="0"/>
+                <a:ea typeface="Calibri" pitchFamily="34" charset="-122"/>
+                <a:cs typeface="Calibri" pitchFamily="34" charset="-120"/>
+              </a:rPr>
+              <a:t>It allows earlier intervention.</a:t>
+            </a:r>
+            <a:endParaRPr lang="en-US" sz="1400" dirty="0"/>
+          </a:p>
+          <a:p>
+            <a:pPr algn="l" marL="177800" indent="-177800">
+              <a:spcAft>
+                <a:spcPts val="900"/>
+              </a:spcAft>
+              <a:buSzPct val="100000"/>
+              <a:buChar char="•"/>
+            </a:pPr>
+            <a:r>
+              <a:rPr lang="en-US" sz="1400" dirty="0">
+                <a:solidFill>
+                  <a:srgbClr val="33444F"/>
+                </a:solidFill>
+                <a:latin typeface="Calibri" pitchFamily="34" charset="0"/>
+                <a:ea typeface="Calibri" pitchFamily="34" charset="-122"/>
+                <a:cs typeface="Calibri" pitchFamily="34" charset="-120"/>
+              </a:rPr>
+              <a:t>Report with the assay’s limit of detection and trend.</a:t>
+            </a:r>
+            <a:endParaRPr lang="en-US" sz="1400" dirty="0"/>
+          </a:p>
+          <a:p>
+            <a:pPr algn="l" marL="177800" indent="-177800">
+              <a:spcAft>
+                <a:spcPts val="900"/>
+              </a:spcAft>
+              <a:buSzPct val="100000"/>
+              <a:buChar char="•"/>
+            </a:pPr>
+            <a:r>
+              <a:rPr lang="en-US" sz="1400" dirty="0">
+                <a:solidFill>
+                  <a:srgbClr val="33444F"/>
+                </a:solidFill>
+                <a:latin typeface="Calibri" pitchFamily="34" charset="0"/>
+                <a:ea typeface="Calibri" pitchFamily="34" charset="-122"/>
+                <a:cs typeface="Calibri" pitchFamily="34" charset="-120"/>
+              </a:rPr>
+              <a:t>Integrate with clinical assessment.</a:t>
+            </a:r>
+            <a:endParaRPr lang="en-US" sz="1400" dirty="0"/>
+          </a:p>
+        </p:txBody>
+      </p:sp>
+      <p:sp>
+        <p:nvSpPr>
+          <p:cNvPr id="5" name="Shape 3"/>
+          <p:cNvSpPr/>
+          <p:nvPr/>
+        </p:nvSpPr>
+        <p:spPr>
+          <a:xfrm>
+            <a:off x="7422788" y="1554480"/>
+            <a:ext cx="4201979" cy="3977640"/>
           </a:xfrm>
           <a:prstGeom prst="roundRect">
             <a:avLst>
-              <a:gd name="adj" fmla="val 7609"/>
+              <a:gd name="adj" fmla="val 2069"/>
             </a:avLst>
           </a:prstGeom>
           <a:solidFill>
-            <a:srgbClr val="143651"/>
-          </a:solidFill>
-          <a:ln/>
-        </p:spPr>
-      </p:sp>
-      <p:sp>
-        <p:nvSpPr>
-          <p:cNvPr id="5" name="Shape 3"/>
-          <p:cNvSpPr/>
-          <p:nvPr/>
-        </p:nvSpPr>
-        <p:spPr>
-          <a:xfrm>
-            <a:off x="749808" y="1755648"/>
-            <a:ext cx="365760" cy="365760"/>
-          </a:xfrm>
-          <a:prstGeom prst="ellipse">
-            <a:avLst/>
-          </a:prstGeom>
-          <a:solidFill>
-            <a:srgbClr val="00838F"/>
+            <a:srgbClr val="E0F2F4"/>
           </a:solidFill>
           <a:ln/>
           <a:effectLst>
@@ -8401,8 +8610,8 @@
         </p:nvSpPr>
         <p:spPr>
           <a:xfrm>
-            <a:off x="749808" y="1755648"/>
-            <a:ext cx="365760" cy="365760"/>
+            <a:off x="7660532" y="1755648"/>
+            <a:ext cx="3744779" cy="310896"/>
           </a:xfrm>
           <a:prstGeom prst="rect">
             <a:avLst/>
@@ -8414,21 +8623,21 @@
           <a:bodyPr wrap="square" lIns="0" tIns="0" rIns="0" bIns="0" rtlCol="0" anchor="ctr"/>
           <a:lstStyle/>
           <a:p>
-            <a:pPr algn="ctr" indent="0" marL="0">
-              <a:buNone/>
-            </a:pPr>
-            <a:r>
-              <a:rPr lang="en-US" sz="1500" b="1" dirty="0">
-                <a:solidFill>
-                  <a:srgbClr val="FFFFFF"/>
-                </a:solidFill>
-                <a:latin typeface="Calibri" pitchFamily="34" charset="0"/>
-                <a:ea typeface="Calibri" pitchFamily="34" charset="-122"/>
-                <a:cs typeface="Calibri" pitchFamily="34" charset="-120"/>
-              </a:rPr>
-              <a:t>1</a:t>
-            </a:r>
-            <a:endParaRPr lang="en-US" sz="1500" dirty="0"/>
+            <a:pPr indent="0" marL="0">
+              <a:buNone/>
+            </a:pPr>
+            <a:r>
+              <a:rPr lang="en-US" sz="1100" b="1" spc="140" kern="0" dirty="0">
+                <a:solidFill>
+                  <a:srgbClr val="00838F"/>
+                </a:solidFill>
+                <a:latin typeface="Calibri" pitchFamily="34" charset="0"/>
+                <a:ea typeface="Calibri" pitchFamily="34" charset="-122"/>
+                <a:cs typeface="Calibri" pitchFamily="34" charset="-120"/>
+              </a:rPr>
+              <a:t>TEACHING POINT</a:t>
+            </a:r>
+            <a:endParaRPr lang="en-US" sz="1100" dirty="0"/>
           </a:p>
         </p:txBody>
       </p:sp>
@@ -8440,8 +8649,50 @@
         </p:nvSpPr>
         <p:spPr>
           <a:xfrm>
-            <a:off x="1280160" y="1517904"/>
-            <a:ext cx="10143439" cy="841248"/>
+            <a:off x="7660532" y="2121408"/>
+            <a:ext cx="3726491" cy="3291840"/>
+          </a:xfrm>
+          <a:prstGeom prst="rect">
+            <a:avLst/>
+          </a:prstGeom>
+          <a:noFill/>
+          <a:ln/>
+        </p:spPr>
+        <p:txBody>
+          <a:bodyPr wrap="square" lIns="0" tIns="0" rIns="0" bIns="0" rtlCol="0" anchor="t"/>
+          <a:lstStyle/>
+          <a:p>
+            <a:pPr algn="l" indent="0" marL="0">
+              <a:lnSpc>
+                <a:spcPct val="110000"/>
+              </a:lnSpc>
+              <a:buNone/>
+            </a:pPr>
+            <a:r>
+              <a:rPr lang="en-US" sz="1350" dirty="0">
+                <a:solidFill>
+                  <a:srgbClr val="33444F"/>
+                </a:solidFill>
+                <a:latin typeface="Calibri" pitchFamily="34" charset="0"/>
+                <a:ea typeface="Calibri" pitchFamily="34" charset="-122"/>
+                <a:cs typeface="Calibri" pitchFamily="34" charset="-120"/>
+              </a:rPr>
+              <a:t>MRD detects disease below morphologic resolution — a rising molecular marker can flag relapse before the marrow looks abnormal.</a:t>
+            </a:r>
+            <a:endParaRPr lang="en-US" sz="1350" dirty="0"/>
+          </a:p>
+        </p:txBody>
+      </p:sp>
+      <p:sp>
+        <p:nvSpPr>
+          <p:cNvPr id="8" name="Text 6"/>
+          <p:cNvSpPr/>
+          <p:nvPr/>
+        </p:nvSpPr>
+        <p:spPr>
+          <a:xfrm>
+            <a:off x="566928" y="6473952"/>
+            <a:ext cx="7772400" cy="274320"/>
           </a:xfrm>
           <a:prstGeom prst="rect">
             <a:avLst/>
@@ -8457,79 +8708,30 @@
               <a:buNone/>
             </a:pPr>
             <a:r>
-              <a:rPr lang="en-US" sz="1350" dirty="0">
-                <a:solidFill>
-                  <a:srgbClr val="E7EEF4"/>
-                </a:solidFill>
-                <a:latin typeface="Calibri" pitchFamily="34" charset="0"/>
-                <a:ea typeface="Calibri" pitchFamily="34" charset="-122"/>
-                <a:cs typeface="Calibri" pitchFamily="34" charset="-120"/>
-              </a:rPr>
-              <a:t>Recurrent fusions (BCR-ABL1, PML-RARA, CBF) define entities and targets; suspected APL (PML-RARA) is a molecular emergency.</a:t>
-            </a:r>
-            <a:endParaRPr lang="en-US" sz="1350" dirty="0"/>
-          </a:p>
-        </p:txBody>
-      </p:sp>
-      <p:sp>
-        <p:nvSpPr>
-          <p:cNvPr id="8" name="Shape 6"/>
-          <p:cNvSpPr/>
-          <p:nvPr/>
-        </p:nvSpPr>
-        <p:spPr>
-          <a:xfrm>
-            <a:off x="566928" y="2505456"/>
-            <a:ext cx="11057839" cy="841248"/>
-          </a:xfrm>
-          <a:prstGeom prst="roundRect">
-            <a:avLst>
-              <a:gd name="adj" fmla="val 7609"/>
-            </a:avLst>
-          </a:prstGeom>
-          <a:solidFill>
-            <a:srgbClr val="143651"/>
-          </a:solidFill>
-          <a:ln/>
-        </p:spPr>
-      </p:sp>
-      <p:sp>
-        <p:nvSpPr>
-          <p:cNvPr id="9" name="Shape 7"/>
-          <p:cNvSpPr/>
-          <p:nvPr/>
-        </p:nvSpPr>
-        <p:spPr>
-          <a:xfrm>
-            <a:off x="749808" y="2743200"/>
-            <a:ext cx="365760" cy="365760"/>
-          </a:xfrm>
-          <a:prstGeom prst="ellipse">
-            <a:avLst/>
-          </a:prstGeom>
-          <a:solidFill>
-            <a:srgbClr val="00838F"/>
-          </a:solidFill>
-          <a:ln/>
-          <a:effectLst>
-            <a:outerShdw sx="100000" sy="100000" kx="0" ky="0" algn="bl" rotWithShape="0" blurRad="88900" dist="25400" dir="5400000">
-              <a:srgbClr val="22303C">
-                <a:alpha val="12000"/>
-              </a:srgbClr>
-            </a:outerShdw>
-          </a:effectLst>
-        </p:spPr>
-      </p:sp>
-      <p:sp>
-        <p:nvSpPr>
-          <p:cNvPr id="10" name="Text 8"/>
-          <p:cNvSpPr/>
-          <p:nvPr/>
-        </p:nvSpPr>
-        <p:spPr>
-          <a:xfrm>
-            <a:off x="749808" y="2743200"/>
-            <a:ext cx="365760" cy="365760"/>
+              <a:rPr lang="en-US" sz="850" dirty="0">
+                <a:solidFill>
+                  <a:srgbClr val="9AA8B4"/>
+                </a:solidFill>
+                <a:latin typeface="Calibri" pitchFamily="34" charset="0"/>
+                <a:ea typeface="Calibri" pitchFamily="34" charset="-122"/>
+                <a:cs typeface="Calibri" pitchFamily="34" charset="-120"/>
+              </a:rPr>
+              <a:t>Makassed General Hospital  ·  Department of Laboratory Medicine</a:t>
+            </a:r>
+            <a:endParaRPr lang="en-US" sz="850" dirty="0"/>
+          </a:p>
+        </p:txBody>
+      </p:sp>
+      <p:sp>
+        <p:nvSpPr>
+          <p:cNvPr id="9" name="Text 7"/>
+          <p:cNvSpPr/>
+          <p:nvPr/>
+        </p:nvSpPr>
+        <p:spPr>
+          <a:xfrm>
+            <a:off x="9814255" y="6473952"/>
+            <a:ext cx="1828800" cy="274320"/>
           </a:xfrm>
           <a:prstGeom prst="rect">
             <a:avLst/>
@@ -8541,504 +8743,34 @@
           <a:bodyPr wrap="square" lIns="0" tIns="0" rIns="0" bIns="0" rtlCol="0" anchor="ctr"/>
           <a:lstStyle/>
           <a:p>
-            <a:pPr algn="ctr" indent="0" marL="0">
-              <a:buNone/>
-            </a:pPr>
-            <a:r>
-              <a:rPr lang="en-US" sz="1500" b="1" dirty="0">
-                <a:solidFill>
-                  <a:srgbClr val="FFFFFF"/>
-                </a:solidFill>
-                <a:latin typeface="Calibri" pitchFamily="34" charset="0"/>
-                <a:ea typeface="Calibri" pitchFamily="34" charset="-122"/>
-                <a:cs typeface="Calibri" pitchFamily="34" charset="-120"/>
-              </a:rPr>
-              <a:t>2</a:t>
-            </a:r>
-            <a:endParaRPr lang="en-US" sz="1500" dirty="0"/>
-          </a:p>
-        </p:txBody>
-      </p:sp>
-      <p:sp>
-        <p:nvSpPr>
-          <p:cNvPr id="11" name="Text 9"/>
-          <p:cNvSpPr/>
-          <p:nvPr/>
-        </p:nvSpPr>
-        <p:spPr>
-          <a:xfrm>
-            <a:off x="1280160" y="2505456"/>
-            <a:ext cx="10143439" cy="841248"/>
-          </a:xfrm>
-          <a:prstGeom prst="rect">
-            <a:avLst/>
-          </a:prstGeom>
-          <a:noFill/>
-          <a:ln/>
-        </p:spPr>
-        <p:txBody>
-          <a:bodyPr wrap="square" lIns="0" tIns="0" rIns="0" bIns="0" rtlCol="0" anchor="ctr"/>
-          <a:lstStyle/>
-          <a:p>
-            <a:pPr algn="l" indent="0" marL="0">
-              <a:buNone/>
-            </a:pPr>
-            <a:r>
-              <a:rPr lang="en-US" sz="1350" dirty="0">
-                <a:solidFill>
-                  <a:srgbClr val="E7EEF4"/>
-                </a:solidFill>
-                <a:latin typeface="Calibri" pitchFamily="34" charset="0"/>
-                <a:ea typeface="Calibri" pitchFamily="34" charset="-122"/>
-                <a:cs typeface="Calibri" pitchFamily="34" charset="-120"/>
-              </a:rPr>
-              <a:t>Prognostic mutations (FLT3, NPM1, TP53; JAK2/CALR/MPL) are increasingly assessed together on NGS.</a:t>
-            </a:r>
-            <a:endParaRPr lang="en-US" sz="1350" dirty="0"/>
-          </a:p>
-        </p:txBody>
-      </p:sp>
-      <p:sp>
-        <p:nvSpPr>
-          <p:cNvPr id="12" name="Shape 10"/>
-          <p:cNvSpPr/>
-          <p:nvPr/>
-        </p:nvSpPr>
-        <p:spPr>
-          <a:xfrm>
-            <a:off x="566928" y="3493008"/>
-            <a:ext cx="11057839" cy="841248"/>
-          </a:xfrm>
-          <a:prstGeom prst="roundRect">
-            <a:avLst>
-              <a:gd name="adj" fmla="val 7609"/>
-            </a:avLst>
-          </a:prstGeom>
-          <a:solidFill>
-            <a:srgbClr val="143651"/>
-          </a:solidFill>
-          <a:ln/>
-        </p:spPr>
-      </p:sp>
-      <p:sp>
-        <p:nvSpPr>
-          <p:cNvPr id="13" name="Shape 11"/>
-          <p:cNvSpPr/>
-          <p:nvPr/>
-        </p:nvSpPr>
-        <p:spPr>
-          <a:xfrm>
-            <a:off x="749808" y="3730752"/>
-            <a:ext cx="365760" cy="365760"/>
-          </a:xfrm>
-          <a:prstGeom prst="ellipse">
-            <a:avLst/>
-          </a:prstGeom>
-          <a:solidFill>
-            <a:srgbClr val="00838F"/>
-          </a:solidFill>
-          <a:ln/>
-          <a:effectLst>
-            <a:outerShdw sx="100000" sy="100000" kx="0" ky="0" algn="bl" rotWithShape="0" blurRad="88900" dist="25400" dir="5400000">
-              <a:srgbClr val="22303C">
-                <a:alpha val="12000"/>
-              </a:srgbClr>
-            </a:outerShdw>
-          </a:effectLst>
-        </p:spPr>
-      </p:sp>
-      <p:sp>
-        <p:nvSpPr>
-          <p:cNvPr id="14" name="Text 12"/>
-          <p:cNvSpPr/>
-          <p:nvPr/>
-        </p:nvSpPr>
-        <p:spPr>
-          <a:xfrm>
-            <a:off x="749808" y="3730752"/>
-            <a:ext cx="365760" cy="365760"/>
-          </a:xfrm>
-          <a:prstGeom prst="rect">
-            <a:avLst/>
-          </a:prstGeom>
-          <a:noFill/>
-          <a:ln/>
-        </p:spPr>
-        <p:txBody>
-          <a:bodyPr wrap="square" lIns="0" tIns="0" rIns="0" bIns="0" rtlCol="0" anchor="ctr"/>
-          <a:lstStyle/>
-          <a:p>
-            <a:pPr algn="ctr" indent="0" marL="0">
-              <a:buNone/>
-            </a:pPr>
-            <a:r>
-              <a:rPr lang="en-US" sz="1500" b="1" dirty="0">
-                <a:solidFill>
-                  <a:srgbClr val="FFFFFF"/>
-                </a:solidFill>
-                <a:latin typeface="Calibri" pitchFamily="34" charset="0"/>
-                <a:ea typeface="Calibri" pitchFamily="34" charset="-122"/>
-                <a:cs typeface="Calibri" pitchFamily="34" charset="-120"/>
-              </a:rPr>
-              <a:t>3</a:t>
-            </a:r>
-            <a:endParaRPr lang="en-US" sz="1500" dirty="0"/>
-          </a:p>
-        </p:txBody>
-      </p:sp>
-      <p:sp>
-        <p:nvSpPr>
-          <p:cNvPr id="15" name="Text 13"/>
-          <p:cNvSpPr/>
-          <p:nvPr/>
-        </p:nvSpPr>
-        <p:spPr>
-          <a:xfrm>
-            <a:off x="1280160" y="3493008"/>
-            <a:ext cx="10143439" cy="841248"/>
-          </a:xfrm>
-          <a:prstGeom prst="rect">
-            <a:avLst/>
-          </a:prstGeom>
-          <a:noFill/>
-          <a:ln/>
-        </p:spPr>
-        <p:txBody>
-          <a:bodyPr wrap="square" lIns="0" tIns="0" rIns="0" bIns="0" rtlCol="0" anchor="ctr"/>
-          <a:lstStyle/>
-          <a:p>
-            <a:pPr algn="l" indent="0" marL="0">
-              <a:buNone/>
-            </a:pPr>
-            <a:r>
-              <a:rPr lang="en-US" sz="1350" dirty="0">
-                <a:solidFill>
-                  <a:srgbClr val="E7EEF4"/>
-                </a:solidFill>
-                <a:latin typeface="Calibri" pitchFamily="34" charset="0"/>
-                <a:ea typeface="Calibri" pitchFamily="34" charset="-122"/>
-                <a:cs typeface="Calibri" pitchFamily="34" charset="-120"/>
-              </a:rPr>
-              <a:t>Clonality (IGH/TCR) supports — but does not equal — malignancy; interpret in context.</a:t>
-            </a:r>
-            <a:endParaRPr lang="en-US" sz="1350" dirty="0"/>
-          </a:p>
-        </p:txBody>
-      </p:sp>
-      <p:sp>
-        <p:nvSpPr>
-          <p:cNvPr id="16" name="Shape 14"/>
-          <p:cNvSpPr/>
-          <p:nvPr/>
-        </p:nvSpPr>
-        <p:spPr>
-          <a:xfrm>
-            <a:off x="566928" y="4480560"/>
-            <a:ext cx="11057839" cy="841248"/>
-          </a:xfrm>
-          <a:prstGeom prst="roundRect">
-            <a:avLst>
-              <a:gd name="adj" fmla="val 7609"/>
-            </a:avLst>
-          </a:prstGeom>
-          <a:solidFill>
-            <a:srgbClr val="143651"/>
-          </a:solidFill>
-          <a:ln/>
-        </p:spPr>
-      </p:sp>
-      <p:sp>
-        <p:nvSpPr>
-          <p:cNvPr id="17" name="Shape 15"/>
-          <p:cNvSpPr/>
-          <p:nvPr/>
-        </p:nvSpPr>
-        <p:spPr>
-          <a:xfrm>
-            <a:off x="749808" y="4718304"/>
-            <a:ext cx="365760" cy="365760"/>
-          </a:xfrm>
-          <a:prstGeom prst="ellipse">
-            <a:avLst/>
-          </a:prstGeom>
-          <a:solidFill>
-            <a:srgbClr val="00838F"/>
-          </a:solidFill>
-          <a:ln/>
-          <a:effectLst>
-            <a:outerShdw sx="100000" sy="100000" kx="0" ky="0" algn="bl" rotWithShape="0" blurRad="88900" dist="25400" dir="5400000">
-              <a:srgbClr val="22303C">
-                <a:alpha val="12000"/>
-              </a:srgbClr>
-            </a:outerShdw>
-          </a:effectLst>
-        </p:spPr>
-      </p:sp>
-      <p:sp>
-        <p:nvSpPr>
-          <p:cNvPr id="18" name="Text 16"/>
-          <p:cNvSpPr/>
-          <p:nvPr/>
-        </p:nvSpPr>
-        <p:spPr>
-          <a:xfrm>
-            <a:off x="749808" y="4718304"/>
-            <a:ext cx="365760" cy="365760"/>
-          </a:xfrm>
-          <a:prstGeom prst="rect">
-            <a:avLst/>
-          </a:prstGeom>
-          <a:noFill/>
-          <a:ln/>
-        </p:spPr>
-        <p:txBody>
-          <a:bodyPr wrap="square" lIns="0" tIns="0" rIns="0" bIns="0" rtlCol="0" anchor="ctr"/>
-          <a:lstStyle/>
-          <a:p>
-            <a:pPr algn="ctr" indent="0" marL="0">
-              <a:buNone/>
-            </a:pPr>
-            <a:r>
-              <a:rPr lang="en-US" sz="1500" b="1" dirty="0">
-                <a:solidFill>
-                  <a:srgbClr val="FFFFFF"/>
-                </a:solidFill>
-                <a:latin typeface="Calibri" pitchFamily="34" charset="0"/>
-                <a:ea typeface="Calibri" pitchFamily="34" charset="-122"/>
-                <a:cs typeface="Calibri" pitchFamily="34" charset="-120"/>
-              </a:rPr>
-              <a:t>4</a:t>
-            </a:r>
-            <a:endParaRPr lang="en-US" sz="1500" dirty="0"/>
-          </a:p>
-        </p:txBody>
-      </p:sp>
-      <p:sp>
-        <p:nvSpPr>
-          <p:cNvPr id="19" name="Text 17"/>
-          <p:cNvSpPr/>
-          <p:nvPr/>
-        </p:nvSpPr>
-        <p:spPr>
-          <a:xfrm>
-            <a:off x="1280160" y="4480560"/>
-            <a:ext cx="10143439" cy="841248"/>
-          </a:xfrm>
-          <a:prstGeom prst="rect">
-            <a:avLst/>
-          </a:prstGeom>
-          <a:noFill/>
-          <a:ln/>
-        </p:spPr>
-        <p:txBody>
-          <a:bodyPr wrap="square" lIns="0" tIns="0" rIns="0" bIns="0" rtlCol="0" anchor="ctr"/>
-          <a:lstStyle/>
-          <a:p>
-            <a:pPr algn="l" indent="0" marL="0">
-              <a:buNone/>
-            </a:pPr>
-            <a:r>
-              <a:rPr lang="en-US" sz="1350" dirty="0">
-                <a:solidFill>
-                  <a:srgbClr val="E7EEF4"/>
-                </a:solidFill>
-                <a:latin typeface="Calibri" pitchFamily="34" charset="0"/>
-                <a:ea typeface="Calibri" pitchFamily="34" charset="-122"/>
-                <a:cs typeface="Calibri" pitchFamily="34" charset="-120"/>
-              </a:rPr>
-              <a:t>MRD by quantitative RT-PCR, flow, or NGS is prognostic and guides therapy; follow trends on a consistent method.</a:t>
-            </a:r>
-            <a:endParaRPr lang="en-US" sz="1350" dirty="0"/>
-          </a:p>
-        </p:txBody>
-      </p:sp>
-      <p:sp>
-        <p:nvSpPr>
-          <p:cNvPr id="20" name="Shape 18"/>
-          <p:cNvSpPr/>
-          <p:nvPr/>
-        </p:nvSpPr>
-        <p:spPr>
-          <a:xfrm>
-            <a:off x="566928" y="5468112"/>
-            <a:ext cx="11057839" cy="841248"/>
-          </a:xfrm>
-          <a:prstGeom prst="roundRect">
-            <a:avLst>
-              <a:gd name="adj" fmla="val 7609"/>
-            </a:avLst>
-          </a:prstGeom>
-          <a:solidFill>
-            <a:srgbClr val="143651"/>
-          </a:solidFill>
-          <a:ln/>
-        </p:spPr>
-      </p:sp>
-      <p:sp>
-        <p:nvSpPr>
-          <p:cNvPr id="21" name="Shape 19"/>
-          <p:cNvSpPr/>
-          <p:nvPr/>
-        </p:nvSpPr>
-        <p:spPr>
-          <a:xfrm>
-            <a:off x="749808" y="5705856"/>
-            <a:ext cx="365760" cy="365760"/>
-          </a:xfrm>
-          <a:prstGeom prst="ellipse">
-            <a:avLst/>
-          </a:prstGeom>
-          <a:solidFill>
-            <a:srgbClr val="00838F"/>
-          </a:solidFill>
-          <a:ln/>
-          <a:effectLst>
-            <a:outerShdw sx="100000" sy="100000" kx="0" ky="0" algn="bl" rotWithShape="0" blurRad="88900" dist="25400" dir="5400000">
-              <a:srgbClr val="22303C">
-                <a:alpha val="12000"/>
-              </a:srgbClr>
-            </a:outerShdw>
-          </a:effectLst>
-        </p:spPr>
-      </p:sp>
-      <p:sp>
-        <p:nvSpPr>
-          <p:cNvPr id="22" name="Text 20"/>
-          <p:cNvSpPr/>
-          <p:nvPr/>
-        </p:nvSpPr>
-        <p:spPr>
-          <a:xfrm>
-            <a:off x="749808" y="5705856"/>
-            <a:ext cx="365760" cy="365760"/>
-          </a:xfrm>
-          <a:prstGeom prst="rect">
-            <a:avLst/>
-          </a:prstGeom>
-          <a:noFill/>
-          <a:ln/>
-        </p:spPr>
-        <p:txBody>
-          <a:bodyPr wrap="square" lIns="0" tIns="0" rIns="0" bIns="0" rtlCol="0" anchor="ctr"/>
-          <a:lstStyle/>
-          <a:p>
-            <a:pPr algn="ctr" indent="0" marL="0">
-              <a:buNone/>
-            </a:pPr>
-            <a:r>
-              <a:rPr lang="en-US" sz="1500" b="1" dirty="0">
-                <a:solidFill>
-                  <a:srgbClr val="FFFFFF"/>
-                </a:solidFill>
-                <a:latin typeface="Calibri" pitchFamily="34" charset="0"/>
-                <a:ea typeface="Calibri" pitchFamily="34" charset="-122"/>
-                <a:cs typeface="Calibri" pitchFamily="34" charset="-120"/>
-              </a:rPr>
-              <a:t>5</a:t>
-            </a:r>
-            <a:endParaRPr lang="en-US" sz="1500" dirty="0"/>
-          </a:p>
-        </p:txBody>
-      </p:sp>
-      <p:sp>
-        <p:nvSpPr>
-          <p:cNvPr id="23" name="Text 21"/>
-          <p:cNvSpPr/>
-          <p:nvPr/>
-        </p:nvSpPr>
-        <p:spPr>
-          <a:xfrm>
-            <a:off x="1280160" y="5468112"/>
-            <a:ext cx="10143439" cy="841248"/>
-          </a:xfrm>
-          <a:prstGeom prst="rect">
-            <a:avLst/>
-          </a:prstGeom>
-          <a:noFill/>
-          <a:ln/>
-        </p:spPr>
-        <p:txBody>
-          <a:bodyPr wrap="square" lIns="0" tIns="0" rIns="0" bIns="0" rtlCol="0" anchor="ctr"/>
-          <a:lstStyle/>
-          <a:p>
-            <a:pPr algn="l" indent="0" marL="0">
-              <a:buNone/>
-            </a:pPr>
-            <a:r>
-              <a:rPr lang="en-US" sz="1350" dirty="0">
-                <a:solidFill>
-                  <a:srgbClr val="E7EEF4"/>
-                </a:solidFill>
-                <a:latin typeface="Calibri" pitchFamily="34" charset="0"/>
-                <a:ea typeface="Calibri" pitchFamily="34" charset="-122"/>
-                <a:cs typeface="Calibri" pitchFamily="34" charset="-120"/>
-              </a:rPr>
-              <a:t>Report an INTEGRATED diagnosis (morphology + flow + cytogenetics + molecular) and ensure sample adequacy.</a:t>
-            </a:r>
-            <a:endParaRPr lang="en-US" sz="1350" dirty="0"/>
-          </a:p>
-        </p:txBody>
-      </p:sp>
-      <p:sp>
-        <p:nvSpPr>
-          <p:cNvPr id="24" name="Text 22"/>
-          <p:cNvSpPr/>
-          <p:nvPr/>
-        </p:nvSpPr>
-        <p:spPr>
-          <a:xfrm>
-            <a:off x="566928" y="6473952"/>
-            <a:ext cx="8229600" cy="274320"/>
-          </a:xfrm>
-          <a:prstGeom prst="rect">
-            <a:avLst/>
-          </a:prstGeom>
-          <a:noFill/>
-          <a:ln/>
-        </p:spPr>
-        <p:txBody>
-          <a:bodyPr wrap="square" lIns="0" tIns="0" rIns="0" bIns="0" rtlCol="0" anchor="ctr"/>
-          <a:lstStyle/>
-          <a:p>
-            <a:pPr indent="0" marL="0">
+            <a:pPr algn="r" indent="0" marL="0">
               <a:buNone/>
             </a:pPr>
             <a:r>
               <a:rPr lang="en-US" sz="850" dirty="0">
                 <a:solidFill>
-                  <a:srgbClr val="5E7488"/>
-                </a:solidFill>
-                <a:latin typeface="Calibri" pitchFamily="34" charset="0"/>
-                <a:ea typeface="Calibri" pitchFamily="34" charset="-122"/>
-                <a:cs typeface="Calibri" pitchFamily="34" charset="-120"/>
-              </a:rPr>
-              <a:t>Makassed General Hospital  ·  Department of Laboratory Medicine</a:t>
-            </a:r>
-            <a:endParaRPr lang="en-US" sz="850" dirty="0"/>
-          </a:p>
-        </p:txBody>
-      </p:sp>
-      <p:sp>
-        <p:nvSpPr>
-          <p:cNvPr id="25" name="Text 23"/>
-          <p:cNvSpPr/>
-          <p:nvPr/>
-        </p:nvSpPr>
-        <p:spPr>
-          <a:xfrm>
-            <a:off x="11002975" y="6473952"/>
-            <a:ext cx="640080" cy="274320"/>
-          </a:xfrm>
-          <a:prstGeom prst="rect">
-            <a:avLst/>
-          </a:prstGeom>
-          <a:noFill/>
-          <a:ln/>
-        </p:spPr>
-        <p:txBody>
-          <a:bodyPr wrap="square" lIns="0" tIns="0" rIns="0" bIns="0" rtlCol="0" anchor="ctr"/>
-          <a:lstStyle/>
-          <a:p>
+                  <a:srgbClr val="9AA8B4"/>
+                </a:solidFill>
+                <a:latin typeface="Calibri" pitchFamily="34" charset="0"/>
+                <a:ea typeface="Calibri" pitchFamily="34" charset="-122"/>
+                <a:cs typeface="Calibri" pitchFamily="34" charset="-120"/>
+              </a:rPr>
+              <a:t>CP Lecture Series</a:t>
+            </a:r>
+            <a:pPr algn="r" indent="0" marL="0">
+              <a:buNone/>
+            </a:pPr>
+            <a:r>
+              <a:rPr lang="en-US" sz="850" dirty="0">
+                <a:solidFill>
+                  <a:srgbClr val="DCE4EC"/>
+                </a:solidFill>
+                <a:latin typeface="Calibri" pitchFamily="34" charset="0"/>
+                <a:ea typeface="Calibri" pitchFamily="34" charset="-122"/>
+                <a:cs typeface="Calibri" pitchFamily="34" charset="-120"/>
+              </a:rPr>
+              <a:t>   ·   </a:t>
+            </a:r>
             <a:pPr algn="r" indent="0" marL="0">
               <a:buNone/>
             </a:pPr>
@@ -9122,6 +8854,2845 @@
                 <a:ea typeface="Calibri" pitchFamily="34" charset="-122"/>
                 <a:cs typeface="Calibri" pitchFamily="34" charset="-120"/>
               </a:rPr>
+              <a:t>MOLECULAR &amp; CYTOGENETICS   ·   BOARD REVIEW  ·  Q1</a:t>
+            </a:r>
+            <a:endParaRPr lang="en-US" sz="1100" dirty="0"/>
+          </a:p>
+        </p:txBody>
+      </p:sp>
+      <p:sp>
+        <p:nvSpPr>
+          <p:cNvPr id="3" name="Text 1"/>
+          <p:cNvSpPr/>
+          <p:nvPr/>
+        </p:nvSpPr>
+        <p:spPr>
+          <a:xfrm>
+            <a:off x="566928" y="713232"/>
+            <a:ext cx="11064240" cy="749808"/>
+          </a:xfrm>
+          <a:prstGeom prst="rect">
+            <a:avLst/>
+          </a:prstGeom>
+          <a:noFill/>
+          <a:ln/>
+        </p:spPr>
+        <p:txBody>
+          <a:bodyPr wrap="square" lIns="0" tIns="0" rIns="0" bIns="0" rtlCol="0" anchor="ctr"/>
+          <a:lstStyle/>
+          <a:p>
+            <a:pPr algn="l" indent="0" marL="0">
+              <a:buNone/>
+            </a:pPr>
+            <a:r>
+              <a:rPr lang="en-US" sz="2600" b="1" dirty="0">
+                <a:solidFill>
+                  <a:srgbClr val="0E3A5F"/>
+                </a:solidFill>
+                <a:latin typeface="Calibri" pitchFamily="34" charset="0"/>
+                <a:ea typeface="Calibri" pitchFamily="34" charset="-122"/>
+                <a:cs typeface="Calibri" pitchFamily="34" charset="-120"/>
+              </a:rPr>
+              <a:t>Board-Style Review</a:t>
+            </a:r>
+            <a:endParaRPr lang="en-US" sz="2600" dirty="0"/>
+          </a:p>
+        </p:txBody>
+      </p:sp>
+      <p:sp>
+        <p:nvSpPr>
+          <p:cNvPr id="4" name="Text 2"/>
+          <p:cNvSpPr/>
+          <p:nvPr/>
+        </p:nvSpPr>
+        <p:spPr>
+          <a:xfrm>
+            <a:off x="566928" y="1417320"/>
+            <a:ext cx="11057839" cy="914400"/>
+          </a:xfrm>
+          <a:prstGeom prst="rect">
+            <a:avLst/>
+          </a:prstGeom>
+          <a:noFill/>
+          <a:ln/>
+        </p:spPr>
+        <p:txBody>
+          <a:bodyPr wrap="square" lIns="0" tIns="0" rIns="0" bIns="0" rtlCol="0" anchor="t"/>
+          <a:lstStyle/>
+          <a:p>
+            <a:pPr algn="l" indent="0" marL="0">
+              <a:lnSpc>
+                <a:spcPct val="105000"/>
+              </a:lnSpc>
+              <a:buNone/>
+            </a:pPr>
+            <a:r>
+              <a:rPr lang="en-US" sz="1450" b="1" dirty="0">
+                <a:solidFill>
+                  <a:srgbClr val="1B2A38"/>
+                </a:solidFill>
+                <a:latin typeface="Calibri" pitchFamily="34" charset="0"/>
+                <a:ea typeface="Calibri" pitchFamily="34" charset="-122"/>
+                <a:cs typeface="Calibri" pitchFamily="34" charset="-120"/>
+              </a:rPr>
+              <a:t>BCR-ABL1 quantitative monitoring in CML is reported on the:</a:t>
+            </a:r>
+            <a:endParaRPr lang="en-US" sz="1450" dirty="0"/>
+          </a:p>
+        </p:txBody>
+      </p:sp>
+      <p:sp>
+        <p:nvSpPr>
+          <p:cNvPr id="5" name="Text 3"/>
+          <p:cNvSpPr/>
+          <p:nvPr/>
+        </p:nvSpPr>
+        <p:spPr>
+          <a:xfrm>
+            <a:off x="658368" y="2395728"/>
+            <a:ext cx="6192390" cy="3017520"/>
+          </a:xfrm>
+          <a:prstGeom prst="rect">
+            <a:avLst/>
+          </a:prstGeom>
+          <a:noFill/>
+          <a:ln/>
+        </p:spPr>
+        <p:txBody>
+          <a:bodyPr wrap="square" lIns="0" tIns="0" rIns="0" bIns="0" rtlCol="0" anchor="t"/>
+          <a:lstStyle/>
+          <a:p>
+            <a:pPr algn="l" indent="0" marL="0">
+              <a:spcAft>
+                <a:spcPts val="600"/>
+              </a:spcAft>
+              <a:buNone/>
+            </a:pPr>
+            <a:r>
+              <a:rPr lang="en-US" sz="1350" dirty="0">
+                <a:solidFill>
+                  <a:srgbClr val="33444F"/>
+                </a:solidFill>
+                <a:latin typeface="Calibri" pitchFamily="34" charset="0"/>
+                <a:ea typeface="Calibri" pitchFamily="34" charset="-122"/>
+                <a:cs typeface="Calibri" pitchFamily="34" charset="-120"/>
+              </a:rPr>
+              <a:t>A. Local arbitrary scale</a:t>
+            </a:r>
+            <a:endParaRPr lang="en-US" sz="1350" dirty="0"/>
+          </a:p>
+          <a:p>
+            <a:pPr algn="l" indent="0" marL="0">
+              <a:spcAft>
+                <a:spcPts val="600"/>
+              </a:spcAft>
+              <a:buNone/>
+            </a:pPr>
+            <a:r>
+              <a:rPr lang="en-US" sz="1350" b="1" dirty="0">
+                <a:solidFill>
+                  <a:srgbClr val="005A63"/>
+                </a:solidFill>
+                <a:latin typeface="Calibri" pitchFamily="34" charset="0"/>
+                <a:ea typeface="Calibri" pitchFamily="34" charset="-122"/>
+                <a:cs typeface="Calibri" pitchFamily="34" charset="-120"/>
+              </a:rPr>
+              <a:t>B. International Scale (IS)</a:t>
+            </a:r>
+            <a:endParaRPr lang="en-US" sz="1350" dirty="0"/>
+          </a:p>
+          <a:p>
+            <a:pPr algn="l" indent="0" marL="0">
+              <a:spcAft>
+                <a:spcPts val="600"/>
+              </a:spcAft>
+              <a:buNone/>
+            </a:pPr>
+            <a:r>
+              <a:rPr lang="en-US" sz="1350" dirty="0">
+                <a:solidFill>
+                  <a:srgbClr val="33444F"/>
+                </a:solidFill>
+                <a:latin typeface="Calibri" pitchFamily="34" charset="0"/>
+                <a:ea typeface="Calibri" pitchFamily="34" charset="-122"/>
+                <a:cs typeface="Calibri" pitchFamily="34" charset="-120"/>
+              </a:rPr>
+              <a:t>C. Ct only</a:t>
+            </a:r>
+            <a:endParaRPr lang="en-US" sz="1350" dirty="0"/>
+          </a:p>
+          <a:p>
+            <a:pPr algn="l" indent="0" marL="0">
+              <a:spcAft>
+                <a:spcPts val="600"/>
+              </a:spcAft>
+              <a:buNone/>
+            </a:pPr>
+            <a:r>
+              <a:rPr lang="en-US" sz="1350" dirty="0">
+                <a:solidFill>
+                  <a:srgbClr val="33444F"/>
+                </a:solidFill>
+                <a:latin typeface="Calibri" pitchFamily="34" charset="0"/>
+                <a:ea typeface="Calibri" pitchFamily="34" charset="-122"/>
+                <a:cs typeface="Calibri" pitchFamily="34" charset="-120"/>
+              </a:rPr>
+              <a:t>D. Karyotype score</a:t>
+            </a:r>
+            <a:endParaRPr lang="en-US" sz="1350" dirty="0"/>
+          </a:p>
+          <a:p>
+            <a:pPr algn="l" indent="0" marL="0">
+              <a:spcAft>
+                <a:spcPts val="600"/>
+              </a:spcAft>
+              <a:buNone/>
+            </a:pPr>
+            <a:r>
+              <a:rPr lang="en-US" sz="1350" dirty="0">
+                <a:solidFill>
+                  <a:srgbClr val="33444F"/>
+                </a:solidFill>
+                <a:latin typeface="Calibri" pitchFamily="34" charset="0"/>
+                <a:ea typeface="Calibri" pitchFamily="34" charset="-122"/>
+                <a:cs typeface="Calibri" pitchFamily="34" charset="-120"/>
+              </a:rPr>
+              <a:t>E. VAF percentage</a:t>
+            </a:r>
+            <a:endParaRPr lang="en-US" sz="1350" dirty="0"/>
+          </a:p>
+        </p:txBody>
+      </p:sp>
+      <p:sp>
+        <p:nvSpPr>
+          <p:cNvPr id="6" name="Shape 4"/>
+          <p:cNvSpPr/>
+          <p:nvPr/>
+        </p:nvSpPr>
+        <p:spPr>
+          <a:xfrm>
+            <a:off x="7201632" y="2395728"/>
+            <a:ext cx="4423136" cy="3246120"/>
+          </a:xfrm>
+          <a:prstGeom prst="roundRect">
+            <a:avLst>
+              <a:gd name="adj" fmla="val 2535"/>
+            </a:avLst>
+          </a:prstGeom>
+          <a:solidFill>
+            <a:srgbClr val="E0F2F4"/>
+          </a:solidFill>
+          <a:ln/>
+          <a:effectLst>
+            <a:outerShdw sx="100000" sy="100000" kx="0" ky="0" algn="bl" rotWithShape="0" blurRad="88900" dist="25400" dir="5400000">
+              <a:srgbClr val="22303C">
+                <a:alpha val="12000"/>
+              </a:srgbClr>
+            </a:outerShdw>
+          </a:effectLst>
+        </p:spPr>
+      </p:sp>
+      <p:sp>
+        <p:nvSpPr>
+          <p:cNvPr id="7" name="Text 5"/>
+          <p:cNvSpPr/>
+          <p:nvPr/>
+        </p:nvSpPr>
+        <p:spPr>
+          <a:xfrm>
+            <a:off x="7439376" y="2578608"/>
+            <a:ext cx="3965936" cy="457200"/>
+          </a:xfrm>
+          <a:prstGeom prst="rect">
+            <a:avLst/>
+          </a:prstGeom>
+          <a:noFill/>
+          <a:ln/>
+        </p:spPr>
+        <p:txBody>
+          <a:bodyPr wrap="square" lIns="0" tIns="0" rIns="0" bIns="0" rtlCol="0" anchor="ctr"/>
+          <a:lstStyle/>
+          <a:p>
+            <a:pPr indent="0" marL="0">
+              <a:buNone/>
+            </a:pPr>
+            <a:r>
+              <a:rPr lang="en-US" sz="1500" b="1" dirty="0">
+                <a:solidFill>
+                  <a:srgbClr val="00838F"/>
+                </a:solidFill>
+                <a:latin typeface="Calibri" pitchFamily="34" charset="0"/>
+                <a:ea typeface="Calibri" pitchFamily="34" charset="-122"/>
+                <a:cs typeface="Calibri" pitchFamily="34" charset="-120"/>
+              </a:rPr>
+              <a:t>ANSWER  </a:t>
+            </a:r>
+            <a:pPr indent="0" marL="0">
+              <a:buNone/>
+            </a:pPr>
+            <a:r>
+              <a:rPr lang="en-US" sz="1500" b="1" dirty="0">
+                <a:solidFill>
+                  <a:srgbClr val="1B2A38"/>
+                </a:solidFill>
+                <a:latin typeface="Calibri" pitchFamily="34" charset="0"/>
+                <a:ea typeface="Calibri" pitchFamily="34" charset="-122"/>
+                <a:cs typeface="Calibri" pitchFamily="34" charset="-120"/>
+              </a:rPr>
+              <a:t>B — International Scale</a:t>
+            </a:r>
+            <a:endParaRPr lang="en-US" sz="1500" dirty="0"/>
+          </a:p>
+        </p:txBody>
+      </p:sp>
+      <p:sp>
+        <p:nvSpPr>
+          <p:cNvPr id="8" name="Text 6"/>
+          <p:cNvSpPr/>
+          <p:nvPr/>
+        </p:nvSpPr>
+        <p:spPr>
+          <a:xfrm>
+            <a:off x="7439376" y="3127248"/>
+            <a:ext cx="3947648" cy="2377440"/>
+          </a:xfrm>
+          <a:prstGeom prst="rect">
+            <a:avLst/>
+          </a:prstGeom>
+          <a:noFill/>
+          <a:ln/>
+        </p:spPr>
+        <p:txBody>
+          <a:bodyPr wrap="square" lIns="0" tIns="0" rIns="0" bIns="0" rtlCol="0" anchor="t"/>
+          <a:lstStyle/>
+          <a:p>
+            <a:pPr algn="l" indent="0" marL="0">
+              <a:lnSpc>
+                <a:spcPct val="108000"/>
+              </a:lnSpc>
+              <a:buNone/>
+            </a:pPr>
+            <a:r>
+              <a:rPr lang="en-US" sz="1250" dirty="0">
+                <a:solidFill>
+                  <a:srgbClr val="33444F"/>
+                </a:solidFill>
+                <a:latin typeface="Calibri" pitchFamily="34" charset="0"/>
+                <a:ea typeface="Calibri" pitchFamily="34" charset="-122"/>
+                <a:cs typeface="Calibri" pitchFamily="34" charset="-120"/>
+              </a:rPr>
+              <a:t>Standardized IS reporting enables comparison of BCR-ABL1 levels across laboratories and time.</a:t>
+            </a:r>
+            <a:endParaRPr lang="en-US" sz="1250" dirty="0"/>
+          </a:p>
+        </p:txBody>
+      </p:sp>
+      <p:sp>
+        <p:nvSpPr>
+          <p:cNvPr id="9" name="Text 7"/>
+          <p:cNvSpPr/>
+          <p:nvPr/>
+        </p:nvSpPr>
+        <p:spPr>
+          <a:xfrm>
+            <a:off x="566928" y="6473952"/>
+            <a:ext cx="7772400" cy="274320"/>
+          </a:xfrm>
+          <a:prstGeom prst="rect">
+            <a:avLst/>
+          </a:prstGeom>
+          <a:noFill/>
+          <a:ln/>
+        </p:spPr>
+        <p:txBody>
+          <a:bodyPr wrap="square" lIns="0" tIns="0" rIns="0" bIns="0" rtlCol="0" anchor="ctr"/>
+          <a:lstStyle/>
+          <a:p>
+            <a:pPr algn="l" indent="0" marL="0">
+              <a:buNone/>
+            </a:pPr>
+            <a:r>
+              <a:rPr lang="en-US" sz="850" dirty="0">
+                <a:solidFill>
+                  <a:srgbClr val="9AA8B4"/>
+                </a:solidFill>
+                <a:latin typeface="Calibri" pitchFamily="34" charset="0"/>
+                <a:ea typeface="Calibri" pitchFamily="34" charset="-122"/>
+                <a:cs typeface="Calibri" pitchFamily="34" charset="-120"/>
+              </a:rPr>
+              <a:t>Makassed General Hospital  ·  Department of Laboratory Medicine</a:t>
+            </a:r>
+            <a:endParaRPr lang="en-US" sz="850" dirty="0"/>
+          </a:p>
+        </p:txBody>
+      </p:sp>
+      <p:sp>
+        <p:nvSpPr>
+          <p:cNvPr id="10" name="Text 8"/>
+          <p:cNvSpPr/>
+          <p:nvPr/>
+        </p:nvSpPr>
+        <p:spPr>
+          <a:xfrm>
+            <a:off x="9814255" y="6473952"/>
+            <a:ext cx="1828800" cy="274320"/>
+          </a:xfrm>
+          <a:prstGeom prst="rect">
+            <a:avLst/>
+          </a:prstGeom>
+          <a:noFill/>
+          <a:ln/>
+        </p:spPr>
+        <p:txBody>
+          <a:bodyPr wrap="square" lIns="0" tIns="0" rIns="0" bIns="0" rtlCol="0" anchor="ctr"/>
+          <a:lstStyle/>
+          <a:p>
+            <a:pPr algn="r" indent="0" marL="0">
+              <a:buNone/>
+            </a:pPr>
+            <a:r>
+              <a:rPr lang="en-US" sz="850" dirty="0">
+                <a:solidFill>
+                  <a:srgbClr val="9AA8B4"/>
+                </a:solidFill>
+                <a:latin typeface="Calibri" pitchFamily="34" charset="0"/>
+                <a:ea typeface="Calibri" pitchFamily="34" charset="-122"/>
+                <a:cs typeface="Calibri" pitchFamily="34" charset="-120"/>
+              </a:rPr>
+              <a:t>CP Lecture Series</a:t>
+            </a:r>
+            <a:pPr algn="r" indent="0" marL="0">
+              <a:buNone/>
+            </a:pPr>
+            <a:r>
+              <a:rPr lang="en-US" sz="850" dirty="0">
+                <a:solidFill>
+                  <a:srgbClr val="DCE4EC"/>
+                </a:solidFill>
+                <a:latin typeface="Calibri" pitchFamily="34" charset="0"/>
+                <a:ea typeface="Calibri" pitchFamily="34" charset="-122"/>
+                <a:cs typeface="Calibri" pitchFamily="34" charset="-120"/>
+              </a:rPr>
+              <a:t>   ·   </a:t>
+            </a:r>
+            <a:pPr algn="r" indent="0" marL="0">
+              <a:buNone/>
+            </a:pPr>
+            <a:r>
+              <a:rPr lang="en-US" sz="850" b="1" dirty="0">
+                <a:solidFill>
+                  <a:srgbClr val="00838F"/>
+                </a:solidFill>
+                <a:latin typeface="Calibri" pitchFamily="34" charset="0"/>
+                <a:ea typeface="Calibri" pitchFamily="34" charset="-122"/>
+                <a:cs typeface="Calibri" pitchFamily="34" charset="-120"/>
+              </a:rPr>
+              <a:t>18</a:t>
+            </a:r>
+            <a:endParaRPr lang="en-US" sz="850" dirty="0"/>
+          </a:p>
+        </p:txBody>
+      </p:sp>
+    </p:spTree>
+  </p:cSld>
+  <p:clrMapOvr>
+    <a:masterClrMapping/>
+  </p:clrMapOvr>
+</p:sld>
+</file>
+
+<file path=ppt/slides/slide22.xml><?xml version="1.0" encoding="utf-8"?>
+<p:sld xmlns:a="http://schemas.openxmlformats.org/drawingml/2006/main" xmlns:r="http://schemas.openxmlformats.org/officeDocument/2006/relationships" xmlns:p="http://schemas.openxmlformats.org/presentationml/2006/main">
+  <p:cSld name="Slide 22">
+    <p:bg>
+      <p:bgPr>
+        <a:solidFill>
+          <a:srgbClr val="FFFFFF"/>
+        </a:solidFill>
+      </p:bgPr>
+    </p:bg>
+    <p:spTree>
+      <p:nvGrpSpPr>
+        <p:cNvPr id="1" name=""/>
+        <p:cNvGrpSpPr/>
+        <p:nvPr/>
+      </p:nvGrpSpPr>
+      <p:grpSpPr>
+        <a:xfrm>
+          <a:off x="0" y="0"/>
+          <a:ext cx="0" cy="0"/>
+          <a:chOff x="0" y="0"/>
+          <a:chExt cx="0" cy="0"/>
+        </a:xfrm>
+      </p:grpSpPr>
+      <p:sp>
+        <p:nvSpPr>
+          <p:cNvPr id="2" name="Text 0"/>
+          <p:cNvSpPr/>
+          <p:nvPr/>
+        </p:nvSpPr>
+        <p:spPr>
+          <a:xfrm>
+            <a:off x="566928" y="329184"/>
+            <a:ext cx="10515600" cy="310896"/>
+          </a:xfrm>
+          <a:prstGeom prst="rect">
+            <a:avLst/>
+          </a:prstGeom>
+          <a:noFill/>
+          <a:ln/>
+        </p:spPr>
+        <p:txBody>
+          <a:bodyPr wrap="square" lIns="0" tIns="0" rIns="0" bIns="0" rtlCol="0" anchor="ctr"/>
+          <a:lstStyle/>
+          <a:p>
+            <a:pPr algn="l" indent="0" marL="0">
+              <a:buNone/>
+            </a:pPr>
+            <a:r>
+              <a:rPr lang="en-US" sz="1100" b="1" spc="150" kern="0" dirty="0">
+                <a:solidFill>
+                  <a:srgbClr val="00838F"/>
+                </a:solidFill>
+                <a:latin typeface="Calibri" pitchFamily="34" charset="0"/>
+                <a:ea typeface="Calibri" pitchFamily="34" charset="-122"/>
+                <a:cs typeface="Calibri" pitchFamily="34" charset="-120"/>
+              </a:rPr>
+              <a:t>MOLECULAR &amp; CYTOGENETICS   ·   BOARD REVIEW  ·  Q2</a:t>
+            </a:r>
+            <a:endParaRPr lang="en-US" sz="1100" dirty="0"/>
+          </a:p>
+        </p:txBody>
+      </p:sp>
+      <p:sp>
+        <p:nvSpPr>
+          <p:cNvPr id="3" name="Text 1"/>
+          <p:cNvSpPr/>
+          <p:nvPr/>
+        </p:nvSpPr>
+        <p:spPr>
+          <a:xfrm>
+            <a:off x="566928" y="713232"/>
+            <a:ext cx="11064240" cy="749808"/>
+          </a:xfrm>
+          <a:prstGeom prst="rect">
+            <a:avLst/>
+          </a:prstGeom>
+          <a:noFill/>
+          <a:ln/>
+        </p:spPr>
+        <p:txBody>
+          <a:bodyPr wrap="square" lIns="0" tIns="0" rIns="0" bIns="0" rtlCol="0" anchor="ctr"/>
+          <a:lstStyle/>
+          <a:p>
+            <a:pPr algn="l" indent="0" marL="0">
+              <a:buNone/>
+            </a:pPr>
+            <a:r>
+              <a:rPr lang="en-US" sz="2600" b="1" dirty="0">
+                <a:solidFill>
+                  <a:srgbClr val="0E3A5F"/>
+                </a:solidFill>
+                <a:latin typeface="Calibri" pitchFamily="34" charset="0"/>
+                <a:ea typeface="Calibri" pitchFamily="34" charset="-122"/>
+                <a:cs typeface="Calibri" pitchFamily="34" charset="-120"/>
+              </a:rPr>
+              <a:t>Board-Style Review</a:t>
+            </a:r>
+            <a:endParaRPr lang="en-US" sz="2600" dirty="0"/>
+          </a:p>
+        </p:txBody>
+      </p:sp>
+      <p:sp>
+        <p:nvSpPr>
+          <p:cNvPr id="4" name="Text 2"/>
+          <p:cNvSpPr/>
+          <p:nvPr/>
+        </p:nvSpPr>
+        <p:spPr>
+          <a:xfrm>
+            <a:off x="566928" y="1417320"/>
+            <a:ext cx="11057839" cy="914400"/>
+          </a:xfrm>
+          <a:prstGeom prst="rect">
+            <a:avLst/>
+          </a:prstGeom>
+          <a:noFill/>
+          <a:ln/>
+        </p:spPr>
+        <p:txBody>
+          <a:bodyPr wrap="square" lIns="0" tIns="0" rIns="0" bIns="0" rtlCol="0" anchor="t"/>
+          <a:lstStyle/>
+          <a:p>
+            <a:pPr algn="l" indent="0" marL="0">
+              <a:lnSpc>
+                <a:spcPct val="105000"/>
+              </a:lnSpc>
+              <a:buNone/>
+            </a:pPr>
+            <a:r>
+              <a:rPr lang="en-US" sz="1450" b="1" dirty="0">
+                <a:solidFill>
+                  <a:srgbClr val="1B2A38"/>
+                </a:solidFill>
+                <a:latin typeface="Calibri" pitchFamily="34" charset="0"/>
+                <a:ea typeface="Calibri" pitchFamily="34" charset="-122"/>
+                <a:cs typeface="Calibri" pitchFamily="34" charset="-120"/>
+              </a:rPr>
+              <a:t>Which finding is a hematologic emergency requiring immediate action?</a:t>
+            </a:r>
+            <a:endParaRPr lang="en-US" sz="1450" dirty="0"/>
+          </a:p>
+        </p:txBody>
+      </p:sp>
+      <p:sp>
+        <p:nvSpPr>
+          <p:cNvPr id="5" name="Text 3"/>
+          <p:cNvSpPr/>
+          <p:nvPr/>
+        </p:nvSpPr>
+        <p:spPr>
+          <a:xfrm>
+            <a:off x="658368" y="2395728"/>
+            <a:ext cx="6192390" cy="3017520"/>
+          </a:xfrm>
+          <a:prstGeom prst="rect">
+            <a:avLst/>
+          </a:prstGeom>
+          <a:noFill/>
+          <a:ln/>
+        </p:spPr>
+        <p:txBody>
+          <a:bodyPr wrap="square" lIns="0" tIns="0" rIns="0" bIns="0" rtlCol="0" anchor="t"/>
+          <a:lstStyle/>
+          <a:p>
+            <a:pPr algn="l" indent="0" marL="0">
+              <a:spcAft>
+                <a:spcPts val="600"/>
+              </a:spcAft>
+              <a:buNone/>
+            </a:pPr>
+            <a:r>
+              <a:rPr lang="en-US" sz="1350" dirty="0">
+                <a:solidFill>
+                  <a:srgbClr val="33444F"/>
+                </a:solidFill>
+                <a:latin typeface="Calibri" pitchFamily="34" charset="0"/>
+                <a:ea typeface="Calibri" pitchFamily="34" charset="-122"/>
+                <a:cs typeface="Calibri" pitchFamily="34" charset="-120"/>
+              </a:rPr>
+              <a:t>A. JAK2 V617F</a:t>
+            </a:r>
+            <a:endParaRPr lang="en-US" sz="1350" dirty="0"/>
+          </a:p>
+          <a:p>
+            <a:pPr algn="l" indent="0" marL="0">
+              <a:spcAft>
+                <a:spcPts val="600"/>
+              </a:spcAft>
+              <a:buNone/>
+            </a:pPr>
+            <a:r>
+              <a:rPr lang="en-US" sz="1350" b="1" dirty="0">
+                <a:solidFill>
+                  <a:srgbClr val="005A63"/>
+                </a:solidFill>
+                <a:latin typeface="Calibri" pitchFamily="34" charset="0"/>
+                <a:ea typeface="Calibri" pitchFamily="34" charset="-122"/>
+                <a:cs typeface="Calibri" pitchFamily="34" charset="-120"/>
+              </a:rPr>
+              <a:t>B. PML-RARA (APL)</a:t>
+            </a:r>
+            <a:endParaRPr lang="en-US" sz="1350" dirty="0"/>
+          </a:p>
+          <a:p>
+            <a:pPr algn="l" indent="0" marL="0">
+              <a:spcAft>
+                <a:spcPts val="600"/>
+              </a:spcAft>
+              <a:buNone/>
+            </a:pPr>
+            <a:r>
+              <a:rPr lang="en-US" sz="1350" dirty="0">
+                <a:solidFill>
+                  <a:srgbClr val="33444F"/>
+                </a:solidFill>
+                <a:latin typeface="Calibri" pitchFamily="34" charset="0"/>
+                <a:ea typeface="Calibri" pitchFamily="34" charset="-122"/>
+                <a:cs typeface="Calibri" pitchFamily="34" charset="-120"/>
+              </a:rPr>
+              <a:t>C. Isolated VUS</a:t>
+            </a:r>
+            <a:endParaRPr lang="en-US" sz="1350" dirty="0"/>
+          </a:p>
+          <a:p>
+            <a:pPr algn="l" indent="0" marL="0">
+              <a:spcAft>
+                <a:spcPts val="600"/>
+              </a:spcAft>
+              <a:buNone/>
+            </a:pPr>
+            <a:r>
+              <a:rPr lang="en-US" sz="1350" dirty="0">
+                <a:solidFill>
+                  <a:srgbClr val="33444F"/>
+                </a:solidFill>
+                <a:latin typeface="Calibri" pitchFamily="34" charset="0"/>
+                <a:ea typeface="Calibri" pitchFamily="34" charset="-122"/>
+                <a:cs typeface="Calibri" pitchFamily="34" charset="-120"/>
+              </a:rPr>
+              <a:t>D. IGH rearrangement</a:t>
+            </a:r>
+            <a:endParaRPr lang="en-US" sz="1350" dirty="0"/>
+          </a:p>
+          <a:p>
+            <a:pPr algn="l" indent="0" marL="0">
+              <a:spcAft>
+                <a:spcPts val="600"/>
+              </a:spcAft>
+              <a:buNone/>
+            </a:pPr>
+            <a:r>
+              <a:rPr lang="en-US" sz="1350" dirty="0">
+                <a:solidFill>
+                  <a:srgbClr val="33444F"/>
+                </a:solidFill>
+                <a:latin typeface="Calibri" pitchFamily="34" charset="0"/>
+                <a:ea typeface="Calibri" pitchFamily="34" charset="-122"/>
+                <a:cs typeface="Calibri" pitchFamily="34" charset="-120"/>
+              </a:rPr>
+              <a:t>E. Normal karyotype</a:t>
+            </a:r>
+            <a:endParaRPr lang="en-US" sz="1350" dirty="0"/>
+          </a:p>
+        </p:txBody>
+      </p:sp>
+      <p:sp>
+        <p:nvSpPr>
+          <p:cNvPr id="6" name="Shape 4"/>
+          <p:cNvSpPr/>
+          <p:nvPr/>
+        </p:nvSpPr>
+        <p:spPr>
+          <a:xfrm>
+            <a:off x="7201632" y="2395728"/>
+            <a:ext cx="4423136" cy="3246120"/>
+          </a:xfrm>
+          <a:prstGeom prst="roundRect">
+            <a:avLst>
+              <a:gd name="adj" fmla="val 2535"/>
+            </a:avLst>
+          </a:prstGeom>
+          <a:solidFill>
+            <a:srgbClr val="E0F2F4"/>
+          </a:solidFill>
+          <a:ln/>
+          <a:effectLst>
+            <a:outerShdw sx="100000" sy="100000" kx="0" ky="0" algn="bl" rotWithShape="0" blurRad="88900" dist="25400" dir="5400000">
+              <a:srgbClr val="22303C">
+                <a:alpha val="12000"/>
+              </a:srgbClr>
+            </a:outerShdw>
+          </a:effectLst>
+        </p:spPr>
+      </p:sp>
+      <p:sp>
+        <p:nvSpPr>
+          <p:cNvPr id="7" name="Text 5"/>
+          <p:cNvSpPr/>
+          <p:nvPr/>
+        </p:nvSpPr>
+        <p:spPr>
+          <a:xfrm>
+            <a:off x="7439376" y="2578608"/>
+            <a:ext cx="3965936" cy="457200"/>
+          </a:xfrm>
+          <a:prstGeom prst="rect">
+            <a:avLst/>
+          </a:prstGeom>
+          <a:noFill/>
+          <a:ln/>
+        </p:spPr>
+        <p:txBody>
+          <a:bodyPr wrap="square" lIns="0" tIns="0" rIns="0" bIns="0" rtlCol="0" anchor="ctr"/>
+          <a:lstStyle/>
+          <a:p>
+            <a:pPr indent="0" marL="0">
+              <a:buNone/>
+            </a:pPr>
+            <a:r>
+              <a:rPr lang="en-US" sz="1500" b="1" dirty="0">
+                <a:solidFill>
+                  <a:srgbClr val="00838F"/>
+                </a:solidFill>
+                <a:latin typeface="Calibri" pitchFamily="34" charset="0"/>
+                <a:ea typeface="Calibri" pitchFamily="34" charset="-122"/>
+                <a:cs typeface="Calibri" pitchFamily="34" charset="-120"/>
+              </a:rPr>
+              <a:t>ANSWER  </a:t>
+            </a:r>
+            <a:pPr indent="0" marL="0">
+              <a:buNone/>
+            </a:pPr>
+            <a:r>
+              <a:rPr lang="en-US" sz="1500" b="1" dirty="0">
+                <a:solidFill>
+                  <a:srgbClr val="1B2A38"/>
+                </a:solidFill>
+                <a:latin typeface="Calibri" pitchFamily="34" charset="0"/>
+                <a:ea typeface="Calibri" pitchFamily="34" charset="-122"/>
+                <a:cs typeface="Calibri" pitchFamily="34" charset="-120"/>
+              </a:rPr>
+              <a:t>B — PML-RARA (APL)</a:t>
+            </a:r>
+            <a:endParaRPr lang="en-US" sz="1500" dirty="0"/>
+          </a:p>
+        </p:txBody>
+      </p:sp>
+      <p:sp>
+        <p:nvSpPr>
+          <p:cNvPr id="8" name="Text 6"/>
+          <p:cNvSpPr/>
+          <p:nvPr/>
+        </p:nvSpPr>
+        <p:spPr>
+          <a:xfrm>
+            <a:off x="7439376" y="3127248"/>
+            <a:ext cx="3947648" cy="2377440"/>
+          </a:xfrm>
+          <a:prstGeom prst="rect">
+            <a:avLst/>
+          </a:prstGeom>
+          <a:noFill/>
+          <a:ln/>
+        </p:spPr>
+        <p:txBody>
+          <a:bodyPr wrap="square" lIns="0" tIns="0" rIns="0" bIns="0" rtlCol="0" anchor="t"/>
+          <a:lstStyle/>
+          <a:p>
+            <a:pPr algn="l" indent="0" marL="0">
+              <a:lnSpc>
+                <a:spcPct val="108000"/>
+              </a:lnSpc>
+              <a:buNone/>
+            </a:pPr>
+            <a:r>
+              <a:rPr lang="en-US" sz="1250" dirty="0">
+                <a:solidFill>
+                  <a:srgbClr val="33444F"/>
+                </a:solidFill>
+                <a:latin typeface="Calibri" pitchFamily="34" charset="0"/>
+                <a:ea typeface="Calibri" pitchFamily="34" charset="-122"/>
+                <a:cs typeface="Calibri" pitchFamily="34" charset="-120"/>
+              </a:rPr>
+              <a:t>APL carries a high risk of fatal coagulopathy; rapid confirmation and treatment are urgent.</a:t>
+            </a:r>
+            <a:endParaRPr lang="en-US" sz="1250" dirty="0"/>
+          </a:p>
+        </p:txBody>
+      </p:sp>
+      <p:sp>
+        <p:nvSpPr>
+          <p:cNvPr id="9" name="Text 7"/>
+          <p:cNvSpPr/>
+          <p:nvPr/>
+        </p:nvSpPr>
+        <p:spPr>
+          <a:xfrm>
+            <a:off x="566928" y="6473952"/>
+            <a:ext cx="7772400" cy="274320"/>
+          </a:xfrm>
+          <a:prstGeom prst="rect">
+            <a:avLst/>
+          </a:prstGeom>
+          <a:noFill/>
+          <a:ln/>
+        </p:spPr>
+        <p:txBody>
+          <a:bodyPr wrap="square" lIns="0" tIns="0" rIns="0" bIns="0" rtlCol="0" anchor="ctr"/>
+          <a:lstStyle/>
+          <a:p>
+            <a:pPr algn="l" indent="0" marL="0">
+              <a:buNone/>
+            </a:pPr>
+            <a:r>
+              <a:rPr lang="en-US" sz="850" dirty="0">
+                <a:solidFill>
+                  <a:srgbClr val="9AA8B4"/>
+                </a:solidFill>
+                <a:latin typeface="Calibri" pitchFamily="34" charset="0"/>
+                <a:ea typeface="Calibri" pitchFamily="34" charset="-122"/>
+                <a:cs typeface="Calibri" pitchFamily="34" charset="-120"/>
+              </a:rPr>
+              <a:t>Makassed General Hospital  ·  Department of Laboratory Medicine</a:t>
+            </a:r>
+            <a:endParaRPr lang="en-US" sz="850" dirty="0"/>
+          </a:p>
+        </p:txBody>
+      </p:sp>
+      <p:sp>
+        <p:nvSpPr>
+          <p:cNvPr id="10" name="Text 8"/>
+          <p:cNvSpPr/>
+          <p:nvPr/>
+        </p:nvSpPr>
+        <p:spPr>
+          <a:xfrm>
+            <a:off x="9814255" y="6473952"/>
+            <a:ext cx="1828800" cy="274320"/>
+          </a:xfrm>
+          <a:prstGeom prst="rect">
+            <a:avLst/>
+          </a:prstGeom>
+          <a:noFill/>
+          <a:ln/>
+        </p:spPr>
+        <p:txBody>
+          <a:bodyPr wrap="square" lIns="0" tIns="0" rIns="0" bIns="0" rtlCol="0" anchor="ctr"/>
+          <a:lstStyle/>
+          <a:p>
+            <a:pPr algn="r" indent="0" marL="0">
+              <a:buNone/>
+            </a:pPr>
+            <a:r>
+              <a:rPr lang="en-US" sz="850" dirty="0">
+                <a:solidFill>
+                  <a:srgbClr val="9AA8B4"/>
+                </a:solidFill>
+                <a:latin typeface="Calibri" pitchFamily="34" charset="0"/>
+                <a:ea typeface="Calibri" pitchFamily="34" charset="-122"/>
+                <a:cs typeface="Calibri" pitchFamily="34" charset="-120"/>
+              </a:rPr>
+              <a:t>CP Lecture Series</a:t>
+            </a:r>
+            <a:pPr algn="r" indent="0" marL="0">
+              <a:buNone/>
+            </a:pPr>
+            <a:r>
+              <a:rPr lang="en-US" sz="850" dirty="0">
+                <a:solidFill>
+                  <a:srgbClr val="DCE4EC"/>
+                </a:solidFill>
+                <a:latin typeface="Calibri" pitchFamily="34" charset="0"/>
+                <a:ea typeface="Calibri" pitchFamily="34" charset="-122"/>
+                <a:cs typeface="Calibri" pitchFamily="34" charset="-120"/>
+              </a:rPr>
+              <a:t>   ·   </a:t>
+            </a:r>
+            <a:pPr algn="r" indent="0" marL="0">
+              <a:buNone/>
+            </a:pPr>
+            <a:r>
+              <a:rPr lang="en-US" sz="850" b="1" dirty="0">
+                <a:solidFill>
+                  <a:srgbClr val="00838F"/>
+                </a:solidFill>
+                <a:latin typeface="Calibri" pitchFamily="34" charset="0"/>
+                <a:ea typeface="Calibri" pitchFamily="34" charset="-122"/>
+                <a:cs typeface="Calibri" pitchFamily="34" charset="-120"/>
+              </a:rPr>
+              <a:t>19</a:t>
+            </a:r>
+            <a:endParaRPr lang="en-US" sz="850" dirty="0"/>
+          </a:p>
+        </p:txBody>
+      </p:sp>
+    </p:spTree>
+  </p:cSld>
+  <p:clrMapOvr>
+    <a:masterClrMapping/>
+  </p:clrMapOvr>
+</p:sld>
+</file>
+
+<file path=ppt/slides/slide23.xml><?xml version="1.0" encoding="utf-8"?>
+<p:sld xmlns:a="http://schemas.openxmlformats.org/drawingml/2006/main" xmlns:r="http://schemas.openxmlformats.org/officeDocument/2006/relationships" xmlns:p="http://schemas.openxmlformats.org/presentationml/2006/main">
+  <p:cSld name="Slide 23">
+    <p:bg>
+      <p:bgPr>
+        <a:solidFill>
+          <a:srgbClr val="FFFFFF"/>
+        </a:solidFill>
+      </p:bgPr>
+    </p:bg>
+    <p:spTree>
+      <p:nvGrpSpPr>
+        <p:cNvPr id="1" name=""/>
+        <p:cNvGrpSpPr/>
+        <p:nvPr/>
+      </p:nvGrpSpPr>
+      <p:grpSpPr>
+        <a:xfrm>
+          <a:off x="0" y="0"/>
+          <a:ext cx="0" cy="0"/>
+          <a:chOff x="0" y="0"/>
+          <a:chExt cx="0" cy="0"/>
+        </a:xfrm>
+      </p:grpSpPr>
+      <p:sp>
+        <p:nvSpPr>
+          <p:cNvPr id="2" name="Text 0"/>
+          <p:cNvSpPr/>
+          <p:nvPr/>
+        </p:nvSpPr>
+        <p:spPr>
+          <a:xfrm>
+            <a:off x="566928" y="329184"/>
+            <a:ext cx="10515600" cy="310896"/>
+          </a:xfrm>
+          <a:prstGeom prst="rect">
+            <a:avLst/>
+          </a:prstGeom>
+          <a:noFill/>
+          <a:ln/>
+        </p:spPr>
+        <p:txBody>
+          <a:bodyPr wrap="square" lIns="0" tIns="0" rIns="0" bIns="0" rtlCol="0" anchor="ctr"/>
+          <a:lstStyle/>
+          <a:p>
+            <a:pPr algn="l" indent="0" marL="0">
+              <a:buNone/>
+            </a:pPr>
+            <a:r>
+              <a:rPr lang="en-US" sz="1100" b="1" spc="150" kern="0" dirty="0">
+                <a:solidFill>
+                  <a:srgbClr val="00838F"/>
+                </a:solidFill>
+                <a:latin typeface="Calibri" pitchFamily="34" charset="0"/>
+                <a:ea typeface="Calibri" pitchFamily="34" charset="-122"/>
+                <a:cs typeface="Calibri" pitchFamily="34" charset="-120"/>
+              </a:rPr>
+              <a:t>MOLECULAR &amp; CYTOGENETICS   ·   BOARD REVIEW  ·  Q3</a:t>
+            </a:r>
+            <a:endParaRPr lang="en-US" sz="1100" dirty="0"/>
+          </a:p>
+        </p:txBody>
+      </p:sp>
+      <p:sp>
+        <p:nvSpPr>
+          <p:cNvPr id="3" name="Text 1"/>
+          <p:cNvSpPr/>
+          <p:nvPr/>
+        </p:nvSpPr>
+        <p:spPr>
+          <a:xfrm>
+            <a:off x="566928" y="713232"/>
+            <a:ext cx="11064240" cy="749808"/>
+          </a:xfrm>
+          <a:prstGeom prst="rect">
+            <a:avLst/>
+          </a:prstGeom>
+          <a:noFill/>
+          <a:ln/>
+        </p:spPr>
+        <p:txBody>
+          <a:bodyPr wrap="square" lIns="0" tIns="0" rIns="0" bIns="0" rtlCol="0" anchor="ctr"/>
+          <a:lstStyle/>
+          <a:p>
+            <a:pPr algn="l" indent="0" marL="0">
+              <a:buNone/>
+            </a:pPr>
+            <a:r>
+              <a:rPr lang="en-US" sz="2600" b="1" dirty="0">
+                <a:solidFill>
+                  <a:srgbClr val="0E3A5F"/>
+                </a:solidFill>
+                <a:latin typeface="Calibri" pitchFamily="34" charset="0"/>
+                <a:ea typeface="Calibri" pitchFamily="34" charset="-122"/>
+                <a:cs typeface="Calibri" pitchFamily="34" charset="-120"/>
+              </a:rPr>
+              <a:t>Board-Style Review</a:t>
+            </a:r>
+            <a:endParaRPr lang="en-US" sz="2600" dirty="0"/>
+          </a:p>
+        </p:txBody>
+      </p:sp>
+      <p:sp>
+        <p:nvSpPr>
+          <p:cNvPr id="4" name="Text 2"/>
+          <p:cNvSpPr/>
+          <p:nvPr/>
+        </p:nvSpPr>
+        <p:spPr>
+          <a:xfrm>
+            <a:off x="566928" y="1417320"/>
+            <a:ext cx="11057839" cy="914400"/>
+          </a:xfrm>
+          <a:prstGeom prst="rect">
+            <a:avLst/>
+          </a:prstGeom>
+          <a:noFill/>
+          <a:ln/>
+        </p:spPr>
+        <p:txBody>
+          <a:bodyPr wrap="square" lIns="0" tIns="0" rIns="0" bIns="0" rtlCol="0" anchor="t"/>
+          <a:lstStyle/>
+          <a:p>
+            <a:pPr algn="l" indent="0" marL="0">
+              <a:lnSpc>
+                <a:spcPct val="105000"/>
+              </a:lnSpc>
+              <a:buNone/>
+            </a:pPr>
+            <a:r>
+              <a:rPr lang="en-US" sz="1450" b="1" dirty="0">
+                <a:solidFill>
+                  <a:srgbClr val="1B2A38"/>
+                </a:solidFill>
+                <a:latin typeface="Calibri" pitchFamily="34" charset="0"/>
+                <a:ea typeface="Calibri" pitchFamily="34" charset="-122"/>
+                <a:cs typeface="Calibri" pitchFamily="34" charset="-120"/>
+              </a:rPr>
+              <a:t>A balanced translocation creating a fusion is best detected by:</a:t>
+            </a:r>
+            <a:endParaRPr lang="en-US" sz="1450" dirty="0"/>
+          </a:p>
+        </p:txBody>
+      </p:sp>
+      <p:sp>
+        <p:nvSpPr>
+          <p:cNvPr id="5" name="Text 3"/>
+          <p:cNvSpPr/>
+          <p:nvPr/>
+        </p:nvSpPr>
+        <p:spPr>
+          <a:xfrm>
+            <a:off x="658368" y="2395728"/>
+            <a:ext cx="6192390" cy="3017520"/>
+          </a:xfrm>
+          <a:prstGeom prst="rect">
+            <a:avLst/>
+          </a:prstGeom>
+          <a:noFill/>
+          <a:ln/>
+        </p:spPr>
+        <p:txBody>
+          <a:bodyPr wrap="square" lIns="0" tIns="0" rIns="0" bIns="0" rtlCol="0" anchor="t"/>
+          <a:lstStyle/>
+          <a:p>
+            <a:pPr algn="l" indent="0" marL="0">
+              <a:spcAft>
+                <a:spcPts val="600"/>
+              </a:spcAft>
+              <a:buNone/>
+            </a:pPr>
+            <a:r>
+              <a:rPr lang="en-US" sz="1350" dirty="0">
+                <a:solidFill>
+                  <a:srgbClr val="33444F"/>
+                </a:solidFill>
+                <a:latin typeface="Calibri" pitchFamily="34" charset="0"/>
+                <a:ea typeface="Calibri" pitchFamily="34" charset="-122"/>
+                <a:cs typeface="Calibri" pitchFamily="34" charset="-120"/>
+              </a:rPr>
+              <a:t>A. Chromosomal microarray</a:t>
+            </a:r>
+            <a:endParaRPr lang="en-US" sz="1350" dirty="0"/>
+          </a:p>
+          <a:p>
+            <a:pPr algn="l" indent="0" marL="0">
+              <a:spcAft>
+                <a:spcPts val="600"/>
+              </a:spcAft>
+              <a:buNone/>
+            </a:pPr>
+            <a:r>
+              <a:rPr lang="en-US" sz="1350" b="1" dirty="0">
+                <a:solidFill>
+                  <a:srgbClr val="005A63"/>
+                </a:solidFill>
+                <a:latin typeface="Calibri" pitchFamily="34" charset="0"/>
+                <a:ea typeface="Calibri" pitchFamily="34" charset="-122"/>
+                <a:cs typeface="Calibri" pitchFamily="34" charset="-120"/>
+              </a:rPr>
+              <a:t>B. FISH break-apart or RT-PCR</a:t>
+            </a:r>
+            <a:endParaRPr lang="en-US" sz="1350" dirty="0"/>
+          </a:p>
+          <a:p>
+            <a:pPr algn="l" indent="0" marL="0">
+              <a:spcAft>
+                <a:spcPts val="600"/>
+              </a:spcAft>
+              <a:buNone/>
+            </a:pPr>
+            <a:r>
+              <a:rPr lang="en-US" sz="1350" dirty="0">
+                <a:solidFill>
+                  <a:srgbClr val="33444F"/>
+                </a:solidFill>
+                <a:latin typeface="Calibri" pitchFamily="34" charset="0"/>
+                <a:ea typeface="Calibri" pitchFamily="34" charset="-122"/>
+                <a:cs typeface="Calibri" pitchFamily="34" charset="-120"/>
+              </a:rPr>
+              <a:t>C. Total protein</a:t>
+            </a:r>
+            <a:endParaRPr lang="en-US" sz="1350" dirty="0"/>
+          </a:p>
+          <a:p>
+            <a:pPr algn="l" indent="0" marL="0">
+              <a:spcAft>
+                <a:spcPts val="600"/>
+              </a:spcAft>
+              <a:buNone/>
+            </a:pPr>
+            <a:r>
+              <a:rPr lang="en-US" sz="1350" dirty="0">
+                <a:solidFill>
+                  <a:srgbClr val="33444F"/>
+                </a:solidFill>
+                <a:latin typeface="Calibri" pitchFamily="34" charset="0"/>
+                <a:ea typeface="Calibri" pitchFamily="34" charset="-122"/>
+                <a:cs typeface="Calibri" pitchFamily="34" charset="-120"/>
+              </a:rPr>
+              <a:t>D. Karyotype only when cryptic</a:t>
+            </a:r>
+            <a:endParaRPr lang="en-US" sz="1350" dirty="0"/>
+          </a:p>
+          <a:p>
+            <a:pPr algn="l" indent="0" marL="0">
+              <a:spcAft>
+                <a:spcPts val="600"/>
+              </a:spcAft>
+              <a:buNone/>
+            </a:pPr>
+            <a:r>
+              <a:rPr lang="en-US" sz="1350" dirty="0">
+                <a:solidFill>
+                  <a:srgbClr val="33444F"/>
+                </a:solidFill>
+                <a:latin typeface="Calibri" pitchFamily="34" charset="0"/>
+                <a:ea typeface="Calibri" pitchFamily="34" charset="-122"/>
+                <a:cs typeface="Calibri" pitchFamily="34" charset="-120"/>
+              </a:rPr>
+              <a:t>E. Flow cytometry</a:t>
+            </a:r>
+            <a:endParaRPr lang="en-US" sz="1350" dirty="0"/>
+          </a:p>
+        </p:txBody>
+      </p:sp>
+      <p:sp>
+        <p:nvSpPr>
+          <p:cNvPr id="6" name="Shape 4"/>
+          <p:cNvSpPr/>
+          <p:nvPr/>
+        </p:nvSpPr>
+        <p:spPr>
+          <a:xfrm>
+            <a:off x="7201632" y="2395728"/>
+            <a:ext cx="4423136" cy="3246120"/>
+          </a:xfrm>
+          <a:prstGeom prst="roundRect">
+            <a:avLst>
+              <a:gd name="adj" fmla="val 2535"/>
+            </a:avLst>
+          </a:prstGeom>
+          <a:solidFill>
+            <a:srgbClr val="E0F2F4"/>
+          </a:solidFill>
+          <a:ln/>
+          <a:effectLst>
+            <a:outerShdw sx="100000" sy="100000" kx="0" ky="0" algn="bl" rotWithShape="0" blurRad="88900" dist="25400" dir="5400000">
+              <a:srgbClr val="22303C">
+                <a:alpha val="12000"/>
+              </a:srgbClr>
+            </a:outerShdw>
+          </a:effectLst>
+        </p:spPr>
+      </p:sp>
+      <p:sp>
+        <p:nvSpPr>
+          <p:cNvPr id="7" name="Text 5"/>
+          <p:cNvSpPr/>
+          <p:nvPr/>
+        </p:nvSpPr>
+        <p:spPr>
+          <a:xfrm>
+            <a:off x="7439376" y="2578608"/>
+            <a:ext cx="3965936" cy="457200"/>
+          </a:xfrm>
+          <a:prstGeom prst="rect">
+            <a:avLst/>
+          </a:prstGeom>
+          <a:noFill/>
+          <a:ln/>
+        </p:spPr>
+        <p:txBody>
+          <a:bodyPr wrap="square" lIns="0" tIns="0" rIns="0" bIns="0" rtlCol="0" anchor="ctr"/>
+          <a:lstStyle/>
+          <a:p>
+            <a:pPr indent="0" marL="0">
+              <a:buNone/>
+            </a:pPr>
+            <a:r>
+              <a:rPr lang="en-US" sz="1500" b="1" dirty="0">
+                <a:solidFill>
+                  <a:srgbClr val="00838F"/>
+                </a:solidFill>
+                <a:latin typeface="Calibri" pitchFamily="34" charset="0"/>
+                <a:ea typeface="Calibri" pitchFamily="34" charset="-122"/>
+                <a:cs typeface="Calibri" pitchFamily="34" charset="-120"/>
+              </a:rPr>
+              <a:t>ANSWER  </a:t>
+            </a:r>
+            <a:pPr indent="0" marL="0">
+              <a:buNone/>
+            </a:pPr>
+            <a:r>
+              <a:rPr lang="en-US" sz="1500" b="1" dirty="0">
+                <a:solidFill>
+                  <a:srgbClr val="1B2A38"/>
+                </a:solidFill>
+                <a:latin typeface="Calibri" pitchFamily="34" charset="0"/>
+                <a:ea typeface="Calibri" pitchFamily="34" charset="-122"/>
+                <a:cs typeface="Calibri" pitchFamily="34" charset="-120"/>
+              </a:rPr>
+              <a:t>B — FISH/RT-PCR</a:t>
+            </a:r>
+            <a:endParaRPr lang="en-US" sz="1500" dirty="0"/>
+          </a:p>
+        </p:txBody>
+      </p:sp>
+      <p:sp>
+        <p:nvSpPr>
+          <p:cNvPr id="8" name="Text 6"/>
+          <p:cNvSpPr/>
+          <p:nvPr/>
+        </p:nvSpPr>
+        <p:spPr>
+          <a:xfrm>
+            <a:off x="7439376" y="3127248"/>
+            <a:ext cx="3947648" cy="2377440"/>
+          </a:xfrm>
+          <a:prstGeom prst="rect">
+            <a:avLst/>
+          </a:prstGeom>
+          <a:noFill/>
+          <a:ln/>
+        </p:spPr>
+        <p:txBody>
+          <a:bodyPr wrap="square" lIns="0" tIns="0" rIns="0" bIns="0" rtlCol="0" anchor="t"/>
+          <a:lstStyle/>
+          <a:p>
+            <a:pPr algn="l" indent="0" marL="0">
+              <a:lnSpc>
+                <a:spcPct val="108000"/>
+              </a:lnSpc>
+              <a:buNone/>
+            </a:pPr>
+            <a:r>
+              <a:rPr lang="en-US" sz="1250" dirty="0">
+                <a:solidFill>
+                  <a:srgbClr val="33444F"/>
+                </a:solidFill>
+                <a:latin typeface="Calibri" pitchFamily="34" charset="0"/>
+                <a:ea typeface="Calibri" pitchFamily="34" charset="-122"/>
+                <a:cs typeface="Calibri" pitchFamily="34" charset="-120"/>
+              </a:rPr>
+              <a:t>Balanced fusions have no copy-number change (missed by arrays); FISH or RT-PCR detect them directly.</a:t>
+            </a:r>
+            <a:endParaRPr lang="en-US" sz="1250" dirty="0"/>
+          </a:p>
+        </p:txBody>
+      </p:sp>
+      <p:sp>
+        <p:nvSpPr>
+          <p:cNvPr id="9" name="Text 7"/>
+          <p:cNvSpPr/>
+          <p:nvPr/>
+        </p:nvSpPr>
+        <p:spPr>
+          <a:xfrm>
+            <a:off x="566928" y="6473952"/>
+            <a:ext cx="7772400" cy="274320"/>
+          </a:xfrm>
+          <a:prstGeom prst="rect">
+            <a:avLst/>
+          </a:prstGeom>
+          <a:noFill/>
+          <a:ln/>
+        </p:spPr>
+        <p:txBody>
+          <a:bodyPr wrap="square" lIns="0" tIns="0" rIns="0" bIns="0" rtlCol="0" anchor="ctr"/>
+          <a:lstStyle/>
+          <a:p>
+            <a:pPr algn="l" indent="0" marL="0">
+              <a:buNone/>
+            </a:pPr>
+            <a:r>
+              <a:rPr lang="en-US" sz="850" dirty="0">
+                <a:solidFill>
+                  <a:srgbClr val="9AA8B4"/>
+                </a:solidFill>
+                <a:latin typeface="Calibri" pitchFamily="34" charset="0"/>
+                <a:ea typeface="Calibri" pitchFamily="34" charset="-122"/>
+                <a:cs typeface="Calibri" pitchFamily="34" charset="-120"/>
+              </a:rPr>
+              <a:t>Makassed General Hospital  ·  Department of Laboratory Medicine</a:t>
+            </a:r>
+            <a:endParaRPr lang="en-US" sz="850" dirty="0"/>
+          </a:p>
+        </p:txBody>
+      </p:sp>
+      <p:sp>
+        <p:nvSpPr>
+          <p:cNvPr id="10" name="Text 8"/>
+          <p:cNvSpPr/>
+          <p:nvPr/>
+        </p:nvSpPr>
+        <p:spPr>
+          <a:xfrm>
+            <a:off x="9814255" y="6473952"/>
+            <a:ext cx="1828800" cy="274320"/>
+          </a:xfrm>
+          <a:prstGeom prst="rect">
+            <a:avLst/>
+          </a:prstGeom>
+          <a:noFill/>
+          <a:ln/>
+        </p:spPr>
+        <p:txBody>
+          <a:bodyPr wrap="square" lIns="0" tIns="0" rIns="0" bIns="0" rtlCol="0" anchor="ctr"/>
+          <a:lstStyle/>
+          <a:p>
+            <a:pPr algn="r" indent="0" marL="0">
+              <a:buNone/>
+            </a:pPr>
+            <a:r>
+              <a:rPr lang="en-US" sz="850" dirty="0">
+                <a:solidFill>
+                  <a:srgbClr val="9AA8B4"/>
+                </a:solidFill>
+                <a:latin typeface="Calibri" pitchFamily="34" charset="0"/>
+                <a:ea typeface="Calibri" pitchFamily="34" charset="-122"/>
+                <a:cs typeface="Calibri" pitchFamily="34" charset="-120"/>
+              </a:rPr>
+              <a:t>CP Lecture Series</a:t>
+            </a:r>
+            <a:pPr algn="r" indent="0" marL="0">
+              <a:buNone/>
+            </a:pPr>
+            <a:r>
+              <a:rPr lang="en-US" sz="850" dirty="0">
+                <a:solidFill>
+                  <a:srgbClr val="DCE4EC"/>
+                </a:solidFill>
+                <a:latin typeface="Calibri" pitchFamily="34" charset="0"/>
+                <a:ea typeface="Calibri" pitchFamily="34" charset="-122"/>
+                <a:cs typeface="Calibri" pitchFamily="34" charset="-120"/>
+              </a:rPr>
+              <a:t>   ·   </a:t>
+            </a:r>
+            <a:pPr algn="r" indent="0" marL="0">
+              <a:buNone/>
+            </a:pPr>
+            <a:r>
+              <a:rPr lang="en-US" sz="850" b="1" dirty="0">
+                <a:solidFill>
+                  <a:srgbClr val="00838F"/>
+                </a:solidFill>
+                <a:latin typeface="Calibri" pitchFamily="34" charset="0"/>
+                <a:ea typeface="Calibri" pitchFamily="34" charset="-122"/>
+                <a:cs typeface="Calibri" pitchFamily="34" charset="-120"/>
+              </a:rPr>
+              <a:t>20</a:t>
+            </a:r>
+            <a:endParaRPr lang="en-US" sz="850" dirty="0"/>
+          </a:p>
+        </p:txBody>
+      </p:sp>
+    </p:spTree>
+  </p:cSld>
+  <p:clrMapOvr>
+    <a:masterClrMapping/>
+  </p:clrMapOvr>
+</p:sld>
+</file>
+
+<file path=ppt/slides/slide24.xml><?xml version="1.0" encoding="utf-8"?>
+<p:sld xmlns:a="http://schemas.openxmlformats.org/drawingml/2006/main" xmlns:r="http://schemas.openxmlformats.org/officeDocument/2006/relationships" xmlns:p="http://schemas.openxmlformats.org/presentationml/2006/main">
+  <p:cSld name="Slide 24">
+    <p:bg>
+      <p:bgPr>
+        <a:solidFill>
+          <a:srgbClr val="FFFFFF"/>
+        </a:solidFill>
+      </p:bgPr>
+    </p:bg>
+    <p:spTree>
+      <p:nvGrpSpPr>
+        <p:cNvPr id="1" name=""/>
+        <p:cNvGrpSpPr/>
+        <p:nvPr/>
+      </p:nvGrpSpPr>
+      <p:grpSpPr>
+        <a:xfrm>
+          <a:off x="0" y="0"/>
+          <a:ext cx="0" cy="0"/>
+          <a:chOff x="0" y="0"/>
+          <a:chExt cx="0" cy="0"/>
+        </a:xfrm>
+      </p:grpSpPr>
+      <p:sp>
+        <p:nvSpPr>
+          <p:cNvPr id="2" name="Text 0"/>
+          <p:cNvSpPr/>
+          <p:nvPr/>
+        </p:nvSpPr>
+        <p:spPr>
+          <a:xfrm>
+            <a:off x="566928" y="329184"/>
+            <a:ext cx="10515600" cy="310896"/>
+          </a:xfrm>
+          <a:prstGeom prst="rect">
+            <a:avLst/>
+          </a:prstGeom>
+          <a:noFill/>
+          <a:ln/>
+        </p:spPr>
+        <p:txBody>
+          <a:bodyPr wrap="square" lIns="0" tIns="0" rIns="0" bIns="0" rtlCol="0" anchor="ctr"/>
+          <a:lstStyle/>
+          <a:p>
+            <a:pPr algn="l" indent="0" marL="0">
+              <a:buNone/>
+            </a:pPr>
+            <a:r>
+              <a:rPr lang="en-US" sz="1100" b="1" spc="150" kern="0" dirty="0">
+                <a:solidFill>
+                  <a:srgbClr val="00838F"/>
+                </a:solidFill>
+                <a:latin typeface="Calibri" pitchFamily="34" charset="0"/>
+                <a:ea typeface="Calibri" pitchFamily="34" charset="-122"/>
+                <a:cs typeface="Calibri" pitchFamily="34" charset="-120"/>
+              </a:rPr>
+              <a:t>MOLECULAR &amp; CYTOGENETICS   ·   BOARD REVIEW  ·  Q4</a:t>
+            </a:r>
+            <a:endParaRPr lang="en-US" sz="1100" dirty="0"/>
+          </a:p>
+        </p:txBody>
+      </p:sp>
+      <p:sp>
+        <p:nvSpPr>
+          <p:cNvPr id="3" name="Text 1"/>
+          <p:cNvSpPr/>
+          <p:nvPr/>
+        </p:nvSpPr>
+        <p:spPr>
+          <a:xfrm>
+            <a:off x="566928" y="713232"/>
+            <a:ext cx="11064240" cy="749808"/>
+          </a:xfrm>
+          <a:prstGeom prst="rect">
+            <a:avLst/>
+          </a:prstGeom>
+          <a:noFill/>
+          <a:ln/>
+        </p:spPr>
+        <p:txBody>
+          <a:bodyPr wrap="square" lIns="0" tIns="0" rIns="0" bIns="0" rtlCol="0" anchor="ctr"/>
+          <a:lstStyle/>
+          <a:p>
+            <a:pPr algn="l" indent="0" marL="0">
+              <a:buNone/>
+            </a:pPr>
+            <a:r>
+              <a:rPr lang="en-US" sz="2600" b="1" dirty="0">
+                <a:solidFill>
+                  <a:srgbClr val="0E3A5F"/>
+                </a:solidFill>
+                <a:latin typeface="Calibri" pitchFamily="34" charset="0"/>
+                <a:ea typeface="Calibri" pitchFamily="34" charset="-122"/>
+                <a:cs typeface="Calibri" pitchFamily="34" charset="-120"/>
+              </a:rPr>
+              <a:t>Board-Style Review</a:t>
+            </a:r>
+            <a:endParaRPr lang="en-US" sz="2600" dirty="0"/>
+          </a:p>
+        </p:txBody>
+      </p:sp>
+      <p:sp>
+        <p:nvSpPr>
+          <p:cNvPr id="4" name="Text 2"/>
+          <p:cNvSpPr/>
+          <p:nvPr/>
+        </p:nvSpPr>
+        <p:spPr>
+          <a:xfrm>
+            <a:off x="566928" y="1417320"/>
+            <a:ext cx="11057839" cy="914400"/>
+          </a:xfrm>
+          <a:prstGeom prst="rect">
+            <a:avLst/>
+          </a:prstGeom>
+          <a:noFill/>
+          <a:ln/>
+        </p:spPr>
+        <p:txBody>
+          <a:bodyPr wrap="square" lIns="0" tIns="0" rIns="0" bIns="0" rtlCol="0" anchor="t"/>
+          <a:lstStyle/>
+          <a:p>
+            <a:pPr algn="l" indent="0" marL="0">
+              <a:lnSpc>
+                <a:spcPct val="105000"/>
+              </a:lnSpc>
+              <a:buNone/>
+            </a:pPr>
+            <a:r>
+              <a:rPr lang="en-US" sz="1450" b="1" dirty="0">
+                <a:solidFill>
+                  <a:srgbClr val="1B2A38"/>
+                </a:solidFill>
+                <a:latin typeface="Calibri" pitchFamily="34" charset="0"/>
+                <a:ea typeface="Calibri" pitchFamily="34" charset="-122"/>
+                <a:cs typeface="Calibri" pitchFamily="34" charset="-120"/>
+              </a:rPr>
+              <a:t>The primary value of minimal residual disease (MRD) testing is to:</a:t>
+            </a:r>
+            <a:endParaRPr lang="en-US" sz="1450" dirty="0"/>
+          </a:p>
+        </p:txBody>
+      </p:sp>
+      <p:sp>
+        <p:nvSpPr>
+          <p:cNvPr id="5" name="Text 3"/>
+          <p:cNvSpPr/>
+          <p:nvPr/>
+        </p:nvSpPr>
+        <p:spPr>
+          <a:xfrm>
+            <a:off x="658368" y="2395728"/>
+            <a:ext cx="6192390" cy="3017520"/>
+          </a:xfrm>
+          <a:prstGeom prst="rect">
+            <a:avLst/>
+          </a:prstGeom>
+          <a:noFill/>
+          <a:ln/>
+        </p:spPr>
+        <p:txBody>
+          <a:bodyPr wrap="square" lIns="0" tIns="0" rIns="0" bIns="0" rtlCol="0" anchor="t"/>
+          <a:lstStyle/>
+          <a:p>
+            <a:pPr algn="l" indent="0" marL="0">
+              <a:spcAft>
+                <a:spcPts val="600"/>
+              </a:spcAft>
+              <a:buNone/>
+            </a:pPr>
+            <a:r>
+              <a:rPr lang="en-US" sz="1350" dirty="0">
+                <a:solidFill>
+                  <a:srgbClr val="33444F"/>
+                </a:solidFill>
+                <a:latin typeface="Calibri" pitchFamily="34" charset="0"/>
+                <a:ea typeface="Calibri" pitchFamily="34" charset="-122"/>
+                <a:cs typeface="Calibri" pitchFamily="34" charset="-120"/>
+              </a:rPr>
+              <a:t>A. Replace morphology</a:t>
+            </a:r>
+            <a:endParaRPr lang="en-US" sz="1350" dirty="0"/>
+          </a:p>
+          <a:p>
+            <a:pPr algn="l" indent="0" marL="0">
+              <a:spcAft>
+                <a:spcPts val="600"/>
+              </a:spcAft>
+              <a:buNone/>
+            </a:pPr>
+            <a:r>
+              <a:rPr lang="en-US" sz="1350" b="1" dirty="0">
+                <a:solidFill>
+                  <a:srgbClr val="005A63"/>
+                </a:solidFill>
+                <a:latin typeface="Calibri" pitchFamily="34" charset="0"/>
+                <a:ea typeface="Calibri" pitchFamily="34" charset="-122"/>
+                <a:cs typeface="Calibri" pitchFamily="34" charset="-120"/>
+              </a:rPr>
+              <a:t>B. Detect disease below morphologic resolution and predict relapse</a:t>
+            </a:r>
+            <a:endParaRPr lang="en-US" sz="1350" dirty="0"/>
+          </a:p>
+          <a:p>
+            <a:pPr algn="l" indent="0" marL="0">
+              <a:spcAft>
+                <a:spcPts val="600"/>
+              </a:spcAft>
+              <a:buNone/>
+            </a:pPr>
+            <a:r>
+              <a:rPr lang="en-US" sz="1350" dirty="0">
+                <a:solidFill>
+                  <a:srgbClr val="33444F"/>
+                </a:solidFill>
+                <a:latin typeface="Calibri" pitchFamily="34" charset="0"/>
+                <a:ea typeface="Calibri" pitchFamily="34" charset="-122"/>
+                <a:cs typeface="Calibri" pitchFamily="34" charset="-120"/>
+              </a:rPr>
+              <a:t>C. Diagnose at presentation only</a:t>
+            </a:r>
+            <a:endParaRPr lang="en-US" sz="1350" dirty="0"/>
+          </a:p>
+          <a:p>
+            <a:pPr algn="l" indent="0" marL="0">
+              <a:spcAft>
+                <a:spcPts val="600"/>
+              </a:spcAft>
+              <a:buNone/>
+            </a:pPr>
+            <a:r>
+              <a:rPr lang="en-US" sz="1350" dirty="0">
+                <a:solidFill>
+                  <a:srgbClr val="33444F"/>
+                </a:solidFill>
+                <a:latin typeface="Calibri" pitchFamily="34" charset="0"/>
+                <a:ea typeface="Calibri" pitchFamily="34" charset="-122"/>
+                <a:cs typeface="Calibri" pitchFamily="34" charset="-120"/>
+              </a:rPr>
+              <a:t>D. Eliminate cytogenetics</a:t>
+            </a:r>
+            <a:endParaRPr lang="en-US" sz="1350" dirty="0"/>
+          </a:p>
+          <a:p>
+            <a:pPr algn="l" indent="0" marL="0">
+              <a:spcAft>
+                <a:spcPts val="600"/>
+              </a:spcAft>
+              <a:buNone/>
+            </a:pPr>
+            <a:r>
+              <a:rPr lang="en-US" sz="1350" dirty="0">
+                <a:solidFill>
+                  <a:srgbClr val="33444F"/>
+                </a:solidFill>
+                <a:latin typeface="Calibri" pitchFamily="34" charset="0"/>
+                <a:ea typeface="Calibri" pitchFamily="34" charset="-122"/>
+                <a:cs typeface="Calibri" pitchFamily="34" charset="-120"/>
+              </a:rPr>
+              <a:t>E. Measure tumor purity</a:t>
+            </a:r>
+            <a:endParaRPr lang="en-US" sz="1350" dirty="0"/>
+          </a:p>
+        </p:txBody>
+      </p:sp>
+      <p:sp>
+        <p:nvSpPr>
+          <p:cNvPr id="6" name="Shape 4"/>
+          <p:cNvSpPr/>
+          <p:nvPr/>
+        </p:nvSpPr>
+        <p:spPr>
+          <a:xfrm>
+            <a:off x="7201632" y="2395728"/>
+            <a:ext cx="4423136" cy="3246120"/>
+          </a:xfrm>
+          <a:prstGeom prst="roundRect">
+            <a:avLst>
+              <a:gd name="adj" fmla="val 2535"/>
+            </a:avLst>
+          </a:prstGeom>
+          <a:solidFill>
+            <a:srgbClr val="E0F2F4"/>
+          </a:solidFill>
+          <a:ln/>
+          <a:effectLst>
+            <a:outerShdw sx="100000" sy="100000" kx="0" ky="0" algn="bl" rotWithShape="0" blurRad="88900" dist="25400" dir="5400000">
+              <a:srgbClr val="22303C">
+                <a:alpha val="12000"/>
+              </a:srgbClr>
+            </a:outerShdw>
+          </a:effectLst>
+        </p:spPr>
+      </p:sp>
+      <p:sp>
+        <p:nvSpPr>
+          <p:cNvPr id="7" name="Text 5"/>
+          <p:cNvSpPr/>
+          <p:nvPr/>
+        </p:nvSpPr>
+        <p:spPr>
+          <a:xfrm>
+            <a:off x="7439376" y="2578608"/>
+            <a:ext cx="3965936" cy="457200"/>
+          </a:xfrm>
+          <a:prstGeom prst="rect">
+            <a:avLst/>
+          </a:prstGeom>
+          <a:noFill/>
+          <a:ln/>
+        </p:spPr>
+        <p:txBody>
+          <a:bodyPr wrap="square" lIns="0" tIns="0" rIns="0" bIns="0" rtlCol="0" anchor="ctr"/>
+          <a:lstStyle/>
+          <a:p>
+            <a:pPr indent="0" marL="0">
+              <a:buNone/>
+            </a:pPr>
+            <a:r>
+              <a:rPr lang="en-US" sz="1500" b="1" dirty="0">
+                <a:solidFill>
+                  <a:srgbClr val="00838F"/>
+                </a:solidFill>
+                <a:latin typeface="Calibri" pitchFamily="34" charset="0"/>
+                <a:ea typeface="Calibri" pitchFamily="34" charset="-122"/>
+                <a:cs typeface="Calibri" pitchFamily="34" charset="-120"/>
+              </a:rPr>
+              <a:t>ANSWER  </a:t>
+            </a:r>
+            <a:pPr indent="0" marL="0">
+              <a:buNone/>
+            </a:pPr>
+            <a:r>
+              <a:rPr lang="en-US" sz="1500" b="1" dirty="0">
+                <a:solidFill>
+                  <a:srgbClr val="1B2A38"/>
+                </a:solidFill>
+                <a:latin typeface="Calibri" pitchFamily="34" charset="0"/>
+                <a:ea typeface="Calibri" pitchFamily="34" charset="-122"/>
+                <a:cs typeface="Calibri" pitchFamily="34" charset="-120"/>
+              </a:rPr>
+              <a:t>B — Detect sub-morphologic disease/relapse</a:t>
+            </a:r>
+            <a:endParaRPr lang="en-US" sz="1500" dirty="0"/>
+          </a:p>
+        </p:txBody>
+      </p:sp>
+      <p:sp>
+        <p:nvSpPr>
+          <p:cNvPr id="8" name="Text 6"/>
+          <p:cNvSpPr/>
+          <p:nvPr/>
+        </p:nvSpPr>
+        <p:spPr>
+          <a:xfrm>
+            <a:off x="7439376" y="3127248"/>
+            <a:ext cx="3947648" cy="2377440"/>
+          </a:xfrm>
+          <a:prstGeom prst="rect">
+            <a:avLst/>
+          </a:prstGeom>
+          <a:noFill/>
+          <a:ln/>
+        </p:spPr>
+        <p:txBody>
+          <a:bodyPr wrap="square" lIns="0" tIns="0" rIns="0" bIns="0" rtlCol="0" anchor="t"/>
+          <a:lstStyle/>
+          <a:p>
+            <a:pPr algn="l" indent="0" marL="0">
+              <a:lnSpc>
+                <a:spcPct val="108000"/>
+              </a:lnSpc>
+              <a:buNone/>
+            </a:pPr>
+            <a:r>
+              <a:rPr lang="en-US" sz="1250" dirty="0">
+                <a:solidFill>
+                  <a:srgbClr val="33444F"/>
+                </a:solidFill>
+                <a:latin typeface="Calibri" pitchFamily="34" charset="0"/>
+                <a:ea typeface="Calibri" pitchFamily="34" charset="-122"/>
+                <a:cs typeface="Calibri" pitchFamily="34" charset="-120"/>
+              </a:rPr>
+              <a:t>MRD quantifies residual disease beneath morphologic detection and can flag relapse earlier.</a:t>
+            </a:r>
+            <a:endParaRPr lang="en-US" sz="1250" dirty="0"/>
+          </a:p>
+        </p:txBody>
+      </p:sp>
+      <p:sp>
+        <p:nvSpPr>
+          <p:cNvPr id="9" name="Text 7"/>
+          <p:cNvSpPr/>
+          <p:nvPr/>
+        </p:nvSpPr>
+        <p:spPr>
+          <a:xfrm>
+            <a:off x="566928" y="6473952"/>
+            <a:ext cx="7772400" cy="274320"/>
+          </a:xfrm>
+          <a:prstGeom prst="rect">
+            <a:avLst/>
+          </a:prstGeom>
+          <a:noFill/>
+          <a:ln/>
+        </p:spPr>
+        <p:txBody>
+          <a:bodyPr wrap="square" lIns="0" tIns="0" rIns="0" bIns="0" rtlCol="0" anchor="ctr"/>
+          <a:lstStyle/>
+          <a:p>
+            <a:pPr algn="l" indent="0" marL="0">
+              <a:buNone/>
+            </a:pPr>
+            <a:r>
+              <a:rPr lang="en-US" sz="850" dirty="0">
+                <a:solidFill>
+                  <a:srgbClr val="9AA8B4"/>
+                </a:solidFill>
+                <a:latin typeface="Calibri" pitchFamily="34" charset="0"/>
+                <a:ea typeface="Calibri" pitchFamily="34" charset="-122"/>
+                <a:cs typeface="Calibri" pitchFamily="34" charset="-120"/>
+              </a:rPr>
+              <a:t>Makassed General Hospital  ·  Department of Laboratory Medicine</a:t>
+            </a:r>
+            <a:endParaRPr lang="en-US" sz="850" dirty="0"/>
+          </a:p>
+        </p:txBody>
+      </p:sp>
+      <p:sp>
+        <p:nvSpPr>
+          <p:cNvPr id="10" name="Text 8"/>
+          <p:cNvSpPr/>
+          <p:nvPr/>
+        </p:nvSpPr>
+        <p:spPr>
+          <a:xfrm>
+            <a:off x="9814255" y="6473952"/>
+            <a:ext cx="1828800" cy="274320"/>
+          </a:xfrm>
+          <a:prstGeom prst="rect">
+            <a:avLst/>
+          </a:prstGeom>
+          <a:noFill/>
+          <a:ln/>
+        </p:spPr>
+        <p:txBody>
+          <a:bodyPr wrap="square" lIns="0" tIns="0" rIns="0" bIns="0" rtlCol="0" anchor="ctr"/>
+          <a:lstStyle/>
+          <a:p>
+            <a:pPr algn="r" indent="0" marL="0">
+              <a:buNone/>
+            </a:pPr>
+            <a:r>
+              <a:rPr lang="en-US" sz="850" dirty="0">
+                <a:solidFill>
+                  <a:srgbClr val="9AA8B4"/>
+                </a:solidFill>
+                <a:latin typeface="Calibri" pitchFamily="34" charset="0"/>
+                <a:ea typeface="Calibri" pitchFamily="34" charset="-122"/>
+                <a:cs typeface="Calibri" pitchFamily="34" charset="-120"/>
+              </a:rPr>
+              <a:t>CP Lecture Series</a:t>
+            </a:r>
+            <a:pPr algn="r" indent="0" marL="0">
+              <a:buNone/>
+            </a:pPr>
+            <a:r>
+              <a:rPr lang="en-US" sz="850" dirty="0">
+                <a:solidFill>
+                  <a:srgbClr val="DCE4EC"/>
+                </a:solidFill>
+                <a:latin typeface="Calibri" pitchFamily="34" charset="0"/>
+                <a:ea typeface="Calibri" pitchFamily="34" charset="-122"/>
+                <a:cs typeface="Calibri" pitchFamily="34" charset="-120"/>
+              </a:rPr>
+              <a:t>   ·   </a:t>
+            </a:r>
+            <a:pPr algn="r" indent="0" marL="0">
+              <a:buNone/>
+            </a:pPr>
+            <a:r>
+              <a:rPr lang="en-US" sz="850" b="1" dirty="0">
+                <a:solidFill>
+                  <a:srgbClr val="00838F"/>
+                </a:solidFill>
+                <a:latin typeface="Calibri" pitchFamily="34" charset="0"/>
+                <a:ea typeface="Calibri" pitchFamily="34" charset="-122"/>
+                <a:cs typeface="Calibri" pitchFamily="34" charset="-120"/>
+              </a:rPr>
+              <a:t>21</a:t>
+            </a:r>
+            <a:endParaRPr lang="en-US" sz="850" dirty="0"/>
+          </a:p>
+        </p:txBody>
+      </p:sp>
+    </p:spTree>
+  </p:cSld>
+  <p:clrMapOvr>
+    <a:masterClrMapping/>
+  </p:clrMapOvr>
+</p:sld>
+</file>
+
+<file path=ppt/slides/slide25.xml><?xml version="1.0" encoding="utf-8"?>
+<p:sld xmlns:a="http://schemas.openxmlformats.org/drawingml/2006/main" xmlns:r="http://schemas.openxmlformats.org/officeDocument/2006/relationships" xmlns:p="http://schemas.openxmlformats.org/presentationml/2006/main">
+  <p:cSld name="Slide 25">
+    <p:bg>
+      <p:bgPr>
+        <a:solidFill>
+          <a:srgbClr val="0A2A45"/>
+        </a:solidFill>
+      </p:bgPr>
+    </p:bg>
+    <p:spTree>
+      <p:nvGrpSpPr>
+        <p:cNvPr id="1" name=""/>
+        <p:cNvGrpSpPr/>
+        <p:nvPr/>
+      </p:nvGrpSpPr>
+      <p:grpSpPr>
+        <a:xfrm>
+          <a:off x="0" y="0"/>
+          <a:ext cx="0" cy="0"/>
+          <a:chOff x="0" y="0"/>
+          <a:chExt cx="0" cy="0"/>
+        </a:xfrm>
+      </p:grpSpPr>
+      <p:sp>
+        <p:nvSpPr>
+          <p:cNvPr id="2" name="Text 0"/>
+          <p:cNvSpPr/>
+          <p:nvPr/>
+        </p:nvSpPr>
+        <p:spPr>
+          <a:xfrm>
+            <a:off x="566928" y="329184"/>
+            <a:ext cx="10058400" cy="310896"/>
+          </a:xfrm>
+          <a:prstGeom prst="rect">
+            <a:avLst/>
+          </a:prstGeom>
+          <a:noFill/>
+          <a:ln/>
+        </p:spPr>
+        <p:txBody>
+          <a:bodyPr wrap="square" lIns="0" tIns="0" rIns="0" bIns="0" rtlCol="0" anchor="ctr"/>
+          <a:lstStyle/>
+          <a:p>
+            <a:pPr indent="0" marL="0">
+              <a:buNone/>
+            </a:pPr>
+            <a:r>
+              <a:rPr lang="en-US" sz="1100" b="1" spc="150" kern="0" dirty="0">
+                <a:solidFill>
+                  <a:srgbClr val="00838F"/>
+                </a:solidFill>
+                <a:latin typeface="Calibri" pitchFamily="34" charset="0"/>
+                <a:ea typeface="Calibri" pitchFamily="34" charset="-122"/>
+                <a:cs typeface="Calibri" pitchFamily="34" charset="-120"/>
+              </a:rPr>
+              <a:t>MOLECULAR &amp; CYTOGENETICS</a:t>
+            </a:r>
+            <a:endParaRPr lang="en-US" sz="1100" dirty="0"/>
+          </a:p>
+        </p:txBody>
+      </p:sp>
+      <p:sp>
+        <p:nvSpPr>
+          <p:cNvPr id="3" name="Text 1"/>
+          <p:cNvSpPr/>
+          <p:nvPr/>
+        </p:nvSpPr>
+        <p:spPr>
+          <a:xfrm>
+            <a:off x="566928" y="676656"/>
+            <a:ext cx="10972800" cy="749808"/>
+          </a:xfrm>
+          <a:prstGeom prst="rect">
+            <a:avLst/>
+          </a:prstGeom>
+          <a:noFill/>
+          <a:ln/>
+        </p:spPr>
+        <p:txBody>
+          <a:bodyPr wrap="square" lIns="0" tIns="0" rIns="0" bIns="0" rtlCol="0" anchor="ctr"/>
+          <a:lstStyle/>
+          <a:p>
+            <a:pPr indent="0" marL="0">
+              <a:buNone/>
+            </a:pPr>
+            <a:r>
+              <a:rPr lang="en-US" sz="3000" b="1" dirty="0">
+                <a:solidFill>
+                  <a:srgbClr val="FFFFFF"/>
+                </a:solidFill>
+                <a:latin typeface="Calibri" pitchFamily="34" charset="0"/>
+                <a:ea typeface="Calibri" pitchFamily="34" charset="-122"/>
+                <a:cs typeface="Calibri" pitchFamily="34" charset="-120"/>
+              </a:rPr>
+              <a:t>Key Take-Home Points</a:t>
+            </a:r>
+            <a:endParaRPr lang="en-US" sz="3000" dirty="0"/>
+          </a:p>
+        </p:txBody>
+      </p:sp>
+      <p:sp>
+        <p:nvSpPr>
+          <p:cNvPr id="4" name="Shape 2"/>
+          <p:cNvSpPr/>
+          <p:nvPr/>
+        </p:nvSpPr>
+        <p:spPr>
+          <a:xfrm>
+            <a:off x="566928" y="1517904"/>
+            <a:ext cx="11057839" cy="841248"/>
+          </a:xfrm>
+          <a:prstGeom prst="roundRect">
+            <a:avLst>
+              <a:gd name="adj" fmla="val 7609"/>
+            </a:avLst>
+          </a:prstGeom>
+          <a:solidFill>
+            <a:srgbClr val="143651"/>
+          </a:solidFill>
+          <a:ln/>
+        </p:spPr>
+      </p:sp>
+      <p:sp>
+        <p:nvSpPr>
+          <p:cNvPr id="5" name="Shape 3"/>
+          <p:cNvSpPr/>
+          <p:nvPr/>
+        </p:nvSpPr>
+        <p:spPr>
+          <a:xfrm>
+            <a:off x="749808" y="1755648"/>
+            <a:ext cx="365760" cy="365760"/>
+          </a:xfrm>
+          <a:prstGeom prst="ellipse">
+            <a:avLst/>
+          </a:prstGeom>
+          <a:solidFill>
+            <a:srgbClr val="00838F"/>
+          </a:solidFill>
+          <a:ln/>
+          <a:effectLst>
+            <a:outerShdw sx="100000" sy="100000" kx="0" ky="0" algn="bl" rotWithShape="0" blurRad="88900" dist="25400" dir="5400000">
+              <a:srgbClr val="22303C">
+                <a:alpha val="12000"/>
+              </a:srgbClr>
+            </a:outerShdw>
+          </a:effectLst>
+        </p:spPr>
+      </p:sp>
+      <p:sp>
+        <p:nvSpPr>
+          <p:cNvPr id="6" name="Text 4"/>
+          <p:cNvSpPr/>
+          <p:nvPr/>
+        </p:nvSpPr>
+        <p:spPr>
+          <a:xfrm>
+            <a:off x="749808" y="1755648"/>
+            <a:ext cx="365760" cy="365760"/>
+          </a:xfrm>
+          <a:prstGeom prst="rect">
+            <a:avLst/>
+          </a:prstGeom>
+          <a:noFill/>
+          <a:ln/>
+        </p:spPr>
+        <p:txBody>
+          <a:bodyPr wrap="square" lIns="0" tIns="0" rIns="0" bIns="0" rtlCol="0" anchor="ctr"/>
+          <a:lstStyle/>
+          <a:p>
+            <a:pPr algn="ctr" indent="0" marL="0">
+              <a:buNone/>
+            </a:pPr>
+            <a:r>
+              <a:rPr lang="en-US" sz="1500" b="1" dirty="0">
+                <a:solidFill>
+                  <a:srgbClr val="FFFFFF"/>
+                </a:solidFill>
+                <a:latin typeface="Calibri" pitchFamily="34" charset="0"/>
+                <a:ea typeface="Calibri" pitchFamily="34" charset="-122"/>
+                <a:cs typeface="Calibri" pitchFamily="34" charset="-120"/>
+              </a:rPr>
+              <a:t>1</a:t>
+            </a:r>
+            <a:endParaRPr lang="en-US" sz="1500" dirty="0"/>
+          </a:p>
+        </p:txBody>
+      </p:sp>
+      <p:sp>
+        <p:nvSpPr>
+          <p:cNvPr id="7" name="Text 5"/>
+          <p:cNvSpPr/>
+          <p:nvPr/>
+        </p:nvSpPr>
+        <p:spPr>
+          <a:xfrm>
+            <a:off x="1280160" y="1517904"/>
+            <a:ext cx="10143439" cy="841248"/>
+          </a:xfrm>
+          <a:prstGeom prst="rect">
+            <a:avLst/>
+          </a:prstGeom>
+          <a:noFill/>
+          <a:ln/>
+        </p:spPr>
+        <p:txBody>
+          <a:bodyPr wrap="square" lIns="0" tIns="0" rIns="0" bIns="0" rtlCol="0" anchor="ctr"/>
+          <a:lstStyle/>
+          <a:p>
+            <a:pPr algn="l" indent="0" marL="0">
+              <a:buNone/>
+            </a:pPr>
+            <a:r>
+              <a:rPr lang="en-US" sz="1350" dirty="0">
+                <a:solidFill>
+                  <a:srgbClr val="E7EEF4"/>
+                </a:solidFill>
+                <a:latin typeface="Calibri" pitchFamily="34" charset="0"/>
+                <a:ea typeface="Calibri" pitchFamily="34" charset="-122"/>
+                <a:cs typeface="Calibri" pitchFamily="34" charset="-120"/>
+              </a:rPr>
+              <a:t>Driver fusions (BCR-ABL1, PML-RARA) define entities and are detected by FISH/RT-PCR; some are therapeutic targets.</a:t>
+            </a:r>
+            <a:endParaRPr lang="en-US" sz="1350" dirty="0"/>
+          </a:p>
+        </p:txBody>
+      </p:sp>
+      <p:sp>
+        <p:nvSpPr>
+          <p:cNvPr id="8" name="Shape 6"/>
+          <p:cNvSpPr/>
+          <p:nvPr/>
+        </p:nvSpPr>
+        <p:spPr>
+          <a:xfrm>
+            <a:off x="566928" y="2505456"/>
+            <a:ext cx="11057839" cy="841248"/>
+          </a:xfrm>
+          <a:prstGeom prst="roundRect">
+            <a:avLst>
+              <a:gd name="adj" fmla="val 7609"/>
+            </a:avLst>
+          </a:prstGeom>
+          <a:solidFill>
+            <a:srgbClr val="143651"/>
+          </a:solidFill>
+          <a:ln/>
+        </p:spPr>
+      </p:sp>
+      <p:sp>
+        <p:nvSpPr>
+          <p:cNvPr id="9" name="Shape 7"/>
+          <p:cNvSpPr/>
+          <p:nvPr/>
+        </p:nvSpPr>
+        <p:spPr>
+          <a:xfrm>
+            <a:off x="749808" y="2743200"/>
+            <a:ext cx="365760" cy="365760"/>
+          </a:xfrm>
+          <a:prstGeom prst="ellipse">
+            <a:avLst/>
+          </a:prstGeom>
+          <a:solidFill>
+            <a:srgbClr val="00838F"/>
+          </a:solidFill>
+          <a:ln/>
+          <a:effectLst>
+            <a:outerShdw sx="100000" sy="100000" kx="0" ky="0" algn="bl" rotWithShape="0" blurRad="88900" dist="25400" dir="5400000">
+              <a:srgbClr val="22303C">
+                <a:alpha val="12000"/>
+              </a:srgbClr>
+            </a:outerShdw>
+          </a:effectLst>
+        </p:spPr>
+      </p:sp>
+      <p:sp>
+        <p:nvSpPr>
+          <p:cNvPr id="10" name="Text 8"/>
+          <p:cNvSpPr/>
+          <p:nvPr/>
+        </p:nvSpPr>
+        <p:spPr>
+          <a:xfrm>
+            <a:off x="749808" y="2743200"/>
+            <a:ext cx="365760" cy="365760"/>
+          </a:xfrm>
+          <a:prstGeom prst="rect">
+            <a:avLst/>
+          </a:prstGeom>
+          <a:noFill/>
+          <a:ln/>
+        </p:spPr>
+        <p:txBody>
+          <a:bodyPr wrap="square" lIns="0" tIns="0" rIns="0" bIns="0" rtlCol="0" anchor="ctr"/>
+          <a:lstStyle/>
+          <a:p>
+            <a:pPr algn="ctr" indent="0" marL="0">
+              <a:buNone/>
+            </a:pPr>
+            <a:r>
+              <a:rPr lang="en-US" sz="1500" b="1" dirty="0">
+                <a:solidFill>
+                  <a:srgbClr val="FFFFFF"/>
+                </a:solidFill>
+                <a:latin typeface="Calibri" pitchFamily="34" charset="0"/>
+                <a:ea typeface="Calibri" pitchFamily="34" charset="-122"/>
+                <a:cs typeface="Calibri" pitchFamily="34" charset="-120"/>
+              </a:rPr>
+              <a:t>2</a:t>
+            </a:r>
+            <a:endParaRPr lang="en-US" sz="1500" dirty="0"/>
+          </a:p>
+        </p:txBody>
+      </p:sp>
+      <p:sp>
+        <p:nvSpPr>
+          <p:cNvPr id="11" name="Text 9"/>
+          <p:cNvSpPr/>
+          <p:nvPr/>
+        </p:nvSpPr>
+        <p:spPr>
+          <a:xfrm>
+            <a:off x="1280160" y="2505456"/>
+            <a:ext cx="10143439" cy="841248"/>
+          </a:xfrm>
+          <a:prstGeom prst="rect">
+            <a:avLst/>
+          </a:prstGeom>
+          <a:noFill/>
+          <a:ln/>
+        </p:spPr>
+        <p:txBody>
+          <a:bodyPr wrap="square" lIns="0" tIns="0" rIns="0" bIns="0" rtlCol="0" anchor="ctr"/>
+          <a:lstStyle/>
+          <a:p>
+            <a:pPr algn="l" indent="0" marL="0">
+              <a:buNone/>
+            </a:pPr>
+            <a:r>
+              <a:rPr lang="en-US" sz="1350" dirty="0">
+                <a:solidFill>
+                  <a:srgbClr val="E7EEF4"/>
+                </a:solidFill>
+                <a:latin typeface="Calibri" pitchFamily="34" charset="0"/>
+                <a:ea typeface="Calibri" pitchFamily="34" charset="-122"/>
+                <a:cs typeface="Calibri" pitchFamily="34" charset="-120"/>
+              </a:rPr>
+              <a:t>Cytogenetics/FISH remain foundational for risk stratification (favorable/intermediate/adverse).</a:t>
+            </a:r>
+            <a:endParaRPr lang="en-US" sz="1350" dirty="0"/>
+          </a:p>
+        </p:txBody>
+      </p:sp>
+      <p:sp>
+        <p:nvSpPr>
+          <p:cNvPr id="12" name="Shape 10"/>
+          <p:cNvSpPr/>
+          <p:nvPr/>
+        </p:nvSpPr>
+        <p:spPr>
+          <a:xfrm>
+            <a:off x="566928" y="3493008"/>
+            <a:ext cx="11057839" cy="841248"/>
+          </a:xfrm>
+          <a:prstGeom prst="roundRect">
+            <a:avLst>
+              <a:gd name="adj" fmla="val 7609"/>
+            </a:avLst>
+          </a:prstGeom>
+          <a:solidFill>
+            <a:srgbClr val="143651"/>
+          </a:solidFill>
+          <a:ln/>
+        </p:spPr>
+      </p:sp>
+      <p:sp>
+        <p:nvSpPr>
+          <p:cNvPr id="13" name="Shape 11"/>
+          <p:cNvSpPr/>
+          <p:nvPr/>
+        </p:nvSpPr>
+        <p:spPr>
+          <a:xfrm>
+            <a:off x="749808" y="3730752"/>
+            <a:ext cx="365760" cy="365760"/>
+          </a:xfrm>
+          <a:prstGeom prst="ellipse">
+            <a:avLst/>
+          </a:prstGeom>
+          <a:solidFill>
+            <a:srgbClr val="00838F"/>
+          </a:solidFill>
+          <a:ln/>
+          <a:effectLst>
+            <a:outerShdw sx="100000" sy="100000" kx="0" ky="0" algn="bl" rotWithShape="0" blurRad="88900" dist="25400" dir="5400000">
+              <a:srgbClr val="22303C">
+                <a:alpha val="12000"/>
+              </a:srgbClr>
+            </a:outerShdw>
+          </a:effectLst>
+        </p:spPr>
+      </p:sp>
+      <p:sp>
+        <p:nvSpPr>
+          <p:cNvPr id="14" name="Text 12"/>
+          <p:cNvSpPr/>
+          <p:nvPr/>
+        </p:nvSpPr>
+        <p:spPr>
+          <a:xfrm>
+            <a:off x="749808" y="3730752"/>
+            <a:ext cx="365760" cy="365760"/>
+          </a:xfrm>
+          <a:prstGeom prst="rect">
+            <a:avLst/>
+          </a:prstGeom>
+          <a:noFill/>
+          <a:ln/>
+        </p:spPr>
+        <p:txBody>
+          <a:bodyPr wrap="square" lIns="0" tIns="0" rIns="0" bIns="0" rtlCol="0" anchor="ctr"/>
+          <a:lstStyle/>
+          <a:p>
+            <a:pPr algn="ctr" indent="0" marL="0">
+              <a:buNone/>
+            </a:pPr>
+            <a:r>
+              <a:rPr lang="en-US" sz="1500" b="1" dirty="0">
+                <a:solidFill>
+                  <a:srgbClr val="FFFFFF"/>
+                </a:solidFill>
+                <a:latin typeface="Calibri" pitchFamily="34" charset="0"/>
+                <a:ea typeface="Calibri" pitchFamily="34" charset="-122"/>
+                <a:cs typeface="Calibri" pitchFamily="34" charset="-120"/>
+              </a:rPr>
+              <a:t>3</a:t>
+            </a:r>
+            <a:endParaRPr lang="en-US" sz="1500" dirty="0"/>
+          </a:p>
+        </p:txBody>
+      </p:sp>
+      <p:sp>
+        <p:nvSpPr>
+          <p:cNvPr id="15" name="Text 13"/>
+          <p:cNvSpPr/>
+          <p:nvPr/>
+        </p:nvSpPr>
+        <p:spPr>
+          <a:xfrm>
+            <a:off x="1280160" y="3493008"/>
+            <a:ext cx="10143439" cy="841248"/>
+          </a:xfrm>
+          <a:prstGeom prst="rect">
+            <a:avLst/>
+          </a:prstGeom>
+          <a:noFill/>
+          <a:ln/>
+        </p:spPr>
+        <p:txBody>
+          <a:bodyPr wrap="square" lIns="0" tIns="0" rIns="0" bIns="0" rtlCol="0" anchor="ctr"/>
+          <a:lstStyle/>
+          <a:p>
+            <a:pPr algn="l" indent="0" marL="0">
+              <a:buNone/>
+            </a:pPr>
+            <a:r>
+              <a:rPr lang="en-US" sz="1350" dirty="0">
+                <a:solidFill>
+                  <a:srgbClr val="E7EEF4"/>
+                </a:solidFill>
+                <a:latin typeface="Calibri" pitchFamily="34" charset="0"/>
+                <a:ea typeface="Calibri" pitchFamily="34" charset="-122"/>
+                <a:cs typeface="Calibri" pitchFamily="34" charset="-120"/>
+              </a:rPr>
+              <a:t>Key mutations (FLT3, NPM1, IDH1/2, JAK2) inform prognosis and therapy; clonality testing supports lymphoid diagnosis.</a:t>
+            </a:r>
+            <a:endParaRPr lang="en-US" sz="1350" dirty="0"/>
+          </a:p>
+        </p:txBody>
+      </p:sp>
+      <p:sp>
+        <p:nvSpPr>
+          <p:cNvPr id="16" name="Shape 14"/>
+          <p:cNvSpPr/>
+          <p:nvPr/>
+        </p:nvSpPr>
+        <p:spPr>
+          <a:xfrm>
+            <a:off x="566928" y="4480560"/>
+            <a:ext cx="11057839" cy="841248"/>
+          </a:xfrm>
+          <a:prstGeom prst="roundRect">
+            <a:avLst>
+              <a:gd name="adj" fmla="val 7609"/>
+            </a:avLst>
+          </a:prstGeom>
+          <a:solidFill>
+            <a:srgbClr val="143651"/>
+          </a:solidFill>
+          <a:ln/>
+        </p:spPr>
+      </p:sp>
+      <p:sp>
+        <p:nvSpPr>
+          <p:cNvPr id="17" name="Shape 15"/>
+          <p:cNvSpPr/>
+          <p:nvPr/>
+        </p:nvSpPr>
+        <p:spPr>
+          <a:xfrm>
+            <a:off x="749808" y="4718304"/>
+            <a:ext cx="365760" cy="365760"/>
+          </a:xfrm>
+          <a:prstGeom prst="ellipse">
+            <a:avLst/>
+          </a:prstGeom>
+          <a:solidFill>
+            <a:srgbClr val="00838F"/>
+          </a:solidFill>
+          <a:ln/>
+          <a:effectLst>
+            <a:outerShdw sx="100000" sy="100000" kx="0" ky="0" algn="bl" rotWithShape="0" blurRad="88900" dist="25400" dir="5400000">
+              <a:srgbClr val="22303C">
+                <a:alpha val="12000"/>
+              </a:srgbClr>
+            </a:outerShdw>
+          </a:effectLst>
+        </p:spPr>
+      </p:sp>
+      <p:sp>
+        <p:nvSpPr>
+          <p:cNvPr id="18" name="Text 16"/>
+          <p:cNvSpPr/>
+          <p:nvPr/>
+        </p:nvSpPr>
+        <p:spPr>
+          <a:xfrm>
+            <a:off x="749808" y="4718304"/>
+            <a:ext cx="365760" cy="365760"/>
+          </a:xfrm>
+          <a:prstGeom prst="rect">
+            <a:avLst/>
+          </a:prstGeom>
+          <a:noFill/>
+          <a:ln/>
+        </p:spPr>
+        <p:txBody>
+          <a:bodyPr wrap="square" lIns="0" tIns="0" rIns="0" bIns="0" rtlCol="0" anchor="ctr"/>
+          <a:lstStyle/>
+          <a:p>
+            <a:pPr algn="ctr" indent="0" marL="0">
+              <a:buNone/>
+            </a:pPr>
+            <a:r>
+              <a:rPr lang="en-US" sz="1500" b="1" dirty="0">
+                <a:solidFill>
+                  <a:srgbClr val="FFFFFF"/>
+                </a:solidFill>
+                <a:latin typeface="Calibri" pitchFamily="34" charset="0"/>
+                <a:ea typeface="Calibri" pitchFamily="34" charset="-122"/>
+                <a:cs typeface="Calibri" pitchFamily="34" charset="-120"/>
+              </a:rPr>
+              <a:t>4</a:t>
+            </a:r>
+            <a:endParaRPr lang="en-US" sz="1500" dirty="0"/>
+          </a:p>
+        </p:txBody>
+      </p:sp>
+      <p:sp>
+        <p:nvSpPr>
+          <p:cNvPr id="19" name="Text 17"/>
+          <p:cNvSpPr/>
+          <p:nvPr/>
+        </p:nvSpPr>
+        <p:spPr>
+          <a:xfrm>
+            <a:off x="1280160" y="4480560"/>
+            <a:ext cx="10143439" cy="841248"/>
+          </a:xfrm>
+          <a:prstGeom prst="rect">
+            <a:avLst/>
+          </a:prstGeom>
+          <a:noFill/>
+          <a:ln/>
+        </p:spPr>
+        <p:txBody>
+          <a:bodyPr wrap="square" lIns="0" tIns="0" rIns="0" bIns="0" rtlCol="0" anchor="ctr"/>
+          <a:lstStyle/>
+          <a:p>
+            <a:pPr algn="l" indent="0" marL="0">
+              <a:buNone/>
+            </a:pPr>
+            <a:r>
+              <a:rPr lang="en-US" sz="1350" dirty="0">
+                <a:solidFill>
+                  <a:srgbClr val="E7EEF4"/>
+                </a:solidFill>
+                <a:latin typeface="Calibri" pitchFamily="34" charset="0"/>
+                <a:ea typeface="Calibri" pitchFamily="34" charset="-122"/>
+                <a:cs typeface="Calibri" pitchFamily="34" charset="-120"/>
+              </a:rPr>
+              <a:t>Quantitative BCR-ABL1 (IS) and MRD assays monitor response and detect early relapse — report with limit of detection.</a:t>
+            </a:r>
+            <a:endParaRPr lang="en-US" sz="1350" dirty="0"/>
+          </a:p>
+        </p:txBody>
+      </p:sp>
+      <p:sp>
+        <p:nvSpPr>
+          <p:cNvPr id="20" name="Shape 18"/>
+          <p:cNvSpPr/>
+          <p:nvPr/>
+        </p:nvSpPr>
+        <p:spPr>
+          <a:xfrm>
+            <a:off x="566928" y="5468112"/>
+            <a:ext cx="11057839" cy="841248"/>
+          </a:xfrm>
+          <a:prstGeom prst="roundRect">
+            <a:avLst>
+              <a:gd name="adj" fmla="val 7609"/>
+            </a:avLst>
+          </a:prstGeom>
+          <a:solidFill>
+            <a:srgbClr val="143651"/>
+          </a:solidFill>
+          <a:ln/>
+        </p:spPr>
+      </p:sp>
+      <p:sp>
+        <p:nvSpPr>
+          <p:cNvPr id="21" name="Shape 19"/>
+          <p:cNvSpPr/>
+          <p:nvPr/>
+        </p:nvSpPr>
+        <p:spPr>
+          <a:xfrm>
+            <a:off x="749808" y="5705856"/>
+            <a:ext cx="365760" cy="365760"/>
+          </a:xfrm>
+          <a:prstGeom prst="ellipse">
+            <a:avLst/>
+          </a:prstGeom>
+          <a:solidFill>
+            <a:srgbClr val="00838F"/>
+          </a:solidFill>
+          <a:ln/>
+          <a:effectLst>
+            <a:outerShdw sx="100000" sy="100000" kx="0" ky="0" algn="bl" rotWithShape="0" blurRad="88900" dist="25400" dir="5400000">
+              <a:srgbClr val="22303C">
+                <a:alpha val="12000"/>
+              </a:srgbClr>
+            </a:outerShdw>
+          </a:effectLst>
+        </p:spPr>
+      </p:sp>
+      <p:sp>
+        <p:nvSpPr>
+          <p:cNvPr id="22" name="Text 20"/>
+          <p:cNvSpPr/>
+          <p:nvPr/>
+        </p:nvSpPr>
+        <p:spPr>
+          <a:xfrm>
+            <a:off x="749808" y="5705856"/>
+            <a:ext cx="365760" cy="365760"/>
+          </a:xfrm>
+          <a:prstGeom prst="rect">
+            <a:avLst/>
+          </a:prstGeom>
+          <a:noFill/>
+          <a:ln/>
+        </p:spPr>
+        <p:txBody>
+          <a:bodyPr wrap="square" lIns="0" tIns="0" rIns="0" bIns="0" rtlCol="0" anchor="ctr"/>
+          <a:lstStyle/>
+          <a:p>
+            <a:pPr algn="ctr" indent="0" marL="0">
+              <a:buNone/>
+            </a:pPr>
+            <a:r>
+              <a:rPr lang="en-US" sz="1500" b="1" dirty="0">
+                <a:solidFill>
+                  <a:srgbClr val="FFFFFF"/>
+                </a:solidFill>
+                <a:latin typeface="Calibri" pitchFamily="34" charset="0"/>
+                <a:ea typeface="Calibri" pitchFamily="34" charset="-122"/>
+                <a:cs typeface="Calibri" pitchFamily="34" charset="-120"/>
+              </a:rPr>
+              <a:t>5</a:t>
+            </a:r>
+            <a:endParaRPr lang="en-US" sz="1500" dirty="0"/>
+          </a:p>
+        </p:txBody>
+      </p:sp>
+      <p:sp>
+        <p:nvSpPr>
+          <p:cNvPr id="23" name="Text 21"/>
+          <p:cNvSpPr/>
+          <p:nvPr/>
+        </p:nvSpPr>
+        <p:spPr>
+          <a:xfrm>
+            <a:off x="1280160" y="5468112"/>
+            <a:ext cx="10143439" cy="841248"/>
+          </a:xfrm>
+          <a:prstGeom prst="rect">
+            <a:avLst/>
+          </a:prstGeom>
+          <a:noFill/>
+          <a:ln/>
+        </p:spPr>
+        <p:txBody>
+          <a:bodyPr wrap="square" lIns="0" tIns="0" rIns="0" bIns="0" rtlCol="0" anchor="ctr"/>
+          <a:lstStyle/>
+          <a:p>
+            <a:pPr algn="l" indent="0" marL="0">
+              <a:buNone/>
+            </a:pPr>
+            <a:r>
+              <a:rPr lang="en-US" sz="1350" dirty="0">
+                <a:solidFill>
+                  <a:srgbClr val="E7EEF4"/>
+                </a:solidFill>
+                <a:latin typeface="Calibri" pitchFamily="34" charset="0"/>
+                <a:ea typeface="Calibri" pitchFamily="34" charset="-122"/>
+                <a:cs typeface="Calibri" pitchFamily="34" charset="-120"/>
+              </a:rPr>
+              <a:t>Diagnosis is integrated: morphology + flow + cytogenetics + molecular; recognize emergencies like APL.</a:t>
+            </a:r>
+            <a:endParaRPr lang="en-US" sz="1350" dirty="0"/>
+          </a:p>
+        </p:txBody>
+      </p:sp>
+      <p:sp>
+        <p:nvSpPr>
+          <p:cNvPr id="24" name="Text 22"/>
+          <p:cNvSpPr/>
+          <p:nvPr/>
+        </p:nvSpPr>
+        <p:spPr>
+          <a:xfrm>
+            <a:off x="566928" y="6473952"/>
+            <a:ext cx="8229600" cy="274320"/>
+          </a:xfrm>
+          <a:prstGeom prst="rect">
+            <a:avLst/>
+          </a:prstGeom>
+          <a:noFill/>
+          <a:ln/>
+        </p:spPr>
+        <p:txBody>
+          <a:bodyPr wrap="square" lIns="0" tIns="0" rIns="0" bIns="0" rtlCol="0" anchor="ctr"/>
+          <a:lstStyle/>
+          <a:p>
+            <a:pPr indent="0" marL="0">
+              <a:buNone/>
+            </a:pPr>
+            <a:r>
+              <a:rPr lang="en-US" sz="850" dirty="0">
+                <a:solidFill>
+                  <a:srgbClr val="5E7488"/>
+                </a:solidFill>
+                <a:latin typeface="Calibri" pitchFamily="34" charset="0"/>
+                <a:ea typeface="Calibri" pitchFamily="34" charset="-122"/>
+                <a:cs typeface="Calibri" pitchFamily="34" charset="-120"/>
+              </a:rPr>
+              <a:t>Makassed General Hospital  ·  Department of Laboratory Medicine</a:t>
+            </a:r>
+            <a:endParaRPr lang="en-US" sz="850" dirty="0"/>
+          </a:p>
+        </p:txBody>
+      </p:sp>
+      <p:sp>
+        <p:nvSpPr>
+          <p:cNvPr id="25" name="Text 23"/>
+          <p:cNvSpPr/>
+          <p:nvPr/>
+        </p:nvSpPr>
+        <p:spPr>
+          <a:xfrm>
+            <a:off x="11002975" y="6473952"/>
+            <a:ext cx="640080" cy="274320"/>
+          </a:xfrm>
+          <a:prstGeom prst="rect">
+            <a:avLst/>
+          </a:prstGeom>
+          <a:noFill/>
+          <a:ln/>
+        </p:spPr>
+        <p:txBody>
+          <a:bodyPr wrap="square" lIns="0" tIns="0" rIns="0" bIns="0" rtlCol="0" anchor="ctr"/>
+          <a:lstStyle/>
+          <a:p>
+            <a:pPr algn="r" indent="0" marL="0">
+              <a:buNone/>
+            </a:pPr>
+            <a:r>
+              <a:rPr lang="en-US" sz="850" b="1" dirty="0">
+                <a:solidFill>
+                  <a:srgbClr val="00838F"/>
+                </a:solidFill>
+                <a:latin typeface="Calibri" pitchFamily="34" charset="0"/>
+                <a:ea typeface="Calibri" pitchFamily="34" charset="-122"/>
+                <a:cs typeface="Calibri" pitchFamily="34" charset="-120"/>
+              </a:rPr>
+              <a:t>22</a:t>
+            </a:r>
+            <a:endParaRPr lang="en-US" sz="850" dirty="0"/>
+          </a:p>
+        </p:txBody>
+      </p:sp>
+    </p:spTree>
+  </p:cSld>
+  <p:clrMapOvr>
+    <a:masterClrMapping/>
+  </p:clrMapOvr>
+</p:sld>
+</file>
+
+<file path=ppt/slides/slide26.xml><?xml version="1.0" encoding="utf-8"?>
+<p:sld xmlns:a="http://schemas.openxmlformats.org/drawingml/2006/main" xmlns:r="http://schemas.openxmlformats.org/officeDocument/2006/relationships" xmlns:p="http://schemas.openxmlformats.org/presentationml/2006/main">
+  <p:cSld name="Slide 26">
+    <p:bg>
+      <p:bgPr>
+        <a:solidFill>
+          <a:srgbClr val="FFFFFF"/>
+        </a:solidFill>
+      </p:bgPr>
+    </p:bg>
+    <p:spTree>
+      <p:nvGrpSpPr>
+        <p:cNvPr id="1" name=""/>
+        <p:cNvGrpSpPr/>
+        <p:nvPr/>
+      </p:nvGrpSpPr>
+      <p:grpSpPr>
+        <a:xfrm>
+          <a:off x="0" y="0"/>
+          <a:ext cx="0" cy="0"/>
+          <a:chOff x="0" y="0"/>
+          <a:chExt cx="0" cy="0"/>
+        </a:xfrm>
+      </p:grpSpPr>
+      <p:sp>
+        <p:nvSpPr>
+          <p:cNvPr id="2" name="Text 0"/>
+          <p:cNvSpPr/>
+          <p:nvPr/>
+        </p:nvSpPr>
+        <p:spPr>
+          <a:xfrm>
+            <a:off x="566928" y="329184"/>
+            <a:ext cx="10515600" cy="310896"/>
+          </a:xfrm>
+          <a:prstGeom prst="rect">
+            <a:avLst/>
+          </a:prstGeom>
+          <a:noFill/>
+          <a:ln/>
+        </p:spPr>
+        <p:txBody>
+          <a:bodyPr wrap="square" lIns="0" tIns="0" rIns="0" bIns="0" rtlCol="0" anchor="ctr"/>
+          <a:lstStyle/>
+          <a:p>
+            <a:pPr algn="l" indent="0" marL="0">
+              <a:buNone/>
+            </a:pPr>
+            <a:r>
+              <a:rPr lang="en-US" sz="1100" b="1" spc="150" kern="0" dirty="0">
+                <a:solidFill>
+                  <a:srgbClr val="00838F"/>
+                </a:solidFill>
+                <a:latin typeface="Calibri" pitchFamily="34" charset="0"/>
+                <a:ea typeface="Calibri" pitchFamily="34" charset="-122"/>
+                <a:cs typeface="Calibri" pitchFamily="34" charset="-120"/>
+              </a:rPr>
               <a:t>MOLECULAR &amp; CYTOGENETICS   ·   REFERENCES &amp; FURTHER READING</a:t>
             </a:r>
             <a:endParaRPr lang="en-US" sz="1100" dirty="0"/>
@@ -9203,7 +11774,7 @@
                 <a:ea typeface="Calibri" pitchFamily="34" charset="-122"/>
                 <a:cs typeface="Calibri" pitchFamily="34" charset="-120"/>
               </a:rPr>
-              <a:t>1.   Khoury JD, et al. WHO Classification of Haematolymphoid Tumours, 5th ed. Leukemia. 2022.</a:t>
+              <a:t>1.   WHO Classification of Haematolymphoid Tumours (current ed.).</a:t>
             </a:r>
             <a:endParaRPr lang="en-US" sz="1150" dirty="0"/>
           </a:p>
@@ -9243,7 +11814,7 @@
                 <a:ea typeface="Calibri" pitchFamily="34" charset="-122"/>
                 <a:cs typeface="Calibri" pitchFamily="34" charset="-120"/>
               </a:rPr>
-              <a:t>3.   Cross NCP, et al. BCR-ABL1 monitoring (International Scale) recommendations.</a:t>
+              <a:t>3.   Cross NCP, et al. BCR-ABL1 International Scale. Leukemia.</a:t>
             </a:r>
             <a:endParaRPr lang="en-US" sz="1150" dirty="0"/>
           </a:p>
@@ -9263,7 +11834,7 @@
                 <a:ea typeface="Calibri" pitchFamily="34" charset="-122"/>
                 <a:cs typeface="Calibri" pitchFamily="34" charset="-120"/>
               </a:rPr>
-              <a:t>4.   van Dongen JJM, et al. EuroClonality/BIOMED-2 clonality assays.</a:t>
+              <a:t>4.   Leonard DGB. Molecular Pathology in Clinical Practice, 2nd ed.</a:t>
             </a:r>
             <a:endParaRPr lang="en-US" sz="1150" dirty="0"/>
           </a:p>
@@ -9369,7 +11940,7 @@
                 <a:ea typeface="Calibri" pitchFamily="34" charset="-122"/>
                 <a:cs typeface="Calibri" pitchFamily="34" charset="-120"/>
               </a:rPr>
-              <a:t>18</a:t>
+              <a:t>23</a:t>
             </a:r>
             <a:endParaRPr lang="en-US" sz="850" dirty="0"/>
           </a:p>
@@ -9613,7 +12184,7 @@
                 <a:ea typeface="Calibri" pitchFamily="34" charset="-122"/>
                 <a:cs typeface="Calibri" pitchFamily="34" charset="-120"/>
               </a:rPr>
-              <a:t>Apply fusion and mutation testing in leukemia and lymphoma.</a:t>
+              <a:t>Describe diagnostic fusion genes and their detection.</a:t>
             </a:r>
             <a:endParaRPr lang="en-US" sz="1350" dirty="0"/>
           </a:p>
@@ -9747,7 +12318,7 @@
                 <a:ea typeface="Calibri" pitchFamily="34" charset="-122"/>
                 <a:cs typeface="Calibri" pitchFamily="34" charset="-120"/>
               </a:rPr>
-              <a:t>Use clonality assays appropriately.</a:t>
+              <a:t>Apply cytogenetics and FISH for risk stratification.</a:t>
             </a:r>
             <a:endParaRPr lang="en-US" sz="1350" dirty="0"/>
           </a:p>
@@ -9881,7 +12452,7 @@
                 <a:ea typeface="Calibri" pitchFamily="34" charset="-122"/>
                 <a:cs typeface="Calibri" pitchFamily="34" charset="-120"/>
               </a:rPr>
-              <a:t>Explain measurable (minimal) residual disease.</a:t>
+              <a:t>Interpret key mutations in myeloid and lymphoid neoplasms.</a:t>
             </a:r>
             <a:endParaRPr lang="en-US" sz="1350" dirty="0"/>
           </a:p>
@@ -10015,7 +12586,7 @@
                 <a:ea typeface="Calibri" pitchFamily="34" charset="-122"/>
                 <a:cs typeface="Calibri" pitchFamily="34" charset="-120"/>
               </a:rPr>
-              <a:t>Integrate molecular results with morphology and flow cytometry.</a:t>
+              <a:t>Explain quantitative monitoring (e.g., BCR-ABL1 IS) and MRD.</a:t>
             </a:r>
             <a:endParaRPr lang="en-US" sz="1350" dirty="0"/>
           </a:p>
@@ -10149,7 +12720,7 @@
                 <a:ea typeface="Calibri" pitchFamily="34" charset="-122"/>
                 <a:cs typeface="Calibri" pitchFamily="34" charset="-120"/>
               </a:rPr>
-              <a:t>Recognize key prognostic and predictive markers.</a:t>
+              <a:t>Integrate molecular results with morphology and flow cytometry.</a:t>
             </a:r>
             <a:endParaRPr lang="en-US" sz="1350" dirty="0"/>
           </a:p>
@@ -10283,7 +12854,7 @@
                 <a:ea typeface="Calibri" pitchFamily="34" charset="-122"/>
                 <a:cs typeface="Calibri" pitchFamily="34" charset="-120"/>
               </a:rPr>
-              <a:t>Ensure sample adequacy for molecular testing.</a:t>
+              <a:t>Recognize results that change management.</a:t>
             </a:r>
             <a:endParaRPr lang="en-US" sz="1350" dirty="0"/>
           </a:p>
@@ -10633,7 +13204,7 @@
                 <a:ea typeface="Calibri" pitchFamily="34" charset="-122"/>
                 <a:cs typeface="Calibri" pitchFamily="34" charset="-120"/>
               </a:rPr>
-              <a:t>Fusions &amp; mutations</a:t>
+              <a:t>Fusions</a:t>
             </a:r>
             <a:pPr algn="l" indent="0" marL="0">
               <a:buNone/>
@@ -10647,7 +13218,7 @@
                 <a:ea typeface="Calibri" pitchFamily="34" charset="-122"/>
                 <a:cs typeface="Calibri" pitchFamily="34" charset="-120"/>
               </a:rPr>
-              <a:t>   —  defining lesions and targets</a:t>
+              <a:t>   —  diagnostic translocations</a:t>
             </a:r>
             <a:endParaRPr lang="en-US" sz="1400" dirty="0"/>
           </a:p>
@@ -10774,7 +13345,7 @@
                 <a:ea typeface="Calibri" pitchFamily="34" charset="-122"/>
                 <a:cs typeface="Calibri" pitchFamily="34" charset="-120"/>
               </a:rPr>
-              <a:t>Clonality</a:t>
+              <a:t>Cytogenetics &amp; FISH</a:t>
             </a:r>
             <a:pPr algn="l" indent="0" marL="0">
               <a:buNone/>
@@ -10788,7 +13359,7 @@
                 <a:ea typeface="Calibri" pitchFamily="34" charset="-122"/>
                 <a:cs typeface="Calibri" pitchFamily="34" charset="-120"/>
               </a:rPr>
-              <a:t>   —  IGH/TCR rearrangement</a:t>
+              <a:t>   —  risk stratification</a:t>
             </a:r>
             <a:endParaRPr lang="en-US" sz="1400" dirty="0"/>
           </a:p>
@@ -10922,7 +13493,7 @@
                 <a:ea typeface="Calibri" pitchFamily="34" charset="-122"/>
                 <a:cs typeface="Calibri" pitchFamily="34" charset="-120"/>
               </a:rPr>
-              <a:t>MRD</a:t>
+              <a:t>Mutations &amp; MRD</a:t>
             </a:r>
             <a:pPr algn="l" indent="0" marL="0">
               <a:buNone/>
@@ -10936,7 +13507,7 @@
                 <a:ea typeface="Calibri" pitchFamily="34" charset="-122"/>
                 <a:cs typeface="Calibri" pitchFamily="34" charset="-120"/>
               </a:rPr>
-              <a:t>   —  concepts and methods</a:t>
+              <a:t>   —  prognosis and monitoring</a:t>
             </a:r>
             <a:endParaRPr lang="en-US" sz="1400" dirty="0"/>
           </a:p>
@@ -11063,7 +13634,7 @@
                 <a:ea typeface="Calibri" pitchFamily="34" charset="-122"/>
                 <a:cs typeface="Calibri" pitchFamily="34" charset="-120"/>
               </a:rPr>
-              <a:t>Integrated diagnosis</a:t>
+              <a:t>Integration</a:t>
             </a:r>
             <a:pPr algn="l" indent="0" marL="0">
               <a:buNone/>
@@ -11077,7 +13648,7 @@
                 <a:ea typeface="Calibri" pitchFamily="34" charset="-122"/>
                 <a:cs typeface="Calibri" pitchFamily="34" charset="-120"/>
               </a:rPr>
-              <a:t>   —  morphology + flow + molecular</a:t>
+              <a:t>   —  with morphology/flow</a:t>
             </a:r>
             <a:endParaRPr lang="en-US" sz="1400" dirty="0"/>
           </a:p>
@@ -11211,7 +13782,7 @@
                 <a:ea typeface="Calibri" pitchFamily="34" charset="-122"/>
                 <a:cs typeface="Calibri" pitchFamily="34" charset="-120"/>
               </a:rPr>
-              <a:t>Cases &amp; board</a:t>
+              <a:t>Cases &amp; board review</a:t>
             </a:r>
             <a:endParaRPr lang="en-US" sz="1400" dirty="0"/>
           </a:p>
@@ -11510,7 +14081,7 @@
                 <a:ea typeface="Calibri" pitchFamily="34" charset="-122"/>
                 <a:cs typeface="Calibri" pitchFamily="34" charset="-120"/>
               </a:rPr>
-              <a:t>Fusions, Mutations &amp; Clonality</a:t>
+              <a:t>Fusions &amp; Cytogenetics</a:t>
             </a:r>
             <a:endParaRPr lang="en-US" sz="3800" dirty="0"/>
           </a:p>
@@ -11620,7 +14191,7 @@
                 <a:ea typeface="Calibri" pitchFamily="34" charset="-122"/>
                 <a:cs typeface="Calibri" pitchFamily="34" charset="-120"/>
               </a:rPr>
-              <a:t>Translocations and Fusion Genes</a:t>
+              <a:t>Fusion Genes Drive Diagnosis</a:t>
             </a:r>
             <a:endParaRPr lang="en-US" sz="3000" dirty="0"/>
           </a:p>
@@ -11635,11 +14206,11 @@
         <p:spPr>
           <a:xfrm>
             <a:off x="1066648" y="1481328"/>
-            <a:ext cx="10058400" cy="4023360"/>
+            <a:ext cx="10058400" cy="4187952"/>
           </a:xfrm>
           <a:prstGeom prst="roundRect">
             <a:avLst>
-              <a:gd name="adj" fmla="val 2045"/>
+              <a:gd name="adj" fmla="val 1965"/>
             </a:avLst>
           </a:prstGeom>
           <a:solidFill>
@@ -11677,7 +14248,7 @@
         <p:spPr>
           <a:xfrm>
             <a:off x="1194664" y="1609344"/>
-            <a:ext cx="9802368" cy="3767328"/>
+            <a:ext cx="9802368" cy="3931920"/>
           </a:xfrm>
           <a:prstGeom prst="rect">
             <a:avLst/>
@@ -11692,7 +14263,7 @@
         </p:nvSpPr>
         <p:spPr>
           <a:xfrm>
-            <a:off x="566928" y="5577840"/>
+            <a:off x="566928" y="5742432"/>
             <a:ext cx="11057839" cy="365760"/>
           </a:xfrm>
           <a:prstGeom prst="rect">
@@ -11717,7 +14288,7 @@
                 <a:ea typeface="Calibri" pitchFamily="34" charset="-122"/>
                 <a:cs typeface="Calibri" pitchFamily="34" charset="-120"/>
               </a:rPr>
-              <a:t>Original schematic. t(9;22) creates BCR-ABL1; recurrent fusions define entities and therapeutic targets.</a:t>
+              <a:t>Original schematic. A translocation juxtaposes two genes into a driver fusion (e.g., BCR-ABL1) detectable by FISH or RT-PCR.</a:t>
             </a:r>
             <a:endParaRPr lang="en-US" sz="1150" dirty="0"/>
           </a:p>
@@ -11894,7 +14465,7 @@
                 <a:ea typeface="Calibri" pitchFamily="34" charset="-122"/>
                 <a:cs typeface="Calibri" pitchFamily="34" charset="-120"/>
               </a:rPr>
-              <a:t>MOLECULAR &amp; CYTOGENETICS   ·   DEFINING LESIONS</a:t>
+              <a:t>MOLECULAR &amp; CYTOGENETICS   ·   FUSIONS</a:t>
             </a:r>
             <a:endParaRPr lang="en-US" sz="1100" dirty="0"/>
           </a:p>
@@ -11933,7 +14504,7 @@
                 <a:ea typeface="Calibri" pitchFamily="34" charset="-122"/>
                 <a:cs typeface="Calibri" pitchFamily="34" charset="-120"/>
               </a:rPr>
-              <a:t>Fusions and Prognostic Mutations</a:t>
+              <a:t>Detecting Driver Fusions</a:t>
             </a:r>
             <a:endParaRPr lang="en-US" sz="3000" dirty="0"/>
           </a:p>
@@ -12001,7 +14572,7 @@
                 <a:ea typeface="Calibri" pitchFamily="34" charset="-122"/>
                 <a:cs typeface="Calibri" pitchFamily="34" charset="-120"/>
               </a:rPr>
-              <a:t>RECURRENT FUSIONS / REARRANGEMENTS</a:t>
+              <a:t>KEY EXAMPLES</a:t>
             </a:r>
             <a:endParaRPr lang="en-US" sz="1200" dirty="0"/>
           </a:p>
@@ -12044,7 +14615,7 @@
                 <a:ea typeface="Calibri" pitchFamily="34" charset="-122"/>
                 <a:cs typeface="Calibri" pitchFamily="34" charset="-120"/>
               </a:rPr>
-              <a:t>BCR-ABL1 (CML, Ph+ ALL); PML-RARA (APL — emergency); core-binding-factor fusions in AML.</a:t>
+              <a:t>BCR-ABL1 (CML; Ph+ ALL); PML-RARA (APL — a medical emergency).</a:t>
             </a:r>
             <a:endParaRPr lang="en-US" sz="1250" dirty="0"/>
           </a:p>
@@ -12065,7 +14636,7 @@
                 <a:ea typeface="Calibri" pitchFamily="34" charset="-122"/>
                 <a:cs typeface="Calibri" pitchFamily="34" charset="-120"/>
               </a:rPr>
-              <a:t>Some define the entity and a targeted therapy (e.g., tyrosine kinase inhibitors).</a:t>
+              <a:t>Many recurrent fusions define entities and therapy.</a:t>
             </a:r>
             <a:endParaRPr lang="en-US" sz="1250" dirty="0"/>
           </a:p>
@@ -12086,7 +14657,7 @@
                 <a:ea typeface="Calibri" pitchFamily="34" charset="-122"/>
                 <a:cs typeface="Calibri" pitchFamily="34" charset="-120"/>
               </a:rPr>
-              <a:t>Detected by FISH, karyotype, or RT-PCR.</a:t>
+              <a:t>RT-PCR, FISH, and karyotype each have roles.</a:t>
             </a:r>
             <a:endParaRPr lang="en-US" sz="1250" dirty="0"/>
           </a:p>
@@ -12107,7 +14678,7 @@
                 <a:ea typeface="Calibri" pitchFamily="34" charset="-122"/>
                 <a:cs typeface="Calibri" pitchFamily="34" charset="-120"/>
               </a:rPr>
-              <a:t>PML-RARA confirmation in suspected APL is time-critical.</a:t>
+              <a:t>Some fusions are targets for specific inhibitors.</a:t>
             </a:r>
             <a:endParaRPr lang="en-US" sz="1250" dirty="0"/>
           </a:p>
@@ -12130,7 +14701,7 @@
             </a:avLst>
           </a:prstGeom>
           <a:solidFill>
-            <a:srgbClr val="E0F2F4"/>
+            <a:srgbClr val="DDF0EF"/>
           </a:solidFill>
           <a:ln/>
           <a:effectLst>
@@ -12175,7 +14746,7 @@
                 <a:ea typeface="Calibri" pitchFamily="34" charset="-122"/>
                 <a:cs typeface="Calibri" pitchFamily="34" charset="-120"/>
               </a:rPr>
-              <a:t>PROGNOSTIC / PREDICTIVE MUTATIONS</a:t>
+              <a:t>METHOD CHOICE</a:t>
             </a:r>
             <a:endParaRPr lang="en-US" sz="1200" dirty="0"/>
           </a:p>
@@ -12218,7 +14789,7 @@
                 <a:ea typeface="Calibri" pitchFamily="34" charset="-122"/>
                 <a:cs typeface="Calibri" pitchFamily="34" charset="-120"/>
               </a:rPr>
-              <a:t>AML: FLT3-ITD, NPM1, CEBPA, TP53 shape prognosis and therapy.</a:t>
+              <a:t>FISH and RT-PCR rapidly detect known fusions; karyotype gives a genome-wide view.</a:t>
             </a:r>
             <a:endParaRPr lang="en-US" sz="1250" dirty="0"/>
           </a:p>
@@ -12239,7 +14810,7 @@
                 <a:ea typeface="Calibri" pitchFamily="34" charset="-122"/>
                 <a:cs typeface="Calibri" pitchFamily="34" charset="-120"/>
               </a:rPr>
-              <a:t>MPN: JAK2 V617F, CALR, MPL.</a:t>
+              <a:t>RT-PCR enables quantitative monitoring.</a:t>
             </a:r>
             <a:endParaRPr lang="en-US" sz="1250" dirty="0"/>
           </a:p>
@@ -12260,7 +14831,7 @@
                 <a:ea typeface="Calibri" pitchFamily="34" charset="-122"/>
                 <a:cs typeface="Calibri" pitchFamily="34" charset="-120"/>
               </a:rPr>
-              <a:t>Lymphoid: MYD88, BRAF (hairy cell), etc.</a:t>
+              <a:t>NGS fusion panels detect many partners.</a:t>
             </a:r>
             <a:endParaRPr lang="en-US" sz="1250" dirty="0"/>
           </a:p>
@@ -12281,7 +14852,7 @@
                 <a:ea typeface="Calibri" pitchFamily="34" charset="-122"/>
                 <a:cs typeface="Calibri" pitchFamily="34" charset="-120"/>
               </a:rPr>
-              <a:t>Increasingly assessed together on NGS panels.</a:t>
+              <a:t>Correlate with morphology and flow.</a:t>
             </a:r>
             <a:endParaRPr lang="en-US" sz="1250" dirty="0"/>
           </a:p>
@@ -12458,7 +15029,7 @@
                 <a:ea typeface="Calibri" pitchFamily="34" charset="-122"/>
                 <a:cs typeface="Calibri" pitchFamily="34" charset="-120"/>
               </a:rPr>
-              <a:t>MOLECULAR &amp; CYTOGENETICS   ·   CLONALITY</a:t>
+              <a:t>MOLECULAR &amp; CYTOGENETICS   ·   CYTOGENETICS</a:t>
             </a:r>
             <a:endParaRPr lang="en-US" sz="1100" dirty="0"/>
           </a:p>
@@ -12497,7 +15068,7 @@
                 <a:ea typeface="Calibri" pitchFamily="34" charset="-122"/>
                 <a:cs typeface="Calibri" pitchFamily="34" charset="-120"/>
               </a:rPr>
-              <a:t>Clonality Testing (IGH / TCR)</a:t>
+              <a:t>Cytogenetic Methods and Resolution</a:t>
             </a:r>
             <a:endParaRPr lang="en-US" sz="3000" dirty="0"/>
           </a:p>
@@ -12511,18 +15082,23 @@
         </p:nvSpPr>
         <p:spPr>
           <a:xfrm>
-            <a:off x="566928" y="1517904"/>
-            <a:ext cx="5346040" cy="4114800"/>
+            <a:off x="883768" y="1481328"/>
+            <a:ext cx="10424160" cy="4507992"/>
           </a:xfrm>
           <a:prstGeom prst="roundRect">
             <a:avLst>
-              <a:gd name="adj" fmla="val 2000"/>
+              <a:gd name="adj" fmla="val 1826"/>
             </a:avLst>
           </a:prstGeom>
           <a:solidFill>
-            <a:srgbClr val="E0F2F4"/>
+            <a:srgbClr val="FFFFFF"/>
           </a:solidFill>
-          <a:ln/>
+          <a:ln w="12700">
+            <a:solidFill>
+              <a:srgbClr val="DCE4EC"/>
+            </a:solidFill>
+            <a:prstDash val="solid"/>
+          </a:ln>
           <a:effectLst>
             <a:outerShdw sx="100000" sy="100000" kx="0" ky="0" algn="bl" rotWithShape="0" blurRad="88900" dist="25400" dir="5400000">
               <a:srgbClr val="22303C">
@@ -12532,55 +15108,40 @@
           </a:effectLst>
         </p:spPr>
       </p:sp>
-      <p:sp>
-        <p:nvSpPr>
-          <p:cNvPr id="5" name="Text 3"/>
-          <p:cNvSpPr/>
-          <p:nvPr/>
-        </p:nvSpPr>
-        <p:spPr>
-          <a:xfrm>
-            <a:off x="804672" y="1682496"/>
-            <a:ext cx="4888840" cy="274320"/>
-          </a:xfrm>
-          <a:prstGeom prst="rect">
-            <a:avLst/>
-          </a:prstGeom>
-          <a:noFill/>
-          <a:ln/>
-        </p:spPr>
-        <p:txBody>
-          <a:bodyPr wrap="square" lIns="0" tIns="0" rIns="0" bIns="0" rtlCol="0" anchor="ctr"/>
-          <a:lstStyle/>
-          <a:p>
-            <a:pPr indent="0" marL="0">
-              <a:buNone/>
-            </a:pPr>
-            <a:r>
-              <a:rPr lang="en-US" sz="1200" b="1" spc="100" kern="0" dirty="0">
-                <a:solidFill>
-                  <a:srgbClr val="005A63"/>
-                </a:solidFill>
-                <a:latin typeface="Calibri" pitchFamily="34" charset="0"/>
-                <a:ea typeface="Calibri" pitchFamily="34" charset="-122"/>
-                <a:cs typeface="Calibri" pitchFamily="34" charset="-120"/>
-              </a:rPr>
-              <a:t>WHAT IT DOES</a:t>
-            </a:r>
-            <a:endParaRPr lang="en-US" sz="1200" dirty="0"/>
-          </a:p>
-        </p:txBody>
-      </p:sp>
-      <p:sp>
-        <p:nvSpPr>
-          <p:cNvPr id="6" name="Text 4"/>
-          <p:cNvSpPr/>
-          <p:nvPr/>
-        </p:nvSpPr>
-        <p:spPr>
-          <a:xfrm>
-            <a:off x="804672" y="2029968"/>
-            <a:ext cx="4870552" cy="3474720"/>
+      <p:pic>
+        <p:nvPicPr>
+          <p:cNvPr id="5" name="Image 0" descr="/tmp/cp_work2/art/mol_cyto.png">    </p:cNvPr>
+          <p:cNvPicPr>
+            <a:picLocks noChangeAspect="1"/>
+          </p:cNvPicPr>
+          <p:nvPr/>
+        </p:nvPicPr>
+        <p:blipFill>
+          <a:blip r:embed="rId1"/>
+          <a:stretch>
+            <a:fillRect/>
+          </a:stretch>
+        </p:blipFill>
+        <p:spPr>
+          <a:xfrm>
+            <a:off x="1011784" y="1609344"/>
+            <a:ext cx="10168128" cy="4251960"/>
+          </a:xfrm>
+          <a:prstGeom prst="rect">
+            <a:avLst/>
+          </a:prstGeom>
+        </p:spPr>
+      </p:pic>
+      <p:sp>
+        <p:nvSpPr>
+          <p:cNvPr id="6" name="Text 3"/>
+          <p:cNvSpPr/>
+          <p:nvPr/>
+        </p:nvSpPr>
+        <p:spPr>
+          <a:xfrm>
+            <a:off x="566928" y="6062472"/>
+            <a:ext cx="11057839" cy="365760"/>
           </a:xfrm>
           <a:prstGeom prst="rect">
             <a:avLst/>
@@ -12592,268 +15153,27 @@
           <a:bodyPr wrap="square" lIns="0" tIns="0" rIns="0" bIns="0" rtlCol="0" anchor="t"/>
           <a:lstStyle/>
           <a:p>
-            <a:pPr algn="l" marL="177800" indent="-177800">
-              <a:spcAft>
-                <a:spcPts val="900"/>
-              </a:spcAft>
-              <a:buSzPct val="100000"/>
-              <a:buChar char="•"/>
-            </a:pPr>
-            <a:r>
-              <a:rPr lang="en-US" sz="1250" b="1" dirty="0">
-                <a:solidFill>
-                  <a:srgbClr val="1B2A38"/>
-                </a:solidFill>
-                <a:latin typeface="Calibri" pitchFamily="34" charset="0"/>
-                <a:ea typeface="Calibri" pitchFamily="34" charset="-122"/>
-                <a:cs typeface="Calibri" pitchFamily="34" charset="-120"/>
-              </a:rPr>
-              <a:t>PCR (or NGS) detects clonal immunoglobulin (IGH) or T-cell receptor (TCR) gene rearrangements.</a:t>
-            </a:r>
-            <a:endParaRPr lang="en-US" sz="1250" dirty="0"/>
-          </a:p>
-          <a:p>
-            <a:pPr algn="l" marL="177800" indent="-177800">
-              <a:spcAft>
-                <a:spcPts val="900"/>
-              </a:spcAft>
-              <a:buSzPct val="100000"/>
-              <a:buChar char="•"/>
-            </a:pPr>
-            <a:r>
-              <a:rPr lang="en-US" sz="1250" dirty="0">
-                <a:solidFill>
-                  <a:srgbClr val="33444F"/>
-                </a:solidFill>
-                <a:latin typeface="Calibri" pitchFamily="34" charset="0"/>
-                <a:ea typeface="Calibri" pitchFamily="34" charset="-122"/>
-                <a:cs typeface="Calibri" pitchFamily="34" charset="-120"/>
-              </a:rPr>
-              <a:t>Supports a diagnosis of clonal lymphoproliferation when morphology/flow are equivocal.</a:t>
-            </a:r>
-            <a:endParaRPr lang="en-US" sz="1250" dirty="0"/>
-          </a:p>
-          <a:p>
-            <a:pPr algn="l" marL="177800" indent="-177800">
-              <a:spcAft>
-                <a:spcPts val="900"/>
-              </a:spcAft>
-              <a:buSzPct val="100000"/>
-              <a:buChar char="•"/>
-            </a:pPr>
-            <a:r>
-              <a:rPr lang="en-US" sz="1250" dirty="0">
-                <a:solidFill>
-                  <a:srgbClr val="33444F"/>
-                </a:solidFill>
-                <a:latin typeface="Calibri" pitchFamily="34" charset="0"/>
-                <a:ea typeface="Calibri" pitchFamily="34" charset="-122"/>
-                <a:cs typeface="Calibri" pitchFamily="34" charset="-120"/>
-              </a:rPr>
-              <a:t>A clonal peak suggests neoplasm; polyclonal suggests reactive.</a:t>
-            </a:r>
-            <a:endParaRPr lang="en-US" sz="1250" dirty="0"/>
-          </a:p>
-          <a:p>
-            <a:pPr algn="l" marL="177800" indent="-177800">
-              <a:spcAft>
-                <a:spcPts val="900"/>
-              </a:spcAft>
-              <a:buSzPct val="100000"/>
-              <a:buChar char="•"/>
-            </a:pPr>
-            <a:r>
-              <a:rPr lang="en-US" sz="1250" dirty="0">
-                <a:solidFill>
-                  <a:srgbClr val="33444F"/>
-                </a:solidFill>
-                <a:latin typeface="Calibri" pitchFamily="34" charset="0"/>
-                <a:ea typeface="Calibri" pitchFamily="34" charset="-122"/>
-                <a:cs typeface="Calibri" pitchFamily="34" charset="-120"/>
-              </a:rPr>
-              <a:t>Useful in cutaneous and other ambiguous lymphoid lesions.</a:t>
-            </a:r>
-            <a:endParaRPr lang="en-US" sz="1250" dirty="0"/>
-          </a:p>
-        </p:txBody>
-      </p:sp>
-      <p:sp>
-        <p:nvSpPr>
-          <p:cNvPr id="7" name="Shape 5"/>
-          <p:cNvSpPr/>
-          <p:nvPr/>
-        </p:nvSpPr>
-        <p:spPr>
-          <a:xfrm>
-            <a:off x="6278728" y="1517904"/>
-            <a:ext cx="5346040" cy="4114800"/>
-          </a:xfrm>
-          <a:prstGeom prst="roundRect">
-            <a:avLst>
-              <a:gd name="adj" fmla="val 2000"/>
-            </a:avLst>
-          </a:prstGeom>
-          <a:solidFill>
-            <a:srgbClr val="E0F2F4"/>
-          </a:solidFill>
-          <a:ln/>
-          <a:effectLst>
-            <a:outerShdw sx="100000" sy="100000" kx="0" ky="0" algn="bl" rotWithShape="0" blurRad="88900" dist="25400" dir="5400000">
-              <a:srgbClr val="22303C">
-                <a:alpha val="12000"/>
-              </a:srgbClr>
-            </a:outerShdw>
-          </a:effectLst>
-        </p:spPr>
-      </p:sp>
-      <p:sp>
-        <p:nvSpPr>
-          <p:cNvPr id="8" name="Text 6"/>
-          <p:cNvSpPr/>
-          <p:nvPr/>
-        </p:nvSpPr>
-        <p:spPr>
-          <a:xfrm>
-            <a:off x="6516472" y="1682496"/>
-            <a:ext cx="4888840" cy="274320"/>
-          </a:xfrm>
-          <a:prstGeom prst="rect">
-            <a:avLst/>
-          </a:prstGeom>
-          <a:noFill/>
-          <a:ln/>
-        </p:spPr>
-        <p:txBody>
-          <a:bodyPr wrap="square" lIns="0" tIns="0" rIns="0" bIns="0" rtlCol="0" anchor="ctr"/>
-          <a:lstStyle/>
-          <a:p>
-            <a:pPr indent="0" marL="0">
-              <a:buNone/>
-            </a:pPr>
-            <a:r>
-              <a:rPr lang="en-US" sz="1200" b="1" spc="100" kern="0" dirty="0">
-                <a:solidFill>
-                  <a:srgbClr val="005A63"/>
-                </a:solidFill>
-                <a:latin typeface="Calibri" pitchFamily="34" charset="0"/>
-                <a:ea typeface="Calibri" pitchFamily="34" charset="-122"/>
-                <a:cs typeface="Calibri" pitchFamily="34" charset="-120"/>
-              </a:rPr>
-              <a:t>CAVEATS</a:t>
-            </a:r>
-            <a:endParaRPr lang="en-US" sz="1200" dirty="0"/>
-          </a:p>
-        </p:txBody>
-      </p:sp>
-      <p:sp>
-        <p:nvSpPr>
-          <p:cNvPr id="9" name="Text 7"/>
-          <p:cNvSpPr/>
-          <p:nvPr/>
-        </p:nvSpPr>
-        <p:spPr>
-          <a:xfrm>
-            <a:off x="6516472" y="2029968"/>
-            <a:ext cx="4870552" cy="3474720"/>
-          </a:xfrm>
-          <a:prstGeom prst="rect">
-            <a:avLst/>
-          </a:prstGeom>
-          <a:noFill/>
-          <a:ln/>
-        </p:spPr>
-        <p:txBody>
-          <a:bodyPr wrap="square" lIns="0" tIns="0" rIns="0" bIns="0" rtlCol="0" anchor="t"/>
-          <a:lstStyle/>
-          <a:p>
-            <a:pPr algn="l" marL="177800" indent="-177800">
-              <a:spcAft>
-                <a:spcPts val="900"/>
-              </a:spcAft>
-              <a:buSzPct val="100000"/>
-              <a:buChar char="•"/>
-            </a:pPr>
-            <a:r>
-              <a:rPr lang="en-US" sz="1250" b="1" dirty="0">
-                <a:solidFill>
-                  <a:srgbClr val="1B2A38"/>
-                </a:solidFill>
-                <a:latin typeface="Calibri" pitchFamily="34" charset="0"/>
-                <a:ea typeface="Calibri" pitchFamily="34" charset="-122"/>
-                <a:cs typeface="Calibri" pitchFamily="34" charset="-120"/>
-              </a:rPr>
-              <a:t>Clonality is not synonymous with malignancy — benign clonal populations occur.</a:t>
-            </a:r>
-            <a:endParaRPr lang="en-US" sz="1250" dirty="0"/>
-          </a:p>
-          <a:p>
-            <a:pPr algn="l" marL="177800" indent="-177800">
-              <a:spcAft>
-                <a:spcPts val="900"/>
-              </a:spcAft>
-              <a:buSzPct val="100000"/>
-              <a:buChar char="•"/>
-            </a:pPr>
-            <a:r>
-              <a:rPr lang="en-US" sz="1250" dirty="0">
-                <a:solidFill>
-                  <a:srgbClr val="33444F"/>
-                </a:solidFill>
-                <a:latin typeface="Calibri" pitchFamily="34" charset="0"/>
-                <a:ea typeface="Calibri" pitchFamily="34" charset="-122"/>
-                <a:cs typeface="Calibri" pitchFamily="34" charset="-120"/>
-              </a:rPr>
-              <a:t>Always interpret with clinical, morphologic, and immunophenotypic context.</a:t>
-            </a:r>
-            <a:endParaRPr lang="en-US" sz="1250" dirty="0"/>
-          </a:p>
-          <a:p>
-            <a:pPr algn="l" marL="177800" indent="-177800">
-              <a:spcAft>
-                <a:spcPts val="900"/>
-              </a:spcAft>
-              <a:buSzPct val="100000"/>
-              <a:buChar char="•"/>
-            </a:pPr>
-            <a:r>
-              <a:rPr lang="en-US" sz="1250" dirty="0">
-                <a:solidFill>
-                  <a:srgbClr val="33444F"/>
-                </a:solidFill>
-                <a:latin typeface="Calibri" pitchFamily="34" charset="0"/>
-                <a:ea typeface="Calibri" pitchFamily="34" charset="-122"/>
-                <a:cs typeface="Calibri" pitchFamily="34" charset="-120"/>
-              </a:rPr>
-              <a:t>Pseudoclonality can occur with scant template.</a:t>
-            </a:r>
-            <a:endParaRPr lang="en-US" sz="1250" dirty="0"/>
-          </a:p>
-          <a:p>
-            <a:pPr algn="l" marL="177800" indent="-177800">
-              <a:spcAft>
-                <a:spcPts val="900"/>
-              </a:spcAft>
-              <a:buSzPct val="100000"/>
-              <a:buChar char="•"/>
-            </a:pPr>
-            <a:r>
-              <a:rPr lang="en-US" sz="1250" dirty="0">
-                <a:solidFill>
-                  <a:srgbClr val="33444F"/>
-                </a:solidFill>
-                <a:latin typeface="Calibri" pitchFamily="34" charset="0"/>
-                <a:ea typeface="Calibri" pitchFamily="34" charset="-122"/>
-                <a:cs typeface="Calibri" pitchFamily="34" charset="-120"/>
-              </a:rPr>
-              <a:t>Lineage of rearrangement does not always equal lineage of disease.</a:t>
-            </a:r>
-            <a:endParaRPr lang="en-US" sz="1250" dirty="0"/>
-          </a:p>
-        </p:txBody>
-      </p:sp>
-      <p:sp>
-        <p:nvSpPr>
-          <p:cNvPr id="10" name="Text 8"/>
+            <a:pPr algn="ctr" indent="0" marL="0">
+              <a:buNone/>
+            </a:pPr>
+            <a:r>
+              <a:rPr lang="en-US" sz="1150" i="1" dirty="0">
+                <a:solidFill>
+                  <a:srgbClr val="6B7B8A"/>
+                </a:solidFill>
+                <a:latin typeface="Calibri" pitchFamily="34" charset="0"/>
+                <a:ea typeface="Calibri" pitchFamily="34" charset="-122"/>
+                <a:cs typeface="Calibri" pitchFamily="34" charset="-120"/>
+              </a:rPr>
+              <a:t>Original schematic. Karyotype, FISH, and microarray differ in scope and resolution — chosen by the clinical question.</a:t>
+            </a:r>
+            <a:endParaRPr lang="en-US" sz="1150" dirty="0"/>
+          </a:p>
+        </p:txBody>
+      </p:sp>
+      <p:sp>
+        <p:nvSpPr>
+          <p:cNvPr id="7" name="Text 4"/>
           <p:cNvSpPr/>
           <p:nvPr/>
         </p:nvSpPr>
@@ -12892,7 +15212,7 @@
       </p:sp>
       <p:sp>
         <p:nvSpPr>
-          <p:cNvPr id="11" name="Text 9"/>
+          <p:cNvPr id="8" name="Text 5"/>
           <p:cNvSpPr/>
           <p:nvPr/>
         </p:nvSpPr>
@@ -12971,7 +15291,7 @@
     <p:bg>
       <p:bgPr>
         <a:solidFill>
-          <a:srgbClr val="005A63"/>
+          <a:srgbClr val="FFFFFF"/>
         </a:solidFill>
       </p:bgPr>
     </p:bg>
@@ -12991,58 +15311,295 @@
       </p:grpSpPr>
       <p:sp>
         <p:nvSpPr>
-          <p:cNvPr id="2" name="Shape 0"/>
-          <p:cNvSpPr/>
-          <p:nvPr/>
-        </p:nvSpPr>
-        <p:spPr>
-          <a:xfrm>
-            <a:off x="9509760" y="-1280160"/>
-            <a:ext cx="4754880" cy="4754880"/>
-          </a:xfrm>
-          <a:prstGeom prst="ellipse">
-            <a:avLst/>
+          <p:cNvPr id="2" name="Text 0"/>
+          <p:cNvSpPr/>
+          <p:nvPr/>
+        </p:nvSpPr>
+        <p:spPr>
+          <a:xfrm>
+            <a:off x="566928" y="329184"/>
+            <a:ext cx="10515600" cy="310896"/>
+          </a:xfrm>
+          <a:prstGeom prst="rect">
+            <a:avLst/>
+          </a:prstGeom>
+          <a:noFill/>
+          <a:ln/>
+        </p:spPr>
+        <p:txBody>
+          <a:bodyPr wrap="square" lIns="0" tIns="0" rIns="0" bIns="0" rtlCol="0" anchor="ctr"/>
+          <a:lstStyle/>
+          <a:p>
+            <a:pPr algn="l" indent="0" marL="0">
+              <a:buNone/>
+            </a:pPr>
+            <a:r>
+              <a:rPr lang="en-US" sz="1100" b="1" spc="150" kern="0" dirty="0">
+                <a:solidFill>
+                  <a:srgbClr val="00838F"/>
+                </a:solidFill>
+                <a:latin typeface="Calibri" pitchFamily="34" charset="0"/>
+                <a:ea typeface="Calibri" pitchFamily="34" charset="-122"/>
+                <a:cs typeface="Calibri" pitchFamily="34" charset="-120"/>
+              </a:rPr>
+              <a:t>MOLECULAR &amp; CYTOGENETICS   ·   RISK</a:t>
+            </a:r>
+            <a:endParaRPr lang="en-US" sz="1100" dirty="0"/>
+          </a:p>
+        </p:txBody>
+      </p:sp>
+      <p:sp>
+        <p:nvSpPr>
+          <p:cNvPr id="3" name="Text 1"/>
+          <p:cNvSpPr/>
+          <p:nvPr/>
+        </p:nvSpPr>
+        <p:spPr>
+          <a:xfrm>
+            <a:off x="566928" y="713232"/>
+            <a:ext cx="11064240" cy="749808"/>
+          </a:xfrm>
+          <a:prstGeom prst="rect">
+            <a:avLst/>
+          </a:prstGeom>
+          <a:noFill/>
+          <a:ln/>
+        </p:spPr>
+        <p:txBody>
+          <a:bodyPr wrap="square" lIns="0" tIns="0" rIns="0" bIns="0" rtlCol="0" anchor="ctr"/>
+          <a:lstStyle/>
+          <a:p>
+            <a:pPr algn="l" indent="0" marL="0">
+              <a:buNone/>
+            </a:pPr>
+            <a:r>
+              <a:rPr lang="en-US" sz="3000" b="1" dirty="0">
+                <a:solidFill>
+                  <a:srgbClr val="0E3A5F"/>
+                </a:solidFill>
+                <a:latin typeface="Calibri" pitchFamily="34" charset="0"/>
+                <a:ea typeface="Calibri" pitchFamily="34" charset="-122"/>
+                <a:cs typeface="Calibri" pitchFamily="34" charset="-120"/>
+              </a:rPr>
+              <a:t>Cytogenetic Risk Stratification</a:t>
+            </a:r>
+            <a:endParaRPr lang="en-US" sz="3000" dirty="0"/>
+          </a:p>
+        </p:txBody>
+      </p:sp>
+      <p:sp>
+        <p:nvSpPr>
+          <p:cNvPr id="4" name="Shape 2"/>
+          <p:cNvSpPr/>
+          <p:nvPr/>
+        </p:nvSpPr>
+        <p:spPr>
+          <a:xfrm>
+            <a:off x="566928" y="1517904"/>
+            <a:ext cx="5346040" cy="4114800"/>
+          </a:xfrm>
+          <a:prstGeom prst="roundRect">
+            <a:avLst>
+              <a:gd name="adj" fmla="val 2000"/>
+            </a:avLst>
           </a:prstGeom>
           <a:solidFill>
-            <a:srgbClr val="FFFFFF">
-              <a:alpha val="8000"/>
-            </a:srgbClr>
+            <a:srgbClr val="E0F2F4"/>
           </a:solidFill>
           <a:ln/>
-        </p:spPr>
-      </p:sp>
-      <p:sp>
-        <p:nvSpPr>
-          <p:cNvPr id="3" name="Shape 1"/>
-          <p:cNvSpPr/>
-          <p:nvPr/>
-        </p:nvSpPr>
-        <p:spPr>
-          <a:xfrm>
-            <a:off x="10607040" y="3931920"/>
-            <a:ext cx="3108960" cy="3108960"/>
-          </a:xfrm>
-          <a:prstGeom prst="ellipse">
-            <a:avLst/>
+          <a:effectLst>
+            <a:outerShdw sx="100000" sy="100000" kx="0" ky="0" algn="bl" rotWithShape="0" blurRad="88900" dist="25400" dir="5400000">
+              <a:srgbClr val="22303C">
+                <a:alpha val="12000"/>
+              </a:srgbClr>
+            </a:outerShdw>
+          </a:effectLst>
+        </p:spPr>
+      </p:sp>
+      <p:sp>
+        <p:nvSpPr>
+          <p:cNvPr id="5" name="Text 3"/>
+          <p:cNvSpPr/>
+          <p:nvPr/>
+        </p:nvSpPr>
+        <p:spPr>
+          <a:xfrm>
+            <a:off x="804672" y="1682496"/>
+            <a:ext cx="4888840" cy="274320"/>
+          </a:xfrm>
+          <a:prstGeom prst="rect">
+            <a:avLst/>
+          </a:prstGeom>
+          <a:noFill/>
+          <a:ln/>
+        </p:spPr>
+        <p:txBody>
+          <a:bodyPr wrap="square" lIns="0" tIns="0" rIns="0" bIns="0" rtlCol="0" anchor="ctr"/>
+          <a:lstStyle/>
+          <a:p>
+            <a:pPr indent="0" marL="0">
+              <a:buNone/>
+            </a:pPr>
+            <a:r>
+              <a:rPr lang="en-US" sz="1200" b="1" spc="100" kern="0" dirty="0">
+                <a:solidFill>
+                  <a:srgbClr val="005A63"/>
+                </a:solidFill>
+                <a:latin typeface="Calibri" pitchFamily="34" charset="0"/>
+                <a:ea typeface="Calibri" pitchFamily="34" charset="-122"/>
+                <a:cs typeface="Calibri" pitchFamily="34" charset="-120"/>
+              </a:rPr>
+              <a:t>PROGNOSTIC CYTOGENETICS</a:t>
+            </a:r>
+            <a:endParaRPr lang="en-US" sz="1200" dirty="0"/>
+          </a:p>
+        </p:txBody>
+      </p:sp>
+      <p:sp>
+        <p:nvSpPr>
+          <p:cNvPr id="6" name="Text 4"/>
+          <p:cNvSpPr/>
+          <p:nvPr/>
+        </p:nvSpPr>
+        <p:spPr>
+          <a:xfrm>
+            <a:off x="804672" y="2029968"/>
+            <a:ext cx="4870552" cy="3474720"/>
+          </a:xfrm>
+          <a:prstGeom prst="rect">
+            <a:avLst/>
+          </a:prstGeom>
+          <a:noFill/>
+          <a:ln/>
+        </p:spPr>
+        <p:txBody>
+          <a:bodyPr wrap="square" lIns="0" tIns="0" rIns="0" bIns="0" rtlCol="0" anchor="t"/>
+          <a:lstStyle/>
+          <a:p>
+            <a:pPr algn="l" marL="177800" indent="-177800">
+              <a:spcAft>
+                <a:spcPts val="900"/>
+              </a:spcAft>
+              <a:buSzPct val="100000"/>
+              <a:buChar char="•"/>
+            </a:pPr>
+            <a:r>
+              <a:rPr lang="en-US" sz="1250" b="1" dirty="0">
+                <a:solidFill>
+                  <a:srgbClr val="1B2A38"/>
+                </a:solidFill>
+                <a:latin typeface="Calibri" pitchFamily="34" charset="0"/>
+                <a:ea typeface="Calibri" pitchFamily="34" charset="-122"/>
+                <a:cs typeface="Calibri" pitchFamily="34" charset="-120"/>
+              </a:rPr>
+              <a:t>Karyotype/FISH define favorable, intermediate, and adverse risk in AML and other neoplasms.</a:t>
+            </a:r>
+            <a:endParaRPr lang="en-US" sz="1250" dirty="0"/>
+          </a:p>
+          <a:p>
+            <a:pPr algn="l" marL="177800" indent="-177800">
+              <a:spcAft>
+                <a:spcPts val="900"/>
+              </a:spcAft>
+              <a:buSzPct val="100000"/>
+              <a:buChar char="•"/>
+            </a:pPr>
+            <a:r>
+              <a:rPr lang="en-US" sz="1250" dirty="0">
+                <a:solidFill>
+                  <a:srgbClr val="33444F"/>
+                </a:solidFill>
+                <a:latin typeface="Calibri" pitchFamily="34" charset="0"/>
+                <a:ea typeface="Calibri" pitchFamily="34" charset="-122"/>
+                <a:cs typeface="Calibri" pitchFamily="34" charset="-120"/>
+              </a:rPr>
+              <a:t>Specific abnormalities guide therapy intensity and transplant decisions.</a:t>
+            </a:r>
+            <a:endParaRPr lang="en-US" sz="1250" dirty="0"/>
+          </a:p>
+          <a:p>
+            <a:pPr algn="l" marL="177800" indent="-177800">
+              <a:spcAft>
+                <a:spcPts val="900"/>
+              </a:spcAft>
+              <a:buSzPct val="100000"/>
+              <a:buChar char="•"/>
+            </a:pPr>
+            <a:r>
+              <a:rPr lang="en-US" sz="1250" dirty="0">
+                <a:solidFill>
+                  <a:srgbClr val="33444F"/>
+                </a:solidFill>
+                <a:latin typeface="Calibri" pitchFamily="34" charset="0"/>
+                <a:ea typeface="Calibri" pitchFamily="34" charset="-122"/>
+                <a:cs typeface="Calibri" pitchFamily="34" charset="-120"/>
+              </a:rPr>
+              <a:t>Complex karyotype generally indicates adverse risk.</a:t>
+            </a:r>
+            <a:endParaRPr lang="en-US" sz="1250" dirty="0"/>
+          </a:p>
+          <a:p>
+            <a:pPr algn="l" marL="177800" indent="-177800">
+              <a:spcAft>
+                <a:spcPts val="900"/>
+              </a:spcAft>
+              <a:buSzPct val="100000"/>
+              <a:buChar char="•"/>
+            </a:pPr>
+            <a:r>
+              <a:rPr lang="en-US" sz="1250" dirty="0">
+                <a:solidFill>
+                  <a:srgbClr val="33444F"/>
+                </a:solidFill>
+                <a:latin typeface="Calibri" pitchFamily="34" charset="0"/>
+                <a:ea typeface="Calibri" pitchFamily="34" charset="-122"/>
+                <a:cs typeface="Calibri" pitchFamily="34" charset="-120"/>
+              </a:rPr>
+              <a:t>Cytogenetics remains foundational despite molecular advances.</a:t>
+            </a:r>
+            <a:endParaRPr lang="en-US" sz="1250" dirty="0"/>
+          </a:p>
+        </p:txBody>
+      </p:sp>
+      <p:sp>
+        <p:nvSpPr>
+          <p:cNvPr id="7" name="Shape 5"/>
+          <p:cNvSpPr/>
+          <p:nvPr/>
+        </p:nvSpPr>
+        <p:spPr>
+          <a:xfrm>
+            <a:off x="6278728" y="1517904"/>
+            <a:ext cx="5346040" cy="4114800"/>
+          </a:xfrm>
+          <a:prstGeom prst="roundRect">
+            <a:avLst>
+              <a:gd name="adj" fmla="val 2000"/>
+            </a:avLst>
           </a:prstGeom>
           <a:solidFill>
-            <a:srgbClr val="FFFFFF">
-              <a:alpha val="6000"/>
-            </a:srgbClr>
+            <a:srgbClr val="DDF0EF"/>
           </a:solidFill>
           <a:ln/>
-        </p:spPr>
-      </p:sp>
-      <p:sp>
-        <p:nvSpPr>
-          <p:cNvPr id="4" name="Text 2"/>
-          <p:cNvSpPr/>
-          <p:nvPr/>
-        </p:nvSpPr>
-        <p:spPr>
-          <a:xfrm>
-            <a:off x="566928" y="1783080"/>
-            <a:ext cx="2743200" cy="1463040"/>
+          <a:effectLst>
+            <a:outerShdw sx="100000" sy="100000" kx="0" ky="0" algn="bl" rotWithShape="0" blurRad="88900" dist="25400" dir="5400000">
+              <a:srgbClr val="22303C">
+                <a:alpha val="12000"/>
+              </a:srgbClr>
+            </a:outerShdw>
+          </a:effectLst>
+        </p:spPr>
+      </p:sp>
+      <p:sp>
+        <p:nvSpPr>
+          <p:cNvPr id="8" name="Text 6"/>
+          <p:cNvSpPr/>
+          <p:nvPr/>
+        </p:nvSpPr>
+        <p:spPr>
+          <a:xfrm>
+            <a:off x="6516472" y="1682496"/>
+            <a:ext cx="4888840" cy="274320"/>
           </a:xfrm>
           <a:prstGeom prst="rect">
             <a:avLst/>
@@ -13054,34 +15611,179 @@
           <a:bodyPr wrap="square" lIns="0" tIns="0" rIns="0" bIns="0" rtlCol="0" anchor="ctr"/>
           <a:lstStyle/>
           <a:p>
+            <a:pPr indent="0" marL="0">
+              <a:buNone/>
+            </a:pPr>
+            <a:r>
+              <a:rPr lang="en-US" sz="1200" b="1" spc="100" kern="0" dirty="0">
+                <a:solidFill>
+                  <a:srgbClr val="005A63"/>
+                </a:solidFill>
+                <a:latin typeface="Calibri" pitchFamily="34" charset="0"/>
+                <a:ea typeface="Calibri" pitchFamily="34" charset="-122"/>
+                <a:cs typeface="Calibri" pitchFamily="34" charset="-120"/>
+              </a:rPr>
+              <a:t>FISH ADDS PRECISION</a:t>
+            </a:r>
+            <a:endParaRPr lang="en-US" sz="1200" dirty="0"/>
+          </a:p>
+        </p:txBody>
+      </p:sp>
+      <p:sp>
+        <p:nvSpPr>
+          <p:cNvPr id="9" name="Text 7"/>
+          <p:cNvSpPr/>
+          <p:nvPr/>
+        </p:nvSpPr>
+        <p:spPr>
+          <a:xfrm>
+            <a:off x="6516472" y="2029968"/>
+            <a:ext cx="4870552" cy="3474720"/>
+          </a:xfrm>
+          <a:prstGeom prst="rect">
+            <a:avLst/>
+          </a:prstGeom>
+          <a:noFill/>
+          <a:ln/>
+        </p:spPr>
+        <p:txBody>
+          <a:bodyPr wrap="square" lIns="0" tIns="0" rIns="0" bIns="0" rtlCol="0" anchor="t"/>
+          <a:lstStyle/>
+          <a:p>
+            <a:pPr algn="l" marL="177800" indent="-177800">
+              <a:spcAft>
+                <a:spcPts val="900"/>
+              </a:spcAft>
+              <a:buSzPct val="100000"/>
+              <a:buChar char="•"/>
+            </a:pPr>
+            <a:r>
+              <a:rPr lang="en-US" sz="1250" b="1" dirty="0">
+                <a:solidFill>
+                  <a:srgbClr val="1B2A38"/>
+                </a:solidFill>
+                <a:latin typeface="Calibri" pitchFamily="34" charset="0"/>
+                <a:ea typeface="Calibri" pitchFamily="34" charset="-122"/>
+                <a:cs typeface="Calibri" pitchFamily="34" charset="-120"/>
+              </a:rPr>
+              <a:t>FISH detects specific lesions when karyotype fails or is normal.</a:t>
+            </a:r>
+            <a:endParaRPr lang="en-US" sz="1250" dirty="0"/>
+          </a:p>
+          <a:p>
+            <a:pPr algn="l" marL="177800" indent="-177800">
+              <a:spcAft>
+                <a:spcPts val="900"/>
+              </a:spcAft>
+              <a:buSzPct val="100000"/>
+              <a:buChar char="•"/>
+            </a:pPr>
+            <a:r>
+              <a:rPr lang="en-US" sz="1250" dirty="0">
+                <a:solidFill>
+                  <a:srgbClr val="33444F"/>
+                </a:solidFill>
+                <a:latin typeface="Calibri" pitchFamily="34" charset="0"/>
+                <a:ea typeface="Calibri" pitchFamily="34" charset="-122"/>
+                <a:cs typeface="Calibri" pitchFamily="34" charset="-120"/>
+              </a:rPr>
+              <a:t>Useful for cryptic rearrangements and deletions.</a:t>
+            </a:r>
+            <a:endParaRPr lang="en-US" sz="1250" dirty="0"/>
+          </a:p>
+          <a:p>
+            <a:pPr algn="l" marL="177800" indent="-177800">
+              <a:spcAft>
+                <a:spcPts val="900"/>
+              </a:spcAft>
+              <a:buSzPct val="100000"/>
+              <a:buChar char="•"/>
+            </a:pPr>
+            <a:r>
+              <a:rPr lang="en-US" sz="1250" dirty="0">
+                <a:solidFill>
+                  <a:srgbClr val="33444F"/>
+                </a:solidFill>
+                <a:latin typeface="Calibri" pitchFamily="34" charset="0"/>
+                <a:ea typeface="Calibri" pitchFamily="34" charset="-122"/>
+                <a:cs typeface="Calibri" pitchFamily="34" charset="-120"/>
+              </a:rPr>
+              <a:t>Interphase FISH works without dividing cells.</a:t>
+            </a:r>
+            <a:endParaRPr lang="en-US" sz="1250" dirty="0"/>
+          </a:p>
+          <a:p>
+            <a:pPr algn="l" marL="177800" indent="-177800">
+              <a:spcAft>
+                <a:spcPts val="900"/>
+              </a:spcAft>
+              <a:buSzPct val="100000"/>
+              <a:buChar char="•"/>
+            </a:pPr>
+            <a:r>
+              <a:rPr lang="en-US" sz="1250" dirty="0">
+                <a:solidFill>
+                  <a:srgbClr val="33444F"/>
+                </a:solidFill>
+                <a:latin typeface="Calibri" pitchFamily="34" charset="0"/>
+                <a:ea typeface="Calibri" pitchFamily="34" charset="-122"/>
+                <a:cs typeface="Calibri" pitchFamily="34" charset="-120"/>
+              </a:rPr>
+              <a:t>Combine with molecular panels.</a:t>
+            </a:r>
+            <a:endParaRPr lang="en-US" sz="1250" dirty="0"/>
+          </a:p>
+        </p:txBody>
+      </p:sp>
+      <p:sp>
+        <p:nvSpPr>
+          <p:cNvPr id="10" name="Text 8"/>
+          <p:cNvSpPr/>
+          <p:nvPr/>
+        </p:nvSpPr>
+        <p:spPr>
+          <a:xfrm>
+            <a:off x="566928" y="6473952"/>
+            <a:ext cx="7772400" cy="274320"/>
+          </a:xfrm>
+          <a:prstGeom prst="rect">
+            <a:avLst/>
+          </a:prstGeom>
+          <a:noFill/>
+          <a:ln/>
+        </p:spPr>
+        <p:txBody>
+          <a:bodyPr wrap="square" lIns="0" tIns="0" rIns="0" bIns="0" rtlCol="0" anchor="ctr"/>
+          <a:lstStyle/>
+          <a:p>
             <a:pPr algn="l" indent="0" marL="0">
               <a:buNone/>
             </a:pPr>
             <a:r>
-              <a:rPr lang="en-US" sz="6400" b="1" dirty="0">
-                <a:solidFill>
-                  <a:srgbClr val="E0F2F4"/>
-                </a:solidFill>
-                <a:latin typeface="Calibri" pitchFamily="34" charset="0"/>
-                <a:ea typeface="Calibri" pitchFamily="34" charset="-122"/>
-                <a:cs typeface="Calibri" pitchFamily="34" charset="-120"/>
-              </a:rPr>
-              <a:t>02</a:t>
-            </a:r>
-            <a:endParaRPr lang="en-US" sz="6400" dirty="0"/>
-          </a:p>
-        </p:txBody>
-      </p:sp>
-      <p:sp>
-        <p:nvSpPr>
-          <p:cNvPr id="5" name="Text 3"/>
-          <p:cNvSpPr/>
-          <p:nvPr/>
-        </p:nvSpPr>
-        <p:spPr>
-          <a:xfrm>
-            <a:off x="566928" y="3246120"/>
-            <a:ext cx="10058400" cy="365760"/>
+              <a:rPr lang="en-US" sz="850" dirty="0">
+                <a:solidFill>
+                  <a:srgbClr val="9AA8B4"/>
+                </a:solidFill>
+                <a:latin typeface="Calibri" pitchFamily="34" charset="0"/>
+                <a:ea typeface="Calibri" pitchFamily="34" charset="-122"/>
+                <a:cs typeface="Calibri" pitchFamily="34" charset="-120"/>
+              </a:rPr>
+              <a:t>Makassed General Hospital  ·  Department of Laboratory Medicine</a:t>
+            </a:r>
+            <a:endParaRPr lang="en-US" sz="850" dirty="0"/>
+          </a:p>
+        </p:txBody>
+      </p:sp>
+      <p:sp>
+        <p:nvSpPr>
+          <p:cNvPr id="11" name="Text 9"/>
+          <p:cNvSpPr/>
+          <p:nvPr/>
+        </p:nvSpPr>
+        <p:spPr>
+          <a:xfrm>
+            <a:off x="9814255" y="6473952"/>
+            <a:ext cx="1828800" cy="274320"/>
           </a:xfrm>
           <a:prstGeom prst="rect">
             <a:avLst/>
@@ -13093,60 +15795,49 @@
           <a:bodyPr wrap="square" lIns="0" tIns="0" rIns="0" bIns="0" rtlCol="0" anchor="ctr"/>
           <a:lstStyle/>
           <a:p>
-            <a:pPr algn="l" indent="0" marL="0">
-              <a:buNone/>
-            </a:pPr>
-            <a:r>
-              <a:rPr lang="en-US" sz="1300" b="1" spc="250" kern="0" dirty="0">
-                <a:solidFill>
-                  <a:srgbClr val="F2C9D9"/>
-                </a:solidFill>
-                <a:latin typeface="Calibri" pitchFamily="34" charset="0"/>
-                <a:ea typeface="Calibri" pitchFamily="34" charset="-122"/>
-                <a:cs typeface="Calibri" pitchFamily="34" charset="-120"/>
-              </a:rPr>
-              <a:t>PART TWO</a:t>
-            </a:r>
-            <a:endParaRPr lang="en-US" sz="1300" dirty="0"/>
-          </a:p>
-        </p:txBody>
-      </p:sp>
-      <p:sp>
-        <p:nvSpPr>
-          <p:cNvPr id="6" name="Text 4"/>
-          <p:cNvSpPr/>
-          <p:nvPr/>
-        </p:nvSpPr>
-        <p:spPr>
-          <a:xfrm>
-            <a:off x="566928" y="3611880"/>
-            <a:ext cx="10607040" cy="1463040"/>
-          </a:xfrm>
-          <a:prstGeom prst="rect">
-            <a:avLst/>
-          </a:prstGeom>
-          <a:noFill/>
-          <a:ln/>
-        </p:spPr>
-        <p:txBody>
-          <a:bodyPr wrap="square" lIns="0" tIns="0" rIns="0" bIns="0" rtlCol="0" anchor="t"/>
-          <a:lstStyle/>
-          <a:p>
-            <a:pPr algn="l" indent="0" marL="0">
-              <a:buNone/>
-            </a:pPr>
-            <a:r>
-              <a:rPr lang="en-US" sz="3800" b="1" dirty="0">
-                <a:solidFill>
-                  <a:srgbClr val="FFFFFF"/>
-                </a:solidFill>
-                <a:latin typeface="Calibri" pitchFamily="34" charset="0"/>
-                <a:ea typeface="Calibri" pitchFamily="34" charset="-122"/>
-                <a:cs typeface="Calibri" pitchFamily="34" charset="-120"/>
-              </a:rPr>
-              <a:t>MRD &amp; Integrated Diagnosis</a:t>
-            </a:r>
-            <a:endParaRPr lang="en-US" sz="3800" dirty="0"/>
+            <a:pPr algn="r" indent="0" marL="0">
+              <a:buNone/>
+            </a:pPr>
+            <a:r>
+              <a:rPr lang="en-US" sz="850" dirty="0">
+                <a:solidFill>
+                  <a:srgbClr val="9AA8B4"/>
+                </a:solidFill>
+                <a:latin typeface="Calibri" pitchFamily="34" charset="0"/>
+                <a:ea typeface="Calibri" pitchFamily="34" charset="-122"/>
+                <a:cs typeface="Calibri" pitchFamily="34" charset="-120"/>
+              </a:rPr>
+              <a:t>CP Lecture Series</a:t>
+            </a:r>
+            <a:pPr algn="r" indent="0" marL="0">
+              <a:buNone/>
+            </a:pPr>
+            <a:r>
+              <a:rPr lang="en-US" sz="850" dirty="0">
+                <a:solidFill>
+                  <a:srgbClr val="DCE4EC"/>
+                </a:solidFill>
+                <a:latin typeface="Calibri" pitchFamily="34" charset="0"/>
+                <a:ea typeface="Calibri" pitchFamily="34" charset="-122"/>
+                <a:cs typeface="Calibri" pitchFamily="34" charset="-120"/>
+              </a:rPr>
+              <a:t>   ·   </a:t>
+            </a:r>
+            <a:pPr algn="r" indent="0" marL="0">
+              <a:buNone/>
+            </a:pPr>
+            <a:r>
+              <a:rPr lang="en-US" sz="850" b="1" dirty="0">
+                <a:solidFill>
+                  <a:srgbClr val="00838F"/>
+                </a:solidFill>
+                <a:latin typeface="Calibri" pitchFamily="34" charset="0"/>
+                <a:ea typeface="Calibri" pitchFamily="34" charset="-122"/>
+                <a:cs typeface="Calibri" pitchFamily="34" charset="-120"/>
+              </a:rPr>
+              <a:t>8</a:t>
+            </a:r>
+            <a:endParaRPr lang="en-US" sz="850" dirty="0"/>
           </a:p>
         </p:txBody>
       </p:sp>

--- a/decks/Molecular_03_Molecular-Testing-in-Hematologic-Malignancy.pptx
+++ b/decks/Molecular_03_Molecular-Testing-in-Hematologic-Malignancy.pptx
@@ -26,9 +26,13 @@
     <p:sldId id="274" r:id="rId20"/>
     <p:sldId id="275" r:id="rId21"/>
     <p:sldId id="276" r:id="rId22"/>
+    <p:sldId id="285" r:id="rId36"/>
     <p:sldId id="277" r:id="rId23"/>
+    <p:sldId id="284" r:id="rId35"/>
     <p:sldId id="278" r:id="rId24"/>
+    <p:sldId id="283" r:id="rId34"/>
     <p:sldId id="279" r:id="rId25"/>
+    <p:sldId id="282" r:id="rId33"/>
     <p:sldId id="280" r:id="rId26"/>
     <p:sldId id="281" r:id="rId27"/>
   </p:sldIdLst>
@@ -3121,6 +3125,10 @@
           </a:solidFill>
           <a:ln/>
         </p:spPr>
+        <p:txBody>
+          <a:bodyPr/>
+          <a:p/>
+        </p:txBody>
       </p:sp>
       <p:sp>
         <p:nvSpPr>
@@ -3143,6 +3151,10 @@
           </a:solidFill>
           <a:ln/>
         </p:spPr>
+        <p:txBody>
+          <a:bodyPr/>
+          <a:p/>
+        </p:txBody>
       </p:sp>
       <p:sp>
         <p:nvSpPr>
@@ -3165,6 +3177,10 @@
           </a:solidFill>
           <a:ln/>
         </p:spPr>
+        <p:txBody>
+          <a:bodyPr/>
+          <a:p/>
+        </p:txBody>
       </p:sp>
       <p:sp>
         <p:nvSpPr>
@@ -3187,6 +3203,10 @@
           </a:solidFill>
           <a:ln/>
         </p:spPr>
+        <p:txBody>
+          <a:bodyPr/>
+          <a:p/>
+        </p:txBody>
       </p:sp>
       <p:sp>
         <p:nvSpPr>
@@ -3518,6 +3538,10 @@
           </a:solidFill>
           <a:ln/>
         </p:spPr>
+        <p:txBody>
+          <a:bodyPr/>
+          <a:p/>
+        </p:txBody>
       </p:sp>
       <p:sp>
         <p:nvSpPr>
@@ -3540,6 +3564,10 @@
           </a:solidFill>
           <a:ln/>
         </p:spPr>
+        <p:txBody>
+          <a:bodyPr/>
+          <a:p/>
+        </p:txBody>
       </p:sp>
       <p:sp>
         <p:nvSpPr>
@@ -3796,6 +3824,10 @@
             </a:outerShdw>
           </a:effectLst>
         </p:spPr>
+        <p:txBody>
+          <a:bodyPr/>
+          <a:p/>
+        </p:txBody>
       </p:sp>
       <p:sp>
         <p:nvSpPr>
@@ -3970,6 +4002,10 @@
             </a:outerShdw>
           </a:effectLst>
         </p:spPr>
+        <p:txBody>
+          <a:bodyPr/>
+          <a:p/>
+        </p:txBody>
       </p:sp>
       <p:sp>
         <p:nvSpPr>
@@ -4360,6 +4396,10 @@
             </a:outerShdw>
           </a:effectLst>
         </p:spPr>
+        <p:txBody>
+          <a:bodyPr/>
+          <a:p/>
+        </p:txBody>
       </p:sp>
       <p:sp>
         <p:nvSpPr>
@@ -4534,6 +4574,10 @@
             </a:outerShdw>
           </a:effectLst>
         </p:spPr>
+        <p:txBody>
+          <a:bodyPr/>
+          <a:p/>
+        </p:txBody>
       </p:sp>
       <p:sp>
         <p:nvSpPr>
@@ -4924,6 +4968,10 @@
             </a:outerShdw>
           </a:effectLst>
         </p:spPr>
+        <p:txBody>
+          <a:bodyPr/>
+          <a:p/>
+        </p:txBody>
       </p:sp>
       <p:sp>
         <p:nvSpPr>
@@ -5098,6 +5146,10 @@
             </a:outerShdw>
           </a:effectLst>
         </p:spPr>
+        <p:txBody>
+          <a:bodyPr/>
+          <a:p/>
+        </p:txBody>
       </p:sp>
       <p:sp>
         <p:nvSpPr>
@@ -5403,6 +5455,10 @@
           </a:solidFill>
           <a:ln/>
         </p:spPr>
+        <p:txBody>
+          <a:bodyPr/>
+          <a:p/>
+        </p:txBody>
       </p:sp>
       <p:sp>
         <p:nvSpPr>
@@ -5425,6 +5481,10 @@
           </a:solidFill>
           <a:ln/>
         </p:spPr>
+        <p:txBody>
+          <a:bodyPr/>
+          <a:p/>
+        </p:txBody>
       </p:sp>
       <p:sp>
         <p:nvSpPr>
@@ -5681,6 +5741,10 @@
             </a:outerShdw>
           </a:effectLst>
         </p:spPr>
+        <p:txBody>
+          <a:bodyPr/>
+          <a:p/>
+        </p:txBody>
       </p:sp>
       <p:sp>
         <p:nvSpPr>
@@ -5791,6 +5855,10 @@
             </a:outerShdw>
           </a:effectLst>
         </p:spPr>
+        <p:txBody>
+          <a:bodyPr/>
+          <a:p/>
+        </p:txBody>
       </p:sp>
       <p:sp>
         <p:nvSpPr>
@@ -6220,6 +6288,10 @@
             </a:outerShdw>
           </a:effectLst>
         </p:spPr>
+        <p:txBody>
+          <a:bodyPr/>
+          <a:p/>
+        </p:txBody>
       </p:sp>
       <p:sp>
         <p:nvSpPr>
@@ -6546,6 +6618,10 @@
             </a:outerShdw>
           </a:effectLst>
         </p:spPr>
+        <p:txBody>
+          <a:bodyPr/>
+          <a:p/>
+        </p:txBody>
       </p:sp>
       <p:sp>
         <p:nvSpPr>
@@ -6656,6 +6732,10 @@
             </a:outerShdw>
           </a:effectLst>
         </p:spPr>
+        <p:txBody>
+          <a:bodyPr/>
+          <a:p/>
+        </p:txBody>
       </p:sp>
       <p:sp>
         <p:nvSpPr>
@@ -7085,6 +7165,10 @@
             </a:outerShdw>
           </a:effectLst>
         </p:spPr>
+        <p:txBody>
+          <a:bodyPr/>
+          <a:p/>
+        </p:txBody>
       </p:sp>
       <p:sp>
         <p:nvSpPr>
@@ -7411,6 +7495,10 @@
             </a:outerShdw>
           </a:effectLst>
         </p:spPr>
+        <p:txBody>
+          <a:bodyPr/>
+          <a:p/>
+        </p:txBody>
       </p:sp>
       <p:sp>
         <p:nvSpPr>
@@ -7521,6 +7609,10 @@
             </a:outerShdw>
           </a:effectLst>
         </p:spPr>
+        <p:txBody>
+          <a:bodyPr/>
+          <a:p/>
+        </p:txBody>
       </p:sp>
       <p:sp>
         <p:nvSpPr>
@@ -7844,6 +7936,10 @@
             </a:outerShdw>
           </a:effectLst>
         </p:spPr>
+        <p:txBody>
+          <a:bodyPr/>
+          <a:p/>
+        </p:txBody>
       </p:sp>
       <p:sp>
         <p:nvSpPr>
@@ -7951,6 +8047,10 @@
             </a:outerShdw>
           </a:effectLst>
         </p:spPr>
+        <p:txBody>
+          <a:bodyPr/>
+          <a:p/>
+        </p:txBody>
       </p:sp>
       <p:sp>
         <p:nvSpPr>
@@ -8058,6 +8158,10 @@
             </a:outerShdw>
           </a:effectLst>
         </p:spPr>
+        <p:txBody>
+          <a:bodyPr/>
+          <a:p/>
+        </p:txBody>
       </p:sp>
       <p:sp>
         <p:nvSpPr>
@@ -8165,6 +8269,10 @@
             </a:outerShdw>
           </a:effectLst>
         </p:spPr>
+        <p:txBody>
+          <a:bodyPr/>
+          <a:p/>
+        </p:txBody>
       </p:sp>
       <p:sp>
         <p:nvSpPr>
@@ -8601,6 +8709,10 @@
             </a:outerShdw>
           </a:effectLst>
         </p:spPr>
+        <p:txBody>
+          <a:bodyPr/>
+          <a:p/>
+        </p:txBody>
       </p:sp>
       <p:sp>
         <p:nvSpPr>
@@ -8989,9 +9101,9 @@
               <a:buNone/>
             </a:pPr>
             <a:r>
-              <a:rPr lang="en-US" sz="1350" b="1" dirty="0">
-                <a:solidFill>
-                  <a:srgbClr val="005A63"/>
+              <a:rPr lang="en-US" sz="1350" b="0" dirty="0">
+                <a:solidFill>
+                  <a:srgbClr val="33444F"/>
                 </a:solidFill>
                 <a:latin typeface="Calibri" pitchFamily="34" charset="0"/>
                 <a:ea typeface="Calibri" pitchFamily="34" charset="-122"/>
@@ -9060,130 +9172,6 @@
               <a:t>E. VAF percentage</a:t>
             </a:r>
             <a:endParaRPr lang="en-US" sz="1350" dirty="0"/>
-          </a:p>
-        </p:txBody>
-      </p:sp>
-      <p:sp>
-        <p:nvSpPr>
-          <p:cNvPr id="6" name="Shape 4"/>
-          <p:cNvSpPr/>
-          <p:nvPr/>
-        </p:nvSpPr>
-        <p:spPr>
-          <a:xfrm>
-            <a:off x="7201632" y="2395728"/>
-            <a:ext cx="4423136" cy="3246120"/>
-          </a:xfrm>
-          <a:prstGeom prst="roundRect">
-            <a:avLst>
-              <a:gd name="adj" fmla="val 2535"/>
-            </a:avLst>
-          </a:prstGeom>
-          <a:solidFill>
-            <a:srgbClr val="E0F2F4"/>
-          </a:solidFill>
-          <a:ln/>
-          <a:effectLst>
-            <a:outerShdw sx="100000" sy="100000" kx="0" ky="0" algn="bl" rotWithShape="0" blurRad="88900" dist="25400" dir="5400000">
-              <a:srgbClr val="22303C">
-                <a:alpha val="12000"/>
-              </a:srgbClr>
-            </a:outerShdw>
-          </a:effectLst>
-        </p:spPr>
-      </p:sp>
-      <p:sp>
-        <p:nvSpPr>
-          <p:cNvPr id="7" name="Text 5"/>
-          <p:cNvSpPr/>
-          <p:nvPr/>
-        </p:nvSpPr>
-        <p:spPr>
-          <a:xfrm>
-            <a:off x="7439376" y="2578608"/>
-            <a:ext cx="3965936" cy="457200"/>
-          </a:xfrm>
-          <a:prstGeom prst="rect">
-            <a:avLst/>
-          </a:prstGeom>
-          <a:noFill/>
-          <a:ln/>
-        </p:spPr>
-        <p:txBody>
-          <a:bodyPr wrap="square" lIns="0" tIns="0" rIns="0" bIns="0" rtlCol="0" anchor="ctr"/>
-          <a:lstStyle/>
-          <a:p>
-            <a:pPr indent="0" marL="0">
-              <a:buNone/>
-            </a:pPr>
-            <a:r>
-              <a:rPr lang="en-US" sz="1500" b="1" dirty="0">
-                <a:solidFill>
-                  <a:srgbClr val="00838F"/>
-                </a:solidFill>
-                <a:latin typeface="Calibri" pitchFamily="34" charset="0"/>
-                <a:ea typeface="Calibri" pitchFamily="34" charset="-122"/>
-                <a:cs typeface="Calibri" pitchFamily="34" charset="-120"/>
-              </a:rPr>
-              <a:t>ANSWER  </a:t>
-            </a:r>
-            <a:pPr indent="0" marL="0">
-              <a:buNone/>
-            </a:pPr>
-            <a:r>
-              <a:rPr lang="en-US" sz="1500" b="1" dirty="0">
-                <a:solidFill>
-                  <a:srgbClr val="1B2A38"/>
-                </a:solidFill>
-                <a:latin typeface="Calibri" pitchFamily="34" charset="0"/>
-                <a:ea typeface="Calibri" pitchFamily="34" charset="-122"/>
-                <a:cs typeface="Calibri" pitchFamily="34" charset="-120"/>
-              </a:rPr>
-              <a:t>B — International Scale</a:t>
-            </a:r>
-            <a:endParaRPr lang="en-US" sz="1500" dirty="0"/>
-          </a:p>
-        </p:txBody>
-      </p:sp>
-      <p:sp>
-        <p:nvSpPr>
-          <p:cNvPr id="8" name="Text 6"/>
-          <p:cNvSpPr/>
-          <p:nvPr/>
-        </p:nvSpPr>
-        <p:spPr>
-          <a:xfrm>
-            <a:off x="7439376" y="3127248"/>
-            <a:ext cx="3947648" cy="2377440"/>
-          </a:xfrm>
-          <a:prstGeom prst="rect">
-            <a:avLst/>
-          </a:prstGeom>
-          <a:noFill/>
-          <a:ln/>
-        </p:spPr>
-        <p:txBody>
-          <a:bodyPr wrap="square" lIns="0" tIns="0" rIns="0" bIns="0" rtlCol="0" anchor="t"/>
-          <a:lstStyle/>
-          <a:p>
-            <a:pPr algn="l" indent="0" marL="0">
-              <a:lnSpc>
-                <a:spcPct val="108000"/>
-              </a:lnSpc>
-              <a:buNone/>
-            </a:pPr>
-            <a:r>
-              <a:rPr lang="en-US" sz="1250" dirty="0">
-                <a:solidFill>
-                  <a:srgbClr val="33444F"/>
-                </a:solidFill>
-                <a:latin typeface="Calibri" pitchFamily="34" charset="0"/>
-                <a:ea typeface="Calibri" pitchFamily="34" charset="-122"/>
-                <a:cs typeface="Calibri" pitchFamily="34" charset="-120"/>
-              </a:rPr>
-              <a:t>Standardized IS reporting enables comparison of BCR-ABL1 levels across laboratories and time.</a:t>
-            </a:r>
-            <a:endParaRPr lang="en-US" sz="1250" dirty="0"/>
           </a:p>
         </p:txBody>
       </p:sp>
@@ -9493,9 +9481,9 @@
               <a:buNone/>
             </a:pPr>
             <a:r>
-              <a:rPr lang="en-US" sz="1350" b="1" dirty="0">
-                <a:solidFill>
-                  <a:srgbClr val="005A63"/>
+              <a:rPr lang="en-US" sz="1350" b="0" dirty="0">
+                <a:solidFill>
+                  <a:srgbClr val="33444F"/>
                 </a:solidFill>
                 <a:latin typeface="Calibri" pitchFamily="34" charset="0"/>
                 <a:ea typeface="Calibri" pitchFamily="34" charset="-122"/>
@@ -9564,130 +9552,6 @@
               <a:t>E. Normal karyotype</a:t>
             </a:r>
             <a:endParaRPr lang="en-US" sz="1350" dirty="0"/>
-          </a:p>
-        </p:txBody>
-      </p:sp>
-      <p:sp>
-        <p:nvSpPr>
-          <p:cNvPr id="6" name="Shape 4"/>
-          <p:cNvSpPr/>
-          <p:nvPr/>
-        </p:nvSpPr>
-        <p:spPr>
-          <a:xfrm>
-            <a:off x="7201632" y="2395728"/>
-            <a:ext cx="4423136" cy="3246120"/>
-          </a:xfrm>
-          <a:prstGeom prst="roundRect">
-            <a:avLst>
-              <a:gd name="adj" fmla="val 2535"/>
-            </a:avLst>
-          </a:prstGeom>
-          <a:solidFill>
-            <a:srgbClr val="E0F2F4"/>
-          </a:solidFill>
-          <a:ln/>
-          <a:effectLst>
-            <a:outerShdw sx="100000" sy="100000" kx="0" ky="0" algn="bl" rotWithShape="0" blurRad="88900" dist="25400" dir="5400000">
-              <a:srgbClr val="22303C">
-                <a:alpha val="12000"/>
-              </a:srgbClr>
-            </a:outerShdw>
-          </a:effectLst>
-        </p:spPr>
-      </p:sp>
-      <p:sp>
-        <p:nvSpPr>
-          <p:cNvPr id="7" name="Text 5"/>
-          <p:cNvSpPr/>
-          <p:nvPr/>
-        </p:nvSpPr>
-        <p:spPr>
-          <a:xfrm>
-            <a:off x="7439376" y="2578608"/>
-            <a:ext cx="3965936" cy="457200"/>
-          </a:xfrm>
-          <a:prstGeom prst="rect">
-            <a:avLst/>
-          </a:prstGeom>
-          <a:noFill/>
-          <a:ln/>
-        </p:spPr>
-        <p:txBody>
-          <a:bodyPr wrap="square" lIns="0" tIns="0" rIns="0" bIns="0" rtlCol="0" anchor="ctr"/>
-          <a:lstStyle/>
-          <a:p>
-            <a:pPr indent="0" marL="0">
-              <a:buNone/>
-            </a:pPr>
-            <a:r>
-              <a:rPr lang="en-US" sz="1500" b="1" dirty="0">
-                <a:solidFill>
-                  <a:srgbClr val="00838F"/>
-                </a:solidFill>
-                <a:latin typeface="Calibri" pitchFamily="34" charset="0"/>
-                <a:ea typeface="Calibri" pitchFamily="34" charset="-122"/>
-                <a:cs typeface="Calibri" pitchFamily="34" charset="-120"/>
-              </a:rPr>
-              <a:t>ANSWER  </a:t>
-            </a:r>
-            <a:pPr indent="0" marL="0">
-              <a:buNone/>
-            </a:pPr>
-            <a:r>
-              <a:rPr lang="en-US" sz="1500" b="1" dirty="0">
-                <a:solidFill>
-                  <a:srgbClr val="1B2A38"/>
-                </a:solidFill>
-                <a:latin typeface="Calibri" pitchFamily="34" charset="0"/>
-                <a:ea typeface="Calibri" pitchFamily="34" charset="-122"/>
-                <a:cs typeface="Calibri" pitchFamily="34" charset="-120"/>
-              </a:rPr>
-              <a:t>B — PML-RARA (APL)</a:t>
-            </a:r>
-            <a:endParaRPr lang="en-US" sz="1500" dirty="0"/>
-          </a:p>
-        </p:txBody>
-      </p:sp>
-      <p:sp>
-        <p:nvSpPr>
-          <p:cNvPr id="8" name="Text 6"/>
-          <p:cNvSpPr/>
-          <p:nvPr/>
-        </p:nvSpPr>
-        <p:spPr>
-          <a:xfrm>
-            <a:off x="7439376" y="3127248"/>
-            <a:ext cx="3947648" cy="2377440"/>
-          </a:xfrm>
-          <a:prstGeom prst="rect">
-            <a:avLst/>
-          </a:prstGeom>
-          <a:noFill/>
-          <a:ln/>
-        </p:spPr>
-        <p:txBody>
-          <a:bodyPr wrap="square" lIns="0" tIns="0" rIns="0" bIns="0" rtlCol="0" anchor="t"/>
-          <a:lstStyle/>
-          <a:p>
-            <a:pPr algn="l" indent="0" marL="0">
-              <a:lnSpc>
-                <a:spcPct val="108000"/>
-              </a:lnSpc>
-              <a:buNone/>
-            </a:pPr>
-            <a:r>
-              <a:rPr lang="en-US" sz="1250" dirty="0">
-                <a:solidFill>
-                  <a:srgbClr val="33444F"/>
-                </a:solidFill>
-                <a:latin typeface="Calibri" pitchFamily="34" charset="0"/>
-                <a:ea typeface="Calibri" pitchFamily="34" charset="-122"/>
-                <a:cs typeface="Calibri" pitchFamily="34" charset="-120"/>
-              </a:rPr>
-              <a:t>APL carries a high risk of fatal coagulopathy; rapid confirmation and treatment are urgent.</a:t>
-            </a:r>
-            <a:endParaRPr lang="en-US" sz="1250" dirty="0"/>
           </a:p>
         </p:txBody>
       </p:sp>
@@ -9997,9 +9861,9 @@
               <a:buNone/>
             </a:pPr>
             <a:r>
-              <a:rPr lang="en-US" sz="1350" b="1" dirty="0">
-                <a:solidFill>
-                  <a:srgbClr val="005A63"/>
+              <a:rPr lang="en-US" sz="1350" b="0" dirty="0">
+                <a:solidFill>
+                  <a:srgbClr val="33444F"/>
                 </a:solidFill>
                 <a:latin typeface="Calibri" pitchFamily="34" charset="0"/>
                 <a:ea typeface="Calibri" pitchFamily="34" charset="-122"/>
@@ -10068,130 +9932,6 @@
               <a:t>E. Flow cytometry</a:t>
             </a:r>
             <a:endParaRPr lang="en-US" sz="1350" dirty="0"/>
-          </a:p>
-        </p:txBody>
-      </p:sp>
-      <p:sp>
-        <p:nvSpPr>
-          <p:cNvPr id="6" name="Shape 4"/>
-          <p:cNvSpPr/>
-          <p:nvPr/>
-        </p:nvSpPr>
-        <p:spPr>
-          <a:xfrm>
-            <a:off x="7201632" y="2395728"/>
-            <a:ext cx="4423136" cy="3246120"/>
-          </a:xfrm>
-          <a:prstGeom prst="roundRect">
-            <a:avLst>
-              <a:gd name="adj" fmla="val 2535"/>
-            </a:avLst>
-          </a:prstGeom>
-          <a:solidFill>
-            <a:srgbClr val="E0F2F4"/>
-          </a:solidFill>
-          <a:ln/>
-          <a:effectLst>
-            <a:outerShdw sx="100000" sy="100000" kx="0" ky="0" algn="bl" rotWithShape="0" blurRad="88900" dist="25400" dir="5400000">
-              <a:srgbClr val="22303C">
-                <a:alpha val="12000"/>
-              </a:srgbClr>
-            </a:outerShdw>
-          </a:effectLst>
-        </p:spPr>
-      </p:sp>
-      <p:sp>
-        <p:nvSpPr>
-          <p:cNvPr id="7" name="Text 5"/>
-          <p:cNvSpPr/>
-          <p:nvPr/>
-        </p:nvSpPr>
-        <p:spPr>
-          <a:xfrm>
-            <a:off x="7439376" y="2578608"/>
-            <a:ext cx="3965936" cy="457200"/>
-          </a:xfrm>
-          <a:prstGeom prst="rect">
-            <a:avLst/>
-          </a:prstGeom>
-          <a:noFill/>
-          <a:ln/>
-        </p:spPr>
-        <p:txBody>
-          <a:bodyPr wrap="square" lIns="0" tIns="0" rIns="0" bIns="0" rtlCol="0" anchor="ctr"/>
-          <a:lstStyle/>
-          <a:p>
-            <a:pPr indent="0" marL="0">
-              <a:buNone/>
-            </a:pPr>
-            <a:r>
-              <a:rPr lang="en-US" sz="1500" b="1" dirty="0">
-                <a:solidFill>
-                  <a:srgbClr val="00838F"/>
-                </a:solidFill>
-                <a:latin typeface="Calibri" pitchFamily="34" charset="0"/>
-                <a:ea typeface="Calibri" pitchFamily="34" charset="-122"/>
-                <a:cs typeface="Calibri" pitchFamily="34" charset="-120"/>
-              </a:rPr>
-              <a:t>ANSWER  </a:t>
-            </a:r>
-            <a:pPr indent="0" marL="0">
-              <a:buNone/>
-            </a:pPr>
-            <a:r>
-              <a:rPr lang="en-US" sz="1500" b="1" dirty="0">
-                <a:solidFill>
-                  <a:srgbClr val="1B2A38"/>
-                </a:solidFill>
-                <a:latin typeface="Calibri" pitchFamily="34" charset="0"/>
-                <a:ea typeface="Calibri" pitchFamily="34" charset="-122"/>
-                <a:cs typeface="Calibri" pitchFamily="34" charset="-120"/>
-              </a:rPr>
-              <a:t>B — FISH/RT-PCR</a:t>
-            </a:r>
-            <a:endParaRPr lang="en-US" sz="1500" dirty="0"/>
-          </a:p>
-        </p:txBody>
-      </p:sp>
-      <p:sp>
-        <p:nvSpPr>
-          <p:cNvPr id="8" name="Text 6"/>
-          <p:cNvSpPr/>
-          <p:nvPr/>
-        </p:nvSpPr>
-        <p:spPr>
-          <a:xfrm>
-            <a:off x="7439376" y="3127248"/>
-            <a:ext cx="3947648" cy="2377440"/>
-          </a:xfrm>
-          <a:prstGeom prst="rect">
-            <a:avLst/>
-          </a:prstGeom>
-          <a:noFill/>
-          <a:ln/>
-        </p:spPr>
-        <p:txBody>
-          <a:bodyPr wrap="square" lIns="0" tIns="0" rIns="0" bIns="0" rtlCol="0" anchor="t"/>
-          <a:lstStyle/>
-          <a:p>
-            <a:pPr algn="l" indent="0" marL="0">
-              <a:lnSpc>
-                <a:spcPct val="108000"/>
-              </a:lnSpc>
-              <a:buNone/>
-            </a:pPr>
-            <a:r>
-              <a:rPr lang="en-US" sz="1250" dirty="0">
-                <a:solidFill>
-                  <a:srgbClr val="33444F"/>
-                </a:solidFill>
-                <a:latin typeface="Calibri" pitchFamily="34" charset="0"/>
-                <a:ea typeface="Calibri" pitchFamily="34" charset="-122"/>
-                <a:cs typeface="Calibri" pitchFamily="34" charset="-120"/>
-              </a:rPr>
-              <a:t>Balanced fusions have no copy-number change (missed by arrays); FISH or RT-PCR detect them directly.</a:t>
-            </a:r>
-            <a:endParaRPr lang="en-US" sz="1250" dirty="0"/>
           </a:p>
         </p:txBody>
       </p:sp>
@@ -10501,9 +10241,9 @@
               <a:buNone/>
             </a:pPr>
             <a:r>
-              <a:rPr lang="en-US" sz="1350" b="1" dirty="0">
-                <a:solidFill>
-                  <a:srgbClr val="005A63"/>
+              <a:rPr lang="en-US" sz="1350" b="0" dirty="0">
+                <a:solidFill>
+                  <a:srgbClr val="33444F"/>
                 </a:solidFill>
                 <a:latin typeface="Calibri" pitchFamily="34" charset="0"/>
                 <a:ea typeface="Calibri" pitchFamily="34" charset="-122"/>
@@ -10572,130 +10312,6 @@
               <a:t>E. Measure tumor purity</a:t>
             </a:r>
             <a:endParaRPr lang="en-US" sz="1350" dirty="0"/>
-          </a:p>
-        </p:txBody>
-      </p:sp>
-      <p:sp>
-        <p:nvSpPr>
-          <p:cNvPr id="6" name="Shape 4"/>
-          <p:cNvSpPr/>
-          <p:nvPr/>
-        </p:nvSpPr>
-        <p:spPr>
-          <a:xfrm>
-            <a:off x="7201632" y="2395728"/>
-            <a:ext cx="4423136" cy="3246120"/>
-          </a:xfrm>
-          <a:prstGeom prst="roundRect">
-            <a:avLst>
-              <a:gd name="adj" fmla="val 2535"/>
-            </a:avLst>
-          </a:prstGeom>
-          <a:solidFill>
-            <a:srgbClr val="E0F2F4"/>
-          </a:solidFill>
-          <a:ln/>
-          <a:effectLst>
-            <a:outerShdw sx="100000" sy="100000" kx="0" ky="0" algn="bl" rotWithShape="0" blurRad="88900" dist="25400" dir="5400000">
-              <a:srgbClr val="22303C">
-                <a:alpha val="12000"/>
-              </a:srgbClr>
-            </a:outerShdw>
-          </a:effectLst>
-        </p:spPr>
-      </p:sp>
-      <p:sp>
-        <p:nvSpPr>
-          <p:cNvPr id="7" name="Text 5"/>
-          <p:cNvSpPr/>
-          <p:nvPr/>
-        </p:nvSpPr>
-        <p:spPr>
-          <a:xfrm>
-            <a:off x="7439376" y="2578608"/>
-            <a:ext cx="3965936" cy="457200"/>
-          </a:xfrm>
-          <a:prstGeom prst="rect">
-            <a:avLst/>
-          </a:prstGeom>
-          <a:noFill/>
-          <a:ln/>
-        </p:spPr>
-        <p:txBody>
-          <a:bodyPr wrap="square" lIns="0" tIns="0" rIns="0" bIns="0" rtlCol="0" anchor="ctr"/>
-          <a:lstStyle/>
-          <a:p>
-            <a:pPr indent="0" marL="0">
-              <a:buNone/>
-            </a:pPr>
-            <a:r>
-              <a:rPr lang="en-US" sz="1500" b="1" dirty="0">
-                <a:solidFill>
-                  <a:srgbClr val="00838F"/>
-                </a:solidFill>
-                <a:latin typeface="Calibri" pitchFamily="34" charset="0"/>
-                <a:ea typeface="Calibri" pitchFamily="34" charset="-122"/>
-                <a:cs typeface="Calibri" pitchFamily="34" charset="-120"/>
-              </a:rPr>
-              <a:t>ANSWER  </a:t>
-            </a:r>
-            <a:pPr indent="0" marL="0">
-              <a:buNone/>
-            </a:pPr>
-            <a:r>
-              <a:rPr lang="en-US" sz="1500" b="1" dirty="0">
-                <a:solidFill>
-                  <a:srgbClr val="1B2A38"/>
-                </a:solidFill>
-                <a:latin typeface="Calibri" pitchFamily="34" charset="0"/>
-                <a:ea typeface="Calibri" pitchFamily="34" charset="-122"/>
-                <a:cs typeface="Calibri" pitchFamily="34" charset="-120"/>
-              </a:rPr>
-              <a:t>B — Detect sub-morphologic disease/relapse</a:t>
-            </a:r>
-            <a:endParaRPr lang="en-US" sz="1500" dirty="0"/>
-          </a:p>
-        </p:txBody>
-      </p:sp>
-      <p:sp>
-        <p:nvSpPr>
-          <p:cNvPr id="8" name="Text 6"/>
-          <p:cNvSpPr/>
-          <p:nvPr/>
-        </p:nvSpPr>
-        <p:spPr>
-          <a:xfrm>
-            <a:off x="7439376" y="3127248"/>
-            <a:ext cx="3947648" cy="2377440"/>
-          </a:xfrm>
-          <a:prstGeom prst="rect">
-            <a:avLst/>
-          </a:prstGeom>
-          <a:noFill/>
-          <a:ln/>
-        </p:spPr>
-        <p:txBody>
-          <a:bodyPr wrap="square" lIns="0" tIns="0" rIns="0" bIns="0" rtlCol="0" anchor="t"/>
-          <a:lstStyle/>
-          <a:p>
-            <a:pPr algn="l" indent="0" marL="0">
-              <a:lnSpc>
-                <a:spcPct val="108000"/>
-              </a:lnSpc>
-              <a:buNone/>
-            </a:pPr>
-            <a:r>
-              <a:rPr lang="en-US" sz="1250" dirty="0">
-                <a:solidFill>
-                  <a:srgbClr val="33444F"/>
-                </a:solidFill>
-                <a:latin typeface="Calibri" pitchFamily="34" charset="0"/>
-                <a:ea typeface="Calibri" pitchFamily="34" charset="-122"/>
-                <a:cs typeface="Calibri" pitchFamily="34" charset="-120"/>
-              </a:rPr>
-              <a:t>MRD quantifies residual disease beneath morphologic detection and can flag relapse earlier.</a:t>
-            </a:r>
-            <a:endParaRPr lang="en-US" sz="1250" dirty="0"/>
           </a:p>
         </p:txBody>
       </p:sp>
@@ -10936,6 +10552,10 @@
           </a:solidFill>
           <a:ln/>
         </p:spPr>
+        <p:txBody>
+          <a:bodyPr/>
+          <a:p/>
+        </p:txBody>
       </p:sp>
       <p:sp>
         <p:nvSpPr>
@@ -10963,6 +10583,10 @@
             </a:outerShdw>
           </a:effectLst>
         </p:spPr>
+        <p:txBody>
+          <a:bodyPr/>
+          <a:p/>
+        </p:txBody>
       </p:sp>
       <p:sp>
         <p:nvSpPr>
@@ -11063,6 +10687,10 @@
           </a:solidFill>
           <a:ln/>
         </p:spPr>
+        <p:txBody>
+          <a:bodyPr/>
+          <a:p/>
+        </p:txBody>
       </p:sp>
       <p:sp>
         <p:nvSpPr>
@@ -11090,6 +10718,10 @@
             </a:outerShdw>
           </a:effectLst>
         </p:spPr>
+        <p:txBody>
+          <a:bodyPr/>
+          <a:p/>
+        </p:txBody>
       </p:sp>
       <p:sp>
         <p:nvSpPr>
@@ -11190,6 +10822,10 @@
           </a:solidFill>
           <a:ln/>
         </p:spPr>
+        <p:txBody>
+          <a:bodyPr/>
+          <a:p/>
+        </p:txBody>
       </p:sp>
       <p:sp>
         <p:nvSpPr>
@@ -11217,6 +10853,10 @@
             </a:outerShdw>
           </a:effectLst>
         </p:spPr>
+        <p:txBody>
+          <a:bodyPr/>
+          <a:p/>
+        </p:txBody>
       </p:sp>
       <p:sp>
         <p:nvSpPr>
@@ -11317,6 +10957,10 @@
           </a:solidFill>
           <a:ln/>
         </p:spPr>
+        <p:txBody>
+          <a:bodyPr/>
+          <a:p/>
+        </p:txBody>
       </p:sp>
       <p:sp>
         <p:nvSpPr>
@@ -11344,6 +10988,10 @@
             </a:outerShdw>
           </a:effectLst>
         </p:spPr>
+        <p:txBody>
+          <a:bodyPr/>
+          <a:p/>
+        </p:txBody>
       </p:sp>
       <p:sp>
         <p:nvSpPr>
@@ -11444,6 +11092,10 @@
           </a:solidFill>
           <a:ln/>
         </p:spPr>
+        <p:txBody>
+          <a:bodyPr/>
+          <a:p/>
+        </p:txBody>
       </p:sp>
       <p:sp>
         <p:nvSpPr>
@@ -11471,6 +11123,10 @@
             </a:outerShdw>
           </a:effectLst>
         </p:spPr>
+        <p:txBody>
+          <a:bodyPr/>
+          <a:p/>
+        </p:txBody>
       </p:sp>
       <p:sp>
         <p:nvSpPr>
@@ -11954,6 +11610,1488 @@
 </p:sld>
 </file>
 
+<file path=ppt/slides/slide27.xml><?xml version="1.0" encoding="utf-8"?>
+<p:sld xmlns:a="http://schemas.openxmlformats.org/drawingml/2006/main" xmlns:p="http://schemas.openxmlformats.org/presentationml/2006/main" xmlns:r="http://schemas.openxmlformats.org/officeDocument/2006/relationships">
+  <p:cSld>
+    <p:spTree>
+      <p:nvGrpSpPr>
+        <p:cNvPr id="1" name=""/>
+        <p:cNvGrpSpPr/>
+        <p:nvPr/>
+      </p:nvGrpSpPr>
+      <p:grpSpPr/>
+      <p:sp>
+        <p:nvSpPr>
+          <p:cNvPr id="2" name="Text 0"/>
+          <p:cNvSpPr/>
+          <p:nvPr/>
+        </p:nvSpPr>
+        <p:spPr>
+          <a:xfrm>
+            <a:off x="566928" y="329184"/>
+            <a:ext cx="10515600" cy="310896"/>
+          </a:xfrm>
+          <a:prstGeom prst="rect">
+            <a:avLst/>
+          </a:prstGeom>
+          <a:noFill/>
+          <a:ln/>
+        </p:spPr>
+        <p:txBody>
+          <a:bodyPr wrap="square" lIns="0" tIns="0" rIns="0" bIns="0" rtlCol="0" anchor="ctr"/>
+          <a:lstStyle/>
+          <a:p>
+            <a:pPr algn="l" indent="0" marL="0">
+              <a:buNone/>
+            </a:pPr>
+            <a:r>
+              <a:rPr lang="en-US" sz="1100" b="1" spc="150" kern="0" dirty="0">
+                <a:solidFill>
+                  <a:srgbClr val="00838F"/>
+                </a:solidFill>
+                <a:latin typeface="Calibri" pitchFamily="34" charset="0"/>
+                <a:ea typeface="Calibri" pitchFamily="34" charset="-122"/>
+                <a:cs typeface="Calibri" pitchFamily="34" charset="-120"/>
+              </a:rPr>
+              <a:t>MOLECULAR &amp; CYTOGENETICS   ·   BOARD REVIEW  ·  Q4</a:t>
+            </a:r>
+            <a:endParaRPr lang="en-US" sz="1100" dirty="0"/>
+          </a:p>
+        </p:txBody>
+      </p:sp>
+      <p:sp>
+        <p:nvSpPr>
+          <p:cNvPr id="3" name="Text 1"/>
+          <p:cNvSpPr/>
+          <p:nvPr/>
+        </p:nvSpPr>
+        <p:spPr>
+          <a:xfrm>
+            <a:off x="566928" y="713232"/>
+            <a:ext cx="11064240" cy="749808"/>
+          </a:xfrm>
+          <a:prstGeom prst="rect">
+            <a:avLst/>
+          </a:prstGeom>
+          <a:noFill/>
+          <a:ln/>
+        </p:spPr>
+        <p:txBody>
+          <a:bodyPr wrap="square" lIns="0" tIns="0" rIns="0" bIns="0" rtlCol="0" anchor="ctr"/>
+          <a:lstStyle/>
+          <a:p>
+            <a:pPr algn="l" indent="0" marL="0">
+              <a:buNone/>
+            </a:pPr>
+            <a:r>
+              <a:rPr lang="en-US" sz="2600" b="1" dirty="0">
+                <a:solidFill>
+                  <a:srgbClr val="0E3A5F"/>
+                </a:solidFill>
+                <a:latin typeface="Calibri" pitchFamily="34" charset="0"/>
+                <a:ea typeface="Calibri" pitchFamily="34" charset="-122"/>
+                <a:cs typeface="Calibri" pitchFamily="34" charset="-120"/>
+              </a:rPr>
+              <a:t>Board-Style Review</a:t>
+            </a:r>
+            <a:endParaRPr lang="en-US" sz="2600" dirty="0"/>
+          </a:p>
+        </p:txBody>
+      </p:sp>
+      <p:sp>
+        <p:nvSpPr>
+          <p:cNvPr id="4" name="Text 2"/>
+          <p:cNvSpPr/>
+          <p:nvPr/>
+        </p:nvSpPr>
+        <p:spPr>
+          <a:xfrm>
+            <a:off x="566928" y="1417320"/>
+            <a:ext cx="11057839" cy="914400"/>
+          </a:xfrm>
+          <a:prstGeom prst="rect">
+            <a:avLst/>
+          </a:prstGeom>
+          <a:noFill/>
+          <a:ln/>
+        </p:spPr>
+        <p:txBody>
+          <a:bodyPr wrap="square" lIns="0" tIns="0" rIns="0" bIns="0" rtlCol="0" anchor="t"/>
+          <a:lstStyle/>
+          <a:p>
+            <a:pPr algn="l" indent="0" marL="0">
+              <a:lnSpc>
+                <a:spcPct val="105000"/>
+              </a:lnSpc>
+              <a:buNone/>
+            </a:pPr>
+            <a:r>
+              <a:rPr lang="en-US" sz="1450" b="1" dirty="0">
+                <a:solidFill>
+                  <a:srgbClr val="1B2A38"/>
+                </a:solidFill>
+                <a:latin typeface="Calibri" pitchFamily="34" charset="0"/>
+                <a:ea typeface="Calibri" pitchFamily="34" charset="-122"/>
+                <a:cs typeface="Calibri" pitchFamily="34" charset="-120"/>
+              </a:rPr>
+              <a:t>The primary value of minimal residual disease (MRD) testing is to:</a:t>
+            </a:r>
+            <a:endParaRPr lang="en-US" sz="1450" dirty="0"/>
+          </a:p>
+        </p:txBody>
+      </p:sp>
+      <p:sp>
+        <p:nvSpPr>
+          <p:cNvPr id="5" name="Text 3"/>
+          <p:cNvSpPr/>
+          <p:nvPr/>
+        </p:nvSpPr>
+        <p:spPr>
+          <a:xfrm>
+            <a:off x="658368" y="2395728"/>
+            <a:ext cx="6192390" cy="3017520"/>
+          </a:xfrm>
+          <a:prstGeom prst="rect">
+            <a:avLst/>
+          </a:prstGeom>
+          <a:noFill/>
+          <a:ln/>
+        </p:spPr>
+        <p:txBody>
+          <a:bodyPr wrap="square" lIns="0" tIns="0" rIns="0" bIns="0" rtlCol="0" anchor="t"/>
+          <a:lstStyle/>
+          <a:p>
+            <a:pPr algn="l" indent="0" marL="0">
+              <a:spcAft>
+                <a:spcPts val="600"/>
+              </a:spcAft>
+              <a:buNone/>
+            </a:pPr>
+            <a:r>
+              <a:rPr lang="en-US" sz="1350" dirty="0">
+                <a:solidFill>
+                  <a:srgbClr val="33444F"/>
+                </a:solidFill>
+                <a:latin typeface="Calibri" pitchFamily="34" charset="0"/>
+                <a:ea typeface="Calibri" pitchFamily="34" charset="-122"/>
+                <a:cs typeface="Calibri" pitchFamily="34" charset="-120"/>
+              </a:rPr>
+              <a:t>A. Replace morphology</a:t>
+            </a:r>
+            <a:endParaRPr lang="en-US" sz="1350" dirty="0"/>
+          </a:p>
+          <a:p>
+            <a:pPr algn="l" indent="0" marL="0">
+              <a:spcAft>
+                <a:spcPts val="600"/>
+              </a:spcAft>
+              <a:buNone/>
+            </a:pPr>
+            <a:r>
+              <a:rPr lang="en-US" sz="1350" b="1" dirty="0">
+                <a:solidFill>
+                  <a:srgbClr val="005A63"/>
+                </a:solidFill>
+                <a:latin typeface="Calibri" pitchFamily="34" charset="0"/>
+                <a:ea typeface="Calibri" pitchFamily="34" charset="-122"/>
+                <a:cs typeface="Calibri" pitchFamily="34" charset="-120"/>
+              </a:rPr>
+              <a:t>B. Detect disease below morphologic resolution and predict relapse</a:t>
+            </a:r>
+            <a:endParaRPr lang="en-US" sz="1350" dirty="0"/>
+          </a:p>
+          <a:p>
+            <a:pPr algn="l" indent="0" marL="0">
+              <a:spcAft>
+                <a:spcPts val="600"/>
+              </a:spcAft>
+              <a:buNone/>
+            </a:pPr>
+            <a:r>
+              <a:rPr lang="en-US" sz="1350" dirty="0">
+                <a:solidFill>
+                  <a:srgbClr val="33444F"/>
+                </a:solidFill>
+                <a:latin typeface="Calibri" pitchFamily="34" charset="0"/>
+                <a:ea typeface="Calibri" pitchFamily="34" charset="-122"/>
+                <a:cs typeface="Calibri" pitchFamily="34" charset="-120"/>
+              </a:rPr>
+              <a:t>C. Diagnose at presentation only</a:t>
+            </a:r>
+            <a:endParaRPr lang="en-US" sz="1350" dirty="0"/>
+          </a:p>
+          <a:p>
+            <a:pPr algn="l" indent="0" marL="0">
+              <a:spcAft>
+                <a:spcPts val="600"/>
+              </a:spcAft>
+              <a:buNone/>
+            </a:pPr>
+            <a:r>
+              <a:rPr lang="en-US" sz="1350" dirty="0">
+                <a:solidFill>
+                  <a:srgbClr val="33444F"/>
+                </a:solidFill>
+                <a:latin typeface="Calibri" pitchFamily="34" charset="0"/>
+                <a:ea typeface="Calibri" pitchFamily="34" charset="-122"/>
+                <a:cs typeface="Calibri" pitchFamily="34" charset="-120"/>
+              </a:rPr>
+              <a:t>D. Eliminate cytogenetics</a:t>
+            </a:r>
+            <a:endParaRPr lang="en-US" sz="1350" dirty="0"/>
+          </a:p>
+          <a:p>
+            <a:pPr algn="l" indent="0" marL="0">
+              <a:spcAft>
+                <a:spcPts val="600"/>
+              </a:spcAft>
+              <a:buNone/>
+            </a:pPr>
+            <a:r>
+              <a:rPr lang="en-US" sz="1350" dirty="0">
+                <a:solidFill>
+                  <a:srgbClr val="33444F"/>
+                </a:solidFill>
+                <a:latin typeface="Calibri" pitchFamily="34" charset="0"/>
+                <a:ea typeface="Calibri" pitchFamily="34" charset="-122"/>
+                <a:cs typeface="Calibri" pitchFamily="34" charset="-120"/>
+              </a:rPr>
+              <a:t>E. Measure tumor purity</a:t>
+            </a:r>
+            <a:endParaRPr lang="en-US" sz="1350" dirty="0"/>
+          </a:p>
+        </p:txBody>
+      </p:sp>
+      <p:sp>
+        <p:nvSpPr>
+          <p:cNvPr id="6" name="Shape 4"/>
+          <p:cNvSpPr/>
+          <p:nvPr/>
+        </p:nvSpPr>
+        <p:spPr>
+          <a:xfrm>
+            <a:off x="7201632" y="2395728"/>
+            <a:ext cx="4423136" cy="3246120"/>
+          </a:xfrm>
+          <a:prstGeom prst="roundRect">
+            <a:avLst>
+              <a:gd name="adj" fmla="val 2535"/>
+            </a:avLst>
+          </a:prstGeom>
+          <a:solidFill>
+            <a:srgbClr val="E0F2F4"/>
+          </a:solidFill>
+          <a:ln/>
+          <a:effectLst>
+            <a:outerShdw sx="100000" sy="100000" kx="0" ky="0" algn="bl" rotWithShape="0" blurRad="88900" dist="25400" dir="5400000">
+              <a:srgbClr val="22303C">
+                <a:alpha val="12000"/>
+              </a:srgbClr>
+            </a:outerShdw>
+          </a:effectLst>
+        </p:spPr>
+        <p:txBody>
+          <a:bodyPr/>
+          <a:p/>
+        </p:txBody>
+      </p:sp>
+      <p:sp>
+        <p:nvSpPr>
+          <p:cNvPr id="7" name="Text 5"/>
+          <p:cNvSpPr/>
+          <p:nvPr/>
+        </p:nvSpPr>
+        <p:spPr>
+          <a:xfrm>
+            <a:off x="7439376" y="2578608"/>
+            <a:ext cx="3965936" cy="457200"/>
+          </a:xfrm>
+          <a:prstGeom prst="rect">
+            <a:avLst/>
+          </a:prstGeom>
+          <a:noFill/>
+          <a:ln/>
+        </p:spPr>
+        <p:txBody>
+          <a:bodyPr wrap="square" lIns="0" tIns="0" rIns="0" bIns="0" rtlCol="0" anchor="ctr"/>
+          <a:lstStyle/>
+          <a:p>
+            <a:pPr indent="0" marL="0">
+              <a:buNone/>
+            </a:pPr>
+            <a:r>
+              <a:rPr lang="en-US" sz="1500" b="1" dirty="0">
+                <a:solidFill>
+                  <a:srgbClr val="00838F"/>
+                </a:solidFill>
+                <a:latin typeface="Calibri" pitchFamily="34" charset="0"/>
+                <a:ea typeface="Calibri" pitchFamily="34" charset="-122"/>
+                <a:cs typeface="Calibri" pitchFamily="34" charset="-120"/>
+              </a:rPr>
+              <a:t>ANSWER  </a:t>
+            </a:r>
+            <a:pPr indent="0" marL="0">
+              <a:buNone/>
+            </a:pPr>
+            <a:r>
+              <a:rPr lang="en-US" sz="1500" b="1" dirty="0">
+                <a:solidFill>
+                  <a:srgbClr val="1B2A38"/>
+                </a:solidFill>
+                <a:latin typeface="Calibri" pitchFamily="34" charset="0"/>
+                <a:ea typeface="Calibri" pitchFamily="34" charset="-122"/>
+                <a:cs typeface="Calibri" pitchFamily="34" charset="-120"/>
+              </a:rPr>
+              <a:t>B — Detect sub-morphologic disease/relapse</a:t>
+            </a:r>
+            <a:endParaRPr lang="en-US" sz="1500" dirty="0"/>
+          </a:p>
+        </p:txBody>
+      </p:sp>
+      <p:sp>
+        <p:nvSpPr>
+          <p:cNvPr id="8" name="Text 6"/>
+          <p:cNvSpPr/>
+          <p:nvPr/>
+        </p:nvSpPr>
+        <p:spPr>
+          <a:xfrm>
+            <a:off x="7439376" y="3127248"/>
+            <a:ext cx="3947648" cy="2377440"/>
+          </a:xfrm>
+          <a:prstGeom prst="rect">
+            <a:avLst/>
+          </a:prstGeom>
+          <a:noFill/>
+          <a:ln/>
+        </p:spPr>
+        <p:txBody>
+          <a:bodyPr wrap="square" lIns="0" tIns="0" rIns="0" bIns="0" rtlCol="0" anchor="t"/>
+          <a:lstStyle/>
+          <a:p>
+            <a:pPr algn="l" indent="0" marL="0">
+              <a:lnSpc>
+                <a:spcPct val="108000"/>
+              </a:lnSpc>
+              <a:buNone/>
+            </a:pPr>
+            <a:r>
+              <a:rPr lang="en-US" sz="1250" dirty="0">
+                <a:solidFill>
+                  <a:srgbClr val="33444F"/>
+                </a:solidFill>
+                <a:latin typeface="Calibri" pitchFamily="34" charset="0"/>
+                <a:ea typeface="Calibri" pitchFamily="34" charset="-122"/>
+                <a:cs typeface="Calibri" pitchFamily="34" charset="-120"/>
+              </a:rPr>
+              <a:t>MRD quantifies residual disease beneath morphologic detection and can flag relapse earlier.</a:t>
+            </a:r>
+            <a:endParaRPr lang="en-US" sz="1250" dirty="0"/>
+          </a:p>
+        </p:txBody>
+      </p:sp>
+      <p:sp>
+        <p:nvSpPr>
+          <p:cNvPr id="9" name="Text 7"/>
+          <p:cNvSpPr/>
+          <p:nvPr/>
+        </p:nvSpPr>
+        <p:spPr>
+          <a:xfrm>
+            <a:off x="566928" y="6473952"/>
+            <a:ext cx="7772400" cy="274320"/>
+          </a:xfrm>
+          <a:prstGeom prst="rect">
+            <a:avLst/>
+          </a:prstGeom>
+          <a:noFill/>
+          <a:ln/>
+        </p:spPr>
+        <p:txBody>
+          <a:bodyPr wrap="square" lIns="0" tIns="0" rIns="0" bIns="0" rtlCol="0" anchor="ctr"/>
+          <a:lstStyle/>
+          <a:p>
+            <a:pPr algn="l" indent="0" marL="0">
+              <a:buNone/>
+            </a:pPr>
+            <a:r>
+              <a:rPr lang="en-US" sz="850" dirty="0">
+                <a:solidFill>
+                  <a:srgbClr val="9AA8B4"/>
+                </a:solidFill>
+                <a:latin typeface="Calibri" pitchFamily="34" charset="0"/>
+                <a:ea typeface="Calibri" pitchFamily="34" charset="-122"/>
+                <a:cs typeface="Calibri" pitchFamily="34" charset="-120"/>
+              </a:rPr>
+              <a:t>Makassed General Hospital  ·  Department of Laboratory Medicine</a:t>
+            </a:r>
+            <a:endParaRPr lang="en-US" sz="850" dirty="0"/>
+          </a:p>
+        </p:txBody>
+      </p:sp>
+      <p:sp>
+        <p:nvSpPr>
+          <p:cNvPr id="10" name="Text 8"/>
+          <p:cNvSpPr/>
+          <p:nvPr/>
+        </p:nvSpPr>
+        <p:spPr>
+          <a:xfrm>
+            <a:off x="9814255" y="6473952"/>
+            <a:ext cx="1828800" cy="274320"/>
+          </a:xfrm>
+          <a:prstGeom prst="rect">
+            <a:avLst/>
+          </a:prstGeom>
+          <a:noFill/>
+          <a:ln/>
+        </p:spPr>
+        <p:txBody>
+          <a:bodyPr wrap="square" lIns="0" tIns="0" rIns="0" bIns="0" rtlCol="0" anchor="ctr"/>
+          <a:lstStyle/>
+          <a:p>
+            <a:pPr algn="r" indent="0" marL="0">
+              <a:buNone/>
+            </a:pPr>
+            <a:r>
+              <a:rPr lang="en-US" sz="850" dirty="0">
+                <a:solidFill>
+                  <a:srgbClr val="9AA8B4"/>
+                </a:solidFill>
+                <a:latin typeface="Calibri" pitchFamily="34" charset="0"/>
+                <a:ea typeface="Calibri" pitchFamily="34" charset="-122"/>
+                <a:cs typeface="Calibri" pitchFamily="34" charset="-120"/>
+              </a:rPr>
+              <a:t>CP Lecture Series</a:t>
+            </a:r>
+            <a:pPr algn="r" indent="0" marL="0">
+              <a:buNone/>
+            </a:pPr>
+            <a:r>
+              <a:rPr lang="en-US" sz="850" dirty="0">
+                <a:solidFill>
+                  <a:srgbClr val="DCE4EC"/>
+                </a:solidFill>
+                <a:latin typeface="Calibri" pitchFamily="34" charset="0"/>
+                <a:ea typeface="Calibri" pitchFamily="34" charset="-122"/>
+                <a:cs typeface="Calibri" pitchFamily="34" charset="-120"/>
+              </a:rPr>
+              <a:t>   ·   </a:t>
+            </a:r>
+            <a:pPr algn="r" indent="0" marL="0">
+              <a:buNone/>
+            </a:pPr>
+            <a:r>
+              <a:rPr lang="en-US" sz="850" b="1" dirty="0">
+                <a:solidFill>
+                  <a:srgbClr val="00838F"/>
+                </a:solidFill>
+                <a:latin typeface="Calibri" pitchFamily="34" charset="0"/>
+                <a:ea typeface="Calibri" pitchFamily="34" charset="-122"/>
+                <a:cs typeface="Calibri" pitchFamily="34" charset="-120"/>
+              </a:rPr>
+              <a:t>21</a:t>
+            </a:r>
+            <a:endParaRPr lang="en-US" sz="850" dirty="0"/>
+          </a:p>
+        </p:txBody>
+      </p:sp>
+    </p:spTree>
+  </p:cSld>
+  <p:clrMapOvr>
+    <a:masterClrMapping/>
+  </p:clrMapOvr>
+</p:sld>
+</file>
+
+<file path=ppt/slides/slide28.xml><?xml version="1.0" encoding="utf-8"?>
+<p:sld xmlns:a="http://schemas.openxmlformats.org/drawingml/2006/main" xmlns:p="http://schemas.openxmlformats.org/presentationml/2006/main" xmlns:r="http://schemas.openxmlformats.org/officeDocument/2006/relationships">
+  <p:cSld>
+    <p:spTree>
+      <p:nvGrpSpPr>
+        <p:cNvPr id="1" name=""/>
+        <p:cNvGrpSpPr/>
+        <p:nvPr/>
+      </p:nvGrpSpPr>
+      <p:grpSpPr/>
+      <p:sp>
+        <p:nvSpPr>
+          <p:cNvPr id="2" name="Text 0"/>
+          <p:cNvSpPr/>
+          <p:nvPr/>
+        </p:nvSpPr>
+        <p:spPr>
+          <a:xfrm>
+            <a:off x="566928" y="329184"/>
+            <a:ext cx="10515600" cy="310896"/>
+          </a:xfrm>
+          <a:prstGeom prst="rect">
+            <a:avLst/>
+          </a:prstGeom>
+          <a:noFill/>
+          <a:ln/>
+        </p:spPr>
+        <p:txBody>
+          <a:bodyPr wrap="square" lIns="0" tIns="0" rIns="0" bIns="0" rtlCol="0" anchor="ctr"/>
+          <a:lstStyle/>
+          <a:p>
+            <a:pPr algn="l" indent="0" marL="0">
+              <a:buNone/>
+            </a:pPr>
+            <a:r>
+              <a:rPr lang="en-US" sz="1100" b="1" spc="150" kern="0" dirty="0">
+                <a:solidFill>
+                  <a:srgbClr val="00838F"/>
+                </a:solidFill>
+                <a:latin typeface="Calibri" pitchFamily="34" charset="0"/>
+                <a:ea typeface="Calibri" pitchFamily="34" charset="-122"/>
+                <a:cs typeface="Calibri" pitchFamily="34" charset="-120"/>
+              </a:rPr>
+              <a:t>MOLECULAR &amp; CYTOGENETICS   ·   BOARD REVIEW  ·  Q3</a:t>
+            </a:r>
+            <a:endParaRPr lang="en-US" sz="1100" dirty="0"/>
+          </a:p>
+        </p:txBody>
+      </p:sp>
+      <p:sp>
+        <p:nvSpPr>
+          <p:cNvPr id="3" name="Text 1"/>
+          <p:cNvSpPr/>
+          <p:nvPr/>
+        </p:nvSpPr>
+        <p:spPr>
+          <a:xfrm>
+            <a:off x="566928" y="713232"/>
+            <a:ext cx="11064240" cy="749808"/>
+          </a:xfrm>
+          <a:prstGeom prst="rect">
+            <a:avLst/>
+          </a:prstGeom>
+          <a:noFill/>
+          <a:ln/>
+        </p:spPr>
+        <p:txBody>
+          <a:bodyPr wrap="square" lIns="0" tIns="0" rIns="0" bIns="0" rtlCol="0" anchor="ctr"/>
+          <a:lstStyle/>
+          <a:p>
+            <a:pPr algn="l" indent="0" marL="0">
+              <a:buNone/>
+            </a:pPr>
+            <a:r>
+              <a:rPr lang="en-US" sz="2600" b="1" dirty="0">
+                <a:solidFill>
+                  <a:srgbClr val="0E3A5F"/>
+                </a:solidFill>
+                <a:latin typeface="Calibri" pitchFamily="34" charset="0"/>
+                <a:ea typeface="Calibri" pitchFamily="34" charset="-122"/>
+                <a:cs typeface="Calibri" pitchFamily="34" charset="-120"/>
+              </a:rPr>
+              <a:t>Board-Style Review</a:t>
+            </a:r>
+            <a:endParaRPr lang="en-US" sz="2600" dirty="0"/>
+          </a:p>
+        </p:txBody>
+      </p:sp>
+      <p:sp>
+        <p:nvSpPr>
+          <p:cNvPr id="4" name="Text 2"/>
+          <p:cNvSpPr/>
+          <p:nvPr/>
+        </p:nvSpPr>
+        <p:spPr>
+          <a:xfrm>
+            <a:off x="566928" y="1417320"/>
+            <a:ext cx="11057839" cy="914400"/>
+          </a:xfrm>
+          <a:prstGeom prst="rect">
+            <a:avLst/>
+          </a:prstGeom>
+          <a:noFill/>
+          <a:ln/>
+        </p:spPr>
+        <p:txBody>
+          <a:bodyPr wrap="square" lIns="0" tIns="0" rIns="0" bIns="0" rtlCol="0" anchor="t"/>
+          <a:lstStyle/>
+          <a:p>
+            <a:pPr algn="l" indent="0" marL="0">
+              <a:lnSpc>
+                <a:spcPct val="105000"/>
+              </a:lnSpc>
+              <a:buNone/>
+            </a:pPr>
+            <a:r>
+              <a:rPr lang="en-US" sz="1450" b="1" dirty="0">
+                <a:solidFill>
+                  <a:srgbClr val="1B2A38"/>
+                </a:solidFill>
+                <a:latin typeface="Calibri" pitchFamily="34" charset="0"/>
+                <a:ea typeface="Calibri" pitchFamily="34" charset="-122"/>
+                <a:cs typeface="Calibri" pitchFamily="34" charset="-120"/>
+              </a:rPr>
+              <a:t>A balanced translocation creating a fusion is best detected by:</a:t>
+            </a:r>
+            <a:endParaRPr lang="en-US" sz="1450" dirty="0"/>
+          </a:p>
+        </p:txBody>
+      </p:sp>
+      <p:sp>
+        <p:nvSpPr>
+          <p:cNvPr id="5" name="Text 3"/>
+          <p:cNvSpPr/>
+          <p:nvPr/>
+        </p:nvSpPr>
+        <p:spPr>
+          <a:xfrm>
+            <a:off x="658368" y="2395728"/>
+            <a:ext cx="6192390" cy="3017520"/>
+          </a:xfrm>
+          <a:prstGeom prst="rect">
+            <a:avLst/>
+          </a:prstGeom>
+          <a:noFill/>
+          <a:ln/>
+        </p:spPr>
+        <p:txBody>
+          <a:bodyPr wrap="square" lIns="0" tIns="0" rIns="0" bIns="0" rtlCol="0" anchor="t"/>
+          <a:lstStyle/>
+          <a:p>
+            <a:pPr algn="l" indent="0" marL="0">
+              <a:spcAft>
+                <a:spcPts val="600"/>
+              </a:spcAft>
+              <a:buNone/>
+            </a:pPr>
+            <a:r>
+              <a:rPr lang="en-US" sz="1350" dirty="0">
+                <a:solidFill>
+                  <a:srgbClr val="33444F"/>
+                </a:solidFill>
+                <a:latin typeface="Calibri" pitchFamily="34" charset="0"/>
+                <a:ea typeface="Calibri" pitchFamily="34" charset="-122"/>
+                <a:cs typeface="Calibri" pitchFamily="34" charset="-120"/>
+              </a:rPr>
+              <a:t>A. Chromosomal microarray</a:t>
+            </a:r>
+            <a:endParaRPr lang="en-US" sz="1350" dirty="0"/>
+          </a:p>
+          <a:p>
+            <a:pPr algn="l" indent="0" marL="0">
+              <a:spcAft>
+                <a:spcPts val="600"/>
+              </a:spcAft>
+              <a:buNone/>
+            </a:pPr>
+            <a:r>
+              <a:rPr lang="en-US" sz="1350" b="1" dirty="0">
+                <a:solidFill>
+                  <a:srgbClr val="005A63"/>
+                </a:solidFill>
+                <a:latin typeface="Calibri" pitchFamily="34" charset="0"/>
+                <a:ea typeface="Calibri" pitchFamily="34" charset="-122"/>
+                <a:cs typeface="Calibri" pitchFamily="34" charset="-120"/>
+              </a:rPr>
+              <a:t>B. FISH break-apart or RT-PCR</a:t>
+            </a:r>
+            <a:endParaRPr lang="en-US" sz="1350" dirty="0"/>
+          </a:p>
+          <a:p>
+            <a:pPr algn="l" indent="0" marL="0">
+              <a:spcAft>
+                <a:spcPts val="600"/>
+              </a:spcAft>
+              <a:buNone/>
+            </a:pPr>
+            <a:r>
+              <a:rPr lang="en-US" sz="1350" dirty="0">
+                <a:solidFill>
+                  <a:srgbClr val="33444F"/>
+                </a:solidFill>
+                <a:latin typeface="Calibri" pitchFamily="34" charset="0"/>
+                <a:ea typeface="Calibri" pitchFamily="34" charset="-122"/>
+                <a:cs typeface="Calibri" pitchFamily="34" charset="-120"/>
+              </a:rPr>
+              <a:t>C. Total protein</a:t>
+            </a:r>
+            <a:endParaRPr lang="en-US" sz="1350" dirty="0"/>
+          </a:p>
+          <a:p>
+            <a:pPr algn="l" indent="0" marL="0">
+              <a:spcAft>
+                <a:spcPts val="600"/>
+              </a:spcAft>
+              <a:buNone/>
+            </a:pPr>
+            <a:r>
+              <a:rPr lang="en-US" sz="1350" dirty="0">
+                <a:solidFill>
+                  <a:srgbClr val="33444F"/>
+                </a:solidFill>
+                <a:latin typeface="Calibri" pitchFamily="34" charset="0"/>
+                <a:ea typeface="Calibri" pitchFamily="34" charset="-122"/>
+                <a:cs typeface="Calibri" pitchFamily="34" charset="-120"/>
+              </a:rPr>
+              <a:t>D. Karyotype only when cryptic</a:t>
+            </a:r>
+            <a:endParaRPr lang="en-US" sz="1350" dirty="0"/>
+          </a:p>
+          <a:p>
+            <a:pPr algn="l" indent="0" marL="0">
+              <a:spcAft>
+                <a:spcPts val="600"/>
+              </a:spcAft>
+              <a:buNone/>
+            </a:pPr>
+            <a:r>
+              <a:rPr lang="en-US" sz="1350" dirty="0">
+                <a:solidFill>
+                  <a:srgbClr val="33444F"/>
+                </a:solidFill>
+                <a:latin typeface="Calibri" pitchFamily="34" charset="0"/>
+                <a:ea typeface="Calibri" pitchFamily="34" charset="-122"/>
+                <a:cs typeface="Calibri" pitchFamily="34" charset="-120"/>
+              </a:rPr>
+              <a:t>E. Flow cytometry</a:t>
+            </a:r>
+            <a:endParaRPr lang="en-US" sz="1350" dirty="0"/>
+          </a:p>
+        </p:txBody>
+      </p:sp>
+      <p:sp>
+        <p:nvSpPr>
+          <p:cNvPr id="6" name="Shape 4"/>
+          <p:cNvSpPr/>
+          <p:nvPr/>
+        </p:nvSpPr>
+        <p:spPr>
+          <a:xfrm>
+            <a:off x="7201632" y="2395728"/>
+            <a:ext cx="4423136" cy="3246120"/>
+          </a:xfrm>
+          <a:prstGeom prst="roundRect">
+            <a:avLst>
+              <a:gd name="adj" fmla="val 2535"/>
+            </a:avLst>
+          </a:prstGeom>
+          <a:solidFill>
+            <a:srgbClr val="E0F2F4"/>
+          </a:solidFill>
+          <a:ln/>
+          <a:effectLst>
+            <a:outerShdw sx="100000" sy="100000" kx="0" ky="0" algn="bl" rotWithShape="0" blurRad="88900" dist="25400" dir="5400000">
+              <a:srgbClr val="22303C">
+                <a:alpha val="12000"/>
+              </a:srgbClr>
+            </a:outerShdw>
+          </a:effectLst>
+        </p:spPr>
+        <p:txBody>
+          <a:bodyPr/>
+          <a:p/>
+        </p:txBody>
+      </p:sp>
+      <p:sp>
+        <p:nvSpPr>
+          <p:cNvPr id="7" name="Text 5"/>
+          <p:cNvSpPr/>
+          <p:nvPr/>
+        </p:nvSpPr>
+        <p:spPr>
+          <a:xfrm>
+            <a:off x="7439376" y="2578608"/>
+            <a:ext cx="3965936" cy="457200"/>
+          </a:xfrm>
+          <a:prstGeom prst="rect">
+            <a:avLst/>
+          </a:prstGeom>
+          <a:noFill/>
+          <a:ln/>
+        </p:spPr>
+        <p:txBody>
+          <a:bodyPr wrap="square" lIns="0" tIns="0" rIns="0" bIns="0" rtlCol="0" anchor="ctr"/>
+          <a:lstStyle/>
+          <a:p>
+            <a:pPr indent="0" marL="0">
+              <a:buNone/>
+            </a:pPr>
+            <a:r>
+              <a:rPr lang="en-US" sz="1500" b="1" dirty="0">
+                <a:solidFill>
+                  <a:srgbClr val="00838F"/>
+                </a:solidFill>
+                <a:latin typeface="Calibri" pitchFamily="34" charset="0"/>
+                <a:ea typeface="Calibri" pitchFamily="34" charset="-122"/>
+                <a:cs typeface="Calibri" pitchFamily="34" charset="-120"/>
+              </a:rPr>
+              <a:t>ANSWER  </a:t>
+            </a:r>
+            <a:pPr indent="0" marL="0">
+              <a:buNone/>
+            </a:pPr>
+            <a:r>
+              <a:rPr lang="en-US" sz="1500" b="1" dirty="0">
+                <a:solidFill>
+                  <a:srgbClr val="1B2A38"/>
+                </a:solidFill>
+                <a:latin typeface="Calibri" pitchFamily="34" charset="0"/>
+                <a:ea typeface="Calibri" pitchFamily="34" charset="-122"/>
+                <a:cs typeface="Calibri" pitchFamily="34" charset="-120"/>
+              </a:rPr>
+              <a:t>B — FISH/RT-PCR</a:t>
+            </a:r>
+            <a:endParaRPr lang="en-US" sz="1500" dirty="0"/>
+          </a:p>
+        </p:txBody>
+      </p:sp>
+      <p:sp>
+        <p:nvSpPr>
+          <p:cNvPr id="8" name="Text 6"/>
+          <p:cNvSpPr/>
+          <p:nvPr/>
+        </p:nvSpPr>
+        <p:spPr>
+          <a:xfrm>
+            <a:off x="7439376" y="3127248"/>
+            <a:ext cx="3947648" cy="2377440"/>
+          </a:xfrm>
+          <a:prstGeom prst="rect">
+            <a:avLst/>
+          </a:prstGeom>
+          <a:noFill/>
+          <a:ln/>
+        </p:spPr>
+        <p:txBody>
+          <a:bodyPr wrap="square" lIns="0" tIns="0" rIns="0" bIns="0" rtlCol="0" anchor="t"/>
+          <a:lstStyle/>
+          <a:p>
+            <a:pPr algn="l" indent="0" marL="0">
+              <a:lnSpc>
+                <a:spcPct val="108000"/>
+              </a:lnSpc>
+              <a:buNone/>
+            </a:pPr>
+            <a:r>
+              <a:rPr lang="en-US" sz="1250" dirty="0">
+                <a:solidFill>
+                  <a:srgbClr val="33444F"/>
+                </a:solidFill>
+                <a:latin typeface="Calibri" pitchFamily="34" charset="0"/>
+                <a:ea typeface="Calibri" pitchFamily="34" charset="-122"/>
+                <a:cs typeface="Calibri" pitchFamily="34" charset="-120"/>
+              </a:rPr>
+              <a:t>Balanced fusions have no copy-number change (missed by arrays); FISH or RT-PCR detect them directly.</a:t>
+            </a:r>
+            <a:endParaRPr lang="en-US" sz="1250" dirty="0"/>
+          </a:p>
+        </p:txBody>
+      </p:sp>
+      <p:sp>
+        <p:nvSpPr>
+          <p:cNvPr id="9" name="Text 7"/>
+          <p:cNvSpPr/>
+          <p:nvPr/>
+        </p:nvSpPr>
+        <p:spPr>
+          <a:xfrm>
+            <a:off x="566928" y="6473952"/>
+            <a:ext cx="7772400" cy="274320"/>
+          </a:xfrm>
+          <a:prstGeom prst="rect">
+            <a:avLst/>
+          </a:prstGeom>
+          <a:noFill/>
+          <a:ln/>
+        </p:spPr>
+        <p:txBody>
+          <a:bodyPr wrap="square" lIns="0" tIns="0" rIns="0" bIns="0" rtlCol="0" anchor="ctr"/>
+          <a:lstStyle/>
+          <a:p>
+            <a:pPr algn="l" indent="0" marL="0">
+              <a:buNone/>
+            </a:pPr>
+            <a:r>
+              <a:rPr lang="en-US" sz="850" dirty="0">
+                <a:solidFill>
+                  <a:srgbClr val="9AA8B4"/>
+                </a:solidFill>
+                <a:latin typeface="Calibri" pitchFamily="34" charset="0"/>
+                <a:ea typeface="Calibri" pitchFamily="34" charset="-122"/>
+                <a:cs typeface="Calibri" pitchFamily="34" charset="-120"/>
+              </a:rPr>
+              <a:t>Makassed General Hospital  ·  Department of Laboratory Medicine</a:t>
+            </a:r>
+            <a:endParaRPr lang="en-US" sz="850" dirty="0"/>
+          </a:p>
+        </p:txBody>
+      </p:sp>
+      <p:sp>
+        <p:nvSpPr>
+          <p:cNvPr id="10" name="Text 8"/>
+          <p:cNvSpPr/>
+          <p:nvPr/>
+        </p:nvSpPr>
+        <p:spPr>
+          <a:xfrm>
+            <a:off x="9814255" y="6473952"/>
+            <a:ext cx="1828800" cy="274320"/>
+          </a:xfrm>
+          <a:prstGeom prst="rect">
+            <a:avLst/>
+          </a:prstGeom>
+          <a:noFill/>
+          <a:ln/>
+        </p:spPr>
+        <p:txBody>
+          <a:bodyPr wrap="square" lIns="0" tIns="0" rIns="0" bIns="0" rtlCol="0" anchor="ctr"/>
+          <a:lstStyle/>
+          <a:p>
+            <a:pPr algn="r" indent="0" marL="0">
+              <a:buNone/>
+            </a:pPr>
+            <a:r>
+              <a:rPr lang="en-US" sz="850" dirty="0">
+                <a:solidFill>
+                  <a:srgbClr val="9AA8B4"/>
+                </a:solidFill>
+                <a:latin typeface="Calibri" pitchFamily="34" charset="0"/>
+                <a:ea typeface="Calibri" pitchFamily="34" charset="-122"/>
+                <a:cs typeface="Calibri" pitchFamily="34" charset="-120"/>
+              </a:rPr>
+              <a:t>CP Lecture Series</a:t>
+            </a:r>
+            <a:pPr algn="r" indent="0" marL="0">
+              <a:buNone/>
+            </a:pPr>
+            <a:r>
+              <a:rPr lang="en-US" sz="850" dirty="0">
+                <a:solidFill>
+                  <a:srgbClr val="DCE4EC"/>
+                </a:solidFill>
+                <a:latin typeface="Calibri" pitchFamily="34" charset="0"/>
+                <a:ea typeface="Calibri" pitchFamily="34" charset="-122"/>
+                <a:cs typeface="Calibri" pitchFamily="34" charset="-120"/>
+              </a:rPr>
+              <a:t>   ·   </a:t>
+            </a:r>
+            <a:pPr algn="r" indent="0" marL="0">
+              <a:buNone/>
+            </a:pPr>
+            <a:r>
+              <a:rPr lang="en-US" sz="850" b="1" dirty="0">
+                <a:solidFill>
+                  <a:srgbClr val="00838F"/>
+                </a:solidFill>
+                <a:latin typeface="Calibri" pitchFamily="34" charset="0"/>
+                <a:ea typeface="Calibri" pitchFamily="34" charset="-122"/>
+                <a:cs typeface="Calibri" pitchFamily="34" charset="-120"/>
+              </a:rPr>
+              <a:t>20</a:t>
+            </a:r>
+            <a:endParaRPr lang="en-US" sz="850" dirty="0"/>
+          </a:p>
+        </p:txBody>
+      </p:sp>
+    </p:spTree>
+  </p:cSld>
+  <p:clrMapOvr>
+    <a:masterClrMapping/>
+  </p:clrMapOvr>
+</p:sld>
+</file>
+
+<file path=ppt/slides/slide29.xml><?xml version="1.0" encoding="utf-8"?>
+<p:sld xmlns:a="http://schemas.openxmlformats.org/drawingml/2006/main" xmlns:p="http://schemas.openxmlformats.org/presentationml/2006/main" xmlns:r="http://schemas.openxmlformats.org/officeDocument/2006/relationships">
+  <p:cSld>
+    <p:spTree>
+      <p:nvGrpSpPr>
+        <p:cNvPr id="1" name=""/>
+        <p:cNvGrpSpPr/>
+        <p:nvPr/>
+      </p:nvGrpSpPr>
+      <p:grpSpPr/>
+      <p:sp>
+        <p:nvSpPr>
+          <p:cNvPr id="2" name="Text 0"/>
+          <p:cNvSpPr/>
+          <p:nvPr/>
+        </p:nvSpPr>
+        <p:spPr>
+          <a:xfrm>
+            <a:off x="566928" y="329184"/>
+            <a:ext cx="10515600" cy="310896"/>
+          </a:xfrm>
+          <a:prstGeom prst="rect">
+            <a:avLst/>
+          </a:prstGeom>
+          <a:noFill/>
+          <a:ln/>
+        </p:spPr>
+        <p:txBody>
+          <a:bodyPr wrap="square" lIns="0" tIns="0" rIns="0" bIns="0" rtlCol="0" anchor="ctr"/>
+          <a:lstStyle/>
+          <a:p>
+            <a:pPr algn="l" indent="0" marL="0">
+              <a:buNone/>
+            </a:pPr>
+            <a:r>
+              <a:rPr lang="en-US" sz="1100" b="1" spc="150" kern="0" dirty="0">
+                <a:solidFill>
+                  <a:srgbClr val="00838F"/>
+                </a:solidFill>
+                <a:latin typeface="Calibri" pitchFamily="34" charset="0"/>
+                <a:ea typeface="Calibri" pitchFamily="34" charset="-122"/>
+                <a:cs typeface="Calibri" pitchFamily="34" charset="-120"/>
+              </a:rPr>
+              <a:t>MOLECULAR &amp; CYTOGENETICS   ·   BOARD REVIEW  ·  Q2</a:t>
+            </a:r>
+            <a:endParaRPr lang="en-US" sz="1100" dirty="0"/>
+          </a:p>
+        </p:txBody>
+      </p:sp>
+      <p:sp>
+        <p:nvSpPr>
+          <p:cNvPr id="3" name="Text 1"/>
+          <p:cNvSpPr/>
+          <p:nvPr/>
+        </p:nvSpPr>
+        <p:spPr>
+          <a:xfrm>
+            <a:off x="566928" y="713232"/>
+            <a:ext cx="11064240" cy="749808"/>
+          </a:xfrm>
+          <a:prstGeom prst="rect">
+            <a:avLst/>
+          </a:prstGeom>
+          <a:noFill/>
+          <a:ln/>
+        </p:spPr>
+        <p:txBody>
+          <a:bodyPr wrap="square" lIns="0" tIns="0" rIns="0" bIns="0" rtlCol="0" anchor="ctr"/>
+          <a:lstStyle/>
+          <a:p>
+            <a:pPr algn="l" indent="0" marL="0">
+              <a:buNone/>
+            </a:pPr>
+            <a:r>
+              <a:rPr lang="en-US" sz="2600" b="1" dirty="0">
+                <a:solidFill>
+                  <a:srgbClr val="0E3A5F"/>
+                </a:solidFill>
+                <a:latin typeface="Calibri" pitchFamily="34" charset="0"/>
+                <a:ea typeface="Calibri" pitchFamily="34" charset="-122"/>
+                <a:cs typeface="Calibri" pitchFamily="34" charset="-120"/>
+              </a:rPr>
+              <a:t>Board-Style Review</a:t>
+            </a:r>
+            <a:endParaRPr lang="en-US" sz="2600" dirty="0"/>
+          </a:p>
+        </p:txBody>
+      </p:sp>
+      <p:sp>
+        <p:nvSpPr>
+          <p:cNvPr id="4" name="Text 2"/>
+          <p:cNvSpPr/>
+          <p:nvPr/>
+        </p:nvSpPr>
+        <p:spPr>
+          <a:xfrm>
+            <a:off x="566928" y="1417320"/>
+            <a:ext cx="11057839" cy="914400"/>
+          </a:xfrm>
+          <a:prstGeom prst="rect">
+            <a:avLst/>
+          </a:prstGeom>
+          <a:noFill/>
+          <a:ln/>
+        </p:spPr>
+        <p:txBody>
+          <a:bodyPr wrap="square" lIns="0" tIns="0" rIns="0" bIns="0" rtlCol="0" anchor="t"/>
+          <a:lstStyle/>
+          <a:p>
+            <a:pPr algn="l" indent="0" marL="0">
+              <a:lnSpc>
+                <a:spcPct val="105000"/>
+              </a:lnSpc>
+              <a:buNone/>
+            </a:pPr>
+            <a:r>
+              <a:rPr lang="en-US" sz="1450" b="1" dirty="0">
+                <a:solidFill>
+                  <a:srgbClr val="1B2A38"/>
+                </a:solidFill>
+                <a:latin typeface="Calibri" pitchFamily="34" charset="0"/>
+                <a:ea typeface="Calibri" pitchFamily="34" charset="-122"/>
+                <a:cs typeface="Calibri" pitchFamily="34" charset="-120"/>
+              </a:rPr>
+              <a:t>Which finding is a hematologic emergency requiring immediate action?</a:t>
+            </a:r>
+            <a:endParaRPr lang="en-US" sz="1450" dirty="0"/>
+          </a:p>
+        </p:txBody>
+      </p:sp>
+      <p:sp>
+        <p:nvSpPr>
+          <p:cNvPr id="5" name="Text 3"/>
+          <p:cNvSpPr/>
+          <p:nvPr/>
+        </p:nvSpPr>
+        <p:spPr>
+          <a:xfrm>
+            <a:off x="658368" y="2395728"/>
+            <a:ext cx="6192390" cy="3017520"/>
+          </a:xfrm>
+          <a:prstGeom prst="rect">
+            <a:avLst/>
+          </a:prstGeom>
+          <a:noFill/>
+          <a:ln/>
+        </p:spPr>
+        <p:txBody>
+          <a:bodyPr wrap="square" lIns="0" tIns="0" rIns="0" bIns="0" rtlCol="0" anchor="t"/>
+          <a:lstStyle/>
+          <a:p>
+            <a:pPr algn="l" indent="0" marL="0">
+              <a:spcAft>
+                <a:spcPts val="600"/>
+              </a:spcAft>
+              <a:buNone/>
+            </a:pPr>
+            <a:r>
+              <a:rPr lang="en-US" sz="1350" dirty="0">
+                <a:solidFill>
+                  <a:srgbClr val="33444F"/>
+                </a:solidFill>
+                <a:latin typeface="Calibri" pitchFamily="34" charset="0"/>
+                <a:ea typeface="Calibri" pitchFamily="34" charset="-122"/>
+                <a:cs typeface="Calibri" pitchFamily="34" charset="-120"/>
+              </a:rPr>
+              <a:t>A. JAK2 V617F</a:t>
+            </a:r>
+            <a:endParaRPr lang="en-US" sz="1350" dirty="0"/>
+          </a:p>
+          <a:p>
+            <a:pPr algn="l" indent="0" marL="0">
+              <a:spcAft>
+                <a:spcPts val="600"/>
+              </a:spcAft>
+              <a:buNone/>
+            </a:pPr>
+            <a:r>
+              <a:rPr lang="en-US" sz="1350" b="1" dirty="0">
+                <a:solidFill>
+                  <a:srgbClr val="005A63"/>
+                </a:solidFill>
+                <a:latin typeface="Calibri" pitchFamily="34" charset="0"/>
+                <a:ea typeface="Calibri" pitchFamily="34" charset="-122"/>
+                <a:cs typeface="Calibri" pitchFamily="34" charset="-120"/>
+              </a:rPr>
+              <a:t>B. PML-RARA (APL)</a:t>
+            </a:r>
+            <a:endParaRPr lang="en-US" sz="1350" dirty="0"/>
+          </a:p>
+          <a:p>
+            <a:pPr algn="l" indent="0" marL="0">
+              <a:spcAft>
+                <a:spcPts val="600"/>
+              </a:spcAft>
+              <a:buNone/>
+            </a:pPr>
+            <a:r>
+              <a:rPr lang="en-US" sz="1350" dirty="0">
+                <a:solidFill>
+                  <a:srgbClr val="33444F"/>
+                </a:solidFill>
+                <a:latin typeface="Calibri" pitchFamily="34" charset="0"/>
+                <a:ea typeface="Calibri" pitchFamily="34" charset="-122"/>
+                <a:cs typeface="Calibri" pitchFamily="34" charset="-120"/>
+              </a:rPr>
+              <a:t>C. Isolated VUS</a:t>
+            </a:r>
+            <a:endParaRPr lang="en-US" sz="1350" dirty="0"/>
+          </a:p>
+          <a:p>
+            <a:pPr algn="l" indent="0" marL="0">
+              <a:spcAft>
+                <a:spcPts val="600"/>
+              </a:spcAft>
+              <a:buNone/>
+            </a:pPr>
+            <a:r>
+              <a:rPr lang="en-US" sz="1350" dirty="0">
+                <a:solidFill>
+                  <a:srgbClr val="33444F"/>
+                </a:solidFill>
+                <a:latin typeface="Calibri" pitchFamily="34" charset="0"/>
+                <a:ea typeface="Calibri" pitchFamily="34" charset="-122"/>
+                <a:cs typeface="Calibri" pitchFamily="34" charset="-120"/>
+              </a:rPr>
+              <a:t>D. IGH rearrangement</a:t>
+            </a:r>
+            <a:endParaRPr lang="en-US" sz="1350" dirty="0"/>
+          </a:p>
+          <a:p>
+            <a:pPr algn="l" indent="0" marL="0">
+              <a:spcAft>
+                <a:spcPts val="600"/>
+              </a:spcAft>
+              <a:buNone/>
+            </a:pPr>
+            <a:r>
+              <a:rPr lang="en-US" sz="1350" dirty="0">
+                <a:solidFill>
+                  <a:srgbClr val="33444F"/>
+                </a:solidFill>
+                <a:latin typeface="Calibri" pitchFamily="34" charset="0"/>
+                <a:ea typeface="Calibri" pitchFamily="34" charset="-122"/>
+                <a:cs typeface="Calibri" pitchFamily="34" charset="-120"/>
+              </a:rPr>
+              <a:t>E. Normal karyotype</a:t>
+            </a:r>
+            <a:endParaRPr lang="en-US" sz="1350" dirty="0"/>
+          </a:p>
+        </p:txBody>
+      </p:sp>
+      <p:sp>
+        <p:nvSpPr>
+          <p:cNvPr id="6" name="Shape 4"/>
+          <p:cNvSpPr/>
+          <p:nvPr/>
+        </p:nvSpPr>
+        <p:spPr>
+          <a:xfrm>
+            <a:off x="7201632" y="2395728"/>
+            <a:ext cx="4423136" cy="3246120"/>
+          </a:xfrm>
+          <a:prstGeom prst="roundRect">
+            <a:avLst>
+              <a:gd name="adj" fmla="val 2535"/>
+            </a:avLst>
+          </a:prstGeom>
+          <a:solidFill>
+            <a:srgbClr val="E0F2F4"/>
+          </a:solidFill>
+          <a:ln/>
+          <a:effectLst>
+            <a:outerShdw sx="100000" sy="100000" kx="0" ky="0" algn="bl" rotWithShape="0" blurRad="88900" dist="25400" dir="5400000">
+              <a:srgbClr val="22303C">
+                <a:alpha val="12000"/>
+              </a:srgbClr>
+            </a:outerShdw>
+          </a:effectLst>
+        </p:spPr>
+        <p:txBody>
+          <a:bodyPr/>
+          <a:p/>
+        </p:txBody>
+      </p:sp>
+      <p:sp>
+        <p:nvSpPr>
+          <p:cNvPr id="7" name="Text 5"/>
+          <p:cNvSpPr/>
+          <p:nvPr/>
+        </p:nvSpPr>
+        <p:spPr>
+          <a:xfrm>
+            <a:off x="7439376" y="2578608"/>
+            <a:ext cx="3965936" cy="457200"/>
+          </a:xfrm>
+          <a:prstGeom prst="rect">
+            <a:avLst/>
+          </a:prstGeom>
+          <a:noFill/>
+          <a:ln/>
+        </p:spPr>
+        <p:txBody>
+          <a:bodyPr wrap="square" lIns="0" tIns="0" rIns="0" bIns="0" rtlCol="0" anchor="ctr"/>
+          <a:lstStyle/>
+          <a:p>
+            <a:pPr indent="0" marL="0">
+              <a:buNone/>
+            </a:pPr>
+            <a:r>
+              <a:rPr lang="en-US" sz="1500" b="1" dirty="0">
+                <a:solidFill>
+                  <a:srgbClr val="00838F"/>
+                </a:solidFill>
+                <a:latin typeface="Calibri" pitchFamily="34" charset="0"/>
+                <a:ea typeface="Calibri" pitchFamily="34" charset="-122"/>
+                <a:cs typeface="Calibri" pitchFamily="34" charset="-120"/>
+              </a:rPr>
+              <a:t>ANSWER  </a:t>
+            </a:r>
+            <a:pPr indent="0" marL="0">
+              <a:buNone/>
+            </a:pPr>
+            <a:r>
+              <a:rPr lang="en-US" sz="1500" b="1" dirty="0">
+                <a:solidFill>
+                  <a:srgbClr val="1B2A38"/>
+                </a:solidFill>
+                <a:latin typeface="Calibri" pitchFamily="34" charset="0"/>
+                <a:ea typeface="Calibri" pitchFamily="34" charset="-122"/>
+                <a:cs typeface="Calibri" pitchFamily="34" charset="-120"/>
+              </a:rPr>
+              <a:t>B — PML-RARA (APL)</a:t>
+            </a:r>
+            <a:endParaRPr lang="en-US" sz="1500" dirty="0"/>
+          </a:p>
+        </p:txBody>
+      </p:sp>
+      <p:sp>
+        <p:nvSpPr>
+          <p:cNvPr id="8" name="Text 6"/>
+          <p:cNvSpPr/>
+          <p:nvPr/>
+        </p:nvSpPr>
+        <p:spPr>
+          <a:xfrm>
+            <a:off x="7439376" y="3127248"/>
+            <a:ext cx="3947648" cy="2377440"/>
+          </a:xfrm>
+          <a:prstGeom prst="rect">
+            <a:avLst/>
+          </a:prstGeom>
+          <a:noFill/>
+          <a:ln/>
+        </p:spPr>
+        <p:txBody>
+          <a:bodyPr wrap="square" lIns="0" tIns="0" rIns="0" bIns="0" rtlCol="0" anchor="t"/>
+          <a:lstStyle/>
+          <a:p>
+            <a:pPr algn="l" indent="0" marL="0">
+              <a:lnSpc>
+                <a:spcPct val="108000"/>
+              </a:lnSpc>
+              <a:buNone/>
+            </a:pPr>
+            <a:r>
+              <a:rPr lang="en-US" sz="1250" dirty="0">
+                <a:solidFill>
+                  <a:srgbClr val="33444F"/>
+                </a:solidFill>
+                <a:latin typeface="Calibri" pitchFamily="34" charset="0"/>
+                <a:ea typeface="Calibri" pitchFamily="34" charset="-122"/>
+                <a:cs typeface="Calibri" pitchFamily="34" charset="-120"/>
+              </a:rPr>
+              <a:t>APL carries a high risk of fatal coagulopathy; rapid confirmation and treatment are urgent.</a:t>
+            </a:r>
+            <a:endParaRPr lang="en-US" sz="1250" dirty="0"/>
+          </a:p>
+        </p:txBody>
+      </p:sp>
+      <p:sp>
+        <p:nvSpPr>
+          <p:cNvPr id="9" name="Text 7"/>
+          <p:cNvSpPr/>
+          <p:nvPr/>
+        </p:nvSpPr>
+        <p:spPr>
+          <a:xfrm>
+            <a:off x="566928" y="6473952"/>
+            <a:ext cx="7772400" cy="274320"/>
+          </a:xfrm>
+          <a:prstGeom prst="rect">
+            <a:avLst/>
+          </a:prstGeom>
+          <a:noFill/>
+          <a:ln/>
+        </p:spPr>
+        <p:txBody>
+          <a:bodyPr wrap="square" lIns="0" tIns="0" rIns="0" bIns="0" rtlCol="0" anchor="ctr"/>
+          <a:lstStyle/>
+          <a:p>
+            <a:pPr algn="l" indent="0" marL="0">
+              <a:buNone/>
+            </a:pPr>
+            <a:r>
+              <a:rPr lang="en-US" sz="850" dirty="0">
+                <a:solidFill>
+                  <a:srgbClr val="9AA8B4"/>
+                </a:solidFill>
+                <a:latin typeface="Calibri" pitchFamily="34" charset="0"/>
+                <a:ea typeface="Calibri" pitchFamily="34" charset="-122"/>
+                <a:cs typeface="Calibri" pitchFamily="34" charset="-120"/>
+              </a:rPr>
+              <a:t>Makassed General Hospital  ·  Department of Laboratory Medicine</a:t>
+            </a:r>
+            <a:endParaRPr lang="en-US" sz="850" dirty="0"/>
+          </a:p>
+        </p:txBody>
+      </p:sp>
+      <p:sp>
+        <p:nvSpPr>
+          <p:cNvPr id="10" name="Text 8"/>
+          <p:cNvSpPr/>
+          <p:nvPr/>
+        </p:nvSpPr>
+        <p:spPr>
+          <a:xfrm>
+            <a:off x="9814255" y="6473952"/>
+            <a:ext cx="1828800" cy="274320"/>
+          </a:xfrm>
+          <a:prstGeom prst="rect">
+            <a:avLst/>
+          </a:prstGeom>
+          <a:noFill/>
+          <a:ln/>
+        </p:spPr>
+        <p:txBody>
+          <a:bodyPr wrap="square" lIns="0" tIns="0" rIns="0" bIns="0" rtlCol="0" anchor="ctr"/>
+          <a:lstStyle/>
+          <a:p>
+            <a:pPr algn="r" indent="0" marL="0">
+              <a:buNone/>
+            </a:pPr>
+            <a:r>
+              <a:rPr lang="en-US" sz="850" dirty="0">
+                <a:solidFill>
+                  <a:srgbClr val="9AA8B4"/>
+                </a:solidFill>
+                <a:latin typeface="Calibri" pitchFamily="34" charset="0"/>
+                <a:ea typeface="Calibri" pitchFamily="34" charset="-122"/>
+                <a:cs typeface="Calibri" pitchFamily="34" charset="-120"/>
+              </a:rPr>
+              <a:t>CP Lecture Series</a:t>
+            </a:r>
+            <a:pPr algn="r" indent="0" marL="0">
+              <a:buNone/>
+            </a:pPr>
+            <a:r>
+              <a:rPr lang="en-US" sz="850" dirty="0">
+                <a:solidFill>
+                  <a:srgbClr val="DCE4EC"/>
+                </a:solidFill>
+                <a:latin typeface="Calibri" pitchFamily="34" charset="0"/>
+                <a:ea typeface="Calibri" pitchFamily="34" charset="-122"/>
+                <a:cs typeface="Calibri" pitchFamily="34" charset="-120"/>
+              </a:rPr>
+              <a:t>   ·   </a:t>
+            </a:r>
+            <a:pPr algn="r" indent="0" marL="0">
+              <a:buNone/>
+            </a:pPr>
+            <a:r>
+              <a:rPr lang="en-US" sz="850" b="1" dirty="0">
+                <a:solidFill>
+                  <a:srgbClr val="00838F"/>
+                </a:solidFill>
+                <a:latin typeface="Calibri" pitchFamily="34" charset="0"/>
+                <a:ea typeface="Calibri" pitchFamily="34" charset="-122"/>
+                <a:cs typeface="Calibri" pitchFamily="34" charset="-120"/>
+              </a:rPr>
+              <a:t>19</a:t>
+            </a:r>
+            <a:endParaRPr lang="en-US" sz="850" dirty="0"/>
+          </a:p>
+        </p:txBody>
+      </p:sp>
+    </p:spTree>
+  </p:cSld>
+  <p:clrMapOvr>
+    <a:masterClrMapping/>
+  </p:clrMapOvr>
+</p:sld>
+</file>
+
 <file path=ppt/slides/slide3.xml><?xml version="1.0" encoding="utf-8"?>
 <p:sld xmlns:a="http://schemas.openxmlformats.org/drawingml/2006/main" xmlns:r="http://schemas.openxmlformats.org/officeDocument/2006/relationships" xmlns:p="http://schemas.openxmlformats.org/presentationml/2006/main">
   <p:cSld name="Slide 3">
@@ -12084,6 +13222,10 @@
             </a:outerShdw>
           </a:effectLst>
         </p:spPr>
+        <p:txBody>
+          <a:bodyPr/>
+          <a:p/>
+        </p:txBody>
       </p:sp>
       <p:sp>
         <p:nvSpPr>
@@ -12111,6 +13253,10 @@
             </a:outerShdw>
           </a:effectLst>
         </p:spPr>
+        <p:txBody>
+          <a:bodyPr/>
+          <a:p/>
+        </p:txBody>
       </p:sp>
       <p:sp>
         <p:nvSpPr>
@@ -12218,6 +13364,10 @@
             </a:outerShdw>
           </a:effectLst>
         </p:spPr>
+        <p:txBody>
+          <a:bodyPr/>
+          <a:p/>
+        </p:txBody>
       </p:sp>
       <p:sp>
         <p:nvSpPr>
@@ -12245,6 +13395,10 @@
             </a:outerShdw>
           </a:effectLst>
         </p:spPr>
+        <p:txBody>
+          <a:bodyPr/>
+          <a:p/>
+        </p:txBody>
       </p:sp>
       <p:sp>
         <p:nvSpPr>
@@ -12352,6 +13506,10 @@
             </a:outerShdw>
           </a:effectLst>
         </p:spPr>
+        <p:txBody>
+          <a:bodyPr/>
+          <a:p/>
+        </p:txBody>
       </p:sp>
       <p:sp>
         <p:nvSpPr>
@@ -12379,6 +13537,10 @@
             </a:outerShdw>
           </a:effectLst>
         </p:spPr>
+        <p:txBody>
+          <a:bodyPr/>
+          <a:p/>
+        </p:txBody>
       </p:sp>
       <p:sp>
         <p:nvSpPr>
@@ -12486,6 +13648,10 @@
             </a:outerShdw>
           </a:effectLst>
         </p:spPr>
+        <p:txBody>
+          <a:bodyPr/>
+          <a:p/>
+        </p:txBody>
       </p:sp>
       <p:sp>
         <p:nvSpPr>
@@ -12513,6 +13679,10 @@
             </a:outerShdw>
           </a:effectLst>
         </p:spPr>
+        <p:txBody>
+          <a:bodyPr/>
+          <a:p/>
+        </p:txBody>
       </p:sp>
       <p:sp>
         <p:nvSpPr>
@@ -12620,6 +13790,10 @@
             </a:outerShdw>
           </a:effectLst>
         </p:spPr>
+        <p:txBody>
+          <a:bodyPr/>
+          <a:p/>
+        </p:txBody>
       </p:sp>
       <p:sp>
         <p:nvSpPr>
@@ -12647,6 +13821,10 @@
             </a:outerShdw>
           </a:effectLst>
         </p:spPr>
+        <p:txBody>
+          <a:bodyPr/>
+          <a:p/>
+        </p:txBody>
       </p:sp>
       <p:sp>
         <p:nvSpPr>
@@ -12754,6 +13932,10 @@
             </a:outerShdw>
           </a:effectLst>
         </p:spPr>
+        <p:txBody>
+          <a:bodyPr/>
+          <a:p/>
+        </p:txBody>
       </p:sp>
       <p:sp>
         <p:nvSpPr>
@@ -12781,6 +13963,10 @@
             </a:outerShdw>
           </a:effectLst>
         </p:spPr>
+        <p:txBody>
+          <a:bodyPr/>
+          <a:p/>
+        </p:txBody>
       </p:sp>
       <p:sp>
         <p:nvSpPr>
@@ -12961,6 +14147,500 @@
                 <a:cs typeface="Calibri" pitchFamily="34" charset="-120"/>
               </a:rPr>
               <a:t>3</a:t>
+            </a:r>
+            <a:endParaRPr lang="en-US" sz="850" dirty="0"/>
+          </a:p>
+        </p:txBody>
+      </p:sp>
+    </p:spTree>
+  </p:cSld>
+  <p:clrMapOvr>
+    <a:masterClrMapping/>
+  </p:clrMapOvr>
+</p:sld>
+</file>
+
+<file path=ppt/slides/slide30.xml><?xml version="1.0" encoding="utf-8"?>
+<p:sld xmlns:a="http://schemas.openxmlformats.org/drawingml/2006/main" xmlns:p="http://schemas.openxmlformats.org/presentationml/2006/main" xmlns:r="http://schemas.openxmlformats.org/officeDocument/2006/relationships">
+  <p:cSld>
+    <p:spTree>
+      <p:nvGrpSpPr>
+        <p:cNvPr id="1" name=""/>
+        <p:cNvGrpSpPr/>
+        <p:nvPr/>
+      </p:nvGrpSpPr>
+      <p:grpSpPr/>
+      <p:sp>
+        <p:nvSpPr>
+          <p:cNvPr id="2" name="Text 0"/>
+          <p:cNvSpPr/>
+          <p:nvPr/>
+        </p:nvSpPr>
+        <p:spPr>
+          <a:xfrm>
+            <a:off x="566928" y="329184"/>
+            <a:ext cx="10515600" cy="310896"/>
+          </a:xfrm>
+          <a:prstGeom prst="rect">
+            <a:avLst/>
+          </a:prstGeom>
+          <a:noFill/>
+          <a:ln/>
+        </p:spPr>
+        <p:txBody>
+          <a:bodyPr wrap="square" lIns="0" tIns="0" rIns="0" bIns="0" rtlCol="0" anchor="ctr"/>
+          <a:lstStyle/>
+          <a:p>
+            <a:pPr algn="l" indent="0" marL="0">
+              <a:buNone/>
+            </a:pPr>
+            <a:r>
+              <a:rPr lang="en-US" sz="1100" b="1" spc="150" kern="0" dirty="0">
+                <a:solidFill>
+                  <a:srgbClr val="00838F"/>
+                </a:solidFill>
+                <a:latin typeface="Calibri" pitchFamily="34" charset="0"/>
+                <a:ea typeface="Calibri" pitchFamily="34" charset="-122"/>
+                <a:cs typeface="Calibri" pitchFamily="34" charset="-120"/>
+              </a:rPr>
+              <a:t>MOLECULAR &amp; CYTOGENETICS   ·   BOARD REVIEW  ·  Q1</a:t>
+            </a:r>
+            <a:endParaRPr lang="en-US" sz="1100" dirty="0"/>
+          </a:p>
+        </p:txBody>
+      </p:sp>
+      <p:sp>
+        <p:nvSpPr>
+          <p:cNvPr id="3" name="Text 1"/>
+          <p:cNvSpPr/>
+          <p:nvPr/>
+        </p:nvSpPr>
+        <p:spPr>
+          <a:xfrm>
+            <a:off x="566928" y="713232"/>
+            <a:ext cx="11064240" cy="749808"/>
+          </a:xfrm>
+          <a:prstGeom prst="rect">
+            <a:avLst/>
+          </a:prstGeom>
+          <a:noFill/>
+          <a:ln/>
+        </p:spPr>
+        <p:txBody>
+          <a:bodyPr wrap="square" lIns="0" tIns="0" rIns="0" bIns="0" rtlCol="0" anchor="ctr"/>
+          <a:lstStyle/>
+          <a:p>
+            <a:pPr algn="l" indent="0" marL="0">
+              <a:buNone/>
+            </a:pPr>
+            <a:r>
+              <a:rPr lang="en-US" sz="2600" b="1" dirty="0">
+                <a:solidFill>
+                  <a:srgbClr val="0E3A5F"/>
+                </a:solidFill>
+                <a:latin typeface="Calibri" pitchFamily="34" charset="0"/>
+                <a:ea typeface="Calibri" pitchFamily="34" charset="-122"/>
+                <a:cs typeface="Calibri" pitchFamily="34" charset="-120"/>
+              </a:rPr>
+              <a:t>Board-Style Review</a:t>
+            </a:r>
+            <a:endParaRPr lang="en-US" sz="2600" dirty="0"/>
+          </a:p>
+        </p:txBody>
+      </p:sp>
+      <p:sp>
+        <p:nvSpPr>
+          <p:cNvPr id="4" name="Text 2"/>
+          <p:cNvSpPr/>
+          <p:nvPr/>
+        </p:nvSpPr>
+        <p:spPr>
+          <a:xfrm>
+            <a:off x="566928" y="1417320"/>
+            <a:ext cx="11057839" cy="914400"/>
+          </a:xfrm>
+          <a:prstGeom prst="rect">
+            <a:avLst/>
+          </a:prstGeom>
+          <a:noFill/>
+          <a:ln/>
+        </p:spPr>
+        <p:txBody>
+          <a:bodyPr wrap="square" lIns="0" tIns="0" rIns="0" bIns="0" rtlCol="0" anchor="t"/>
+          <a:lstStyle/>
+          <a:p>
+            <a:pPr algn="l" indent="0" marL="0">
+              <a:lnSpc>
+                <a:spcPct val="105000"/>
+              </a:lnSpc>
+              <a:buNone/>
+            </a:pPr>
+            <a:r>
+              <a:rPr lang="en-US" sz="1450" b="1" dirty="0">
+                <a:solidFill>
+                  <a:srgbClr val="1B2A38"/>
+                </a:solidFill>
+                <a:latin typeface="Calibri" pitchFamily="34" charset="0"/>
+                <a:ea typeface="Calibri" pitchFamily="34" charset="-122"/>
+                <a:cs typeface="Calibri" pitchFamily="34" charset="-120"/>
+              </a:rPr>
+              <a:t>BCR-ABL1 quantitative monitoring in CML is reported on the:</a:t>
+            </a:r>
+            <a:endParaRPr lang="en-US" sz="1450" dirty="0"/>
+          </a:p>
+        </p:txBody>
+      </p:sp>
+      <p:sp>
+        <p:nvSpPr>
+          <p:cNvPr id="5" name="Text 3"/>
+          <p:cNvSpPr/>
+          <p:nvPr/>
+        </p:nvSpPr>
+        <p:spPr>
+          <a:xfrm>
+            <a:off x="658368" y="2395728"/>
+            <a:ext cx="6192390" cy="3017520"/>
+          </a:xfrm>
+          <a:prstGeom prst="rect">
+            <a:avLst/>
+          </a:prstGeom>
+          <a:noFill/>
+          <a:ln/>
+        </p:spPr>
+        <p:txBody>
+          <a:bodyPr wrap="square" lIns="0" tIns="0" rIns="0" bIns="0" rtlCol="0" anchor="t"/>
+          <a:lstStyle/>
+          <a:p>
+            <a:pPr algn="l" indent="0" marL="0">
+              <a:spcAft>
+                <a:spcPts val="600"/>
+              </a:spcAft>
+              <a:buNone/>
+            </a:pPr>
+            <a:r>
+              <a:rPr lang="en-US" sz="1350" dirty="0">
+                <a:solidFill>
+                  <a:srgbClr val="33444F"/>
+                </a:solidFill>
+                <a:latin typeface="Calibri" pitchFamily="34" charset="0"/>
+                <a:ea typeface="Calibri" pitchFamily="34" charset="-122"/>
+                <a:cs typeface="Calibri" pitchFamily="34" charset="-120"/>
+              </a:rPr>
+              <a:t>A. Local arbitrary scale</a:t>
+            </a:r>
+            <a:endParaRPr lang="en-US" sz="1350" dirty="0"/>
+          </a:p>
+          <a:p>
+            <a:pPr algn="l" indent="0" marL="0">
+              <a:spcAft>
+                <a:spcPts val="600"/>
+              </a:spcAft>
+              <a:buNone/>
+            </a:pPr>
+            <a:r>
+              <a:rPr lang="en-US" sz="1350" b="1" dirty="0">
+                <a:solidFill>
+                  <a:srgbClr val="005A63"/>
+                </a:solidFill>
+                <a:latin typeface="Calibri" pitchFamily="34" charset="0"/>
+                <a:ea typeface="Calibri" pitchFamily="34" charset="-122"/>
+                <a:cs typeface="Calibri" pitchFamily="34" charset="-120"/>
+              </a:rPr>
+              <a:t>B. International Scale (IS)</a:t>
+            </a:r>
+            <a:endParaRPr lang="en-US" sz="1350" dirty="0"/>
+          </a:p>
+          <a:p>
+            <a:pPr algn="l" indent="0" marL="0">
+              <a:spcAft>
+                <a:spcPts val="600"/>
+              </a:spcAft>
+              <a:buNone/>
+            </a:pPr>
+            <a:r>
+              <a:rPr lang="en-US" sz="1350" dirty="0">
+                <a:solidFill>
+                  <a:srgbClr val="33444F"/>
+                </a:solidFill>
+                <a:latin typeface="Calibri" pitchFamily="34" charset="0"/>
+                <a:ea typeface="Calibri" pitchFamily="34" charset="-122"/>
+                <a:cs typeface="Calibri" pitchFamily="34" charset="-120"/>
+              </a:rPr>
+              <a:t>C. Ct only</a:t>
+            </a:r>
+            <a:endParaRPr lang="en-US" sz="1350" dirty="0"/>
+          </a:p>
+          <a:p>
+            <a:pPr algn="l" indent="0" marL="0">
+              <a:spcAft>
+                <a:spcPts val="600"/>
+              </a:spcAft>
+              <a:buNone/>
+            </a:pPr>
+            <a:r>
+              <a:rPr lang="en-US" sz="1350" dirty="0">
+                <a:solidFill>
+                  <a:srgbClr val="33444F"/>
+                </a:solidFill>
+                <a:latin typeface="Calibri" pitchFamily="34" charset="0"/>
+                <a:ea typeface="Calibri" pitchFamily="34" charset="-122"/>
+                <a:cs typeface="Calibri" pitchFamily="34" charset="-120"/>
+              </a:rPr>
+              <a:t>D. Karyotype score</a:t>
+            </a:r>
+            <a:endParaRPr lang="en-US" sz="1350" dirty="0"/>
+          </a:p>
+          <a:p>
+            <a:pPr algn="l" indent="0" marL="0">
+              <a:spcAft>
+                <a:spcPts val="600"/>
+              </a:spcAft>
+              <a:buNone/>
+            </a:pPr>
+            <a:r>
+              <a:rPr lang="en-US" sz="1350" dirty="0">
+                <a:solidFill>
+                  <a:srgbClr val="33444F"/>
+                </a:solidFill>
+                <a:latin typeface="Calibri" pitchFamily="34" charset="0"/>
+                <a:ea typeface="Calibri" pitchFamily="34" charset="-122"/>
+                <a:cs typeface="Calibri" pitchFamily="34" charset="-120"/>
+              </a:rPr>
+              <a:t>E. VAF percentage</a:t>
+            </a:r>
+            <a:endParaRPr lang="en-US" sz="1350" dirty="0"/>
+          </a:p>
+        </p:txBody>
+      </p:sp>
+      <p:sp>
+        <p:nvSpPr>
+          <p:cNvPr id="6" name="Shape 4"/>
+          <p:cNvSpPr/>
+          <p:nvPr/>
+        </p:nvSpPr>
+        <p:spPr>
+          <a:xfrm>
+            <a:off x="7201632" y="2395728"/>
+            <a:ext cx="4423136" cy="3246120"/>
+          </a:xfrm>
+          <a:prstGeom prst="roundRect">
+            <a:avLst>
+              <a:gd name="adj" fmla="val 2535"/>
+            </a:avLst>
+          </a:prstGeom>
+          <a:solidFill>
+            <a:srgbClr val="E0F2F4"/>
+          </a:solidFill>
+          <a:ln/>
+          <a:effectLst>
+            <a:outerShdw sx="100000" sy="100000" kx="0" ky="0" algn="bl" rotWithShape="0" blurRad="88900" dist="25400" dir="5400000">
+              <a:srgbClr val="22303C">
+                <a:alpha val="12000"/>
+              </a:srgbClr>
+            </a:outerShdw>
+          </a:effectLst>
+        </p:spPr>
+        <p:txBody>
+          <a:bodyPr/>
+          <a:p/>
+        </p:txBody>
+      </p:sp>
+      <p:sp>
+        <p:nvSpPr>
+          <p:cNvPr id="7" name="Text 5"/>
+          <p:cNvSpPr/>
+          <p:nvPr/>
+        </p:nvSpPr>
+        <p:spPr>
+          <a:xfrm>
+            <a:off x="7439376" y="2578608"/>
+            <a:ext cx="3965936" cy="457200"/>
+          </a:xfrm>
+          <a:prstGeom prst="rect">
+            <a:avLst/>
+          </a:prstGeom>
+          <a:noFill/>
+          <a:ln/>
+        </p:spPr>
+        <p:txBody>
+          <a:bodyPr wrap="square" lIns="0" tIns="0" rIns="0" bIns="0" rtlCol="0" anchor="ctr"/>
+          <a:lstStyle/>
+          <a:p>
+            <a:pPr indent="0" marL="0">
+              <a:buNone/>
+            </a:pPr>
+            <a:r>
+              <a:rPr lang="en-US" sz="1500" b="1" dirty="0">
+                <a:solidFill>
+                  <a:srgbClr val="00838F"/>
+                </a:solidFill>
+                <a:latin typeface="Calibri" pitchFamily="34" charset="0"/>
+                <a:ea typeface="Calibri" pitchFamily="34" charset="-122"/>
+                <a:cs typeface="Calibri" pitchFamily="34" charset="-120"/>
+              </a:rPr>
+              <a:t>ANSWER  </a:t>
+            </a:r>
+            <a:pPr indent="0" marL="0">
+              <a:buNone/>
+            </a:pPr>
+            <a:r>
+              <a:rPr lang="en-US" sz="1500" b="1" dirty="0">
+                <a:solidFill>
+                  <a:srgbClr val="1B2A38"/>
+                </a:solidFill>
+                <a:latin typeface="Calibri" pitchFamily="34" charset="0"/>
+                <a:ea typeface="Calibri" pitchFamily="34" charset="-122"/>
+                <a:cs typeface="Calibri" pitchFamily="34" charset="-120"/>
+              </a:rPr>
+              <a:t>B — International Scale</a:t>
+            </a:r>
+            <a:endParaRPr lang="en-US" sz="1500" dirty="0"/>
+          </a:p>
+        </p:txBody>
+      </p:sp>
+      <p:sp>
+        <p:nvSpPr>
+          <p:cNvPr id="8" name="Text 6"/>
+          <p:cNvSpPr/>
+          <p:nvPr/>
+        </p:nvSpPr>
+        <p:spPr>
+          <a:xfrm>
+            <a:off x="7439376" y="3127248"/>
+            <a:ext cx="3947648" cy="2377440"/>
+          </a:xfrm>
+          <a:prstGeom prst="rect">
+            <a:avLst/>
+          </a:prstGeom>
+          <a:noFill/>
+          <a:ln/>
+        </p:spPr>
+        <p:txBody>
+          <a:bodyPr wrap="square" lIns="0" tIns="0" rIns="0" bIns="0" rtlCol="0" anchor="t"/>
+          <a:lstStyle/>
+          <a:p>
+            <a:pPr algn="l" indent="0" marL="0">
+              <a:lnSpc>
+                <a:spcPct val="108000"/>
+              </a:lnSpc>
+              <a:buNone/>
+            </a:pPr>
+            <a:r>
+              <a:rPr lang="en-US" sz="1250" dirty="0">
+                <a:solidFill>
+                  <a:srgbClr val="33444F"/>
+                </a:solidFill>
+                <a:latin typeface="Calibri" pitchFamily="34" charset="0"/>
+                <a:ea typeface="Calibri" pitchFamily="34" charset="-122"/>
+                <a:cs typeface="Calibri" pitchFamily="34" charset="-120"/>
+              </a:rPr>
+              <a:t>Standardized IS reporting enables comparison of BCR-ABL1 levels across laboratories and time.</a:t>
+            </a:r>
+            <a:endParaRPr lang="en-US" sz="1250" dirty="0"/>
+          </a:p>
+        </p:txBody>
+      </p:sp>
+      <p:sp>
+        <p:nvSpPr>
+          <p:cNvPr id="9" name="Text 7"/>
+          <p:cNvSpPr/>
+          <p:nvPr/>
+        </p:nvSpPr>
+        <p:spPr>
+          <a:xfrm>
+            <a:off x="566928" y="6473952"/>
+            <a:ext cx="7772400" cy="274320"/>
+          </a:xfrm>
+          <a:prstGeom prst="rect">
+            <a:avLst/>
+          </a:prstGeom>
+          <a:noFill/>
+          <a:ln/>
+        </p:spPr>
+        <p:txBody>
+          <a:bodyPr wrap="square" lIns="0" tIns="0" rIns="0" bIns="0" rtlCol="0" anchor="ctr"/>
+          <a:lstStyle/>
+          <a:p>
+            <a:pPr algn="l" indent="0" marL="0">
+              <a:buNone/>
+            </a:pPr>
+            <a:r>
+              <a:rPr lang="en-US" sz="850" dirty="0">
+                <a:solidFill>
+                  <a:srgbClr val="9AA8B4"/>
+                </a:solidFill>
+                <a:latin typeface="Calibri" pitchFamily="34" charset="0"/>
+                <a:ea typeface="Calibri" pitchFamily="34" charset="-122"/>
+                <a:cs typeface="Calibri" pitchFamily="34" charset="-120"/>
+              </a:rPr>
+              <a:t>Makassed General Hospital  ·  Department of Laboratory Medicine</a:t>
+            </a:r>
+            <a:endParaRPr lang="en-US" sz="850" dirty="0"/>
+          </a:p>
+        </p:txBody>
+      </p:sp>
+      <p:sp>
+        <p:nvSpPr>
+          <p:cNvPr id="10" name="Text 8"/>
+          <p:cNvSpPr/>
+          <p:nvPr/>
+        </p:nvSpPr>
+        <p:spPr>
+          <a:xfrm>
+            <a:off x="9814255" y="6473952"/>
+            <a:ext cx="1828800" cy="274320"/>
+          </a:xfrm>
+          <a:prstGeom prst="rect">
+            <a:avLst/>
+          </a:prstGeom>
+          <a:noFill/>
+          <a:ln/>
+        </p:spPr>
+        <p:txBody>
+          <a:bodyPr wrap="square" lIns="0" tIns="0" rIns="0" bIns="0" rtlCol="0" anchor="ctr"/>
+          <a:lstStyle/>
+          <a:p>
+            <a:pPr algn="r" indent="0" marL="0">
+              <a:buNone/>
+            </a:pPr>
+            <a:r>
+              <a:rPr lang="en-US" sz="850" dirty="0">
+                <a:solidFill>
+                  <a:srgbClr val="9AA8B4"/>
+                </a:solidFill>
+                <a:latin typeface="Calibri" pitchFamily="34" charset="0"/>
+                <a:ea typeface="Calibri" pitchFamily="34" charset="-122"/>
+                <a:cs typeface="Calibri" pitchFamily="34" charset="-120"/>
+              </a:rPr>
+              <a:t>CP Lecture Series</a:t>
+            </a:r>
+            <a:pPr algn="r" indent="0" marL="0">
+              <a:buNone/>
+            </a:pPr>
+            <a:r>
+              <a:rPr lang="en-US" sz="850" dirty="0">
+                <a:solidFill>
+                  <a:srgbClr val="DCE4EC"/>
+                </a:solidFill>
+                <a:latin typeface="Calibri" pitchFamily="34" charset="0"/>
+                <a:ea typeface="Calibri" pitchFamily="34" charset="-122"/>
+                <a:cs typeface="Calibri" pitchFamily="34" charset="-120"/>
+              </a:rPr>
+              <a:t>   ·   </a:t>
+            </a:r>
+            <a:pPr algn="r" indent="0" marL="0">
+              <a:buNone/>
+            </a:pPr>
+            <a:r>
+              <a:rPr lang="en-US" sz="850" b="1" dirty="0">
+                <a:solidFill>
+                  <a:srgbClr val="00838F"/>
+                </a:solidFill>
+                <a:latin typeface="Calibri" pitchFamily="34" charset="0"/>
+                <a:ea typeface="Calibri" pitchFamily="34" charset="-122"/>
+                <a:cs typeface="Calibri" pitchFamily="34" charset="-120"/>
+              </a:rPr>
+              <a:t>18</a:t>
             </a:r>
             <a:endParaRPr lang="en-US" sz="850" dirty="0"/>
           </a:p>
@@ -13104,6 +14784,10 @@
             </a:outerShdw>
           </a:effectLst>
         </p:spPr>
+        <p:txBody>
+          <a:bodyPr/>
+          <a:p/>
+        </p:txBody>
       </p:sp>
       <p:sp>
         <p:nvSpPr>
@@ -13131,6 +14815,10 @@
             </a:outerShdw>
           </a:effectLst>
         </p:spPr>
+        <p:txBody>
+          <a:bodyPr/>
+          <a:p/>
+        </p:txBody>
       </p:sp>
       <p:sp>
         <p:nvSpPr>
@@ -13245,6 +14933,10 @@
           </a:solidFill>
           <a:ln/>
         </p:spPr>
+        <p:txBody>
+          <a:bodyPr/>
+          <a:p/>
+        </p:txBody>
       </p:sp>
       <p:sp>
         <p:nvSpPr>
@@ -13272,6 +14964,10 @@
             </a:outerShdw>
           </a:effectLst>
         </p:spPr>
+        <p:txBody>
+          <a:bodyPr/>
+          <a:p/>
+        </p:txBody>
       </p:sp>
       <p:sp>
         <p:nvSpPr>
@@ -13393,6 +15089,10 @@
             </a:outerShdw>
           </a:effectLst>
         </p:spPr>
+        <p:txBody>
+          <a:bodyPr/>
+          <a:p/>
+        </p:txBody>
       </p:sp>
       <p:sp>
         <p:nvSpPr>
@@ -13420,6 +15120,10 @@
             </a:outerShdw>
           </a:effectLst>
         </p:spPr>
+        <p:txBody>
+          <a:bodyPr/>
+          <a:p/>
+        </p:txBody>
       </p:sp>
       <p:sp>
         <p:nvSpPr>
@@ -13534,6 +15238,10 @@
           </a:solidFill>
           <a:ln/>
         </p:spPr>
+        <p:txBody>
+          <a:bodyPr/>
+          <a:p/>
+        </p:txBody>
       </p:sp>
       <p:sp>
         <p:nvSpPr>
@@ -13561,6 +15269,10 @@
             </a:outerShdw>
           </a:effectLst>
         </p:spPr>
+        <p:txBody>
+          <a:bodyPr/>
+          <a:p/>
+        </p:txBody>
       </p:sp>
       <p:sp>
         <p:nvSpPr>
@@ -13682,6 +15394,10 @@
             </a:outerShdw>
           </a:effectLst>
         </p:spPr>
+        <p:txBody>
+          <a:bodyPr/>
+          <a:p/>
+        </p:txBody>
       </p:sp>
       <p:sp>
         <p:nvSpPr>
@@ -13709,6 +15425,10 @@
             </a:outerShdw>
           </a:effectLst>
         </p:spPr>
+        <p:txBody>
+          <a:bodyPr/>
+          <a:p/>
+        </p:txBody>
       </p:sp>
       <p:sp>
         <p:nvSpPr>
@@ -13947,6 +15667,10 @@
           </a:solidFill>
           <a:ln/>
         </p:spPr>
+        <p:txBody>
+          <a:bodyPr/>
+          <a:p/>
+        </p:txBody>
       </p:sp>
       <p:sp>
         <p:nvSpPr>
@@ -13969,6 +15693,10 @@
           </a:solidFill>
           <a:ln/>
         </p:spPr>
+        <p:txBody>
+          <a:bodyPr/>
+          <a:p/>
+        </p:txBody>
       </p:sp>
       <p:sp>
         <p:nvSpPr>
@@ -14230,6 +15958,10 @@
             </a:outerShdw>
           </a:effectLst>
         </p:spPr>
+        <p:txBody>
+          <a:bodyPr/>
+          <a:p/>
+        </p:txBody>
       </p:sp>
       <p:pic>
         <p:nvPicPr>
@@ -14538,6 +16270,10 @@
             </a:outerShdw>
           </a:effectLst>
         </p:spPr>
+        <p:txBody>
+          <a:bodyPr/>
+          <a:p/>
+        </p:txBody>
       </p:sp>
       <p:sp>
         <p:nvSpPr>
@@ -14712,6 +16448,10 @@
             </a:outerShdw>
           </a:effectLst>
         </p:spPr>
+        <p:txBody>
+          <a:bodyPr/>
+          <a:p/>
+        </p:txBody>
       </p:sp>
       <p:sp>
         <p:nvSpPr>
@@ -15107,6 +16847,10 @@
             </a:outerShdw>
           </a:effectLst>
         </p:spPr>
+        <p:txBody>
+          <a:bodyPr/>
+          <a:p/>
+        </p:txBody>
       </p:sp>
       <p:pic>
         <p:nvPicPr>
@@ -15415,6 +17159,10 @@
             </a:outerShdw>
           </a:effectLst>
         </p:spPr>
+        <p:txBody>
+          <a:bodyPr/>
+          <a:p/>
+        </p:txBody>
       </p:sp>
       <p:sp>
         <p:nvSpPr>
@@ -15589,6 +17337,10 @@
             </a:outerShdw>
           </a:effectLst>
         </p:spPr>
+        <p:txBody>
+          <a:bodyPr/>
+          <a:p/>
+        </p:txBody>
       </p:sp>
       <p:sp>
         <p:nvSpPr>
